--- a/S1-CL1-Cloud-Design-Build/delivery/topic_10/Topic_10_Slides.pptx
+++ b/S1-CL1-Cloud-Design-Build/delivery/topic_10/Topic_10_Slides.pptx
@@ -3409,7 +3409,7 @@
           <a:noFill/>
         </p:spPr>
         <p:txBody>
-          <a:bodyPr wrap="square" anchor="t" lIns="0" rIns="0" tIns="0" bIns="0">
+          <a:bodyPr wrap="square" anchor="ctr" lIns="0" rIns="0" tIns="0" bIns="0">
             <a:spAutoFit/>
           </a:bodyPr>
           <a:lstStyle/>
@@ -3426,7 +3426,7 @@
               </a:spcAft>
             </a:pPr>
             <a:r>
-              <a:rPr sz="1800" b="1" i="0">
+              <a:rPr sz="2400" b="1" i="0">
                 <a:solidFill>
                   <a:srgbClr val="EDAB0C"/>
                 </a:solidFill>
@@ -3435,7 +3435,7 @@
               <a:t>■  </a:t>
             </a:r>
             <a:r>
-              <a:rPr sz="1800" b="0" i="0">
+              <a:rPr sz="2400" b="0" i="0">
                 <a:solidFill>
                   <a:srgbClr val="2A2929"/>
                 </a:solidFill>
@@ -3457,7 +3457,7 @@
               </a:spcAft>
             </a:pPr>
             <a:r>
-              <a:rPr sz="1800" b="1" i="0">
+              <a:rPr sz="2400" b="1" i="0">
                 <a:solidFill>
                   <a:srgbClr val="27B5CE"/>
                 </a:solidFill>
@@ -3466,7 +3466,7 @@
               <a:t>■  </a:t>
             </a:r>
             <a:r>
-              <a:rPr sz="1800" b="1" i="0">
+              <a:rPr sz="2400" b="1" i="0">
                 <a:solidFill>
                   <a:srgbClr val="27B5CE"/>
                 </a:solidFill>
@@ -3488,7 +3488,7 @@
               </a:spcAft>
             </a:pPr>
             <a:r>
-              <a:rPr sz="1800" b="1" i="0">
+              <a:rPr sz="2400" b="1" i="0">
                 <a:solidFill>
                   <a:srgbClr val="EDAB0C"/>
                 </a:solidFill>
@@ -3497,7 +3497,7 @@
               <a:t>■  </a:t>
             </a:r>
             <a:r>
-              <a:rPr sz="1800" b="0" i="0">
+              <a:rPr sz="2400" b="0" i="0">
                 <a:solidFill>
                   <a:srgbClr val="2A2929"/>
                 </a:solidFill>
@@ -3767,7 +3767,7 @@
           <a:noFill/>
         </p:spPr>
         <p:txBody>
-          <a:bodyPr wrap="square" anchor="t" lIns="0" rIns="0" tIns="0" bIns="0">
+          <a:bodyPr wrap="square" anchor="ctr" lIns="0" rIns="0" tIns="0" bIns="0">
             <a:spAutoFit/>
           </a:bodyPr>
           <a:lstStyle/>
@@ -3784,7 +3784,7 @@
               </a:spcAft>
             </a:pPr>
             <a:r>
-              <a:rPr sz="1800" b="1" i="0">
+              <a:rPr sz="2400" b="1" i="0">
                 <a:solidFill>
                   <a:srgbClr val="EDAB0C"/>
                 </a:solidFill>
@@ -3793,7 +3793,7 @@
               <a:t>■  </a:t>
             </a:r>
             <a:r>
-              <a:rPr sz="1800" b="0" i="0">
+              <a:rPr sz="2400" b="0" i="0">
                 <a:solidFill>
                   <a:srgbClr val="2A2929"/>
                 </a:solidFill>
@@ -3815,7 +3815,7 @@
               </a:spcAft>
             </a:pPr>
             <a:r>
-              <a:rPr sz="1800" b="1" i="0">
+              <a:rPr sz="2400" b="1" i="0">
                 <a:solidFill>
                   <a:srgbClr val="EDAB0C"/>
                 </a:solidFill>
@@ -3824,7 +3824,7 @@
               <a:t>■  </a:t>
             </a:r>
             <a:r>
-              <a:rPr sz="1800" b="0" i="0">
+              <a:rPr sz="2400" b="0" i="0">
                 <a:solidFill>
                   <a:srgbClr val="2A2929"/>
                 </a:solidFill>
@@ -3846,7 +3846,7 @@
               </a:spcAft>
             </a:pPr>
             <a:r>
-              <a:rPr sz="1800" b="1" i="0">
+              <a:rPr sz="2400" b="1" i="0">
                 <a:solidFill>
                   <a:srgbClr val="EDAB0C"/>
                 </a:solidFill>
@@ -3855,7 +3855,7 @@
               <a:t>■  </a:t>
             </a:r>
             <a:r>
-              <a:rPr sz="1800" b="0" i="0">
+              <a:rPr sz="2400" b="0" i="0">
                 <a:solidFill>
                   <a:srgbClr val="2A2929"/>
                 </a:solidFill>
@@ -3877,7 +3877,7 @@
               </a:spcAft>
             </a:pPr>
             <a:r>
-              <a:rPr sz="1800" b="1" i="0">
+              <a:rPr sz="2400" b="1" i="0">
                 <a:solidFill>
                   <a:srgbClr val="27B5CE"/>
                 </a:solidFill>
@@ -3886,7 +3886,7 @@
               <a:t>■  </a:t>
             </a:r>
             <a:r>
-              <a:rPr sz="1800" b="1" i="0">
+              <a:rPr sz="2400" b="1" i="0">
                 <a:solidFill>
                   <a:srgbClr val="27B5CE"/>
                 </a:solidFill>
@@ -4156,7 +4156,7 @@
           <a:noFill/>
         </p:spPr>
         <p:txBody>
-          <a:bodyPr wrap="square" anchor="t" lIns="0" rIns="0" tIns="0" bIns="0">
+          <a:bodyPr wrap="square" anchor="ctr" lIns="0" rIns="0" tIns="0" bIns="0">
             <a:spAutoFit/>
           </a:bodyPr>
           <a:lstStyle/>
@@ -4173,7 +4173,7 @@
               </a:spcAft>
             </a:pPr>
             <a:r>
-              <a:rPr sz="1800" b="1" i="0">
+              <a:rPr sz="2400" b="1" i="0">
                 <a:solidFill>
                   <a:srgbClr val="EDAB0C"/>
                 </a:solidFill>
@@ -4182,7 +4182,7 @@
               <a:t>■  </a:t>
             </a:r>
             <a:r>
-              <a:rPr sz="1800" b="0" i="0">
+              <a:rPr sz="2400" b="0" i="0">
                 <a:solidFill>
                   <a:srgbClr val="2A2929"/>
                 </a:solidFill>
@@ -4204,7 +4204,7 @@
               </a:spcAft>
             </a:pPr>
             <a:r>
-              <a:rPr sz="1800" b="1" i="0">
+              <a:rPr sz="2400" b="1" i="0">
                 <a:solidFill>
                   <a:srgbClr val="EDAB0C"/>
                 </a:solidFill>
@@ -4213,7 +4213,7 @@
               <a:t>■  </a:t>
             </a:r>
             <a:r>
-              <a:rPr sz="1800" b="0" i="0">
+              <a:rPr sz="2400" b="0" i="0">
                 <a:solidFill>
                   <a:srgbClr val="2A2929"/>
                 </a:solidFill>
@@ -4235,7 +4235,7 @@
               </a:spcAft>
             </a:pPr>
             <a:r>
-              <a:rPr sz="1800" b="1" i="0">
+              <a:rPr sz="2400" b="1" i="0">
                 <a:solidFill>
                   <a:srgbClr val="27B5CE"/>
                 </a:solidFill>
@@ -4244,7 +4244,7 @@
               <a:t>■  </a:t>
             </a:r>
             <a:r>
-              <a:rPr sz="1800" b="1" i="0">
+              <a:rPr sz="2400" b="1" i="0">
                 <a:solidFill>
                   <a:srgbClr val="27B5CE"/>
                 </a:solidFill>
@@ -4266,7 +4266,7 @@
               </a:spcAft>
             </a:pPr>
             <a:r>
-              <a:rPr sz="1800" b="1" i="0">
+              <a:rPr sz="2400" b="1" i="0">
                 <a:solidFill>
                   <a:srgbClr val="EDAB0C"/>
                 </a:solidFill>
@@ -4275,7 +4275,7 @@
               <a:t>■  </a:t>
             </a:r>
             <a:r>
-              <a:rPr sz="1800" b="0" i="0">
+              <a:rPr sz="2400" b="0" i="0">
                 <a:solidFill>
                   <a:srgbClr val="2A2929"/>
                 </a:solidFill>
@@ -4545,7 +4545,7 @@
           <a:noFill/>
         </p:spPr>
         <p:txBody>
-          <a:bodyPr wrap="square" anchor="t" lIns="0" rIns="0" tIns="0" bIns="0">
+          <a:bodyPr wrap="square" anchor="ctr" lIns="0" rIns="0" tIns="0" bIns="0">
             <a:spAutoFit/>
           </a:bodyPr>
           <a:lstStyle/>
@@ -4562,7 +4562,7 @@
               </a:spcAft>
             </a:pPr>
             <a:r>
-              <a:rPr sz="1800" b="1" i="0">
+              <a:rPr sz="2400" b="1" i="0">
                 <a:solidFill>
                   <a:srgbClr val="EDAB0C"/>
                 </a:solidFill>
@@ -4571,7 +4571,7 @@
               <a:t>■  </a:t>
             </a:r>
             <a:r>
-              <a:rPr sz="1800" b="0" i="0">
+              <a:rPr sz="2400" b="0" i="0">
                 <a:solidFill>
                   <a:srgbClr val="2A2929"/>
                 </a:solidFill>
@@ -4593,7 +4593,7 @@
               </a:spcAft>
             </a:pPr>
             <a:r>
-              <a:rPr sz="1800" b="1" i="0">
+              <a:rPr sz="2400" b="1" i="0">
                 <a:solidFill>
                   <a:srgbClr val="27B5CE"/>
                 </a:solidFill>
@@ -4602,7 +4602,7 @@
               <a:t>■  </a:t>
             </a:r>
             <a:r>
-              <a:rPr sz="1800" b="1" i="0">
+              <a:rPr sz="2400" b="1" i="0">
                 <a:solidFill>
                   <a:srgbClr val="27B5CE"/>
                 </a:solidFill>
@@ -4624,7 +4624,7 @@
               </a:spcAft>
             </a:pPr>
             <a:r>
-              <a:rPr sz="1800" b="1" i="0">
+              <a:rPr sz="2400" b="1" i="0">
                 <a:solidFill>
                   <a:srgbClr val="EDAB0C"/>
                 </a:solidFill>
@@ -4633,7 +4633,7 @@
               <a:t>■  </a:t>
             </a:r>
             <a:r>
-              <a:rPr sz="1800" b="0" i="0">
+              <a:rPr sz="2400" b="0" i="0">
                 <a:solidFill>
                   <a:srgbClr val="2A2929"/>
                 </a:solidFill>
@@ -4903,7 +4903,7 @@
           <a:noFill/>
         </p:spPr>
         <p:txBody>
-          <a:bodyPr wrap="square" anchor="t" lIns="0" rIns="0" tIns="0" bIns="0">
+          <a:bodyPr wrap="square" anchor="ctr" lIns="0" rIns="0" tIns="0" bIns="0">
             <a:spAutoFit/>
           </a:bodyPr>
           <a:lstStyle/>
@@ -4920,7 +4920,7 @@
               </a:spcAft>
             </a:pPr>
             <a:r>
-              <a:rPr sz="1800" b="1" i="0">
+              <a:rPr sz="2400" b="1" i="0">
                 <a:solidFill>
                   <a:srgbClr val="EDAB0C"/>
                 </a:solidFill>
@@ -4929,7 +4929,7 @@
               <a:t>■  </a:t>
             </a:r>
             <a:r>
-              <a:rPr sz="1800" b="0" i="0">
+              <a:rPr sz="2400" b="0" i="0">
                 <a:solidFill>
                   <a:srgbClr val="2A2929"/>
                 </a:solidFill>
@@ -4951,7 +4951,7 @@
               </a:spcAft>
             </a:pPr>
             <a:r>
-              <a:rPr sz="1800" b="1" i="0">
+              <a:rPr sz="2400" b="1" i="0">
                 <a:solidFill>
                   <a:srgbClr val="EDAB0C"/>
                 </a:solidFill>
@@ -4960,7 +4960,7 @@
               <a:t>■  </a:t>
             </a:r>
             <a:r>
-              <a:rPr sz="1800" b="0" i="0">
+              <a:rPr sz="2400" b="0" i="0">
                 <a:solidFill>
                   <a:srgbClr val="2A2929"/>
                 </a:solidFill>
@@ -4982,7 +4982,7 @@
               </a:spcAft>
             </a:pPr>
             <a:r>
-              <a:rPr sz="1800" b="1" i="0">
+              <a:rPr sz="2400" b="1" i="0">
                 <a:solidFill>
                   <a:srgbClr val="27B5CE"/>
                 </a:solidFill>
@@ -4991,7 +4991,7 @@
               <a:t>■  </a:t>
             </a:r>
             <a:r>
-              <a:rPr sz="1800" b="1" i="0">
+              <a:rPr sz="2400" b="1" i="0">
                 <a:solidFill>
                   <a:srgbClr val="27B5CE"/>
                 </a:solidFill>
@@ -6817,7 +6817,7 @@
           <a:noFill/>
         </p:spPr>
         <p:txBody>
-          <a:bodyPr wrap="square" anchor="t" lIns="0" rIns="0" tIns="0" bIns="0">
+          <a:bodyPr wrap="square" anchor="ctr" lIns="0" rIns="0" tIns="0" bIns="0">
             <a:spAutoFit/>
           </a:bodyPr>
           <a:lstStyle/>
@@ -6834,7 +6834,7 @@
               </a:spcAft>
             </a:pPr>
             <a:r>
-              <a:rPr sz="1800" b="1" i="0">
+              <a:rPr sz="2400" b="1" i="0">
                 <a:solidFill>
                   <a:srgbClr val="EDAB0C"/>
                 </a:solidFill>
@@ -6843,7 +6843,7 @@
               <a:t>■  </a:t>
             </a:r>
             <a:r>
-              <a:rPr sz="1800" b="0" i="0">
+              <a:rPr sz="2400" b="0" i="0">
                 <a:solidFill>
                   <a:srgbClr val="2A2929"/>
                 </a:solidFill>
@@ -6865,7 +6865,7 @@
               </a:spcAft>
             </a:pPr>
             <a:r>
-              <a:rPr sz="1800" b="1" i="0">
+              <a:rPr sz="2400" b="1" i="0">
                 <a:solidFill>
                   <a:srgbClr val="205F61"/>
                 </a:solidFill>
@@ -6874,7 +6874,7 @@
               <a:t>■  </a:t>
             </a:r>
             <a:r>
-              <a:rPr sz="1800" b="1" i="0">
+              <a:rPr sz="2400" b="1" i="0">
                 <a:solidFill>
                   <a:srgbClr val="205F61"/>
                 </a:solidFill>
@@ -6896,7 +6896,7 @@
               </a:spcAft>
             </a:pPr>
             <a:r>
-              <a:rPr sz="1800" b="1" i="0">
+              <a:rPr sz="2400" b="1" i="0">
                 <a:solidFill>
                   <a:srgbClr val="EDAB0C"/>
                 </a:solidFill>
@@ -6905,7 +6905,7 @@
               <a:t>■  </a:t>
             </a:r>
             <a:r>
-              <a:rPr sz="1800" b="0" i="0">
+              <a:rPr sz="2400" b="0" i="0">
                 <a:solidFill>
                   <a:srgbClr val="2A2929"/>
                 </a:solidFill>
@@ -7681,7 +7681,7 @@
           <a:noFill/>
         </p:spPr>
         <p:txBody>
-          <a:bodyPr wrap="square" anchor="t" lIns="0" rIns="0" tIns="0" bIns="0">
+          <a:bodyPr wrap="square" anchor="ctr" lIns="0" rIns="0" tIns="0" bIns="0">
             <a:spAutoFit/>
           </a:bodyPr>
           <a:lstStyle/>
@@ -7698,7 +7698,7 @@
               </a:spcAft>
             </a:pPr>
             <a:r>
-              <a:rPr sz="1800" b="1" i="0">
+              <a:rPr sz="2400" b="1" i="0">
                 <a:solidFill>
                   <a:srgbClr val="EDAB0C"/>
                 </a:solidFill>
@@ -7707,7 +7707,7 @@
               <a:t>■  </a:t>
             </a:r>
             <a:r>
-              <a:rPr sz="1800" b="0" i="0">
+              <a:rPr sz="2400" b="0" i="0">
                 <a:solidFill>
                   <a:srgbClr val="2A2929"/>
                 </a:solidFill>
@@ -7729,7 +7729,7 @@
               </a:spcAft>
             </a:pPr>
             <a:r>
-              <a:rPr sz="1800" b="1" i="0">
+              <a:rPr sz="2400" b="1" i="0">
                 <a:solidFill>
                   <a:srgbClr val="92268F"/>
                 </a:solidFill>
@@ -7738,7 +7738,7 @@
               <a:t>■  </a:t>
             </a:r>
             <a:r>
-              <a:rPr sz="1800" b="1" i="0">
+              <a:rPr sz="2400" b="1" i="0">
                 <a:solidFill>
                   <a:srgbClr val="92268F"/>
                 </a:solidFill>
@@ -7760,7 +7760,7 @@
               </a:spcAft>
             </a:pPr>
             <a:r>
-              <a:rPr sz="1800" b="1" i="0">
+              <a:rPr sz="2400" b="1" i="0">
                 <a:solidFill>
                   <a:srgbClr val="EDAB0C"/>
                 </a:solidFill>
@@ -7769,7 +7769,7 @@
               <a:t>■  </a:t>
             </a:r>
             <a:r>
-              <a:rPr sz="1800" b="0" i="0">
+              <a:rPr sz="2400" b="0" i="0">
                 <a:solidFill>
                   <a:srgbClr val="2A2929"/>
                 </a:solidFill>
@@ -7791,7 +7791,7 @@
               </a:spcAft>
             </a:pPr>
             <a:r>
-              <a:rPr sz="1800" b="1" i="0">
+              <a:rPr sz="2400" b="1" i="0">
                 <a:solidFill>
                   <a:srgbClr val="EDAB0C"/>
                 </a:solidFill>
@@ -7800,7 +7800,7 @@
               <a:t>■  </a:t>
             </a:r>
             <a:r>
-              <a:rPr sz="1800" b="0" i="0">
+              <a:rPr sz="2400" b="0" i="0">
                 <a:solidFill>
                   <a:srgbClr val="2A2929"/>
                 </a:solidFill>
@@ -8362,7 +8362,7 @@
           <a:noFill/>
         </p:spPr>
         <p:txBody>
-          <a:bodyPr wrap="square" anchor="t" lIns="0" rIns="0" tIns="0" bIns="0">
+          <a:bodyPr wrap="square" anchor="ctr" lIns="0" rIns="0" tIns="0" bIns="0">
             <a:spAutoFit/>
           </a:bodyPr>
           <a:lstStyle/>
@@ -8379,7 +8379,7 @@
               </a:spcAft>
             </a:pPr>
             <a:r>
-              <a:rPr sz="1800" b="1" i="0">
+              <a:rPr sz="2400" b="1" i="0">
                 <a:solidFill>
                   <a:srgbClr val="EDAB0C"/>
                 </a:solidFill>
@@ -8388,7 +8388,7 @@
               <a:t>■  </a:t>
             </a:r>
             <a:r>
-              <a:rPr sz="1800" b="0" i="0">
+              <a:rPr sz="2400" b="0" i="0">
                 <a:solidFill>
                   <a:srgbClr val="2A2929"/>
                 </a:solidFill>
@@ -8410,7 +8410,7 @@
               </a:spcAft>
             </a:pPr>
             <a:r>
-              <a:rPr sz="1800" b="1" i="0">
+              <a:rPr sz="2400" b="1" i="0">
                 <a:solidFill>
                   <a:srgbClr val="92268F"/>
                 </a:solidFill>
@@ -8419,7 +8419,7 @@
               <a:t>■  </a:t>
             </a:r>
             <a:r>
-              <a:rPr sz="1800" b="1" i="0">
+              <a:rPr sz="2400" b="1" i="0">
                 <a:solidFill>
                   <a:srgbClr val="92268F"/>
                 </a:solidFill>
@@ -8441,7 +8441,7 @@
               </a:spcAft>
             </a:pPr>
             <a:r>
-              <a:rPr sz="1800" b="1" i="0">
+              <a:rPr sz="2400" b="1" i="0">
                 <a:solidFill>
                   <a:srgbClr val="EDAB0C"/>
                 </a:solidFill>
@@ -8450,7 +8450,7 @@
               <a:t>■  </a:t>
             </a:r>
             <a:r>
-              <a:rPr sz="1800" b="0" i="0">
+              <a:rPr sz="2400" b="0" i="0">
                 <a:solidFill>
                   <a:srgbClr val="2A2929"/>
                 </a:solidFill>
@@ -10516,7 +10516,7 @@
           <a:noFill/>
         </p:spPr>
         <p:txBody>
-          <a:bodyPr wrap="square" anchor="t" lIns="0" rIns="0" tIns="0" bIns="0">
+          <a:bodyPr wrap="square" anchor="ctr" lIns="0" rIns="0" tIns="0" bIns="0">
             <a:spAutoFit/>
           </a:bodyPr>
           <a:lstStyle/>
@@ -10533,7 +10533,7 @@
               </a:spcAft>
             </a:pPr>
             <a:r>
-              <a:rPr sz="1800" b="1" i="0">
+              <a:rPr sz="2400" b="1" i="0">
                 <a:solidFill>
                   <a:srgbClr val="EDAB0C"/>
                 </a:solidFill>
@@ -10542,7 +10542,7 @@
               <a:t>■  </a:t>
             </a:r>
             <a:r>
-              <a:rPr sz="1800" b="0" i="0">
+              <a:rPr sz="2400" b="0" i="0">
                 <a:solidFill>
                   <a:srgbClr val="2A2929"/>
                 </a:solidFill>
@@ -10564,7 +10564,7 @@
               </a:spcAft>
             </a:pPr>
             <a:r>
-              <a:rPr sz="1800" b="1" i="0">
+              <a:rPr sz="2400" b="1" i="0">
                 <a:solidFill>
                   <a:srgbClr val="92268F"/>
                 </a:solidFill>
@@ -10573,7 +10573,7 @@
               <a:t>■  </a:t>
             </a:r>
             <a:r>
-              <a:rPr sz="1800" b="1" i="0">
+              <a:rPr sz="2400" b="1" i="0">
                 <a:solidFill>
                   <a:srgbClr val="92268F"/>
                 </a:solidFill>
@@ -10595,7 +10595,7 @@
               </a:spcAft>
             </a:pPr>
             <a:r>
-              <a:rPr sz="1800" b="1" i="0">
+              <a:rPr sz="2400" b="1" i="0">
                 <a:solidFill>
                   <a:srgbClr val="EDAB0C"/>
                 </a:solidFill>
@@ -10604,7 +10604,7 @@
               <a:t>■  </a:t>
             </a:r>
             <a:r>
-              <a:rPr sz="1800" b="0" i="0">
+              <a:rPr sz="2400" b="0" i="0">
                 <a:solidFill>
                   <a:srgbClr val="2A2929"/>
                 </a:solidFill>
@@ -10874,7 +10874,7 @@
           <a:noFill/>
         </p:spPr>
         <p:txBody>
-          <a:bodyPr wrap="square" anchor="t" lIns="0" rIns="0" tIns="0" bIns="0">
+          <a:bodyPr wrap="square" anchor="ctr" lIns="0" rIns="0" tIns="0" bIns="0">
             <a:spAutoFit/>
           </a:bodyPr>
           <a:lstStyle/>
@@ -10891,7 +10891,7 @@
               </a:spcAft>
             </a:pPr>
             <a:r>
-              <a:rPr sz="1800" b="1" i="0">
+              <a:rPr sz="2400" b="1" i="0">
                 <a:solidFill>
                   <a:srgbClr val="EDAB0C"/>
                 </a:solidFill>
@@ -10900,7 +10900,7 @@
               <a:t>■  </a:t>
             </a:r>
             <a:r>
-              <a:rPr sz="1800" b="0" i="0">
+              <a:rPr sz="2400" b="0" i="0">
                 <a:solidFill>
                   <a:srgbClr val="2A2929"/>
                 </a:solidFill>
@@ -10922,7 +10922,7 @@
               </a:spcAft>
             </a:pPr>
             <a:r>
-              <a:rPr sz="1800" b="1" i="0">
+              <a:rPr sz="2400" b="1" i="0">
                 <a:solidFill>
                   <a:srgbClr val="EDAB0C"/>
                 </a:solidFill>
@@ -10931,7 +10931,7 @@
               <a:t>■  </a:t>
             </a:r>
             <a:r>
-              <a:rPr sz="1800" b="0" i="0">
+              <a:rPr sz="2400" b="0" i="0">
                 <a:solidFill>
                   <a:srgbClr val="2A2929"/>
                 </a:solidFill>
@@ -10953,7 +10953,7 @@
               </a:spcAft>
             </a:pPr>
             <a:r>
-              <a:rPr sz="1800" b="1" i="0">
+              <a:rPr sz="2400" b="1" i="0">
                 <a:solidFill>
                   <a:srgbClr val="EDAB0C"/>
                 </a:solidFill>
@@ -10962,7 +10962,7 @@
               <a:t>■  </a:t>
             </a:r>
             <a:r>
-              <a:rPr sz="1800" b="0" i="0">
+              <a:rPr sz="2400" b="0" i="0">
                 <a:solidFill>
                   <a:srgbClr val="2A2929"/>
                 </a:solidFill>
@@ -10984,7 +10984,7 @@
               </a:spcAft>
             </a:pPr>
             <a:r>
-              <a:rPr sz="1800" b="1" i="0">
+              <a:rPr sz="2400" b="1" i="0">
                 <a:solidFill>
                   <a:srgbClr val="92268F"/>
                 </a:solidFill>
@@ -10993,7 +10993,7 @@
               <a:t>■  </a:t>
             </a:r>
             <a:r>
-              <a:rPr sz="1800" b="1" i="0">
+              <a:rPr sz="2400" b="1" i="0">
                 <a:solidFill>
                   <a:srgbClr val="92268F"/>
                 </a:solidFill>
@@ -11263,7 +11263,7 @@
           <a:noFill/>
         </p:spPr>
         <p:txBody>
-          <a:bodyPr wrap="square" anchor="t" lIns="0" rIns="0" tIns="0" bIns="0">
+          <a:bodyPr wrap="square" anchor="ctr" lIns="0" rIns="0" tIns="0" bIns="0">
             <a:spAutoFit/>
           </a:bodyPr>
           <a:lstStyle/>
@@ -11280,7 +11280,7 @@
               </a:spcAft>
             </a:pPr>
             <a:r>
-              <a:rPr sz="1800" b="1" i="0">
+              <a:rPr sz="2400" b="1" i="0">
                 <a:solidFill>
                   <a:srgbClr val="EDAB0C"/>
                 </a:solidFill>
@@ -11289,7 +11289,7 @@
               <a:t>■  </a:t>
             </a:r>
             <a:r>
-              <a:rPr sz="1800" b="0" i="0">
+              <a:rPr sz="2400" b="0" i="0">
                 <a:solidFill>
                   <a:srgbClr val="2A2929"/>
                 </a:solidFill>
@@ -11311,7 +11311,7 @@
               </a:spcAft>
             </a:pPr>
             <a:r>
-              <a:rPr sz="1800" b="1" i="0">
+              <a:rPr sz="2400" b="1" i="0">
                 <a:solidFill>
                   <a:srgbClr val="EDAB0C"/>
                 </a:solidFill>
@@ -11320,7 +11320,7 @@
               <a:t>■  </a:t>
             </a:r>
             <a:r>
-              <a:rPr sz="1800" b="0" i="0">
+              <a:rPr sz="2400" b="0" i="0">
                 <a:solidFill>
                   <a:srgbClr val="2A2929"/>
                 </a:solidFill>
@@ -11342,7 +11342,7 @@
               </a:spcAft>
             </a:pPr>
             <a:r>
-              <a:rPr sz="1800" b="1" i="0">
+              <a:rPr sz="2400" b="1" i="0">
                 <a:solidFill>
                   <a:srgbClr val="92268F"/>
                 </a:solidFill>
@@ -11351,7 +11351,7 @@
               <a:t>■  </a:t>
             </a:r>
             <a:r>
-              <a:rPr sz="1800" b="1" i="0">
+              <a:rPr sz="2400" b="1" i="0">
                 <a:solidFill>
                   <a:srgbClr val="92268F"/>
                 </a:solidFill>

--- a/S1-CL1-Cloud-Design-Build/delivery/topic_10/Topic_10_Slides.pptx
+++ b/S1-CL1-Cloud-Design-Build/delivery/topic_10/Topic_10_Slides.pptx
@@ -7,28 +7,28 @@
   <p:sldIdLst>
     <p:sldId id="256" r:id="rId7"/>
     <p:sldId id="257" r:id="rId8"/>
-    <p:sldId id="258" r:id="rId9"/>
-    <p:sldId id="259" r:id="rId10"/>
-    <p:sldId id="260" r:id="rId11"/>
-    <p:sldId id="261" r:id="rId12"/>
-    <p:sldId id="262" r:id="rId13"/>
-    <p:sldId id="263" r:id="rId14"/>
-    <p:sldId id="264" r:id="rId15"/>
-    <p:sldId id="265" r:id="rId16"/>
-    <p:sldId id="266" r:id="rId17"/>
-    <p:sldId id="267" r:id="rId18"/>
-    <p:sldId id="268" r:id="rId19"/>
-    <p:sldId id="269" r:id="rId20"/>
-    <p:sldId id="270" r:id="rId21"/>
-    <p:sldId id="271" r:id="rId22"/>
-    <p:sldId id="272" r:id="rId23"/>
-    <p:sldId id="273" r:id="rId24"/>
-    <p:sldId id="274" r:id="rId25"/>
-    <p:sldId id="275" r:id="rId26"/>
-    <p:sldId id="276" r:id="rId27"/>
-    <p:sldId id="277" r:id="rId28"/>
-    <p:sldId id="278" r:id="rId29"/>
-    <p:sldId id="279" r:id="rId30"/>
+    <p:sldId id="258" r:id="rId10"/>
+    <p:sldId id="259" r:id="rId11"/>
+    <p:sldId id="260" r:id="rId12"/>
+    <p:sldId id="261" r:id="rId13"/>
+    <p:sldId id="262" r:id="rId14"/>
+    <p:sldId id="263" r:id="rId15"/>
+    <p:sldId id="264" r:id="rId16"/>
+    <p:sldId id="265" r:id="rId17"/>
+    <p:sldId id="266" r:id="rId18"/>
+    <p:sldId id="267" r:id="rId19"/>
+    <p:sldId id="268" r:id="rId20"/>
+    <p:sldId id="269" r:id="rId21"/>
+    <p:sldId id="270" r:id="rId22"/>
+    <p:sldId id="271" r:id="rId23"/>
+    <p:sldId id="272" r:id="rId24"/>
+    <p:sldId id="273" r:id="rId25"/>
+    <p:sldId id="274" r:id="rId26"/>
+    <p:sldId id="275" r:id="rId27"/>
+    <p:sldId id="276" r:id="rId28"/>
+    <p:sldId id="277" r:id="rId29"/>
+    <p:sldId id="278" r:id="rId30"/>
+    <p:sldId id="279" r:id="rId31"/>
   </p:sldIdLst>
   <p:sldSz cx="12191695" cy="6858000" type="screen4x3"/>
   <p:notesSz cx="6858000" cy="9144000"/>
@@ -128,6 +128,2261 @@
     </a:lvl9pPr>
   </p:defaultTextStyle>
 </p:presentation>
+</file>
+
+<file path=ppt/notesMasters/notesMaster1.xml><?xml version="1.0" encoding="utf-8"?>
+<p:notesMaster xmlns:a="http://schemas.openxmlformats.org/drawingml/2006/main" xmlns:p="http://schemas.openxmlformats.org/presentationml/2006/main" xmlns:r="http://schemas.openxmlformats.org/officeDocument/2006/relationships">
+  <p:cSld>
+    <p:bg>
+      <p:bgRef idx="1001">
+        <a:schemeClr val="bg1"/>
+      </p:bgRef>
+    </p:bg>
+    <p:spTree>
+      <p:nvGrpSpPr>
+        <p:cNvPr id="1" name=""/>
+        <p:cNvGrpSpPr/>
+        <p:nvPr/>
+      </p:nvGrpSpPr>
+      <p:grpSpPr>
+        <a:xfrm>
+          <a:off x="0" y="0"/>
+          <a:ext cx="0" cy="0"/>
+          <a:chOff x="0" y="0"/>
+          <a:chExt cx="0" cy="0"/>
+        </a:xfrm>
+      </p:grpSpPr>
+      <p:sp>
+        <p:nvSpPr>
+          <p:cNvPr id="2" name="Header Placeholder 1"/>
+          <p:cNvSpPr>
+            <a:spLocks noGrp="1"/>
+          </p:cNvSpPr>
+          <p:nvPr>
+            <p:ph type="hdr" sz="quarter"/>
+          </p:nvPr>
+        </p:nvSpPr>
+        <p:spPr>
+          <a:xfrm>
+            <a:off x="0" y="0"/>
+            <a:ext cx="2971800" cy="457200"/>
+          </a:xfrm>
+          <a:prstGeom prst="rect">
+            <a:avLst/>
+          </a:prstGeom>
+        </p:spPr>
+        <p:txBody>
+          <a:bodyPr vert="horz" lIns="91440" tIns="45720" rIns="91440" bIns="45720" rtlCol="0"/>
+          <a:lstStyle>
+            <a:lvl1pPr algn="l">
+              <a:defRPr sz="1200"/>
+            </a:lvl1pPr>
+          </a:lstStyle>
+          <a:p>
+            <a:endParaRPr lang="en-US"/>
+          </a:p>
+        </p:txBody>
+      </p:sp>
+      <p:sp>
+        <p:nvSpPr>
+          <p:cNvPr id="3" name="Date Placeholder 2"/>
+          <p:cNvSpPr>
+            <a:spLocks noGrp="1"/>
+          </p:cNvSpPr>
+          <p:nvPr>
+            <p:ph type="dt" idx="1"/>
+          </p:nvPr>
+        </p:nvSpPr>
+        <p:spPr>
+          <a:xfrm>
+            <a:off x="3884613" y="0"/>
+            <a:ext cx="2971800" cy="457200"/>
+          </a:xfrm>
+          <a:prstGeom prst="rect">
+            <a:avLst/>
+          </a:prstGeom>
+        </p:spPr>
+        <p:txBody>
+          <a:bodyPr vert="horz" lIns="91440" tIns="45720" rIns="91440" bIns="45720" rtlCol="0"/>
+          <a:lstStyle>
+            <a:lvl1pPr algn="r">
+              <a:defRPr sz="1200"/>
+            </a:lvl1pPr>
+          </a:lstStyle>
+          <a:p>
+            <a:fld id="{0F89C1C7-3DCD-1040-A9CF-14679D8B5DDD}" type="datetimeFigureOut">
+              <a:rPr lang="en-US" smtClean="0"/>
+              <a:t>10/17/16</a:t>
+            </a:fld>
+            <a:endParaRPr lang="en-US"/>
+          </a:p>
+        </p:txBody>
+      </p:sp>
+      <p:sp>
+        <p:nvSpPr>
+          <p:cNvPr id="4" name="Slide Image Placeholder 3"/>
+          <p:cNvSpPr>
+            <a:spLocks noGrp="1" noRot="1" noChangeAspect="1"/>
+          </p:cNvSpPr>
+          <p:nvPr>
+            <p:ph type="sldImg" idx="2"/>
+          </p:nvPr>
+        </p:nvSpPr>
+        <p:spPr>
+          <a:xfrm>
+            <a:off x="1143000" y="685800"/>
+            <a:ext cx="4572000" cy="3429000"/>
+          </a:xfrm>
+          <a:prstGeom prst="rect">
+            <a:avLst/>
+          </a:prstGeom>
+          <a:noFill/>
+          <a:ln w="12700">
+            <a:solidFill>
+              <a:prstClr val="black"/>
+            </a:solidFill>
+          </a:ln>
+        </p:spPr>
+        <p:txBody>
+          <a:bodyPr vert="horz" lIns="91440" tIns="45720" rIns="91440" bIns="45720" rtlCol="0" anchor="ctr"/>
+          <a:lstStyle/>
+          <a:p>
+            <a:endParaRPr lang="en-US"/>
+          </a:p>
+        </p:txBody>
+      </p:sp>
+      <p:sp>
+        <p:nvSpPr>
+          <p:cNvPr id="5" name="Notes Placeholder 4"/>
+          <p:cNvSpPr>
+            <a:spLocks noGrp="1"/>
+          </p:cNvSpPr>
+          <p:nvPr>
+            <p:ph type="body" sz="quarter" idx="3"/>
+          </p:nvPr>
+        </p:nvSpPr>
+        <p:spPr>
+          <a:xfrm>
+            <a:off x="685800" y="4343400"/>
+            <a:ext cx="5486400" cy="4114800"/>
+          </a:xfrm>
+          <a:prstGeom prst="rect">
+            <a:avLst/>
+          </a:prstGeom>
+        </p:spPr>
+        <p:txBody>
+          <a:bodyPr vert="horz" lIns="91440" tIns="45720" rIns="91440" bIns="45720" rtlCol="0"/>
+          <a:lstStyle/>
+          <a:p>
+            <a:pPr lvl="0"/>
+            <a:r>
+              <a:rPr lang="en-US" smtClean="0"/>
+              <a:t>Click to edit Master text styles</a:t>
+            </a:r>
+          </a:p>
+          <a:p>
+            <a:pPr lvl="1"/>
+            <a:r>
+              <a:rPr lang="en-US" smtClean="0"/>
+              <a:t>Second level</a:t>
+            </a:r>
+          </a:p>
+          <a:p>
+            <a:pPr lvl="2"/>
+            <a:r>
+              <a:rPr lang="en-US" smtClean="0"/>
+              <a:t>Third level</a:t>
+            </a:r>
+          </a:p>
+          <a:p>
+            <a:pPr lvl="3"/>
+            <a:r>
+              <a:rPr lang="en-US" smtClean="0"/>
+              <a:t>Fourth level</a:t>
+            </a:r>
+          </a:p>
+          <a:p>
+            <a:pPr lvl="4"/>
+            <a:r>
+              <a:rPr lang="en-US" smtClean="0"/>
+              <a:t>Fifth level</a:t>
+            </a:r>
+            <a:endParaRPr lang="en-US"/>
+          </a:p>
+        </p:txBody>
+      </p:sp>
+      <p:sp>
+        <p:nvSpPr>
+          <p:cNvPr id="6" name="Footer Placeholder 5"/>
+          <p:cNvSpPr>
+            <a:spLocks noGrp="1"/>
+          </p:cNvSpPr>
+          <p:nvPr>
+            <p:ph type="ftr" sz="quarter" idx="4"/>
+          </p:nvPr>
+        </p:nvSpPr>
+        <p:spPr>
+          <a:xfrm>
+            <a:off x="0" y="8685213"/>
+            <a:ext cx="2971800" cy="457200"/>
+          </a:xfrm>
+          <a:prstGeom prst="rect">
+            <a:avLst/>
+          </a:prstGeom>
+        </p:spPr>
+        <p:txBody>
+          <a:bodyPr vert="horz" lIns="91440" tIns="45720" rIns="91440" bIns="45720" rtlCol="0" anchor="b"/>
+          <a:lstStyle>
+            <a:lvl1pPr algn="l">
+              <a:defRPr sz="1200"/>
+            </a:lvl1pPr>
+          </a:lstStyle>
+          <a:p>
+            <a:endParaRPr lang="en-US"/>
+          </a:p>
+        </p:txBody>
+      </p:sp>
+      <p:sp>
+        <p:nvSpPr>
+          <p:cNvPr id="7" name="Slide Number Placeholder 6"/>
+          <p:cNvSpPr>
+            <a:spLocks noGrp="1"/>
+          </p:cNvSpPr>
+          <p:nvPr>
+            <p:ph type="sldNum" sz="quarter" idx="5"/>
+          </p:nvPr>
+        </p:nvSpPr>
+        <p:spPr>
+          <a:xfrm>
+            <a:off x="3884613" y="8685213"/>
+            <a:ext cx="2971800" cy="457200"/>
+          </a:xfrm>
+          <a:prstGeom prst="rect">
+            <a:avLst/>
+          </a:prstGeom>
+        </p:spPr>
+        <p:txBody>
+          <a:bodyPr vert="horz" lIns="91440" tIns="45720" rIns="91440" bIns="45720" rtlCol="0" anchor="b"/>
+          <a:lstStyle>
+            <a:lvl1pPr algn="r">
+              <a:defRPr sz="1200"/>
+            </a:lvl1pPr>
+          </a:lstStyle>
+          <a:p>
+            <a:fld id="{BB5E49A5-4136-284D-997B-48E1D791AD67}" type="slidenum">
+              <a:rPr lang="en-US" smtClean="0"/>
+              <a:t>‹#›</a:t>
+            </a:fld>
+            <a:endParaRPr lang="en-US"/>
+          </a:p>
+        </p:txBody>
+      </p:sp>
+    </p:spTree>
+    <p:extLst>
+      <p:ext uri="{BB962C8B-B14F-4D97-AF65-F5344CB8AC3E}">
+        <p14:creationId xmlns:p14="http://schemas.microsoft.com/office/powerpoint/2010/main" val="2623252185"/>
+      </p:ext>
+    </p:extLst>
+  </p:cSld>
+  <p:clrMap bg1="lt1" tx1="dk1" bg2="lt2" tx2="dk2" accent1="accent1" accent2="accent2" accent3="accent3" accent4="accent4" accent5="accent5" accent6="accent6" hlink="hlink" folHlink="folHlink"/>
+  <p:notesStyle>
+    <a:lvl1pPr marL="0" algn="l" defTabSz="457200" rtl="0" eaLnBrk="1" latinLnBrk="0" hangingPunct="1">
+      <a:defRPr sz="1200" kern="1200">
+        <a:solidFill>
+          <a:schemeClr val="tx1"/>
+        </a:solidFill>
+        <a:latin typeface="+mn-lt"/>
+        <a:ea typeface="+mn-ea"/>
+        <a:cs typeface="+mn-cs"/>
+      </a:defRPr>
+    </a:lvl1pPr>
+    <a:lvl2pPr marL="457200" algn="l" defTabSz="457200" rtl="0" eaLnBrk="1" latinLnBrk="0" hangingPunct="1">
+      <a:defRPr sz="1200" kern="1200">
+        <a:solidFill>
+          <a:schemeClr val="tx1"/>
+        </a:solidFill>
+        <a:latin typeface="+mn-lt"/>
+        <a:ea typeface="+mn-ea"/>
+        <a:cs typeface="+mn-cs"/>
+      </a:defRPr>
+    </a:lvl2pPr>
+    <a:lvl3pPr marL="914400" algn="l" defTabSz="457200" rtl="0" eaLnBrk="1" latinLnBrk="0" hangingPunct="1">
+      <a:defRPr sz="1200" kern="1200">
+        <a:solidFill>
+          <a:schemeClr val="tx1"/>
+        </a:solidFill>
+        <a:latin typeface="+mn-lt"/>
+        <a:ea typeface="+mn-ea"/>
+        <a:cs typeface="+mn-cs"/>
+      </a:defRPr>
+    </a:lvl3pPr>
+    <a:lvl4pPr marL="1371600" algn="l" defTabSz="457200" rtl="0" eaLnBrk="1" latinLnBrk="0" hangingPunct="1">
+      <a:defRPr sz="1200" kern="1200">
+        <a:solidFill>
+          <a:schemeClr val="tx1"/>
+        </a:solidFill>
+        <a:latin typeface="+mn-lt"/>
+        <a:ea typeface="+mn-ea"/>
+        <a:cs typeface="+mn-cs"/>
+      </a:defRPr>
+    </a:lvl4pPr>
+    <a:lvl5pPr marL="1828800" algn="l" defTabSz="457200" rtl="0" eaLnBrk="1" latinLnBrk="0" hangingPunct="1">
+      <a:defRPr sz="1200" kern="1200">
+        <a:solidFill>
+          <a:schemeClr val="tx1"/>
+        </a:solidFill>
+        <a:latin typeface="+mn-lt"/>
+        <a:ea typeface="+mn-ea"/>
+        <a:cs typeface="+mn-cs"/>
+      </a:defRPr>
+    </a:lvl5pPr>
+    <a:lvl6pPr marL="2286000" algn="l" defTabSz="457200" rtl="0" eaLnBrk="1" latinLnBrk="0" hangingPunct="1">
+      <a:defRPr sz="1200" kern="1200">
+        <a:solidFill>
+          <a:schemeClr val="tx1"/>
+        </a:solidFill>
+        <a:latin typeface="+mn-lt"/>
+        <a:ea typeface="+mn-ea"/>
+        <a:cs typeface="+mn-cs"/>
+      </a:defRPr>
+    </a:lvl6pPr>
+    <a:lvl7pPr marL="2743200" algn="l" defTabSz="457200" rtl="0" eaLnBrk="1" latinLnBrk="0" hangingPunct="1">
+      <a:defRPr sz="1200" kern="1200">
+        <a:solidFill>
+          <a:schemeClr val="tx1"/>
+        </a:solidFill>
+        <a:latin typeface="+mn-lt"/>
+        <a:ea typeface="+mn-ea"/>
+        <a:cs typeface="+mn-cs"/>
+      </a:defRPr>
+    </a:lvl7pPr>
+    <a:lvl8pPr marL="3200400" algn="l" defTabSz="457200" rtl="0" eaLnBrk="1" latinLnBrk="0" hangingPunct="1">
+      <a:defRPr sz="1200" kern="1200">
+        <a:solidFill>
+          <a:schemeClr val="tx1"/>
+        </a:solidFill>
+        <a:latin typeface="+mn-lt"/>
+        <a:ea typeface="+mn-ea"/>
+        <a:cs typeface="+mn-cs"/>
+      </a:defRPr>
+    </a:lvl8pPr>
+    <a:lvl9pPr marL="3657600" algn="l" defTabSz="457200" rtl="0" eaLnBrk="1" latinLnBrk="0" hangingPunct="1">
+      <a:defRPr sz="1200" kern="1200">
+        <a:solidFill>
+          <a:schemeClr val="tx1"/>
+        </a:solidFill>
+        <a:latin typeface="+mn-lt"/>
+        <a:ea typeface="+mn-ea"/>
+        <a:cs typeface="+mn-cs"/>
+      </a:defRPr>
+    </a:lvl9pPr>
+  </p:notesStyle>
+</p:notesMaster>
+</file>
+
+<file path=ppt/notesSlides/notesSlide1.xml><?xml version="1.0" encoding="utf-8"?>
+<p:notes xmlns:a="http://schemas.openxmlformats.org/drawingml/2006/main" xmlns:p="http://schemas.openxmlformats.org/presentationml/2006/main" xmlns:r="http://schemas.openxmlformats.org/officeDocument/2006/relationships">
+  <p:cSld>
+    <p:spTree>
+      <p:nvGrpSpPr>
+        <p:cNvPr id="1" name=""/>
+        <p:cNvGrpSpPr/>
+        <p:nvPr/>
+      </p:nvGrpSpPr>
+      <p:grpSpPr>
+        <a:xfrm>
+          <a:off x="0" y="0"/>
+          <a:ext cx="0" cy="0"/>
+          <a:chOff x="0" y="0"/>
+          <a:chExt cx="0" cy="0"/>
+        </a:xfrm>
+      </p:grpSpPr>
+      <p:sp>
+        <p:nvSpPr>
+          <p:cNvPr id="2" name="Slide Image Placeholder 1"/>
+          <p:cNvSpPr>
+            <a:spLocks noGrp="1"/>
+          </p:cNvSpPr>
+          <p:nvPr>
+            <p:ph type="sldImg" idx="2"/>
+          </p:nvPr>
+        </p:nvSpPr>
+        <p:spPr/>
+      </p:sp>
+      <p:sp>
+        <p:nvSpPr>
+          <p:cNvPr id="3" name="Notes Placeholder 2"/>
+          <p:cNvSpPr>
+            <a:spLocks noGrp="1"/>
+          </p:cNvSpPr>
+          <p:nvPr>
+            <p:ph type="body" idx="3" sz="quarter"/>
+          </p:nvPr>
+        </p:nvSpPr>
+        <p:spPr/>
+        <p:txBody>
+          <a:bodyPr/>
+          <a:lstStyle/>
+          <a:p>
+            <a:r>
+              <a:t>Frame this as the map for the whole Topic — the pivot from building to writing up. No new</a:t>
+            </a:r>
+          </a:p>
+          <a:p>
+            <a:r>
+              <a:t>building today.</a:t>
+            </a:r>
+          </a:p>
+          <a:p>
+            <a:r>
+              <a:t>• Goal: read it out — by the end they can turn the Topics 6–9 build into the Deployment Report.</a:t>
+            </a:r>
+          </a:p>
+          <a:p>
+            <a:r>
+              <a:t>  That report IS the AT2 deliverable; everything today assembles it.</a:t>
+            </a:r>
+          </a:p>
+          <a:p>
+            <a:r>
+              <a:t>• Where this fits: last AT2 content Topic. They're MTS consultants; the report is what YAT's ICT</a:t>
+            </a:r>
+          </a:p>
+          <a:p>
+            <a:r>
+              <a:t>  team and auditors actually receive — the running system alone isn't the handover.</a:t>
+            </a:r>
+          </a:p>
+          <a:p>
+            <a:r>
+              <a:t>• The four moves: organise the evidence, write the report, evidence the knowledge in context,</a:t>
+            </a:r>
+          </a:p>
+          <a:p>
+            <a:r>
+              <a:t>  reflect. Each maps to a section today.</a:t>
+            </a:r>
+          </a:p>
+          <a:p>
+            <a:r>
+              <a:t>• Stress it: no new resources — everything they need was captured as they built.</a:t>
+            </a:r>
+          </a:p>
+          <a:p>
+            <a:r>
+              <a:t>Misconception to pre-empt: "documentation is an afterthought / a diary of what I did." No — it IS</a:t>
+            </a:r>
+          </a:p>
+          <a:p>
+            <a:r>
+              <a:t>the deliverable; the build is worthless to the client without the document that explains it.</a:t>
+            </a:r>
+          </a:p>
+          <a:p>
+            <a:r>
+              <a:t>Question to pose: "If you left YAT tomorrow, what would their ICT team have — the running system,</a:t>
+            </a:r>
+          </a:p>
+          <a:p>
+            <a:r>
+              <a:t>or the running system PLUS a document that lets them run and audit it?"</a:t>
+            </a:r>
+          </a:p>
+          <a:p>
+            <a:r>
+              <a:t>UoC/AT2 tie: this Topic develops ICTCLD401 element 4; the Deployment Report (§1–§7 + Appendices</a:t>
+            </a:r>
+          </a:p>
+          <a:p>
+            <a:r>
+              <a:t>A/B/C) is the single AT2 deliverable everything is marked in.</a:t>
+            </a:r>
+          </a:p>
+        </p:txBody>
+      </p:sp>
+      <p:sp>
+        <p:nvSpPr>
+          <p:cNvPr id="4" name="Slide Number Placeholder 3"/>
+          <p:cNvSpPr>
+            <a:spLocks noGrp="1"/>
+          </p:cNvSpPr>
+          <p:nvPr>
+            <p:ph type="sldNum" idx="5" sz="quarter"/>
+          </p:nvPr>
+        </p:nvSpPr>
+        <p:spPr/>
+      </p:sp>
+    </p:spTree>
+  </p:cSld>
+  <p:clrMapOvr>
+    <a:masterClrMapping/>
+  </p:clrMapOvr>
+</p:notes>
+</file>
+
+<file path=ppt/notesSlides/notesSlide10.xml><?xml version="1.0" encoding="utf-8"?>
+<p:notes xmlns:a="http://schemas.openxmlformats.org/drawingml/2006/main" xmlns:p="http://schemas.openxmlformats.org/presentationml/2006/main" xmlns:r="http://schemas.openxmlformats.org/officeDocument/2006/relationships">
+  <p:cSld>
+    <p:spTree>
+      <p:nvGrpSpPr>
+        <p:cNvPr id="1" name=""/>
+        <p:cNvGrpSpPr/>
+        <p:nvPr/>
+      </p:nvGrpSpPr>
+      <p:grpSpPr>
+        <a:xfrm>
+          <a:off x="0" y="0"/>
+          <a:ext cx="0" cy="0"/>
+          <a:chOff x="0" y="0"/>
+          <a:chExt cx="0" cy="0"/>
+        </a:xfrm>
+      </p:grpSpPr>
+      <p:sp>
+        <p:nvSpPr>
+          <p:cNvPr id="2" name="Slide Image Placeholder 1"/>
+          <p:cNvSpPr>
+            <a:spLocks noGrp="1"/>
+          </p:cNvSpPr>
+          <p:nvPr>
+            <p:ph type="sldImg" idx="2"/>
+          </p:nvPr>
+        </p:nvSpPr>
+        <p:spPr/>
+      </p:sp>
+      <p:sp>
+        <p:nvSpPr>
+          <p:cNvPr id="3" name="Notes Placeholder 2"/>
+          <p:cNvSpPr>
+            <a:spLocks noGrp="1"/>
+          </p:cNvSpPr>
+          <p:nvPr>
+            <p:ph type="body" idx="3" sz="quarter"/>
+          </p:nvPr>
+        </p:nvSpPr>
+        <p:spPr/>
+        <p:txBody>
+          <a:bodyPr/>
+          <a:lstStyle/>
+          <a:p>
+            <a:r>
+              <a:t>The frame-and-handover sections — short, but do them properly; §7 especially is real consulting.</a:t>
+            </a:r>
+          </a:p>
+          <a:p>
+            <a:r>
+              <a:t>• §2 Context + §3 Scope — what the engagement was, why, and what's in / out of this build.</a:t>
+            </a:r>
+          </a:p>
+          <a:p>
+            <a:r>
+              <a:t>• §7 Operational Handover — what YAT ICT now owns and how to run it: alarms, backups, access.</a:t>
+            </a:r>
+          </a:p>
+          <a:p>
+            <a:r>
+              <a:t>• The accent line: §1 Executive Summary — write it LAST; a short, plain summary for a busy reader.</a:t>
+            </a:r>
+          </a:p>
+          <a:p>
+            <a:r>
+              <a:t>Misconception to pre-empt: "the Exec Summary is first, so I write it first." Write it last — you</a:t>
+            </a:r>
+          </a:p>
+          <a:p>
+            <a:r>
+              <a:t>can't summarise a report you haven't finished.</a:t>
+            </a:r>
+          </a:p>
+          <a:p>
+            <a:r>
+              <a:t>Question to pose: "§7 handover — if you vanished tomorrow, what does YAT's ICT team need from you</a:t>
+            </a:r>
+          </a:p>
+          <a:p>
+            <a:r>
+              <a:t>to keep this running?" (alarms, backups, access — the operational reality).</a:t>
+            </a:r>
+          </a:p>
+          <a:p>
+            <a:r>
+              <a:t>UoC/AT2 tie: PC 4.1; scope and handover complete the AT2 report the reader actually operates from.</a:t>
+            </a:r>
+          </a:p>
+        </p:txBody>
+      </p:sp>
+      <p:sp>
+        <p:nvSpPr>
+          <p:cNvPr id="4" name="Slide Number Placeholder 3"/>
+          <p:cNvSpPr>
+            <a:spLocks noGrp="1"/>
+          </p:cNvSpPr>
+          <p:nvPr>
+            <p:ph type="sldNum" idx="5" sz="quarter"/>
+          </p:nvPr>
+        </p:nvSpPr>
+        <p:spPr/>
+      </p:sp>
+    </p:spTree>
+  </p:cSld>
+  <p:clrMapOvr>
+    <a:masterClrMapping/>
+  </p:clrMapOvr>
+</p:notes>
+</file>
+
+<file path=ppt/notesSlides/notesSlide11.xml><?xml version="1.0" encoding="utf-8"?>
+<p:notes xmlns:a="http://schemas.openxmlformats.org/drawingml/2006/main" xmlns:p="http://schemas.openxmlformats.org/presentationml/2006/main" xmlns:r="http://schemas.openxmlformats.org/officeDocument/2006/relationships">
+  <p:cSld>
+    <p:spTree>
+      <p:nvGrpSpPr>
+        <p:cNvPr id="1" name=""/>
+        <p:cNvGrpSpPr/>
+        <p:nvPr/>
+      </p:nvGrpSpPr>
+      <p:grpSpPr>
+        <a:xfrm>
+          <a:off x="0" y="0"/>
+          <a:ext cx="0" cy="0"/>
+          <a:chOff x="0" y="0"/>
+          <a:chExt cx="0" cy="0"/>
+        </a:xfrm>
+      </p:grpSpPr>
+      <p:sp>
+        <p:nvSpPr>
+          <p:cNvPr id="2" name="Slide Image Placeholder 1"/>
+          <p:cNvSpPr>
+            <a:spLocks noGrp="1"/>
+          </p:cNvSpPr>
+          <p:nvPr>
+            <p:ph type="sldImg" idx="2"/>
+          </p:nvPr>
+        </p:nvSpPr>
+        <p:spPr/>
+      </p:sp>
+      <p:sp>
+        <p:nvSpPr>
+          <p:cNvPr id="3" name="Notes Placeholder 2"/>
+          <p:cNvSpPr>
+            <a:spLocks noGrp="1"/>
+          </p:cNvSpPr>
+          <p:nvPr>
+            <p:ph type="body" idx="3" sz="quarter"/>
+          </p:nvPr>
+        </p:nvSpPr>
+        <p:spPr/>
+        <p:txBody>
+          <a:bodyPr/>
+          <a:lstStyle/>
+          <a:p>
+            <a:r>
+              <a:t>Facilitation — the major writing block of the Topic. Give it room; circulate constantly.</a:t>
+            </a:r>
+          </a:p>
+          <a:p>
+            <a:r>
+              <a:t>Tell students: "Write the Deployment Report for the practice engagement, to the template. Drop</a:t>
+            </a:r>
+          </a:p>
+          <a:p>
+            <a:r>
+              <a:t>your Topic 9 justifications into §5 and your validation into §6. Write the §4 narrative tier by</a:t>
+            </a:r>
+          </a:p>
+          <a:p>
+            <a:r>
+              <a:t>tier, cross-referencing your appendices. Add §2/§3 context and scope, §7 handover — and write the</a:t>
+            </a:r>
+          </a:p>
+          <a:p>
+            <a:r>
+              <a:t>Executive Summary last. Every claim ties back to a labelled appendix item."</a:t>
+            </a:r>
+          </a:p>
+          <a:p>
+            <a:r>
+              <a:t>Steps:</a:t>
+            </a:r>
+          </a:p>
+          <a:p>
+            <a:r>
+              <a:t>1. §4 narrative — tier by tier, cross-referencing Appendices A and B.</a:t>
+            </a:r>
+          </a:p>
+          <a:p>
+            <a:r>
+              <a:t>2. §5 from your justifications; §6 from your validation (referencing Appendix C).</a:t>
+            </a:r>
+          </a:p>
+          <a:p>
+            <a:r>
+              <a:t>3. §2/§3 context + scope; §7 operational handover.</a:t>
+            </a:r>
+          </a:p>
+          <a:p>
+            <a:r>
+              <a:t>4. §1 Executive Summary — last.</a:t>
+            </a:r>
+          </a:p>
+          <a:p>
+            <a:r>
+              <a:t>Must produce: a complete Deployment Report to the template, every claim cross-referenced to a</a:t>
+            </a:r>
+          </a:p>
+          <a:p>
+            <a:r>
+              <a:t>labelled appendix item.</a:t>
+            </a:r>
+          </a:p>
+          <a:p>
+            <a:r>
+              <a:t>Timing: ~40 min (the big one). Where they get stuck: they try to write §5/§6 fresh — redirect them</a:t>
+            </a:r>
+          </a:p>
+          <a:p>
+            <a:r>
+              <a:t>to their Topic 9 work; or they write §4 as a diary — pull them back to factual and cross-referenced.</a:t>
+            </a:r>
+          </a:p>
+          <a:p>
+            <a:r>
+              <a:t>Share-back prompt: swap reports and have a partner try to find one cited appendix item — if they</a:t>
+            </a:r>
+          </a:p>
+          <a:p>
+            <a:r>
+              <a:t>can't, the cross-reference failed.</a:t>
+            </a:r>
+          </a:p>
+          <a:p>
+            <a:r>
+              <a:t>No-leakage note: this is the practice report on Ledgerline; AT2 is the same report on the assessed</a:t>
+            </a:r>
+          </a:p>
+          <a:p>
+            <a:r>
+              <a:t>system (LMS) — comparable, not identical.</a:t>
+            </a:r>
+          </a:p>
+        </p:txBody>
+      </p:sp>
+      <p:sp>
+        <p:nvSpPr>
+          <p:cNvPr id="4" name="Slide Number Placeholder 3"/>
+          <p:cNvSpPr>
+            <a:spLocks noGrp="1"/>
+          </p:cNvSpPr>
+          <p:nvPr>
+            <p:ph type="sldNum" idx="5" sz="quarter"/>
+          </p:nvPr>
+        </p:nvSpPr>
+        <p:spPr/>
+      </p:sp>
+    </p:spTree>
+  </p:cSld>
+  <p:clrMapOvr>
+    <a:masterClrMapping/>
+  </p:clrMapOvr>
+</p:notes>
+</file>
+
+<file path=ppt/notesSlides/notesSlide12.xml><?xml version="1.0" encoding="utf-8"?>
+<p:notes xmlns:a="http://schemas.openxmlformats.org/drawingml/2006/main" xmlns:p="http://schemas.openxmlformats.org/presentationml/2006/main" xmlns:r="http://schemas.openxmlformats.org/officeDocument/2006/relationships">
+  <p:cSld>
+    <p:spTree>
+      <p:nvGrpSpPr>
+        <p:cNvPr id="1" name=""/>
+        <p:cNvGrpSpPr/>
+        <p:nvPr/>
+      </p:nvGrpSpPr>
+      <p:grpSpPr>
+        <a:xfrm>
+          <a:off x="0" y="0"/>
+          <a:ext cx="0" cy="0"/>
+          <a:chOff x="0" y="0"/>
+          <a:chExt cx="0" cy="0"/>
+        </a:xfrm>
+      </p:grpSpPr>
+      <p:sp>
+        <p:nvSpPr>
+          <p:cNvPr id="2" name="Slide Image Placeholder 1"/>
+          <p:cNvSpPr>
+            <a:spLocks noGrp="1"/>
+          </p:cNvSpPr>
+          <p:nvPr>
+            <p:ph type="sldImg" idx="2"/>
+          </p:nvPr>
+        </p:nvSpPr>
+        <p:spPr/>
+      </p:sp>
+      <p:sp>
+        <p:nvSpPr>
+          <p:cNvPr id="3" name="Notes Placeholder 2"/>
+          <p:cNvSpPr>
+            <a:spLocks noGrp="1"/>
+          </p:cNvSpPr>
+          <p:nvPr>
+            <p:ph type="body" idx="3" sz="quarter"/>
+          </p:nvPr>
+        </p:nvSpPr>
+        <p:spPr/>
+        <p:txBody>
+          <a:bodyPr/>
+          <a:lstStyle/>
+          <a:p>
+            <a:r>
+              <a:t>Opens C3 — the knowledge that building alone doesn't demonstrate. The whole trick is "in context."</a:t>
+            </a:r>
+          </a:p>
+          <a:p>
+            <a:r>
+              <a:t>• Some knowledge isn't shown by a screenshot: shared responsibility, managed vs self-hosted,</a:t>
+            </a:r>
+          </a:p>
+          <a:p>
+            <a:r>
+              <a:t>  storage/scaling/database options, cost models.</a:t>
+            </a:r>
+          </a:p>
+          <a:p>
+            <a:r>
+              <a:t>• The accent line: answer the knowledge questions grounded in YOUR build — cite your actual design</a:t>
+            </a:r>
+          </a:p>
+          <a:p>
+            <a:r>
+              <a:t>  and decisions.</a:t>
+            </a:r>
+          </a:p>
+          <a:p>
+            <a:r>
+              <a:t>• The example to land: "why a managed database here?" → because of the Ledgerline workload and</a:t>
+            </a:r>
+          </a:p>
+          <a:p>
+            <a:r>
+              <a:t>  these trade-offs, NOT a textbook definition.</a:t>
+            </a:r>
+          </a:p>
+          <a:p>
+            <a:r>
+              <a:t>Misconception to pre-empt: "knowledge questions = recite the definition." No — evidence it in</a:t>
+            </a:r>
+          </a:p>
+          <a:p>
+            <a:r>
+              <a:t>context; tie every answer to your own system and the choices you made.</a:t>
+            </a:r>
+          </a:p>
+          <a:p>
+            <a:r>
+              <a:t>Question to pose: "'What is the shared responsibility model?' versus 'In YOUR build, what did AWS</a:t>
+            </a:r>
+          </a:p>
+          <a:p>
+            <a:r>
+              <a:t>secure and what did you?' — which one proves you actually understand it?"</a:t>
+            </a:r>
+          </a:p>
+          <a:p>
+            <a:r>
+              <a:t>UoC/AT2 tie: ICTCLD401 KE 4–7, evidenced contextually in the report (this is C3).</a:t>
+            </a:r>
+          </a:p>
+        </p:txBody>
+      </p:sp>
+      <p:sp>
+        <p:nvSpPr>
+          <p:cNvPr id="4" name="Slide Number Placeholder 3"/>
+          <p:cNvSpPr>
+            <a:spLocks noGrp="1"/>
+          </p:cNvSpPr>
+          <p:nvPr>
+            <p:ph type="sldNum" idx="5" sz="quarter"/>
+          </p:nvPr>
+        </p:nvSpPr>
+        <p:spPr/>
+      </p:sp>
+    </p:spTree>
+  </p:cSld>
+  <p:clrMapOvr>
+    <a:masterClrMapping/>
+  </p:clrMapOvr>
+</p:notes>
+</file>
+
+<file path=ppt/notesSlides/notesSlide13.xml><?xml version="1.0" encoding="utf-8"?>
+<p:notes xmlns:a="http://schemas.openxmlformats.org/drawingml/2006/main" xmlns:p="http://schemas.openxmlformats.org/presentationml/2006/main" xmlns:r="http://schemas.openxmlformats.org/officeDocument/2006/relationships">
+  <p:cSld>
+    <p:spTree>
+      <p:nvGrpSpPr>
+        <p:cNvPr id="1" name=""/>
+        <p:cNvGrpSpPr/>
+        <p:nvPr/>
+      </p:nvGrpSpPr>
+      <p:grpSpPr>
+        <a:xfrm>
+          <a:off x="0" y="0"/>
+          <a:ext cx="0" cy="0"/>
+          <a:chOff x="0" y="0"/>
+          <a:chExt cx="0" cy="0"/>
+        </a:xfrm>
+      </p:grpSpPr>
+      <p:sp>
+        <p:nvSpPr>
+          <p:cNvPr id="2" name="Slide Image Placeholder 1"/>
+          <p:cNvSpPr>
+            <a:spLocks noGrp="1"/>
+          </p:cNvSpPr>
+          <p:nvPr>
+            <p:ph type="sldImg" idx="2"/>
+          </p:nvPr>
+        </p:nvSpPr>
+        <p:spPr/>
+      </p:sp>
+      <p:sp>
+        <p:nvSpPr>
+          <p:cNvPr id="3" name="Notes Placeholder 2"/>
+          <p:cNvSpPr>
+            <a:spLocks noGrp="1"/>
+          </p:cNvSpPr>
+          <p:nvPr>
+            <p:ph type="body" idx="3" sz="quarter"/>
+          </p:nvPr>
+        </p:nvSpPr>
+        <p:spPr/>
+        <p:txBody>
+          <a:bodyPr/>
+          <a:lstStyle/>
+          <a:p>
+            <a:r>
+              <a:t>Facilitation — a short written KE task; the discipline is grounding, not defining.</a:t>
+            </a:r>
+          </a:p>
+          <a:p>
+            <a:r>
+              <a:t>Tell students: "Answer the AT2 knowledge questions for the practice engagement — but ground every</a:t>
+            </a:r>
+          </a:p>
+          <a:p>
+            <a:r>
+              <a:t>answer in YOUR build. Shared responsibility, managed vs self-hosted, storage and scaling options,</a:t>
+            </a:r>
+          </a:p>
+          <a:p>
+            <a:r>
+              <a:t>cost models: for each, don't define it — show it in your own system and your own decisions."</a:t>
+            </a:r>
+          </a:p>
+          <a:p>
+            <a:r>
+              <a:t>Steps:</a:t>
+            </a:r>
+          </a:p>
+          <a:p>
+            <a:r>
+              <a:t>1. Take each knowledge question in turn.</a:t>
+            </a:r>
+          </a:p>
+          <a:p>
+            <a:r>
+              <a:t>2. Answer it by citing your build, your decisions, and the Ledgerline workload.</a:t>
+            </a:r>
+          </a:p>
+          <a:p>
+            <a:r>
+              <a:t>Must produce: contextual answers, each tied to their own system — not generic best practice.</a:t>
+            </a:r>
+          </a:p>
+          <a:p>
+            <a:r>
+              <a:t>Timing: ~20 min then compare. Where they get stuck: they slip into textbook definitions — push</a:t>
+            </a:r>
+          </a:p>
+          <a:p>
+            <a:r>
+              <a:t>back every time with "yes, but in YOUR build?"</a:t>
+            </a:r>
+          </a:p>
+          <a:p>
+            <a:r>
+              <a:t>Share-back prompt: read one generic answer and one contextual answer, ask the room which one</a:t>
+            </a:r>
+          </a:p>
+          <a:p>
+            <a:r>
+              <a:t>evidences understanding.</a:t>
+            </a:r>
+          </a:p>
+          <a:p>
+            <a:r>
+              <a:t>No-leakage note: practice questions on Ledgerline; AT2 asks the same contextual KE on the assessed</a:t>
+            </a:r>
+          </a:p>
+          <a:p>
+            <a:r>
+              <a:t>system (LMS) — comparable, not identical.</a:t>
+            </a:r>
+          </a:p>
+        </p:txBody>
+      </p:sp>
+      <p:sp>
+        <p:nvSpPr>
+          <p:cNvPr id="4" name="Slide Number Placeholder 3"/>
+          <p:cNvSpPr>
+            <a:spLocks noGrp="1"/>
+          </p:cNvSpPr>
+          <p:nvPr>
+            <p:ph type="sldNum" idx="5" sz="quarter"/>
+          </p:nvPr>
+        </p:nvSpPr>
+        <p:spPr/>
+      </p:sp>
+    </p:spTree>
+  </p:cSld>
+  <p:clrMapOvr>
+    <a:masterClrMapping/>
+  </p:clrMapOvr>
+</p:notes>
+</file>
+
+<file path=ppt/notesSlides/notesSlide14.xml><?xml version="1.0" encoding="utf-8"?>
+<p:notes xmlns:a="http://schemas.openxmlformats.org/drawingml/2006/main" xmlns:p="http://schemas.openxmlformats.org/presentationml/2006/main" xmlns:r="http://schemas.openxmlformats.org/officeDocument/2006/relationships">
+  <p:cSld>
+    <p:spTree>
+      <p:nvGrpSpPr>
+        <p:cNvPr id="1" name=""/>
+        <p:cNvGrpSpPr/>
+        <p:nvPr/>
+      </p:nvGrpSpPr>
+      <p:grpSpPr>
+        <a:xfrm>
+          <a:off x="0" y="0"/>
+          <a:ext cx="0" cy="0"/>
+          <a:chOff x="0" y="0"/>
+          <a:chExt cx="0" cy="0"/>
+        </a:xfrm>
+      </p:grpSpPr>
+      <p:sp>
+        <p:nvSpPr>
+          <p:cNvPr id="2" name="Slide Image Placeholder 1"/>
+          <p:cNvSpPr>
+            <a:spLocks noGrp="1"/>
+          </p:cNvSpPr>
+          <p:nvPr>
+            <p:ph type="sldImg" idx="2"/>
+          </p:nvPr>
+        </p:nvSpPr>
+        <p:spPr/>
+      </p:sp>
+      <p:sp>
+        <p:nvSpPr>
+          <p:cNvPr id="3" name="Notes Placeholder 2"/>
+          <p:cNvSpPr>
+            <a:spLocks noGrp="1"/>
+          </p:cNvSpPr>
+          <p:nvPr>
+            <p:ph type="body" idx="3" sz="quarter"/>
+          </p:nvPr>
+        </p:nvSpPr>
+        <p:spPr/>
+        <p:txBody>
+          <a:bodyPr/>
+          <a:lstStyle/>
+          <a:p>
+            <a:r>
+              <a:t>Opens C4 — the professional close-out. Two distinct things: an honest reflection, then acting on</a:t>
+            </a:r>
+          </a:p>
+          <a:p>
+            <a:r>
+              <a:t>feedback.</a:t>
+            </a:r>
+          </a:p>
+          <a:p>
+            <a:r>
+              <a:t>• A reflection is an honest review — what worked, what you'd do differently, what you learned —</a:t>
+            </a:r>
+          </a:p>
+          <a:p>
+            <a:r>
+              <a:t>  NOT a summary of what you did.</a:t>
+            </a:r>
+          </a:p>
+          <a:p>
+            <a:r>
+              <a:t>• The accent line: then seek feedback on the report from the required personnel, and respond to it.</a:t>
+            </a:r>
+          </a:p>
+          <a:p>
+            <a:r>
+              <a:t>• Acting on feedback is part of the job — and it's assessed.</a:t>
+            </a:r>
+          </a:p>
+          <a:p>
+            <a:r>
+              <a:t>Misconception to pre-empt: "a reflection is a recap of what I did." No — it's honest self-review;</a:t>
+            </a:r>
+          </a:p>
+          <a:p>
+            <a:r>
+              <a:t>the value is in what you'd change, not what went fine.</a:t>
+            </a:r>
+          </a:p>
+          <a:p>
+            <a:r>
+              <a:t>Question to pose: "Name one thing you'd do differently if you rebuilt this — that one sentence is</a:t>
+            </a:r>
+          </a:p>
+          <a:p>
+            <a:r>
+              <a:t>worth more than a paragraph of what went smoothly."</a:t>
+            </a:r>
+          </a:p>
+          <a:p>
+            <a:r>
+              <a:t>UoC/AT2 tie: PC 4.2 (seek and respond to feedback as required) — this is C4.</a:t>
+            </a:r>
+          </a:p>
+        </p:txBody>
+      </p:sp>
+      <p:sp>
+        <p:nvSpPr>
+          <p:cNvPr id="4" name="Slide Number Placeholder 3"/>
+          <p:cNvSpPr>
+            <a:spLocks noGrp="1"/>
+          </p:cNvSpPr>
+          <p:nvPr>
+            <p:ph type="sldNum" idx="5" sz="quarter"/>
+          </p:nvPr>
+        </p:nvSpPr>
+        <p:spPr/>
+      </p:sp>
+    </p:spTree>
+  </p:cSld>
+  <p:clrMapOvr>
+    <a:masterClrMapping/>
+  </p:clrMapOvr>
+</p:notes>
+</file>
+
+<file path=ppt/notesSlides/notesSlide15.xml><?xml version="1.0" encoding="utf-8"?>
+<p:notes xmlns:a="http://schemas.openxmlformats.org/drawingml/2006/main" xmlns:p="http://schemas.openxmlformats.org/presentationml/2006/main" xmlns:r="http://schemas.openxmlformats.org/officeDocument/2006/relationships">
+  <p:cSld>
+    <p:spTree>
+      <p:nvGrpSpPr>
+        <p:cNvPr id="1" name=""/>
+        <p:cNvGrpSpPr/>
+        <p:nvPr/>
+      </p:nvGrpSpPr>
+      <p:grpSpPr>
+        <a:xfrm>
+          <a:off x="0" y="0"/>
+          <a:ext cx="0" cy="0"/>
+          <a:chOff x="0" y="0"/>
+          <a:chExt cx="0" cy="0"/>
+        </a:xfrm>
+      </p:grpSpPr>
+      <p:sp>
+        <p:nvSpPr>
+          <p:cNvPr id="2" name="Slide Image Placeholder 1"/>
+          <p:cNvSpPr>
+            <a:spLocks noGrp="1"/>
+          </p:cNvSpPr>
+          <p:nvPr>
+            <p:ph type="sldImg" idx="2"/>
+          </p:nvPr>
+        </p:nvSpPr>
+        <p:spPr/>
+      </p:sp>
+      <p:sp>
+        <p:nvSpPr>
+          <p:cNvPr id="3" name="Notes Placeholder 2"/>
+          <p:cNvSpPr>
+            <a:spLocks noGrp="1"/>
+          </p:cNvSpPr>
+          <p:nvPr>
+            <p:ph type="body" idx="3" sz="quarter"/>
+          </p:nvPr>
+        </p:nvSpPr>
+        <p:spPr/>
+        <p:txBody>
+          <a:bodyPr/>
+          <a:lstStyle/>
+          <a:p>
+            <a:r>
+              <a:t>Facilitation — the close-out task. Short, but the "respond" half is the assessed bit.</a:t>
+            </a:r>
+          </a:p>
+          <a:p>
+            <a:r>
+              <a:t>Tell students: "Close out the engagement. Write a short, honest reflection on the build and the</a:t>
+            </a:r>
+          </a:p>
+          <a:p>
+            <a:r>
+              <a:t>process — what worked, what you'd do differently. Then seek feedback on your report from the</a:t>
+            </a:r>
+          </a:p>
+          <a:p>
+            <a:r>
+              <a:t>required personnel, and note what you actually changed in response."</a:t>
+            </a:r>
+          </a:p>
+          <a:p>
+            <a:r>
+              <a:t>Steps:</a:t>
+            </a:r>
+          </a:p>
+          <a:p>
+            <a:r>
+              <a:t>1. Write a short, honest reflection (not a summary).</a:t>
+            </a:r>
+          </a:p>
+          <a:p>
+            <a:r>
+              <a:t>2. Seek feedback on the report from the required personnel.</a:t>
+            </a:r>
+          </a:p>
+          <a:p>
+            <a:r>
+              <a:t>3. Note what you changed in response.</a:t>
+            </a:r>
+          </a:p>
+          <a:p>
+            <a:r>
+              <a:t>Must produce: a reflection plus a record of feedback sought and the response/change made.</a:t>
+            </a:r>
+          </a:p>
+          <a:p>
+            <a:r>
+              <a:t>Timing: ~15 min. Where they get stuck: reflections that are just summaries — prompt "what would</a:t>
+            </a:r>
+          </a:p>
+          <a:p>
+            <a:r>
+              <a:t>you change?"; or "responding to feedback" with no actual change — the change IS the assessed part.</a:t>
+            </a:r>
+          </a:p>
+          <a:p>
+            <a:r>
+              <a:t>Share-back prompt: one honest "what I'd do differently" from the room.</a:t>
+            </a:r>
+          </a:p>
+          <a:p>
+            <a:r>
+              <a:t>No-leakage note: practice reflection on the Ledgerline engagement; AT2 assesses the same</a:t>
+            </a:r>
+          </a:p>
+          <a:p>
+            <a:r>
+              <a:t>reflect-and-respond on the LMS work — comparable, not identical.</a:t>
+            </a:r>
+          </a:p>
+        </p:txBody>
+      </p:sp>
+      <p:sp>
+        <p:nvSpPr>
+          <p:cNvPr id="4" name="Slide Number Placeholder 3"/>
+          <p:cNvSpPr>
+            <a:spLocks noGrp="1"/>
+          </p:cNvSpPr>
+          <p:nvPr>
+            <p:ph type="sldNum" idx="5" sz="quarter"/>
+          </p:nvPr>
+        </p:nvSpPr>
+        <p:spPr/>
+      </p:sp>
+    </p:spTree>
+  </p:cSld>
+  <p:clrMapOvr>
+    <a:masterClrMapping/>
+  </p:clrMapOvr>
+</p:notes>
+</file>
+
+<file path=ppt/notesSlides/notesSlide2.xml><?xml version="1.0" encoding="utf-8"?>
+<p:notes xmlns:a="http://schemas.openxmlformats.org/drawingml/2006/main" xmlns:p="http://schemas.openxmlformats.org/presentationml/2006/main" xmlns:r="http://schemas.openxmlformats.org/officeDocument/2006/relationships">
+  <p:cSld>
+    <p:spTree>
+      <p:nvGrpSpPr>
+        <p:cNvPr id="1" name=""/>
+        <p:cNvGrpSpPr/>
+        <p:nvPr/>
+      </p:nvGrpSpPr>
+      <p:grpSpPr>
+        <a:xfrm>
+          <a:off x="0" y="0"/>
+          <a:ext cx="0" cy="0"/>
+          <a:chOff x="0" y="0"/>
+          <a:chExt cx="0" cy="0"/>
+        </a:xfrm>
+      </p:grpSpPr>
+      <p:sp>
+        <p:nvSpPr>
+          <p:cNvPr id="2" name="Slide Image Placeholder 1"/>
+          <p:cNvSpPr>
+            <a:spLocks noGrp="1"/>
+          </p:cNvSpPr>
+          <p:nvPr>
+            <p:ph type="sldImg" idx="2"/>
+          </p:nvPr>
+        </p:nvSpPr>
+        <p:spPr/>
+      </p:sp>
+      <p:sp>
+        <p:nvSpPr>
+          <p:cNvPr id="3" name="Notes Placeholder 2"/>
+          <p:cNvSpPr>
+            <a:spLocks noGrp="1"/>
+          </p:cNvSpPr>
+          <p:nvPr>
+            <p:ph type="body" idx="3" sz="quarter"/>
+          </p:nvPr>
+        </p:nvSpPr>
+        <p:spPr/>
+        <p:txBody>
+          <a:bodyPr/>
+          <a:lstStyle/>
+          <a:p>
+            <a:r>
+              <a:t>The primer on traceable evidence — teach this before they touch the filing. Sets the bar for C1.</a:t>
+            </a:r>
+          </a:p>
+          <a:p>
+            <a:r>
+              <a:t>• Walk it: good evidence is named, dated, and shows the Region and identity it was taken under.</a:t>
+            </a:r>
+          </a:p>
+          <a:p>
+            <a:r>
+              <a:t>• The load-bearing line: it's organised and referenceable — a reader can find the exact item the</a:t>
+            </a:r>
+          </a:p>
+          <a:p>
+            <a:r>
+              <a:t>  narrative cites.</a:t>
+            </a:r>
+          </a:p>
+          <a:p>
+            <a:r>
+              <a:t>• Give the counter-example: an unplaceable screenshot, or an export with no label, proves nothing.</a:t>
+            </a:r>
+          </a:p>
+          <a:p>
+            <a:r>
+              <a:t>Misconception to pre-empt: "a screenshot is evidence." Only if it's placeable — an image with no</a:t>
+            </a:r>
+          </a:p>
+          <a:p>
+            <a:r>
+              <a:t>label, date or context is not evidence an auditor can use.</a:t>
+            </a:r>
+          </a:p>
+          <a:p>
+            <a:r>
+              <a:t>Question to pose: "If I hand you a folder of 40 unnamed screenshots, can you prove the database is</a:t>
+            </a:r>
+          </a:p>
+          <a:p>
+            <a:r>
+              <a:t>encrypted? What would each one need on it to count?"</a:t>
+            </a:r>
+          </a:p>
+          <a:p>
+            <a:r>
+              <a:t>UoC/AT2 tie: ICTCLD401 PC 4.3 (save/store documentation per organisational policy); this is the</a:t>
+            </a:r>
+          </a:p>
+          <a:p>
+            <a:r>
+              <a:t>standard C1 organises evidence to meet.</a:t>
+            </a:r>
+          </a:p>
+        </p:txBody>
+      </p:sp>
+      <p:sp>
+        <p:nvSpPr>
+          <p:cNvPr id="4" name="Slide Number Placeholder 3"/>
+          <p:cNvSpPr>
+            <a:spLocks noGrp="1"/>
+          </p:cNvSpPr>
+          <p:nvPr>
+            <p:ph type="sldNum" idx="5" sz="quarter"/>
+          </p:nvPr>
+        </p:nvSpPr>
+        <p:spPr/>
+      </p:sp>
+    </p:spTree>
+  </p:cSld>
+  <p:clrMapOvr>
+    <a:masterClrMapping/>
+  </p:clrMapOvr>
+</p:notes>
+</file>
+
+<file path=ppt/notesSlides/notesSlide3.xml><?xml version="1.0" encoding="utf-8"?>
+<p:notes xmlns:a="http://schemas.openxmlformats.org/drawingml/2006/main" xmlns:p="http://schemas.openxmlformats.org/presentationml/2006/main" xmlns:r="http://schemas.openxmlformats.org/officeDocument/2006/relationships">
+  <p:cSld>
+    <p:spTree>
+      <p:nvGrpSpPr>
+        <p:cNvPr id="1" name=""/>
+        <p:cNvGrpSpPr/>
+        <p:nvPr/>
+      </p:nvGrpSpPr>
+      <p:grpSpPr>
+        <a:xfrm>
+          <a:off x="0" y="0"/>
+          <a:ext cx="0" cy="0"/>
+          <a:chOff x="0" y="0"/>
+          <a:chExt cx="0" cy="0"/>
+        </a:xfrm>
+      </p:grpSpPr>
+      <p:sp>
+        <p:nvSpPr>
+          <p:cNvPr id="2" name="Slide Image Placeholder 1"/>
+          <p:cNvSpPr>
+            <a:spLocks noGrp="1"/>
+          </p:cNvSpPr>
+          <p:nvPr>
+            <p:ph type="sldImg" idx="2"/>
+          </p:nvPr>
+        </p:nvSpPr>
+        <p:spPr/>
+      </p:sp>
+      <p:sp>
+        <p:nvSpPr>
+          <p:cNvPr id="3" name="Notes Placeholder 2"/>
+          <p:cNvSpPr>
+            <a:spLocks noGrp="1"/>
+          </p:cNvSpPr>
+          <p:nvPr>
+            <p:ph type="body" idx="3" sz="quarter"/>
+          </p:nvPr>
+        </p:nvSpPr>
+        <p:spPr/>
+        <p:txBody>
+          <a:bodyPr/>
+          <a:lstStyle/>
+          <a:p>
+            <a:r>
+              <a:t>The filing system — the three homes for evidence. Keep it crisp; the point is knowing what goes</a:t>
+            </a:r>
+          </a:p>
+          <a:p>
+            <a:r>
+              <a:t>where.</a:t>
+            </a:r>
+          </a:p>
+          <a:p>
+            <a:r>
+              <a:t>• A = build screenshots (the named captures taken as they built each tier). B = configuration</a:t>
+            </a:r>
+          </a:p>
+          <a:p>
+            <a:r>
+              <a:t>  exports (the settings — security-group rules, RDS config). C = test &amp; validation evidence</a:t>
+            </a:r>
+          </a:p>
+          <a:p>
+            <a:r>
+              <a:t>  (connectivity, scaling, recovery-objective results).</a:t>
+            </a:r>
+          </a:p>
+          <a:p>
+            <a:r>
+              <a:t>• The load-bearing line: label and number EVERY item so §4–§6 can cross-reference it.</a:t>
+            </a:r>
+          </a:p>
+          <a:p>
+            <a:r>
+              <a:t>Misconception to pre-empt: students dump everything into one pile / one appendix. The A/B/C split</a:t>
+            </a:r>
+          </a:p>
+          <a:p>
+            <a:r>
+              <a:t>is what makes the report navigable — a reader jumps straight to the right kind of evidence.</a:t>
+            </a:r>
+          </a:p>
+          <a:p>
+            <a:r>
+              <a:t>Question to pose (fire three quick): "A security-group rule export — which appendix? A screenshot</a:t>
+            </a:r>
+          </a:p>
+          <a:p>
+            <a:r>
+              <a:t>of the instance running? A failover test result?" (B, A, C).</a:t>
+            </a:r>
+          </a:p>
+          <a:p>
+            <a:r>
+              <a:t>UoC/AT2 tie: PE 1 · PE 2 — the built artefacts are the evidence, assembled here; Appendices A/B/C</a:t>
+            </a:r>
+          </a:p>
+          <a:p>
+            <a:r>
+              <a:t>are the evidence home in the AT2 report.</a:t>
+            </a:r>
+          </a:p>
+        </p:txBody>
+      </p:sp>
+      <p:sp>
+        <p:nvSpPr>
+          <p:cNvPr id="4" name="Slide Number Placeholder 3"/>
+          <p:cNvSpPr>
+            <a:spLocks noGrp="1"/>
+          </p:cNvSpPr>
+          <p:nvPr>
+            <p:ph type="sldNum" idx="5" sz="quarter"/>
+          </p:nvPr>
+        </p:nvSpPr>
+        <p:spPr/>
+      </p:sp>
+    </p:spTree>
+  </p:cSld>
+  <p:clrMapOvr>
+    <a:masterClrMapping/>
+  </p:clrMapOvr>
+</p:notes>
+</file>
+
+<file path=ppt/notesSlides/notesSlide4.xml><?xml version="1.0" encoding="utf-8"?>
+<p:notes xmlns:a="http://schemas.openxmlformats.org/drawingml/2006/main" xmlns:p="http://schemas.openxmlformats.org/presentationml/2006/main" xmlns:r="http://schemas.openxmlformats.org/officeDocument/2006/relationships">
+  <p:cSld>
+    <p:spTree>
+      <p:nvGrpSpPr>
+        <p:cNvPr id="1" name=""/>
+        <p:cNvGrpSpPr/>
+        <p:nvPr/>
+      </p:nvGrpSpPr>
+      <p:grpSpPr>
+        <a:xfrm>
+          <a:off x="0" y="0"/>
+          <a:ext cx="0" cy="0"/>
+          <a:chOff x="0" y="0"/>
+          <a:chExt cx="0" cy="0"/>
+        </a:xfrm>
+      </p:grpSpPr>
+      <p:sp>
+        <p:nvSpPr>
+          <p:cNvPr id="2" name="Slide Image Placeholder 1"/>
+          <p:cNvSpPr>
+            <a:spLocks noGrp="1"/>
+          </p:cNvSpPr>
+          <p:nvPr>
+            <p:ph type="sldImg" idx="2"/>
+          </p:nvPr>
+        </p:nvSpPr>
+        <p:spPr/>
+      </p:sp>
+      <p:sp>
+        <p:nvSpPr>
+          <p:cNvPr id="3" name="Notes Placeholder 2"/>
+          <p:cNvSpPr>
+            <a:spLocks noGrp="1"/>
+          </p:cNvSpPr>
+          <p:nvPr>
+            <p:ph type="body" idx="3" sz="quarter"/>
+          </p:nvPr>
+        </p:nvSpPr>
+        <p:spPr/>
+        <p:txBody>
+          <a:bodyPr/>
+          <a:lstStyle/>
+          <a:p>
+            <a:r>
+              <a:t>The how-to just before the activity — the concrete steps, and the one time-critical warning.</a:t>
+            </a:r>
+          </a:p>
+          <a:p>
+            <a:r>
+              <a:t>• Gather every screenshot, export and test result captured across Topics 6–9.</a:t>
+            </a:r>
+          </a:p>
+          <a:p>
+            <a:r>
+              <a:t>• Sort into A / B / C; give each item a clear label and number.</a:t>
+            </a:r>
+          </a:p>
+          <a:p>
+            <a:r>
+              <a:t>• The accent line: note any gaps — and recapture WHILE THE LAB IS STILL STANDING.</a:t>
+            </a:r>
+          </a:p>
+          <a:p>
+            <a:r>
+              <a:t>Misconception to pre-empt: "I'll recapture it later." The lab is ephemeral — once it's torn down</a:t>
+            </a:r>
+          </a:p>
+          <a:p>
+            <a:r>
+              <a:t>the evidence is gone for good; recapture now, not next week.</a:t>
+            </a:r>
+          </a:p>
+          <a:p>
+            <a:r>
+              <a:t>Question to pose: "What's the one thing you can do today that you can't do after the lab closes?"</a:t>
+            </a:r>
+          </a:p>
+          <a:p>
+            <a:r>
+              <a:t>(recapture missing evidence).</a:t>
+            </a:r>
+          </a:p>
+          <a:p>
+            <a:r>
+              <a:t>UoC/AT2 tie: PC 4.3; this frames the Build-your-appendices activity that follows.</a:t>
+            </a:r>
+          </a:p>
+        </p:txBody>
+      </p:sp>
+      <p:sp>
+        <p:nvSpPr>
+          <p:cNvPr id="4" name="Slide Number Placeholder 3"/>
+          <p:cNvSpPr>
+            <a:spLocks noGrp="1"/>
+          </p:cNvSpPr>
+          <p:nvPr>
+            <p:ph type="sldNum" idx="5" sz="quarter"/>
+          </p:nvPr>
+        </p:nvSpPr>
+        <p:spPr/>
+      </p:sp>
+    </p:spTree>
+  </p:cSld>
+  <p:clrMapOvr>
+    <a:masterClrMapping/>
+  </p:clrMapOvr>
+</p:notes>
+</file>
+
+<file path=ppt/notesSlides/notesSlide5.xml><?xml version="1.0" encoding="utf-8"?>
+<p:notes xmlns:a="http://schemas.openxmlformats.org/drawingml/2006/main" xmlns:p="http://schemas.openxmlformats.org/presentationml/2006/main" xmlns:r="http://schemas.openxmlformats.org/officeDocument/2006/relationships">
+  <p:cSld>
+    <p:spTree>
+      <p:nvGrpSpPr>
+        <p:cNvPr id="1" name=""/>
+        <p:cNvGrpSpPr/>
+        <p:nvPr/>
+      </p:nvGrpSpPr>
+      <p:grpSpPr>
+        <a:xfrm>
+          <a:off x="0" y="0"/>
+          <a:ext cx="0" cy="0"/>
+          <a:chOff x="0" y="0"/>
+          <a:chExt cx="0" cy="0"/>
+        </a:xfrm>
+      </p:grpSpPr>
+      <p:sp>
+        <p:nvSpPr>
+          <p:cNvPr id="2" name="Slide Image Placeholder 1"/>
+          <p:cNvSpPr>
+            <a:spLocks noGrp="1"/>
+          </p:cNvSpPr>
+          <p:nvPr>
+            <p:ph type="sldImg" idx="2"/>
+          </p:nvPr>
+        </p:nvSpPr>
+        <p:spPr/>
+      </p:sp>
+      <p:sp>
+        <p:nvSpPr>
+          <p:cNvPr id="3" name="Notes Placeholder 2"/>
+          <p:cNvSpPr>
+            <a:spLocks noGrp="1"/>
+          </p:cNvSpPr>
+          <p:nvPr>
+            <p:ph type="body" idx="3" sz="quarter"/>
+          </p:nvPr>
+        </p:nvSpPr>
+        <p:spPr/>
+        <p:txBody>
+          <a:bodyPr/>
+          <a:lstStyle/>
+          <a:p>
+            <a:r>
+              <a:t>Facilitation — a filing/organising task, not a lecture. They've been capturing since Topic 6; now</a:t>
+            </a:r>
+          </a:p>
+          <a:p>
+            <a:r>
+              <a:t>they assemble it.</a:t>
+            </a:r>
+          </a:p>
+          <a:p>
+            <a:r>
+              <a:t>Tell students: "You've been capturing evidence since Topic 6 — now assemble it. Sort everything</a:t>
+            </a:r>
+          </a:p>
+          <a:p>
+            <a:r>
+              <a:t>into three appendices: screenshots, config exports, test evidence. Label and number every item so</a:t>
+            </a:r>
+          </a:p>
+          <a:p>
+            <a:r>
+              <a:t>your report can cite it. Flag anything missing and recapture it now, while the lab is up."</a:t>
+            </a:r>
+          </a:p>
+          <a:p>
+            <a:r>
+              <a:t>Steps (put on the board):</a:t>
+            </a:r>
+          </a:p>
+          <a:p>
+            <a:r>
+              <a:t>1. Gather all screenshots, exports and test results from Topics 6–9.</a:t>
+            </a:r>
+          </a:p>
+          <a:p>
+            <a:r>
+              <a:t>2. Sort into A (screenshots) / B (config exports) / C (test evidence).</a:t>
+            </a:r>
+          </a:p>
+          <a:p>
+            <a:r>
+              <a:t>3. Label and number each item.</a:t>
+            </a:r>
+          </a:p>
+          <a:p>
+            <a:r>
+              <a:t>4. List any gaps — and recapture them immediately.</a:t>
+            </a:r>
+          </a:p>
+          <a:p>
+            <a:r>
+              <a:t>Must produce: three organised appendices, every item labelled and numbered, gaps recaptured.</a:t>
+            </a:r>
+          </a:p>
+          <a:p>
+            <a:r>
+              <a:t>Timing: ~20 min. Where they get stuck: they discover they never captured something — that's the</a:t>
+            </a:r>
+          </a:p>
+          <a:p>
+            <a:r>
+              <a:t>point, not a failure; have them recapture live from the standing lab, don't let them fabricate it.</a:t>
+            </a:r>
+          </a:p>
+          <a:p>
+            <a:r>
+              <a:t>Share-back prompt: "What gap did you find — and could you still recapture it?"</a:t>
+            </a:r>
+          </a:p>
+          <a:p>
+            <a:r>
+              <a:t>No-leakage note: this is the PRACTICE engagement (Ledgerline); AT2 assembles the same appendices</a:t>
+            </a:r>
+          </a:p>
+          <a:p>
+            <a:r>
+              <a:t>for the assessed system (LMS) — comparable, not identical.</a:t>
+            </a:r>
+          </a:p>
+        </p:txBody>
+      </p:sp>
+      <p:sp>
+        <p:nvSpPr>
+          <p:cNvPr id="4" name="Slide Number Placeholder 3"/>
+          <p:cNvSpPr>
+            <a:spLocks noGrp="1"/>
+          </p:cNvSpPr>
+          <p:nvPr>
+            <p:ph type="sldNum" idx="5" sz="quarter"/>
+          </p:nvPr>
+        </p:nvSpPr>
+        <p:spPr/>
+      </p:sp>
+    </p:spTree>
+  </p:cSld>
+  <p:clrMapOvr>
+    <a:masterClrMapping/>
+  </p:clrMapOvr>
+</p:notes>
+</file>
+
+<file path=ppt/notesSlides/notesSlide6.xml><?xml version="1.0" encoding="utf-8"?>
+<p:notes xmlns:a="http://schemas.openxmlformats.org/drawingml/2006/main" xmlns:p="http://schemas.openxmlformats.org/presentationml/2006/main" xmlns:r="http://schemas.openxmlformats.org/officeDocument/2006/relationships">
+  <p:cSld>
+    <p:spTree>
+      <p:nvGrpSpPr>
+        <p:cNvPr id="1" name=""/>
+        <p:cNvGrpSpPr/>
+        <p:nvPr/>
+      </p:nvGrpSpPr>
+      <p:grpSpPr>
+        <a:xfrm>
+          <a:off x="0" y="0"/>
+          <a:ext cx="0" cy="0"/>
+          <a:chOff x="0" y="0"/>
+          <a:chExt cx="0" cy="0"/>
+        </a:xfrm>
+      </p:grpSpPr>
+      <p:sp>
+        <p:nvSpPr>
+          <p:cNvPr id="2" name="Slide Image Placeholder 1"/>
+          <p:cNvSpPr>
+            <a:spLocks noGrp="1"/>
+          </p:cNvSpPr>
+          <p:nvPr>
+            <p:ph type="sldImg" idx="2"/>
+          </p:nvPr>
+        </p:nvSpPr>
+        <p:spPr/>
+      </p:sp>
+      <p:sp>
+        <p:nvSpPr>
+          <p:cNvPr id="3" name="Notes Placeholder 2"/>
+          <p:cNvSpPr>
+            <a:spLocks noGrp="1"/>
+          </p:cNvSpPr>
+          <p:nvPr>
+            <p:ph type="body" idx="3" sz="quarter"/>
+          </p:nvPr>
+        </p:nvSpPr>
+        <p:spPr/>
+        <p:txBody>
+          <a:bodyPr/>
+          <a:lstStyle/>
+          <a:p>
+            <a:r>
+              <a:t>Opens C2 — the audience question before the structure. Who the report is for decides how it's</a:t>
+            </a:r>
+          </a:p>
+          <a:p>
+            <a:r>
+              <a:t>written.</a:t>
+            </a:r>
+          </a:p>
+          <a:p>
+            <a:r>
+              <a:t>• The report is for the people who will run and audit the system: YAT ICT and auditors.</a:t>
+            </a:r>
+          </a:p>
+          <a:p>
+            <a:r>
+              <a:t>• The accent line: clear, factual, traceable — every claim backed by an appendix reference.</a:t>
+            </a:r>
+          </a:p>
+          <a:p>
+            <a:r>
+              <a:t>• It's a record of what was built and why — not a diary of your day.</a:t>
+            </a:r>
+          </a:p>
+          <a:p>
+            <a:r>
+              <a:t>Misconception to pre-empt: "write it for the marker" / "write down everything I did." No — write</a:t>
+            </a:r>
+          </a:p>
+          <a:p>
+            <a:r>
+              <a:t>for the operator and auditor; relevance and traceability, not a blow-by-blow of your afternoon.</a:t>
+            </a:r>
+          </a:p>
+          <a:p>
+            <a:r>
+              <a:t>Question to pose: "The person reading this has to run the system at 2am when an alarm fires — what</a:t>
+            </a:r>
+          </a:p>
+          <a:p>
+            <a:r>
+              <a:t>do they need from your report, and what don't they care about?"</a:t>
+            </a:r>
+          </a:p>
+          <a:p>
+            <a:r>
+              <a:t>UoC/AT2 tie: PC 4.1 (document and communicate work to required personnel) — the audience IS the</a:t>
+            </a:r>
+          </a:p>
+          <a:p>
+            <a:r>
+              <a:t>"required personnel."</a:t>
+            </a:r>
+          </a:p>
+        </p:txBody>
+      </p:sp>
+      <p:sp>
+        <p:nvSpPr>
+          <p:cNvPr id="4" name="Slide Number Placeholder 3"/>
+          <p:cNvSpPr>
+            <a:spLocks noGrp="1"/>
+          </p:cNvSpPr>
+          <p:nvPr>
+            <p:ph type="sldNum" idx="5" sz="quarter"/>
+          </p:nvPr>
+        </p:nvSpPr>
+        <p:spPr/>
+      </p:sp>
+    </p:spTree>
+  </p:cSld>
+  <p:clrMapOvr>
+    <a:masterClrMapping/>
+  </p:clrMapOvr>
+</p:notes>
+</file>
+
+<file path=ppt/notesSlides/notesSlide7.xml><?xml version="1.0" encoding="utf-8"?>
+<p:notes xmlns:a="http://schemas.openxmlformats.org/drawingml/2006/main" xmlns:p="http://schemas.openxmlformats.org/presentationml/2006/main" xmlns:r="http://schemas.openxmlformats.org/officeDocument/2006/relationships">
+  <p:cSld>
+    <p:spTree>
+      <p:nvGrpSpPr>
+        <p:cNvPr id="1" name=""/>
+        <p:cNvGrpSpPr/>
+        <p:nvPr/>
+      </p:nvGrpSpPr>
+      <p:grpSpPr>
+        <a:xfrm>
+          <a:off x="0" y="0"/>
+          <a:ext cx="0" cy="0"/>
+          <a:chOff x="0" y="0"/>
+          <a:chExt cx="0" cy="0"/>
+        </a:xfrm>
+      </p:grpSpPr>
+      <p:sp>
+        <p:nvSpPr>
+          <p:cNvPr id="2" name="Slide Image Placeholder 1"/>
+          <p:cNvSpPr>
+            <a:spLocks noGrp="1"/>
+          </p:cNvSpPr>
+          <p:nvPr>
+            <p:ph type="sldImg" idx="2"/>
+          </p:nvPr>
+        </p:nvSpPr>
+        <p:spPr/>
+      </p:sp>
+      <p:sp>
+        <p:nvSpPr>
+          <p:cNvPr id="3" name="Notes Placeholder 2"/>
+          <p:cNvSpPr>
+            <a:spLocks noGrp="1"/>
+          </p:cNvSpPr>
+          <p:nvPr>
+            <p:ph type="body" idx="3" sz="quarter"/>
+          </p:nvPr>
+        </p:nvSpPr>
+        <p:spPr/>
+        <p:txBody>
+          <a:bodyPr/>
+          <a:lstStyle/>
+          <a:p>
+            <a:r>
+              <a:t>The template — the map of the seven sections. They write TO this; they don't invent structure.</a:t>
+            </a:r>
+          </a:p>
+          <a:p>
+            <a:r>
+              <a:t>• Read the sections: §1 Exec Summary · §2 Context · §3 Scope · §4 Build/Change Narrative ·</a:t>
+            </a:r>
+          </a:p>
+          <a:p>
+            <a:r>
+              <a:t>  §5 Configuration Decisions · §6 Testing/Validation · §7 Operational Handover.</a:t>
+            </a:r>
+          </a:p>
+          <a:p>
+            <a:r>
+              <a:t>• Appendices A/B/C are referenced throughout — the structure and the evidence interlock.</a:t>
+            </a:r>
+          </a:p>
+          <a:p>
+            <a:r>
+              <a:t>• The point: same professional-writing discipline as AT1's Business Case, new document — the</a:t>
+            </a:r>
+          </a:p>
+          <a:p>
+            <a:r>
+              <a:t>  assessor exemplar sets the standard.</a:t>
+            </a:r>
+          </a:p>
+          <a:p>
+            <a:r>
+              <a:t>Misconception to pre-empt: "I'll organise it my own way." No — the template IS the standard; a</a:t>
+            </a:r>
+          </a:p>
+          <a:p>
+            <a:r>
+              <a:t>report that doesn't follow it costs marks and confuses the reader.</a:t>
+            </a:r>
+          </a:p>
+          <a:p>
+            <a:r>
+              <a:t>Question to pose: "Which of these sections are you writing fresh today, and which are you dropping</a:t>
+            </a:r>
+          </a:p>
+          <a:p>
+            <a:r>
+              <a:t>in from work you already did?" (§5/§6 come from Topic 9 — leads to the next slides).</a:t>
+            </a:r>
+          </a:p>
+          <a:p>
+            <a:r>
+              <a:t>UoC/AT2 tie: PC 4.1; §1–§7 + Appendices A/B/C is the AT2 marking home — every criterion lives in it.</a:t>
+            </a:r>
+          </a:p>
+        </p:txBody>
+      </p:sp>
+      <p:sp>
+        <p:nvSpPr>
+          <p:cNvPr id="4" name="Slide Number Placeholder 3"/>
+          <p:cNvSpPr>
+            <a:spLocks noGrp="1"/>
+          </p:cNvSpPr>
+          <p:nvPr>
+            <p:ph type="sldNum" idx="5" sz="quarter"/>
+          </p:nvPr>
+        </p:nvSpPr>
+        <p:spPr/>
+      </p:sp>
+    </p:spTree>
+  </p:cSld>
+  <p:clrMapOvr>
+    <a:masterClrMapping/>
+  </p:clrMapOvr>
+</p:notes>
+</file>
+
+<file path=ppt/notesSlides/notesSlide8.xml><?xml version="1.0" encoding="utf-8"?>
+<p:notes xmlns:a="http://schemas.openxmlformats.org/drawingml/2006/main" xmlns:p="http://schemas.openxmlformats.org/presentationml/2006/main" xmlns:r="http://schemas.openxmlformats.org/officeDocument/2006/relationships">
+  <p:cSld>
+    <p:spTree>
+      <p:nvGrpSpPr>
+        <p:cNvPr id="1" name=""/>
+        <p:cNvGrpSpPr/>
+        <p:nvPr/>
+      </p:nvGrpSpPr>
+      <p:grpSpPr>
+        <a:xfrm>
+          <a:off x="0" y="0"/>
+          <a:ext cx="0" cy="0"/>
+          <a:chOff x="0" y="0"/>
+          <a:chExt cx="0" cy="0"/>
+        </a:xfrm>
+      </p:grpSpPr>
+      <p:sp>
+        <p:nvSpPr>
+          <p:cNvPr id="2" name="Slide Image Placeholder 1"/>
+          <p:cNvSpPr>
+            <a:spLocks noGrp="1"/>
+          </p:cNvSpPr>
+          <p:nvPr>
+            <p:ph type="sldImg" idx="2"/>
+          </p:nvPr>
+        </p:nvSpPr>
+        <p:spPr/>
+      </p:sp>
+      <p:sp>
+        <p:nvSpPr>
+          <p:cNvPr id="3" name="Notes Placeholder 2"/>
+          <p:cNvSpPr>
+            <a:spLocks noGrp="1"/>
+          </p:cNvSpPr>
+          <p:nvPr>
+            <p:ph type="body" idx="3" sz="quarter"/>
+          </p:nvPr>
+        </p:nvSpPr>
+        <p:spPr/>
+        <p:txBody>
+          <a:bodyPr/>
+          <a:lstStyle/>
+          <a:p>
+            <a:r>
+              <a:t>The biggest writing section — teach it as a factual, ordered record, not a story.</a:t>
+            </a:r>
+          </a:p>
+          <a:p>
+            <a:r>
+              <a:t>• Walk the tier order: foundation → network → compute → elasticity → database → storage →</a:t>
+            </a:r>
+          </a:p>
+          <a:p>
+            <a:r>
+              <a:t>  monitoring. That order is the spine of §4.</a:t>
+            </a:r>
+          </a:p>
+          <a:p>
+            <a:r>
+              <a:t>• For each tier: state what you built and what changed from the baseline design.</a:t>
+            </a:r>
+          </a:p>
+          <a:p>
+            <a:r>
+              <a:t>• The accent line: cross-reference the Appendix A screenshots and Appendix B exports that prove it.</a:t>
+            </a:r>
+          </a:p>
+          <a:p>
+            <a:r>
+              <a:t>• Factual and specific — not "I set up the server", but what, where, and with which settings.</a:t>
+            </a:r>
+          </a:p>
+          <a:p>
+            <a:r>
+              <a:t>Misconception to pre-empt: "the narrative is the story of my day." No — it's a factual tier-by-tier</a:t>
+            </a:r>
+          </a:p>
+          <a:p>
+            <a:r>
+              <a:t>record, and every claim is cross-referenced to evidence.</a:t>
+            </a:r>
+          </a:p>
+          <a:p>
+            <a:r>
+              <a:t>Question to pose: "'I configured the database.' What three things does an auditor still not know</a:t>
+            </a:r>
+          </a:p>
+          <a:p>
+            <a:r>
+              <a:t>from that sentence?" (which engine, what settings, where's the proof).</a:t>
+            </a:r>
+          </a:p>
+          <a:p>
+            <a:r>
+              <a:t>UoC/AT2 tie: PC 4.1; §4 is the A-build criterion in AT2 — the written proof of what was built.</a:t>
+            </a:r>
+          </a:p>
+        </p:txBody>
+      </p:sp>
+      <p:sp>
+        <p:nvSpPr>
+          <p:cNvPr id="4" name="Slide Number Placeholder 3"/>
+          <p:cNvSpPr>
+            <a:spLocks noGrp="1"/>
+          </p:cNvSpPr>
+          <p:nvPr>
+            <p:ph type="sldNum" idx="5" sz="quarter"/>
+          </p:nvPr>
+        </p:nvSpPr>
+        <p:spPr/>
+      </p:sp>
+    </p:spTree>
+  </p:cSld>
+  <p:clrMapOvr>
+    <a:masterClrMapping/>
+  </p:clrMapOvr>
+</p:notes>
+</file>
+
+<file path=ppt/notesSlides/notesSlide9.xml><?xml version="1.0" encoding="utf-8"?>
+<p:notes xmlns:a="http://schemas.openxmlformats.org/drawingml/2006/main" xmlns:p="http://schemas.openxmlformats.org/presentationml/2006/main" xmlns:r="http://schemas.openxmlformats.org/officeDocument/2006/relationships">
+  <p:cSld>
+    <p:spTree>
+      <p:nvGrpSpPr>
+        <p:cNvPr id="1" name=""/>
+        <p:cNvGrpSpPr/>
+        <p:nvPr/>
+      </p:nvGrpSpPr>
+      <p:grpSpPr>
+        <a:xfrm>
+          <a:off x="0" y="0"/>
+          <a:ext cx="0" cy="0"/>
+          <a:chOff x="0" y="0"/>
+          <a:chExt cx="0" cy="0"/>
+        </a:xfrm>
+      </p:grpSpPr>
+      <p:sp>
+        <p:nvSpPr>
+          <p:cNvPr id="2" name="Slide Image Placeholder 1"/>
+          <p:cNvSpPr>
+            <a:spLocks noGrp="1"/>
+          </p:cNvSpPr>
+          <p:nvPr>
+            <p:ph type="sldImg" idx="2"/>
+          </p:nvPr>
+        </p:nvSpPr>
+        <p:spPr/>
+      </p:sp>
+      <p:sp>
+        <p:nvSpPr>
+          <p:cNvPr id="3" name="Notes Placeholder 2"/>
+          <p:cNvSpPr>
+            <a:spLocks noGrp="1"/>
+          </p:cNvSpPr>
+          <p:nvPr>
+            <p:ph type="body" idx="3" sz="quarter"/>
+          </p:nvPr>
+        </p:nvSpPr>
+        <p:spPr/>
+        <p:txBody>
+          <a:bodyPr/>
+          <a:lstStyle/>
+          <a:p>
+            <a:r>
+              <a:t>The payoff of C2 — the least NEW writing, the most marks. Their Topic 9 work lands straight here.</a:t>
+            </a:r>
+          </a:p>
+          <a:p>
+            <a:r>
+              <a:t>• §5 Configuration Decisions = the Topic 9 C1–C8 justifications — drop in the rationales already</a:t>
+            </a:r>
+          </a:p>
+          <a:p>
+            <a:r>
+              <a:t>  written.</a:t>
+            </a:r>
+          </a:p>
+          <a:p>
+            <a:r>
+              <a:t>• The accent line: §6 Testing/Validation = the Topic 9 validation results, each referencing</a:t>
+            </a:r>
+          </a:p>
+          <a:p>
+            <a:r>
+              <a:t>  Appendix C.</a:t>
+            </a:r>
+          </a:p>
+          <a:p>
+            <a:r>
+              <a:t>• The point: this is where the marked judgement (justify) and the evidence of a working build come</a:t>
+            </a:r>
+          </a:p>
+          <a:p>
+            <a:r>
+              <a:t>  together in one place.</a:t>
+            </a:r>
+          </a:p>
+          <a:p>
+            <a:r>
+              <a:t>Misconception to pre-empt: "I have to write §5 and §6 from scratch." No — they wrote these in</a:t>
+            </a:r>
+          </a:p>
+          <a:p>
+            <a:r>
+              <a:t>Topic 9; this is assembling and cross-referencing, not re-authoring.</a:t>
+            </a:r>
+          </a:p>
+          <a:p>
+            <a:r>
+              <a:t>Question to pose: "Your Topic 9 justification for the managed database — which section does it go</a:t>
+            </a:r>
+          </a:p>
+          <a:p>
+            <a:r>
+              <a:t>in, and what appendix backs the testing beside it?" (§5; and §6 references Appendix C).</a:t>
+            </a:r>
+          </a:p>
+          <a:p>
+            <a:r>
+              <a:t>UoC/AT2 tie: PC 4.1; §5 = the A4 criterion, §6 = A-build in AT2.</a:t>
+            </a:r>
+          </a:p>
+        </p:txBody>
+      </p:sp>
+      <p:sp>
+        <p:nvSpPr>
+          <p:cNvPr id="4" name="Slide Number Placeholder 3"/>
+          <p:cNvSpPr>
+            <a:spLocks noGrp="1"/>
+          </p:cNvSpPr>
+          <p:nvPr>
+            <p:ph type="sldNum" idx="5" sz="quarter"/>
+          </p:nvPr>
+        </p:nvSpPr>
+        <p:spPr/>
+      </p:sp>
+    </p:spTree>
+  </p:cSld>
+  <p:clrMapOvr>
+    <a:masterClrMapping/>
+  </p:clrMapOvr>
+</p:notes>
 </file>
 
 <file path=ppt/slideLayouts/slideLayout1.xml><?xml version="1.0" encoding="utf-8"?>
@@ -13366,4 +15621,324 @@
   </a:objectDefaults>
   <a:extraClrSchemeLst/>
 </a:theme>
+</file>
+
+<file path=ppt/theme/theme2.xml><?xml version="1.0" encoding="utf-8"?>
+<a:theme xmlns:a="http://schemas.openxmlformats.org/drawingml/2006/main" name="Office Theme">
+  <a:themeElements>
+    <a:clrScheme name="Office">
+      <a:dk1>
+        <a:sysClr val="windowText" lastClr="000000"/>
+      </a:dk1>
+      <a:lt1>
+        <a:sysClr val="window" lastClr="FFFFFF"/>
+      </a:lt1>
+      <a:dk2>
+        <a:srgbClr val="1F497D"/>
+      </a:dk2>
+      <a:lt2>
+        <a:srgbClr val="EEECE1"/>
+      </a:lt2>
+      <a:accent1>
+        <a:srgbClr val="4F81BD"/>
+      </a:accent1>
+      <a:accent2>
+        <a:srgbClr val="C0504D"/>
+      </a:accent2>
+      <a:accent3>
+        <a:srgbClr val="9BBB59"/>
+      </a:accent3>
+      <a:accent4>
+        <a:srgbClr val="8064A2"/>
+      </a:accent4>
+      <a:accent5>
+        <a:srgbClr val="4BACC6"/>
+      </a:accent5>
+      <a:accent6>
+        <a:srgbClr val="F79646"/>
+      </a:accent6>
+      <a:hlink>
+        <a:srgbClr val="0000FF"/>
+      </a:hlink>
+      <a:folHlink>
+        <a:srgbClr val="800080"/>
+      </a:folHlink>
+    </a:clrScheme>
+    <a:fontScheme name="Office">
+      <a:majorFont>
+        <a:latin typeface="Calibri"/>
+        <a:ea typeface=""/>
+        <a:cs typeface=""/>
+        <a:font script="Jpan" typeface="ＭＳ Ｐゴシック"/>
+        <a:font script="Hang" typeface="맑은 고딕"/>
+        <a:font script="Hans" typeface="宋体"/>
+        <a:font script="Hant" typeface="新細明體"/>
+        <a:font script="Arab" typeface="Times New Roman"/>
+        <a:font script="Hebr" typeface="Times New Roman"/>
+        <a:font script="Thai" typeface="Angsana New"/>
+        <a:font script="Ethi" typeface="Nyala"/>
+        <a:font script="Beng" typeface="Vrinda"/>
+        <a:font script="Gujr" typeface="Shruti"/>
+        <a:font script="Khmr" typeface="MoolBoran"/>
+        <a:font script="Knda" typeface="Tunga"/>
+        <a:font script="Guru" typeface="Raavi"/>
+        <a:font script="Cans" typeface="Euphemia"/>
+        <a:font script="Cher" typeface="Plantagenet Cherokee"/>
+        <a:font script="Yiii" typeface="Microsoft Yi Baiti"/>
+        <a:font script="Tibt" typeface="Microsoft Himalaya"/>
+        <a:font script="Thaa" typeface="MV Boli"/>
+        <a:font script="Deva" typeface="Mangal"/>
+        <a:font script="Telu" typeface="Gautami"/>
+        <a:font script="Taml" typeface="Latha"/>
+        <a:font script="Syrc" typeface="Estrangelo Edessa"/>
+        <a:font script="Orya" typeface="Kalinga"/>
+        <a:font script="Mlym" typeface="Kartika"/>
+        <a:font script="Laoo" typeface="DokChampa"/>
+        <a:font script="Sinh" typeface="Iskoola Pota"/>
+        <a:font script="Mong" typeface="Mongolian Baiti"/>
+        <a:font script="Viet" typeface="Times New Roman"/>
+        <a:font script="Uigh" typeface="Microsoft Uighur"/>
+        <a:font script="Geor" typeface="Sylfaen"/>
+      </a:majorFont>
+      <a:minorFont>
+        <a:latin typeface="Calibri"/>
+        <a:ea typeface=""/>
+        <a:cs typeface=""/>
+        <a:font script="Jpan" typeface="ＭＳ Ｐゴシック"/>
+        <a:font script="Hang" typeface="맑은 고딕"/>
+        <a:font script="Hans" typeface="宋体"/>
+        <a:font script="Hant" typeface="新細明體"/>
+        <a:font script="Arab" typeface="Arial"/>
+        <a:font script="Hebr" typeface="Arial"/>
+        <a:font script="Thai" typeface="Cordia New"/>
+        <a:font script="Ethi" typeface="Nyala"/>
+        <a:font script="Beng" typeface="Vrinda"/>
+        <a:font script="Gujr" typeface="Shruti"/>
+        <a:font script="Khmr" typeface="DaunPenh"/>
+        <a:font script="Knda" typeface="Tunga"/>
+        <a:font script="Guru" typeface="Raavi"/>
+        <a:font script="Cans" typeface="Euphemia"/>
+        <a:font script="Cher" typeface="Plantagenet Cherokee"/>
+        <a:font script="Yiii" typeface="Microsoft Yi Baiti"/>
+        <a:font script="Tibt" typeface="Microsoft Himalaya"/>
+        <a:font script="Thaa" typeface="MV Boli"/>
+        <a:font script="Deva" typeface="Mangal"/>
+        <a:font script="Telu" typeface="Gautami"/>
+        <a:font script="Taml" typeface="Latha"/>
+        <a:font script="Syrc" typeface="Estrangelo Edessa"/>
+        <a:font script="Orya" typeface="Kalinga"/>
+        <a:font script="Mlym" typeface="Kartika"/>
+        <a:font script="Laoo" typeface="DokChampa"/>
+        <a:font script="Sinh" typeface="Iskoola Pota"/>
+        <a:font script="Mong" typeface="Mongolian Baiti"/>
+        <a:font script="Viet" typeface="Arial"/>
+        <a:font script="Uigh" typeface="Microsoft Uighur"/>
+        <a:font script="Geor" typeface="Sylfaen"/>
+      </a:minorFont>
+    </a:fontScheme>
+    <a:fmtScheme name="Office">
+      <a:fillStyleLst>
+        <a:solidFill>
+          <a:schemeClr val="phClr"/>
+        </a:solidFill>
+        <a:gradFill rotWithShape="1">
+          <a:gsLst>
+            <a:gs pos="0">
+              <a:schemeClr val="phClr">
+                <a:tint val="50000"/>
+                <a:satMod val="300000"/>
+              </a:schemeClr>
+            </a:gs>
+            <a:gs pos="35000">
+              <a:schemeClr val="phClr">
+                <a:tint val="37000"/>
+                <a:satMod val="300000"/>
+              </a:schemeClr>
+            </a:gs>
+            <a:gs pos="100000">
+              <a:schemeClr val="phClr">
+                <a:tint val="15000"/>
+                <a:satMod val="350000"/>
+              </a:schemeClr>
+            </a:gs>
+          </a:gsLst>
+          <a:lin ang="16200000" scaled="1"/>
+        </a:gradFill>
+        <a:gradFill rotWithShape="1">
+          <a:gsLst>
+            <a:gs pos="0">
+              <a:schemeClr val="phClr">
+                <a:tint val="100000"/>
+                <a:shade val="100000"/>
+                <a:satMod val="130000"/>
+              </a:schemeClr>
+            </a:gs>
+            <a:gs pos="100000">
+              <a:schemeClr val="phClr">
+                <a:tint val="50000"/>
+                <a:shade val="100000"/>
+                <a:satMod val="350000"/>
+              </a:schemeClr>
+            </a:gs>
+          </a:gsLst>
+          <a:lin ang="16200000" scaled="0"/>
+        </a:gradFill>
+      </a:fillStyleLst>
+      <a:lnStyleLst>
+        <a:ln w="9525" cap="flat" cmpd="sng" algn="ctr">
+          <a:solidFill>
+            <a:schemeClr val="phClr">
+              <a:shade val="95000"/>
+              <a:satMod val="105000"/>
+            </a:schemeClr>
+          </a:solidFill>
+          <a:prstDash val="solid"/>
+        </a:ln>
+        <a:ln w="25400" cap="flat" cmpd="sng" algn="ctr">
+          <a:solidFill>
+            <a:schemeClr val="phClr"/>
+          </a:solidFill>
+          <a:prstDash val="solid"/>
+        </a:ln>
+        <a:ln w="38100" cap="flat" cmpd="sng" algn="ctr">
+          <a:solidFill>
+            <a:schemeClr val="phClr"/>
+          </a:solidFill>
+          <a:prstDash val="solid"/>
+        </a:ln>
+      </a:lnStyleLst>
+      <a:effectStyleLst>
+        <a:effectStyle>
+          <a:effectLst>
+            <a:outerShdw blurRad="40000" dist="20000" dir="5400000" rotWithShape="0">
+              <a:srgbClr val="000000">
+                <a:alpha val="38000"/>
+              </a:srgbClr>
+            </a:outerShdw>
+          </a:effectLst>
+        </a:effectStyle>
+        <a:effectStyle>
+          <a:effectLst>
+            <a:outerShdw blurRad="40000" dist="23000" dir="5400000" rotWithShape="0">
+              <a:srgbClr val="000000">
+                <a:alpha val="35000"/>
+              </a:srgbClr>
+            </a:outerShdw>
+          </a:effectLst>
+        </a:effectStyle>
+        <a:effectStyle>
+          <a:effectLst>
+            <a:outerShdw blurRad="40000" dist="23000" dir="5400000" rotWithShape="0">
+              <a:srgbClr val="000000">
+                <a:alpha val="35000"/>
+              </a:srgbClr>
+            </a:outerShdw>
+          </a:effectLst>
+          <a:scene3d>
+            <a:camera prst="orthographicFront">
+              <a:rot lat="0" lon="0" rev="0"/>
+            </a:camera>
+            <a:lightRig rig="threePt" dir="t">
+              <a:rot lat="0" lon="0" rev="1200000"/>
+            </a:lightRig>
+          </a:scene3d>
+          <a:sp3d>
+            <a:bevelT w="63500" h="25400"/>
+          </a:sp3d>
+        </a:effectStyle>
+      </a:effectStyleLst>
+      <a:bgFillStyleLst>
+        <a:solidFill>
+          <a:schemeClr val="phClr"/>
+        </a:solidFill>
+        <a:gradFill rotWithShape="1">
+          <a:gsLst>
+            <a:gs pos="0">
+              <a:schemeClr val="phClr">
+                <a:tint val="40000"/>
+                <a:satMod val="350000"/>
+              </a:schemeClr>
+            </a:gs>
+            <a:gs pos="40000">
+              <a:schemeClr val="phClr">
+                <a:tint val="45000"/>
+                <a:shade val="99000"/>
+                <a:satMod val="350000"/>
+              </a:schemeClr>
+            </a:gs>
+            <a:gs pos="100000">
+              <a:schemeClr val="phClr">
+                <a:shade val="20000"/>
+                <a:satMod val="255000"/>
+              </a:schemeClr>
+            </a:gs>
+          </a:gsLst>
+          <a:path path="circle">
+            <a:fillToRect l="50000" t="-80000" r="50000" b="180000"/>
+          </a:path>
+        </a:gradFill>
+        <a:gradFill rotWithShape="1">
+          <a:gsLst>
+            <a:gs pos="0">
+              <a:schemeClr val="phClr">
+                <a:tint val="80000"/>
+                <a:satMod val="300000"/>
+              </a:schemeClr>
+            </a:gs>
+            <a:gs pos="100000">
+              <a:schemeClr val="phClr">
+                <a:shade val="30000"/>
+                <a:satMod val="200000"/>
+              </a:schemeClr>
+            </a:gs>
+          </a:gsLst>
+          <a:path path="circle">
+            <a:fillToRect l="50000" t="50000" r="50000" b="50000"/>
+          </a:path>
+        </a:gradFill>
+      </a:bgFillStyleLst>
+    </a:fmtScheme>
+  </a:themeElements>
+  <a:objectDefaults>
+    <a:spDef>
+      <a:spPr/>
+      <a:bodyPr/>
+      <a:lstStyle/>
+      <a:style>
+        <a:lnRef idx="1">
+          <a:schemeClr val="accent1"/>
+        </a:lnRef>
+        <a:fillRef idx="3">
+          <a:schemeClr val="accent1"/>
+        </a:fillRef>
+        <a:effectRef idx="2">
+          <a:schemeClr val="accent1"/>
+        </a:effectRef>
+        <a:fontRef idx="minor">
+          <a:schemeClr val="lt1"/>
+        </a:fontRef>
+      </a:style>
+    </a:spDef>
+    <a:lnDef>
+      <a:spPr/>
+      <a:bodyPr/>
+      <a:lstStyle/>
+      <a:style>
+        <a:lnRef idx="2">
+          <a:schemeClr val="accent1"/>
+        </a:lnRef>
+        <a:fillRef idx="0">
+          <a:schemeClr val="accent1"/>
+        </a:fillRef>
+        <a:effectRef idx="1">
+          <a:schemeClr val="accent1"/>
+        </a:effectRef>
+        <a:fontRef idx="minor">
+          <a:schemeClr val="tx1"/>
+        </a:fontRef>
+      </a:style>
+    </a:lnDef>
+  </a:objectDefaults>
+  <a:extraClrSchemeLst/>
+</a:theme>
 </file>
--- a/S1-CL1-Cloud-Design-Build/delivery/topic_10/Topic_10_Slides.pptx
+++ b/S1-CL1-Cloud-Design-Build/delivery/topic_10/Topic_10_Slides.pptx
@@ -540,7 +540,7 @@
           </a:p>
           <a:p>
             <a:r>
-              <a:t>  That report IS the AT2 deliverable; everything today assembles it.</a:t>
+              <a:t>That report IS the AT2 deliverable; everything today assembles it.</a:t>
             </a:r>
           </a:p>
           <a:p>
@@ -550,7 +550,7 @@
           </a:p>
           <a:p>
             <a:r>
-              <a:t>  team and auditors actually receive — the running system alone isn't the handover.</a:t>
+              <a:t>team and auditors actually receive — the running system alone isn't the handover.</a:t>
             </a:r>
           </a:p>
           <a:p>
@@ -560,7 +560,7 @@
           </a:p>
           <a:p>
             <a:r>
-              <a:t>  reflect. Each maps to a section today.</a:t>
+              <a:t>reflect. Each maps to a section today.</a:t>
             </a:r>
           </a:p>
           <a:p>
@@ -940,7 +940,7 @@
           </a:p>
           <a:p>
             <a:r>
-              <a:t>  storage/scaling/database options, cost models.</a:t>
+              <a:t>storage/scaling/database options, cost models.</a:t>
             </a:r>
           </a:p>
           <a:p>
@@ -950,7 +950,7 @@
           </a:p>
           <a:p>
             <a:r>
-              <a:t>  and decisions.</a:t>
+              <a:t>and decisions.</a:t>
             </a:r>
           </a:p>
           <a:p>
@@ -960,7 +960,7 @@
           </a:p>
           <a:p>
             <a:r>
-              <a:t>  these trade-offs, NOT a textbook definition.</a:t>
+              <a:t>these trade-offs, NOT a textbook definition.</a:t>
             </a:r>
           </a:p>
           <a:p>
@@ -1205,7 +1205,7 @@
           </a:p>
           <a:p>
             <a:r>
-              <a:t>  NOT a summary of what you did.</a:t>
+              <a:t>NOT a summary of what you did.</a:t>
             </a:r>
           </a:p>
           <a:p>
@@ -1460,7 +1460,7 @@
           </a:p>
           <a:p>
             <a:r>
-              <a:t>  narrative cites.</a:t>
+              <a:t>narrative cites.</a:t>
             </a:r>
           </a:p>
           <a:p>
@@ -1580,12 +1580,12 @@
           </a:p>
           <a:p>
             <a:r>
-              <a:t>  exports (the settings — security-group rules, RDS config). C = test &amp; validation evidence</a:t>
-            </a:r>
-          </a:p>
-          <a:p>
-            <a:r>
-              <a:t>  (connectivity, scaling, recovery-objective results).</a:t>
+              <a:t>exports (the settings — security-group rules, RDS config). C = test &amp; validation evidence</a:t>
+            </a:r>
+          </a:p>
+          <a:p>
+            <a:r>
+              <a:t>(connectivity, scaling, recovery-objective results).</a:t>
             </a:r>
           </a:p>
           <a:p>
@@ -2075,7 +2075,7 @@
           </a:p>
           <a:p>
             <a:r>
-              <a:t>  §5 Configuration Decisions · §6 Testing/Validation · §7 Operational Handover.</a:t>
+              <a:t>§5 Configuration Decisions · §6 Testing/Validation · §7 Operational Handover.</a:t>
             </a:r>
           </a:p>
           <a:p>
@@ -2090,7 +2090,7 @@
           </a:p>
           <a:p>
             <a:r>
-              <a:t>  assessor exemplar sets the standard.</a:t>
+              <a:t>assessor exemplar sets the standard.</a:t>
             </a:r>
           </a:p>
           <a:p>
@@ -2195,7 +2195,7 @@
           </a:p>
           <a:p>
             <a:r>
-              <a:t>  monitoring. That order is the spine of §4.</a:t>
+              <a:t>monitoring. That order is the spine of §4.</a:t>
             </a:r>
           </a:p>
           <a:p>
@@ -2315,7 +2315,7 @@
           </a:p>
           <a:p>
             <a:r>
-              <a:t>  written.</a:t>
+              <a:t>written.</a:t>
             </a:r>
           </a:p>
           <a:p>
@@ -2325,7 +2325,7 @@
           </a:p>
           <a:p>
             <a:r>
-              <a:t>  Appendix C.</a:t>
+              <a:t>Appendix C.</a:t>
             </a:r>
           </a:p>
           <a:p>
@@ -2335,7 +2335,7 @@
           </a:p>
           <a:p>
             <a:r>
-              <a:t>  together in one place.</a:t>
+              <a:t>together in one place.</a:t>
             </a:r>
           </a:p>
           <a:p>
@@ -5714,16 +5714,16 @@
             <a:r>
               <a:rPr sz="2400" b="1" i="0">
                 <a:solidFill>
-                  <a:srgbClr val="27B5CE"/>
+                  <a:srgbClr val="EDAB0C"/>
                 </a:solidFill>
                 <a:latin typeface="Roboto"/>
               </a:rPr>
               <a:t>■  </a:t>
             </a:r>
             <a:r>
-              <a:rPr sz="2400" b="1" i="0">
-                <a:solidFill>
-                  <a:srgbClr val="27B5CE"/>
+              <a:rPr sz="2400" b="0" i="0">
+                <a:solidFill>
+                  <a:srgbClr val="2A2929"/>
                 </a:solidFill>
                 <a:latin typeface="Roboto"/>
               </a:rPr>
@@ -6134,16 +6134,16 @@
             <a:r>
               <a:rPr sz="2400" b="1" i="0">
                 <a:solidFill>
-                  <a:srgbClr val="27B5CE"/>
+                  <a:srgbClr val="EDAB0C"/>
                 </a:solidFill>
                 <a:latin typeface="Roboto"/>
               </a:rPr>
               <a:t>■  </a:t>
             </a:r>
             <a:r>
-              <a:rPr sz="2400" b="1" i="0">
-                <a:solidFill>
-                  <a:srgbClr val="27B5CE"/>
+              <a:rPr sz="2400" b="0" i="0">
+                <a:solidFill>
+                  <a:srgbClr val="2A2929"/>
                 </a:solidFill>
                 <a:latin typeface="Roboto"/>
               </a:rPr>
@@ -6492,16 +6492,16 @@
             <a:r>
               <a:rPr sz="2400" b="1" i="0">
                 <a:solidFill>
-                  <a:srgbClr val="27B5CE"/>
+                  <a:srgbClr val="EDAB0C"/>
                 </a:solidFill>
                 <a:latin typeface="Roboto"/>
               </a:rPr>
               <a:t>■  </a:t>
             </a:r>
             <a:r>
-              <a:rPr sz="2400" b="1" i="0">
-                <a:solidFill>
-                  <a:srgbClr val="27B5CE"/>
+              <a:rPr sz="2400" b="0" i="0">
+                <a:solidFill>
+                  <a:srgbClr val="2A2929"/>
                 </a:solidFill>
                 <a:latin typeface="Roboto"/>
               </a:rPr>
@@ -6850,16 +6850,16 @@
             <a:r>
               <a:rPr sz="2400" b="1" i="0">
                 <a:solidFill>
-                  <a:srgbClr val="27B5CE"/>
+                  <a:srgbClr val="EDAB0C"/>
                 </a:solidFill>
                 <a:latin typeface="Roboto"/>
               </a:rPr>
               <a:t>■  </a:t>
             </a:r>
             <a:r>
-              <a:rPr sz="2400" b="1" i="0">
-                <a:solidFill>
-                  <a:srgbClr val="27B5CE"/>
+              <a:rPr sz="2400" b="0" i="0">
+                <a:solidFill>
+                  <a:srgbClr val="2A2929"/>
                 </a:solidFill>
                 <a:latin typeface="Roboto"/>
               </a:rPr>
@@ -7239,16 +7239,16 @@
             <a:r>
               <a:rPr sz="2400" b="1" i="0">
                 <a:solidFill>
-                  <a:srgbClr val="27B5CE"/>
+                  <a:srgbClr val="EDAB0C"/>
                 </a:solidFill>
                 <a:latin typeface="Roboto"/>
               </a:rPr>
               <a:t>■  </a:t>
             </a:r>
             <a:r>
-              <a:rPr sz="2400" b="1" i="0">
-                <a:solidFill>
-                  <a:srgbClr val="27B5CE"/>
+              <a:rPr sz="2400" b="0" i="0">
+                <a:solidFill>
+                  <a:srgbClr val="2A2929"/>
                 </a:solidFill>
                 <a:latin typeface="Roboto"/>
               </a:rPr>
@@ -7579,7 +7579,7 @@
               <a:t>■  </a:t>
             </a:r>
             <a:r>
-              <a:rPr sz="1700" b="1" i="0">
+              <a:rPr sz="1700" b="0" i="0">
                 <a:solidFill>
                   <a:srgbClr val="2A2929"/>
                 </a:solidFill>
@@ -7665,16 +7665,16 @@
             <a:r>
               <a:rPr sz="1700" b="1" i="0">
                 <a:solidFill>
-                  <a:srgbClr val="27B5CE"/>
+                  <a:srgbClr val="EDAB0C"/>
                 </a:solidFill>
                 <a:latin typeface="Roboto"/>
               </a:rPr>
               <a:t>■  </a:t>
             </a:r>
             <a:r>
-              <a:rPr sz="1700" b="1" i="0">
-                <a:solidFill>
-                  <a:srgbClr val="27B5CE"/>
+              <a:rPr sz="1700" b="0" i="0">
+                <a:solidFill>
+                  <a:srgbClr val="2A2929"/>
                 </a:solidFill>
                 <a:latin typeface="Roboto"/>
               </a:rPr>
@@ -9122,16 +9122,16 @@
             <a:r>
               <a:rPr sz="2400" b="1" i="0">
                 <a:solidFill>
-                  <a:srgbClr val="205F61"/>
+                  <a:srgbClr val="EDAB0C"/>
                 </a:solidFill>
                 <a:latin typeface="Roboto"/>
               </a:rPr>
               <a:t>■  </a:t>
             </a:r>
             <a:r>
-              <a:rPr sz="2400" b="1" i="0">
-                <a:solidFill>
-                  <a:srgbClr val="205F61"/>
+              <a:rPr sz="2400" b="0" i="0">
+                <a:solidFill>
+                  <a:srgbClr val="2A2929"/>
                 </a:solidFill>
                 <a:latin typeface="Roboto"/>
               </a:rPr>
@@ -9493,7 +9493,7 @@
               <a:t>■  </a:t>
             </a:r>
             <a:r>
-              <a:rPr sz="1700" b="1" i="0">
+              <a:rPr sz="1700" b="0" i="0">
                 <a:solidFill>
                   <a:srgbClr val="2A2929"/>
                 </a:solidFill>
@@ -9579,16 +9579,16 @@
             <a:r>
               <a:rPr sz="1700" b="1" i="0">
                 <a:solidFill>
-                  <a:srgbClr val="205F61"/>
+                  <a:srgbClr val="EDAB0C"/>
                 </a:solidFill>
                 <a:latin typeface="Roboto"/>
               </a:rPr>
               <a:t>■  </a:t>
             </a:r>
             <a:r>
-              <a:rPr sz="1700" b="1" i="0">
-                <a:solidFill>
-                  <a:srgbClr val="205F61"/>
+              <a:rPr sz="1700" b="0" i="0">
+                <a:solidFill>
+                  <a:srgbClr val="2A2929"/>
                 </a:solidFill>
                 <a:latin typeface="Roboto"/>
               </a:rPr>
@@ -9986,16 +9986,16 @@
             <a:r>
               <a:rPr sz="2400" b="1" i="0">
                 <a:solidFill>
-                  <a:srgbClr val="92268F"/>
+                  <a:srgbClr val="EDAB0C"/>
                 </a:solidFill>
                 <a:latin typeface="Roboto"/>
               </a:rPr>
               <a:t>■  </a:t>
             </a:r>
             <a:r>
-              <a:rPr sz="2400" b="1" i="0">
-                <a:solidFill>
-                  <a:srgbClr val="92268F"/>
+              <a:rPr sz="2400" b="0" i="0">
+                <a:solidFill>
+                  <a:srgbClr val="2A2929"/>
                 </a:solidFill>
                 <a:latin typeface="Roboto"/>
               </a:rPr>
@@ -10229,7 +10229,7 @@
             <a:avLst/>
           </a:prstGeom>
           <a:solidFill>
-            <a:srgbClr val="92268F"/>
+            <a:srgbClr val="004488"/>
           </a:solidFill>
           <a:ln>
             <a:noFill/>
@@ -10317,7 +10317,7 @@
             <a:r>
               <a:rPr sz="1600" b="1" i="0">
                 <a:solidFill>
-                  <a:srgbClr val="92268F"/>
+                  <a:srgbClr val="004488"/>
                 </a:solidFill>
                 <a:latin typeface="Roboto"/>
               </a:rPr>
@@ -10373,7 +10373,7 @@
             <a:avLst/>
           </a:prstGeom>
           <a:solidFill>
-            <a:srgbClr val="92268F"/>
+            <a:srgbClr val="004488"/>
           </a:solidFill>
           <a:ln>
             <a:noFill/>
@@ -10571,7 +10571,7 @@
             <a:avLst/>
           </a:prstGeom>
           <a:solidFill>
-            <a:srgbClr val="92268F"/>
+            <a:srgbClr val="004488"/>
           </a:solidFill>
           <a:ln>
             <a:noFill/>
@@ -10667,16 +10667,16 @@
             <a:r>
               <a:rPr sz="2400" b="1" i="0">
                 <a:solidFill>
-                  <a:srgbClr val="92268F"/>
+                  <a:srgbClr val="EDAB0C"/>
                 </a:solidFill>
                 <a:latin typeface="Roboto"/>
               </a:rPr>
               <a:t>■  </a:t>
             </a:r>
             <a:r>
-              <a:rPr sz="2400" b="1" i="0">
-                <a:solidFill>
-                  <a:srgbClr val="92268F"/>
+              <a:rPr sz="2400" b="0" i="0">
+                <a:solidFill>
+                  <a:srgbClr val="2A2929"/>
                 </a:solidFill>
                 <a:latin typeface="Roboto"/>
               </a:rPr>
@@ -10731,7 +10731,7 @@
             <a:avLst/>
           </a:prstGeom>
           <a:solidFill>
-            <a:srgbClr val="92268F"/>
+            <a:srgbClr val="004488"/>
           </a:solidFill>
           <a:ln>
             <a:noFill/>
@@ -10879,7 +10879,7 @@
             <a:avLst/>
           </a:prstGeom>
           <a:solidFill>
-            <a:srgbClr val="92268F"/>
+            <a:srgbClr val="004488"/>
           </a:solidFill>
           <a:ln>
             <a:noFill/>
@@ -11038,7 +11038,7 @@
               <a:t>■  </a:t>
             </a:r>
             <a:r>
-              <a:rPr sz="1700" b="1" i="0">
+              <a:rPr sz="1700" b="0" i="0">
                 <a:solidFill>
                   <a:srgbClr val="2A2929"/>
                 </a:solidFill>
@@ -11206,7 +11206,7 @@
             <a:avLst/>
           </a:prstGeom>
           <a:solidFill>
-            <a:srgbClr val="92268F"/>
+            <a:srgbClr val="004488"/>
           </a:solidFill>
           <a:ln>
             <a:noFill/>
@@ -11380,7 +11380,7 @@
             <a:r>
               <a:rPr sz="1800" b="1" i="0">
                 <a:solidFill>
-                  <a:srgbClr val="EDAB0C"/>
+                  <a:srgbClr val="004488"/>
                 </a:solidFill>
                 <a:latin typeface="Roboto"/>
               </a:rPr>
@@ -11404,7 +11404,7 @@
             <a:avLst/>
           </a:prstGeom>
           <a:solidFill>
-            <a:srgbClr val="EDAB0C"/>
+            <a:srgbClr val="004488"/>
           </a:solidFill>
           <a:ln>
             <a:noFill/>
@@ -11494,7 +11494,7 @@
             <a:avLst/>
           </a:prstGeom>
           <a:solidFill>
-            <a:srgbClr val="EDAB0C"/>
+            <a:srgbClr val="004488"/>
           </a:solidFill>
           <a:ln>
             <a:noFill/>
@@ -11623,7 +11623,7 @@
             <a:avLst/>
           </a:prstGeom>
           <a:solidFill>
-            <a:srgbClr val="EDAB0C"/>
+            <a:srgbClr val="004488"/>
           </a:solidFill>
           <a:ln>
             <a:noFill/>
@@ -11752,7 +11752,7 @@
             <a:avLst/>
           </a:prstGeom>
           <a:solidFill>
-            <a:srgbClr val="EDAB0C"/>
+            <a:srgbClr val="004488"/>
           </a:solidFill>
           <a:ln>
             <a:noFill/>
@@ -11881,7 +11881,7 @@
             <a:avLst/>
           </a:prstGeom>
           <a:solidFill>
-            <a:srgbClr val="EDAB0C"/>
+            <a:srgbClr val="004488"/>
           </a:solidFill>
           <a:ln>
             <a:noFill/>
@@ -12010,7 +12010,7 @@
             <a:avLst/>
           </a:prstGeom>
           <a:solidFill>
-            <a:srgbClr val="EDAB0C"/>
+            <a:srgbClr val="004488"/>
           </a:solidFill>
           <a:ln>
             <a:noFill/>
@@ -12093,7 +12093,7 @@
             <a:avLst/>
           </a:prstGeom>
           <a:solidFill>
-            <a:srgbClr val="EDAB0C"/>
+            <a:srgbClr val="004488"/>
           </a:solidFill>
           <a:ln>
             <a:noFill/>
@@ -12821,16 +12821,16 @@
             <a:r>
               <a:rPr sz="2400" b="1" i="0">
                 <a:solidFill>
-                  <a:srgbClr val="92268F"/>
+                  <a:srgbClr val="EDAB0C"/>
                 </a:solidFill>
                 <a:latin typeface="Roboto"/>
               </a:rPr>
               <a:t>■  </a:t>
             </a:r>
             <a:r>
-              <a:rPr sz="2400" b="1" i="0">
-                <a:solidFill>
-                  <a:srgbClr val="92268F"/>
+              <a:rPr sz="2400" b="0" i="0">
+                <a:solidFill>
+                  <a:srgbClr val="2A2929"/>
                 </a:solidFill>
                 <a:latin typeface="Roboto"/>
               </a:rPr>
@@ -13241,16 +13241,16 @@
             <a:r>
               <a:rPr sz="2400" b="1" i="0">
                 <a:solidFill>
-                  <a:srgbClr val="92268F"/>
+                  <a:srgbClr val="EDAB0C"/>
                 </a:solidFill>
                 <a:latin typeface="Roboto"/>
               </a:rPr>
               <a:t>■  </a:t>
             </a:r>
             <a:r>
-              <a:rPr sz="2400" b="1" i="0">
-                <a:solidFill>
-                  <a:srgbClr val="92268F"/>
+              <a:rPr sz="2400" b="0" i="0">
+                <a:solidFill>
+                  <a:srgbClr val="2A2929"/>
                 </a:solidFill>
                 <a:latin typeface="Roboto"/>
               </a:rPr>
@@ -13599,16 +13599,16 @@
             <a:r>
               <a:rPr sz="2400" b="1" i="0">
                 <a:solidFill>
-                  <a:srgbClr val="92268F"/>
+                  <a:srgbClr val="EDAB0C"/>
                 </a:solidFill>
                 <a:latin typeface="Roboto"/>
               </a:rPr>
               <a:t>■  </a:t>
             </a:r>
             <a:r>
-              <a:rPr sz="2400" b="1" i="0">
-                <a:solidFill>
-                  <a:srgbClr val="92268F"/>
+              <a:rPr sz="2400" b="0" i="0">
+                <a:solidFill>
+                  <a:srgbClr val="2A2929"/>
                 </a:solidFill>
                 <a:latin typeface="Roboto"/>
               </a:rPr>
@@ -13939,7 +13939,7 @@
               <a:t>■  </a:t>
             </a:r>
             <a:r>
-              <a:rPr sz="1700" b="1" i="0">
+              <a:rPr sz="1700" b="0" i="0">
                 <a:solidFill>
                   <a:srgbClr val="2A2929"/>
                 </a:solidFill>
@@ -14025,16 +14025,16 @@
             <a:r>
               <a:rPr sz="1700" b="1" i="0">
                 <a:solidFill>
-                  <a:srgbClr val="92268F"/>
+                  <a:srgbClr val="EDAB0C"/>
                 </a:solidFill>
                 <a:latin typeface="Roboto"/>
               </a:rPr>
               <a:t>■  </a:t>
             </a:r>
             <a:r>
-              <a:rPr sz="1700" b="1" i="0">
-                <a:solidFill>
-                  <a:srgbClr val="92268F"/>
+              <a:rPr sz="1700" b="0" i="0">
+                <a:solidFill>
+                  <a:srgbClr val="2A2929"/>
                 </a:solidFill>
                 <a:latin typeface="Roboto"/>
               </a:rPr>

--- a/S1-CL1-Cloud-Design-Build/delivery/topic_10/Topic_10_Slides.pptx
+++ b/S1-CL1-Cloud-Design-Build/delivery/topic_10/Topic_10_Slides.pptx
@@ -7,13 +7,13 @@
   <p:sldIdLst>
     <p:sldId id="256" r:id="rId7"/>
     <p:sldId id="257" r:id="rId8"/>
-    <p:sldId id="258" r:id="rId10"/>
-    <p:sldId id="259" r:id="rId11"/>
-    <p:sldId id="260" r:id="rId12"/>
-    <p:sldId id="261" r:id="rId13"/>
-    <p:sldId id="262" r:id="rId14"/>
-    <p:sldId id="263" r:id="rId15"/>
-    <p:sldId id="264" r:id="rId16"/>
+    <p:sldId id="258" r:id="rId9"/>
+    <p:sldId id="259" r:id="rId10"/>
+    <p:sldId id="260" r:id="rId11"/>
+    <p:sldId id="261" r:id="rId12"/>
+    <p:sldId id="262" r:id="rId13"/>
+    <p:sldId id="263" r:id="rId14"/>
+    <p:sldId id="264" r:id="rId15"/>
     <p:sldId id="265" r:id="rId17"/>
     <p:sldId id="266" r:id="rId18"/>
     <p:sldId id="267" r:id="rId19"/>
@@ -26,9 +26,6 @@
     <p:sldId id="274" r:id="rId26"/>
     <p:sldId id="275" r:id="rId27"/>
     <p:sldId id="276" r:id="rId28"/>
-    <p:sldId id="277" r:id="rId29"/>
-    <p:sldId id="278" r:id="rId30"/>
-    <p:sldId id="279" r:id="rId31"/>
   </p:sldIdLst>
   <p:sldSz cx="12191695" cy="6858000" type="screen4x3"/>
   <p:notesSz cx="6858000" cy="9144000"/>
@@ -525,857 +522,17 @@
           <a:lstStyle/>
           <a:p>
             <a:r>
-              <a:t>Frame this as the map for the whole Topic — the pivot from building to writing up. No new</a:t>
-            </a:r>
-          </a:p>
-          <a:p>
-            <a:r>
-              <a:t>building today.</a:t>
-            </a:r>
-          </a:p>
-          <a:p>
-            <a:r>
-              <a:t>• Goal: read it out — by the end they can turn the Topics 6–9 build into the Deployment Report.</a:t>
-            </a:r>
-          </a:p>
-          <a:p>
-            <a:r>
-              <a:t>That report IS the AT2 deliverable; everything today assembles it.</a:t>
-            </a:r>
-          </a:p>
-          <a:p>
-            <a:r>
-              <a:t>• Where this fits: last AT2 content Topic. They're MTS consultants; the report is what YAT's ICT</a:t>
-            </a:r>
-          </a:p>
-          <a:p>
-            <a:r>
-              <a:t>team and auditors actually receive — the running system alone isn't the handover.</a:t>
-            </a:r>
-          </a:p>
-          <a:p>
-            <a:r>
-              <a:t>• The four moves: organise the evidence, write the report, evidence the knowledge in context,</a:t>
-            </a:r>
-          </a:p>
-          <a:p>
-            <a:r>
-              <a:t>reflect. Each maps to a section today.</a:t>
-            </a:r>
-          </a:p>
-          <a:p>
-            <a:r>
-              <a:t>• Stress it: no new resources — everything they need was captured as they built.</a:t>
-            </a:r>
-          </a:p>
-          <a:p>
-            <a:r>
-              <a:t>Misconception to pre-empt: "documentation is an afterthought / a diary of what I did." No — it IS</a:t>
-            </a:r>
-          </a:p>
-          <a:p>
-            <a:r>
-              <a:t>the deliverable; the build is worthless to the client without the document that explains it.</a:t>
-            </a:r>
-          </a:p>
-          <a:p>
-            <a:r>
-              <a:t>Question to pose: "If you left YAT tomorrow, what would their ICT team have — the running system,</a:t>
-            </a:r>
-          </a:p>
-          <a:p>
-            <a:r>
-              <a:t>or the running system PLUS a document that lets them run and audit it?"</a:t>
-            </a:r>
-          </a:p>
-          <a:p>
-            <a:r>
-              <a:t>UoC/AT2 tie: this Topic develops ICTCLD401 element 4; the Deployment Report (§1–§7 + Appendices</a:t>
-            </a:r>
-          </a:p>
-          <a:p>
-            <a:r>
-              <a:t>A/B/C) is the single AT2 deliverable everything is marked in.</a:t>
-            </a:r>
-          </a:p>
-        </p:txBody>
-      </p:sp>
-      <p:sp>
-        <p:nvSpPr>
-          <p:cNvPr id="4" name="Slide Number Placeholder 3"/>
-          <p:cNvSpPr>
-            <a:spLocks noGrp="1"/>
-          </p:cNvSpPr>
-          <p:nvPr>
-            <p:ph type="sldNum" idx="5" sz="quarter"/>
-          </p:nvPr>
-        </p:nvSpPr>
-        <p:spPr/>
-      </p:sp>
-    </p:spTree>
-  </p:cSld>
-  <p:clrMapOvr>
-    <a:masterClrMapping/>
-  </p:clrMapOvr>
-</p:notes>
-</file>
-
-<file path=ppt/notesSlides/notesSlide10.xml><?xml version="1.0" encoding="utf-8"?>
-<p:notes xmlns:a="http://schemas.openxmlformats.org/drawingml/2006/main" xmlns:p="http://schemas.openxmlformats.org/presentationml/2006/main" xmlns:r="http://schemas.openxmlformats.org/officeDocument/2006/relationships">
-  <p:cSld>
-    <p:spTree>
-      <p:nvGrpSpPr>
-        <p:cNvPr id="1" name=""/>
-        <p:cNvGrpSpPr/>
-        <p:nvPr/>
-      </p:nvGrpSpPr>
-      <p:grpSpPr>
-        <a:xfrm>
-          <a:off x="0" y="0"/>
-          <a:ext cx="0" cy="0"/>
-          <a:chOff x="0" y="0"/>
-          <a:chExt cx="0" cy="0"/>
-        </a:xfrm>
-      </p:grpSpPr>
-      <p:sp>
-        <p:nvSpPr>
-          <p:cNvPr id="2" name="Slide Image Placeholder 1"/>
-          <p:cNvSpPr>
-            <a:spLocks noGrp="1"/>
-          </p:cNvSpPr>
-          <p:nvPr>
-            <p:ph type="sldImg" idx="2"/>
-          </p:nvPr>
-        </p:nvSpPr>
-        <p:spPr/>
-      </p:sp>
-      <p:sp>
-        <p:nvSpPr>
-          <p:cNvPr id="3" name="Notes Placeholder 2"/>
-          <p:cNvSpPr>
-            <a:spLocks noGrp="1"/>
-          </p:cNvSpPr>
-          <p:nvPr>
-            <p:ph type="body" idx="3" sz="quarter"/>
-          </p:nvPr>
-        </p:nvSpPr>
-        <p:spPr/>
-        <p:txBody>
-          <a:bodyPr/>
-          <a:lstStyle/>
-          <a:p>
-            <a:r>
-              <a:t>The frame-and-handover sections — short, but do them properly; §7 especially is real consulting.</a:t>
-            </a:r>
-          </a:p>
-          <a:p>
-            <a:r>
-              <a:t>• §2 Context + §3 Scope — what the engagement was, why, and what's in / out of this build.</a:t>
-            </a:r>
-          </a:p>
-          <a:p>
-            <a:r>
-              <a:t>• §7 Operational Handover — what YAT ICT now owns and how to run it: alarms, backups, access.</a:t>
-            </a:r>
-          </a:p>
-          <a:p>
-            <a:r>
-              <a:t>• The accent line: §1 Executive Summary — write it LAST; a short, plain summary for a busy reader.</a:t>
-            </a:r>
-          </a:p>
-          <a:p>
-            <a:r>
-              <a:t>Misconception to pre-empt: "the Exec Summary is first, so I write it first." Write it last — you</a:t>
-            </a:r>
-          </a:p>
-          <a:p>
-            <a:r>
-              <a:t>can't summarise a report you haven't finished.</a:t>
-            </a:r>
-          </a:p>
-          <a:p>
-            <a:r>
-              <a:t>Question to pose: "§7 handover — if you vanished tomorrow, what does YAT's ICT team need from you</a:t>
-            </a:r>
-          </a:p>
-          <a:p>
-            <a:r>
-              <a:t>to keep this running?" (alarms, backups, access — the operational reality).</a:t>
-            </a:r>
-          </a:p>
-          <a:p>
-            <a:r>
-              <a:t>UoC/AT2 tie: PC 4.1; scope and handover complete the AT2 report the reader actually operates from.</a:t>
-            </a:r>
-          </a:p>
-        </p:txBody>
-      </p:sp>
-      <p:sp>
-        <p:nvSpPr>
-          <p:cNvPr id="4" name="Slide Number Placeholder 3"/>
-          <p:cNvSpPr>
-            <a:spLocks noGrp="1"/>
-          </p:cNvSpPr>
-          <p:nvPr>
-            <p:ph type="sldNum" idx="5" sz="quarter"/>
-          </p:nvPr>
-        </p:nvSpPr>
-        <p:spPr/>
-      </p:sp>
-    </p:spTree>
-  </p:cSld>
-  <p:clrMapOvr>
-    <a:masterClrMapping/>
-  </p:clrMapOvr>
-</p:notes>
-</file>
-
-<file path=ppt/notesSlides/notesSlide11.xml><?xml version="1.0" encoding="utf-8"?>
-<p:notes xmlns:a="http://schemas.openxmlformats.org/drawingml/2006/main" xmlns:p="http://schemas.openxmlformats.org/presentationml/2006/main" xmlns:r="http://schemas.openxmlformats.org/officeDocument/2006/relationships">
-  <p:cSld>
-    <p:spTree>
-      <p:nvGrpSpPr>
-        <p:cNvPr id="1" name=""/>
-        <p:cNvGrpSpPr/>
-        <p:nvPr/>
-      </p:nvGrpSpPr>
-      <p:grpSpPr>
-        <a:xfrm>
-          <a:off x="0" y="0"/>
-          <a:ext cx="0" cy="0"/>
-          <a:chOff x="0" y="0"/>
-          <a:chExt cx="0" cy="0"/>
-        </a:xfrm>
-      </p:grpSpPr>
-      <p:sp>
-        <p:nvSpPr>
-          <p:cNvPr id="2" name="Slide Image Placeholder 1"/>
-          <p:cNvSpPr>
-            <a:spLocks noGrp="1"/>
-          </p:cNvSpPr>
-          <p:nvPr>
-            <p:ph type="sldImg" idx="2"/>
-          </p:nvPr>
-        </p:nvSpPr>
-        <p:spPr/>
-      </p:sp>
-      <p:sp>
-        <p:nvSpPr>
-          <p:cNvPr id="3" name="Notes Placeholder 2"/>
-          <p:cNvSpPr>
-            <a:spLocks noGrp="1"/>
-          </p:cNvSpPr>
-          <p:nvPr>
-            <p:ph type="body" idx="3" sz="quarter"/>
-          </p:nvPr>
-        </p:nvSpPr>
-        <p:spPr/>
-        <p:txBody>
-          <a:bodyPr/>
-          <a:lstStyle/>
-          <a:p>
-            <a:r>
-              <a:t>Facilitation — the major writing block of the Topic. Give it room; circulate constantly.</a:t>
-            </a:r>
-          </a:p>
-          <a:p>
-            <a:r>
-              <a:t>Tell students: "Write the Deployment Report for the practice engagement, to the template. Drop</a:t>
-            </a:r>
-          </a:p>
-          <a:p>
-            <a:r>
-              <a:t>your Topic 9 justifications into §5 and your validation into §6. Write the §4 narrative tier by</a:t>
-            </a:r>
-          </a:p>
-          <a:p>
-            <a:r>
-              <a:t>tier, cross-referencing your appendices. Add §2/§3 context and scope, §7 handover — and write the</a:t>
-            </a:r>
-          </a:p>
-          <a:p>
-            <a:r>
-              <a:t>Executive Summary last. Every claim ties back to a labelled appendix item."</a:t>
-            </a:r>
-          </a:p>
-          <a:p>
-            <a:r>
-              <a:t>Steps:</a:t>
-            </a:r>
-          </a:p>
-          <a:p>
-            <a:r>
-              <a:t>1. §4 narrative — tier by tier, cross-referencing Appendices A and B.</a:t>
-            </a:r>
-          </a:p>
-          <a:p>
-            <a:r>
-              <a:t>2. §5 from your justifications; §6 from your validation (referencing Appendix C).</a:t>
-            </a:r>
-          </a:p>
-          <a:p>
-            <a:r>
-              <a:t>3. §2/§3 context + scope; §7 operational handover.</a:t>
-            </a:r>
-          </a:p>
-          <a:p>
-            <a:r>
-              <a:t>4. §1 Executive Summary — last.</a:t>
-            </a:r>
-          </a:p>
-          <a:p>
-            <a:r>
-              <a:t>Must produce: a complete Deployment Report to the template, every claim cross-referenced to a</a:t>
-            </a:r>
-          </a:p>
-          <a:p>
-            <a:r>
-              <a:t>labelled appendix item.</a:t>
-            </a:r>
-          </a:p>
-          <a:p>
-            <a:r>
-              <a:t>Timing: ~40 min (the big one). Where they get stuck: they try to write §5/§6 fresh — redirect them</a:t>
-            </a:r>
-          </a:p>
-          <a:p>
-            <a:r>
-              <a:t>to their Topic 9 work; or they write §4 as a diary — pull them back to factual and cross-referenced.</a:t>
-            </a:r>
-          </a:p>
-          <a:p>
-            <a:r>
-              <a:t>Share-back prompt: swap reports and have a partner try to find one cited appendix item — if they</a:t>
-            </a:r>
-          </a:p>
-          <a:p>
-            <a:r>
-              <a:t>can't, the cross-reference failed.</a:t>
-            </a:r>
-          </a:p>
-          <a:p>
-            <a:r>
-              <a:t>No-leakage note: this is the practice report on Ledgerline; AT2 is the same report on the assessed</a:t>
-            </a:r>
-          </a:p>
-          <a:p>
-            <a:r>
-              <a:t>system (LMS) — comparable, not identical.</a:t>
-            </a:r>
-          </a:p>
-        </p:txBody>
-      </p:sp>
-      <p:sp>
-        <p:nvSpPr>
-          <p:cNvPr id="4" name="Slide Number Placeholder 3"/>
-          <p:cNvSpPr>
-            <a:spLocks noGrp="1"/>
-          </p:cNvSpPr>
-          <p:nvPr>
-            <p:ph type="sldNum" idx="5" sz="quarter"/>
-          </p:nvPr>
-        </p:nvSpPr>
-        <p:spPr/>
-      </p:sp>
-    </p:spTree>
-  </p:cSld>
-  <p:clrMapOvr>
-    <a:masterClrMapping/>
-  </p:clrMapOvr>
-</p:notes>
-</file>
-
-<file path=ppt/notesSlides/notesSlide12.xml><?xml version="1.0" encoding="utf-8"?>
-<p:notes xmlns:a="http://schemas.openxmlformats.org/drawingml/2006/main" xmlns:p="http://schemas.openxmlformats.org/presentationml/2006/main" xmlns:r="http://schemas.openxmlformats.org/officeDocument/2006/relationships">
-  <p:cSld>
-    <p:spTree>
-      <p:nvGrpSpPr>
-        <p:cNvPr id="1" name=""/>
-        <p:cNvGrpSpPr/>
-        <p:nvPr/>
-      </p:nvGrpSpPr>
-      <p:grpSpPr>
-        <a:xfrm>
-          <a:off x="0" y="0"/>
-          <a:ext cx="0" cy="0"/>
-          <a:chOff x="0" y="0"/>
-          <a:chExt cx="0" cy="0"/>
-        </a:xfrm>
-      </p:grpSpPr>
-      <p:sp>
-        <p:nvSpPr>
-          <p:cNvPr id="2" name="Slide Image Placeholder 1"/>
-          <p:cNvSpPr>
-            <a:spLocks noGrp="1"/>
-          </p:cNvSpPr>
-          <p:nvPr>
-            <p:ph type="sldImg" idx="2"/>
-          </p:nvPr>
-        </p:nvSpPr>
-        <p:spPr/>
-      </p:sp>
-      <p:sp>
-        <p:nvSpPr>
-          <p:cNvPr id="3" name="Notes Placeholder 2"/>
-          <p:cNvSpPr>
-            <a:spLocks noGrp="1"/>
-          </p:cNvSpPr>
-          <p:nvPr>
-            <p:ph type="body" idx="3" sz="quarter"/>
-          </p:nvPr>
-        </p:nvSpPr>
-        <p:spPr/>
-        <p:txBody>
-          <a:bodyPr/>
-          <a:lstStyle/>
-          <a:p>
-            <a:r>
-              <a:t>Opens C3 — the knowledge that building alone doesn't demonstrate. The whole trick is "in context."</a:t>
-            </a:r>
-          </a:p>
-          <a:p>
-            <a:r>
-              <a:t>• Some knowledge isn't shown by a screenshot: shared responsibility, managed vs self-hosted,</a:t>
-            </a:r>
-          </a:p>
-          <a:p>
-            <a:r>
-              <a:t>storage/scaling/database options, cost models.</a:t>
-            </a:r>
-          </a:p>
-          <a:p>
-            <a:r>
-              <a:t>• The accent line: answer the knowledge questions grounded in YOUR build — cite your actual design</a:t>
-            </a:r>
-          </a:p>
-          <a:p>
-            <a:r>
-              <a:t>and decisions.</a:t>
-            </a:r>
-          </a:p>
-          <a:p>
-            <a:r>
-              <a:t>• The example to land: "why a managed database here?" → because of the Ledgerline workload and</a:t>
-            </a:r>
-          </a:p>
-          <a:p>
-            <a:r>
-              <a:t>these trade-offs, NOT a textbook definition.</a:t>
-            </a:r>
-          </a:p>
-          <a:p>
-            <a:r>
-              <a:t>Misconception to pre-empt: "knowledge questions = recite the definition." No — evidence it in</a:t>
-            </a:r>
-          </a:p>
-          <a:p>
-            <a:r>
-              <a:t>context; tie every answer to your own system and the choices you made.</a:t>
-            </a:r>
-          </a:p>
-          <a:p>
-            <a:r>
-              <a:t>Question to pose: "'What is the shared responsibility model?' versus 'In YOUR build, what did AWS</a:t>
-            </a:r>
-          </a:p>
-          <a:p>
-            <a:r>
-              <a:t>secure and what did you?' — which one proves you actually understand it?"</a:t>
-            </a:r>
-          </a:p>
-          <a:p>
-            <a:r>
-              <a:t>UoC/AT2 tie: ICTCLD401 KE 4–7, evidenced contextually in the report (this is C3).</a:t>
-            </a:r>
-          </a:p>
-        </p:txBody>
-      </p:sp>
-      <p:sp>
-        <p:nvSpPr>
-          <p:cNvPr id="4" name="Slide Number Placeholder 3"/>
-          <p:cNvSpPr>
-            <a:spLocks noGrp="1"/>
-          </p:cNvSpPr>
-          <p:nvPr>
-            <p:ph type="sldNum" idx="5" sz="quarter"/>
-          </p:nvPr>
-        </p:nvSpPr>
-        <p:spPr/>
-      </p:sp>
-    </p:spTree>
-  </p:cSld>
-  <p:clrMapOvr>
-    <a:masterClrMapping/>
-  </p:clrMapOvr>
-</p:notes>
-</file>
-
-<file path=ppt/notesSlides/notesSlide13.xml><?xml version="1.0" encoding="utf-8"?>
-<p:notes xmlns:a="http://schemas.openxmlformats.org/drawingml/2006/main" xmlns:p="http://schemas.openxmlformats.org/presentationml/2006/main" xmlns:r="http://schemas.openxmlformats.org/officeDocument/2006/relationships">
-  <p:cSld>
-    <p:spTree>
-      <p:nvGrpSpPr>
-        <p:cNvPr id="1" name=""/>
-        <p:cNvGrpSpPr/>
-        <p:nvPr/>
-      </p:nvGrpSpPr>
-      <p:grpSpPr>
-        <a:xfrm>
-          <a:off x="0" y="0"/>
-          <a:ext cx="0" cy="0"/>
-          <a:chOff x="0" y="0"/>
-          <a:chExt cx="0" cy="0"/>
-        </a:xfrm>
-      </p:grpSpPr>
-      <p:sp>
-        <p:nvSpPr>
-          <p:cNvPr id="2" name="Slide Image Placeholder 1"/>
-          <p:cNvSpPr>
-            <a:spLocks noGrp="1"/>
-          </p:cNvSpPr>
-          <p:nvPr>
-            <p:ph type="sldImg" idx="2"/>
-          </p:nvPr>
-        </p:nvSpPr>
-        <p:spPr/>
-      </p:sp>
-      <p:sp>
-        <p:nvSpPr>
-          <p:cNvPr id="3" name="Notes Placeholder 2"/>
-          <p:cNvSpPr>
-            <a:spLocks noGrp="1"/>
-          </p:cNvSpPr>
-          <p:nvPr>
-            <p:ph type="body" idx="3" sz="quarter"/>
-          </p:nvPr>
-        </p:nvSpPr>
-        <p:spPr/>
-        <p:txBody>
-          <a:bodyPr/>
-          <a:lstStyle/>
-          <a:p>
-            <a:r>
-              <a:t>Facilitation — a short written KE task; the discipline is grounding, not defining.</a:t>
-            </a:r>
-          </a:p>
-          <a:p>
-            <a:r>
-              <a:t>Tell students: "Answer the AT2 knowledge questions for the practice engagement — but ground every</a:t>
-            </a:r>
-          </a:p>
-          <a:p>
-            <a:r>
-              <a:t>answer in YOUR build. Shared responsibility, managed vs self-hosted, storage and scaling options,</a:t>
-            </a:r>
-          </a:p>
-          <a:p>
-            <a:r>
-              <a:t>cost models: for each, don't define it — show it in your own system and your own decisions."</a:t>
-            </a:r>
-          </a:p>
-          <a:p>
-            <a:r>
-              <a:t>Steps:</a:t>
-            </a:r>
-          </a:p>
-          <a:p>
-            <a:r>
-              <a:t>1. Take each knowledge question in turn.</a:t>
-            </a:r>
-          </a:p>
-          <a:p>
-            <a:r>
-              <a:t>2. Answer it by citing your build, your decisions, and the Ledgerline workload.</a:t>
-            </a:r>
-          </a:p>
-          <a:p>
-            <a:r>
-              <a:t>Must produce: contextual answers, each tied to their own system — not generic best practice.</a:t>
-            </a:r>
-          </a:p>
-          <a:p>
-            <a:r>
-              <a:t>Timing: ~20 min then compare. Where they get stuck: they slip into textbook definitions — push</a:t>
-            </a:r>
-          </a:p>
-          <a:p>
-            <a:r>
-              <a:t>back every time with "yes, but in YOUR build?"</a:t>
-            </a:r>
-          </a:p>
-          <a:p>
-            <a:r>
-              <a:t>Share-back prompt: read one generic answer and one contextual answer, ask the room which one</a:t>
-            </a:r>
-          </a:p>
-          <a:p>
-            <a:r>
-              <a:t>evidences understanding.</a:t>
-            </a:r>
-          </a:p>
-          <a:p>
-            <a:r>
-              <a:t>No-leakage note: practice questions on Ledgerline; AT2 asks the same contextual KE on the assessed</a:t>
-            </a:r>
-          </a:p>
-          <a:p>
-            <a:r>
-              <a:t>system (LMS) — comparable, not identical.</a:t>
-            </a:r>
-          </a:p>
-        </p:txBody>
-      </p:sp>
-      <p:sp>
-        <p:nvSpPr>
-          <p:cNvPr id="4" name="Slide Number Placeholder 3"/>
-          <p:cNvSpPr>
-            <a:spLocks noGrp="1"/>
-          </p:cNvSpPr>
-          <p:nvPr>
-            <p:ph type="sldNum" idx="5" sz="quarter"/>
-          </p:nvPr>
-        </p:nvSpPr>
-        <p:spPr/>
-      </p:sp>
-    </p:spTree>
-  </p:cSld>
-  <p:clrMapOvr>
-    <a:masterClrMapping/>
-  </p:clrMapOvr>
-</p:notes>
-</file>
-
-<file path=ppt/notesSlides/notesSlide14.xml><?xml version="1.0" encoding="utf-8"?>
-<p:notes xmlns:a="http://schemas.openxmlformats.org/drawingml/2006/main" xmlns:p="http://schemas.openxmlformats.org/presentationml/2006/main" xmlns:r="http://schemas.openxmlformats.org/officeDocument/2006/relationships">
-  <p:cSld>
-    <p:spTree>
-      <p:nvGrpSpPr>
-        <p:cNvPr id="1" name=""/>
-        <p:cNvGrpSpPr/>
-        <p:nvPr/>
-      </p:nvGrpSpPr>
-      <p:grpSpPr>
-        <a:xfrm>
-          <a:off x="0" y="0"/>
-          <a:ext cx="0" cy="0"/>
-          <a:chOff x="0" y="0"/>
-          <a:chExt cx="0" cy="0"/>
-        </a:xfrm>
-      </p:grpSpPr>
-      <p:sp>
-        <p:nvSpPr>
-          <p:cNvPr id="2" name="Slide Image Placeholder 1"/>
-          <p:cNvSpPr>
-            <a:spLocks noGrp="1"/>
-          </p:cNvSpPr>
-          <p:nvPr>
-            <p:ph type="sldImg" idx="2"/>
-          </p:nvPr>
-        </p:nvSpPr>
-        <p:spPr/>
-      </p:sp>
-      <p:sp>
-        <p:nvSpPr>
-          <p:cNvPr id="3" name="Notes Placeholder 2"/>
-          <p:cNvSpPr>
-            <a:spLocks noGrp="1"/>
-          </p:cNvSpPr>
-          <p:nvPr>
-            <p:ph type="body" idx="3" sz="quarter"/>
-          </p:nvPr>
-        </p:nvSpPr>
-        <p:spPr/>
-        <p:txBody>
-          <a:bodyPr/>
-          <a:lstStyle/>
-          <a:p>
-            <a:r>
-              <a:t>Opens C4 — the professional close-out. Two distinct things: an honest reflection, then acting on</a:t>
-            </a:r>
-          </a:p>
-          <a:p>
-            <a:r>
-              <a:t>feedback.</a:t>
-            </a:r>
-          </a:p>
-          <a:p>
-            <a:r>
-              <a:t>• A reflection is an honest review — what worked, what you'd do differently, what you learned —</a:t>
-            </a:r>
-          </a:p>
-          <a:p>
-            <a:r>
-              <a:t>NOT a summary of what you did.</a:t>
-            </a:r>
-          </a:p>
-          <a:p>
-            <a:r>
-              <a:t>• The accent line: then seek feedback on the report from the required personnel, and respond to it.</a:t>
-            </a:r>
-          </a:p>
-          <a:p>
-            <a:r>
-              <a:t>• Acting on feedback is part of the job — and it's assessed.</a:t>
-            </a:r>
-          </a:p>
-          <a:p>
-            <a:r>
-              <a:t>Misconception to pre-empt: "a reflection is a recap of what I did." No — it's honest self-review;</a:t>
-            </a:r>
-          </a:p>
-          <a:p>
-            <a:r>
-              <a:t>the value is in what you'd change, not what went fine.</a:t>
-            </a:r>
-          </a:p>
-          <a:p>
-            <a:r>
-              <a:t>Question to pose: "Name one thing you'd do differently if you rebuilt this — that one sentence is</a:t>
-            </a:r>
-          </a:p>
-          <a:p>
-            <a:r>
-              <a:t>worth more than a paragraph of what went smoothly."</a:t>
-            </a:r>
-          </a:p>
-          <a:p>
-            <a:r>
-              <a:t>UoC/AT2 tie: PC 4.2 (seek and respond to feedback as required) — this is C4.</a:t>
-            </a:r>
-          </a:p>
-        </p:txBody>
-      </p:sp>
-      <p:sp>
-        <p:nvSpPr>
-          <p:cNvPr id="4" name="Slide Number Placeholder 3"/>
-          <p:cNvSpPr>
-            <a:spLocks noGrp="1"/>
-          </p:cNvSpPr>
-          <p:nvPr>
-            <p:ph type="sldNum" idx="5" sz="quarter"/>
-          </p:nvPr>
-        </p:nvSpPr>
-        <p:spPr/>
-      </p:sp>
-    </p:spTree>
-  </p:cSld>
-  <p:clrMapOvr>
-    <a:masterClrMapping/>
-  </p:clrMapOvr>
-</p:notes>
-</file>
-
-<file path=ppt/notesSlides/notesSlide15.xml><?xml version="1.0" encoding="utf-8"?>
-<p:notes xmlns:a="http://schemas.openxmlformats.org/drawingml/2006/main" xmlns:p="http://schemas.openxmlformats.org/presentationml/2006/main" xmlns:r="http://schemas.openxmlformats.org/officeDocument/2006/relationships">
-  <p:cSld>
-    <p:spTree>
-      <p:nvGrpSpPr>
-        <p:cNvPr id="1" name=""/>
-        <p:cNvGrpSpPr/>
-        <p:nvPr/>
-      </p:nvGrpSpPr>
-      <p:grpSpPr>
-        <a:xfrm>
-          <a:off x="0" y="0"/>
-          <a:ext cx="0" cy="0"/>
-          <a:chOff x="0" y="0"/>
-          <a:chExt cx="0" cy="0"/>
-        </a:xfrm>
-      </p:grpSpPr>
-      <p:sp>
-        <p:nvSpPr>
-          <p:cNvPr id="2" name="Slide Image Placeholder 1"/>
-          <p:cNvSpPr>
-            <a:spLocks noGrp="1"/>
-          </p:cNvSpPr>
-          <p:nvPr>
-            <p:ph type="sldImg" idx="2"/>
-          </p:nvPr>
-        </p:nvSpPr>
-        <p:spPr/>
-      </p:sp>
-      <p:sp>
-        <p:nvSpPr>
-          <p:cNvPr id="3" name="Notes Placeholder 2"/>
-          <p:cNvSpPr>
-            <a:spLocks noGrp="1"/>
-          </p:cNvSpPr>
-          <p:nvPr>
-            <p:ph type="body" idx="3" sz="quarter"/>
-          </p:nvPr>
-        </p:nvSpPr>
-        <p:spPr/>
-        <p:txBody>
-          <a:bodyPr/>
-          <a:lstStyle/>
-          <a:p>
-            <a:r>
-              <a:t>Facilitation — the close-out task. Short, but the "respond" half is the assessed bit.</a:t>
-            </a:r>
-          </a:p>
-          <a:p>
-            <a:r>
-              <a:t>Tell students: "Close out the engagement. Write a short, honest reflection on the build and the</a:t>
-            </a:r>
-          </a:p>
-          <a:p>
-            <a:r>
-              <a:t>process — what worked, what you'd do differently. Then seek feedback on your report from the</a:t>
-            </a:r>
-          </a:p>
-          <a:p>
-            <a:r>
-              <a:t>required personnel, and note what you actually changed in response."</a:t>
-            </a:r>
-          </a:p>
-          <a:p>
-            <a:r>
-              <a:t>Steps:</a:t>
-            </a:r>
-          </a:p>
-          <a:p>
-            <a:r>
-              <a:t>1. Write a short, honest reflection (not a summary).</a:t>
-            </a:r>
-          </a:p>
-          <a:p>
-            <a:r>
-              <a:t>2. Seek feedback on the report from the required personnel.</a:t>
-            </a:r>
-          </a:p>
-          <a:p>
-            <a:r>
-              <a:t>3. Note what you changed in response.</a:t>
-            </a:r>
-          </a:p>
-          <a:p>
-            <a:r>
-              <a:t>Must produce: a reflection plus a record of feedback sought and the response/change made.</a:t>
-            </a:r>
-          </a:p>
-          <a:p>
-            <a:r>
-              <a:t>Timing: ~15 min. Where they get stuck: reflections that are just summaries — prompt "what would</a:t>
-            </a:r>
-          </a:p>
-          <a:p>
-            <a:r>
-              <a:t>you change?"; or "responding to feedback" with no actual change — the change IS the assessed part.</a:t>
-            </a:r>
-          </a:p>
-          <a:p>
-            <a:r>
-              <a:t>Share-back prompt: one honest "what I'd do differently" from the room.</a:t>
-            </a:r>
-          </a:p>
-          <a:p>
-            <a:r>
-              <a:t>No-leakage note: practice reflection on the Ledgerline engagement; AT2 assesses the same</a:t>
-            </a:r>
-          </a:p>
-          <a:p>
-            <a:r>
-              <a:t>reflect-and-respond on the LMS work — comparable, not identical.</a:t>
+              <a:t>Activity = practice run sheet tests T1–T4. T4 is the one that catches people: the balancer listens</a:t>
+            </a:r>
+          </a:p>
+          <a:p>
+            <a:r>
+              <a:t>on plain HTTP, and a browser left to itself will try the secure port and fail. A 503 usually means</a:t>
+            </a:r>
+          </a:p>
+          <a:p>
+            <a:r>
+              <a:t>no healthy target yet rather than a fault — have them check the target group and wait.</a:t>
             </a:r>
           </a:p>
         </p:txBody>
@@ -1445,57 +602,12 @@
           <a:lstStyle/>
           <a:p>
             <a:r>
-              <a:t>The primer on traceable evidence — teach this before they touch the filing. Sets the bar for C1.</a:t>
-            </a:r>
-          </a:p>
-          <a:p>
-            <a:r>
-              <a:t>• Walk it: good evidence is named, dated, and shows the Region and identity it was taken under.</a:t>
-            </a:r>
-          </a:p>
-          <a:p>
-            <a:r>
-              <a:t>• The load-bearing line: it's organised and referenceable — a reader can find the exact item the</a:t>
-            </a:r>
-          </a:p>
-          <a:p>
-            <a:r>
-              <a:t>narrative cites.</a:t>
-            </a:r>
-          </a:p>
-          <a:p>
-            <a:r>
-              <a:t>• Give the counter-example: an unplaceable screenshot, or an export with no label, proves nothing.</a:t>
-            </a:r>
-          </a:p>
-          <a:p>
-            <a:r>
-              <a:t>Misconception to pre-empt: "a screenshot is evidence." Only if it's placeable — an image with no</a:t>
-            </a:r>
-          </a:p>
-          <a:p>
-            <a:r>
-              <a:t>label, date or context is not evidence an auditor can use.</a:t>
-            </a:r>
-          </a:p>
-          <a:p>
-            <a:r>
-              <a:t>Question to pose: "If I hand you a folder of 40 unnamed screenshots, can you prove the database is</a:t>
-            </a:r>
-          </a:p>
-          <a:p>
-            <a:r>
-              <a:t>encrypted? What would each one need on it to count?"</a:t>
-            </a:r>
-          </a:p>
-          <a:p>
-            <a:r>
-              <a:t>UoC/AT2 tie: ICTCLD401 PC 4.3 (save/store documentation per organisational policy); this is the</a:t>
-            </a:r>
-          </a:p>
-          <a:p>
-            <a:r>
-              <a:t>standard C1 organises evidence to meet.</a:t>
+              <a:t>Activity = practice run sheet test T5. Set expectations on timing — scale-in takes several minutes</a:t>
+            </a:r>
+          </a:p>
+          <a:p>
+            <a:r>
+              <a:t>and students assume it has failed. Remind them to put the target value back where it started.</a:t>
             </a:r>
           </a:p>
         </p:txBody>
@@ -1565,802 +677,17 @@
           <a:lstStyle/>
           <a:p>
             <a:r>
-              <a:t>The filing system — the three homes for evidence. Keep it crisp; the point is knowing what goes</a:t>
-            </a:r>
-          </a:p>
-          <a:p>
-            <a:r>
-              <a:t>where.</a:t>
-            </a:r>
-          </a:p>
-          <a:p>
-            <a:r>
-              <a:t>• A = build screenshots (the named captures taken as they built each tier). B = configuration</a:t>
-            </a:r>
-          </a:p>
-          <a:p>
-            <a:r>
-              <a:t>exports (the settings — security-group rules, RDS config). C = test &amp; validation evidence</a:t>
-            </a:r>
-          </a:p>
-          <a:p>
-            <a:r>
-              <a:t>(connectivity, scaling, recovery-objective results).</a:t>
-            </a:r>
-          </a:p>
-          <a:p>
-            <a:r>
-              <a:t>• The load-bearing line: label and number EVERY item so §4–§6 can cross-reference it.</a:t>
-            </a:r>
-          </a:p>
-          <a:p>
-            <a:r>
-              <a:t>Misconception to pre-empt: students dump everything into one pile / one appendix. The A/B/C split</a:t>
-            </a:r>
-          </a:p>
-          <a:p>
-            <a:r>
-              <a:t>is what makes the report navigable — a reader jumps straight to the right kind of evidence.</a:t>
-            </a:r>
-          </a:p>
-          <a:p>
-            <a:r>
-              <a:t>Question to pose (fire three quick): "A security-group rule export — which appendix? A screenshot</a:t>
-            </a:r>
-          </a:p>
-          <a:p>
-            <a:r>
-              <a:t>of the instance running? A failover test result?" (B, A, C).</a:t>
-            </a:r>
-          </a:p>
-          <a:p>
-            <a:r>
-              <a:t>UoC/AT2 tie: PE 1 · PE 2 — the built artefacts are the evidence, assembled here; Appendices A/B/C</a:t>
-            </a:r>
-          </a:p>
-          <a:p>
-            <a:r>
-              <a:t>are the evidence home in the AT2 report.</a:t>
-            </a:r>
-          </a:p>
-        </p:txBody>
-      </p:sp>
-      <p:sp>
-        <p:nvSpPr>
-          <p:cNvPr id="4" name="Slide Number Placeholder 3"/>
-          <p:cNvSpPr>
-            <a:spLocks noGrp="1"/>
-          </p:cNvSpPr>
-          <p:nvPr>
-            <p:ph type="sldNum" idx="5" sz="quarter"/>
-          </p:nvPr>
-        </p:nvSpPr>
-        <p:spPr/>
-      </p:sp>
-    </p:spTree>
-  </p:cSld>
-  <p:clrMapOvr>
-    <a:masterClrMapping/>
-  </p:clrMapOvr>
-</p:notes>
-</file>
-
-<file path=ppt/notesSlides/notesSlide4.xml><?xml version="1.0" encoding="utf-8"?>
-<p:notes xmlns:a="http://schemas.openxmlformats.org/drawingml/2006/main" xmlns:p="http://schemas.openxmlformats.org/presentationml/2006/main" xmlns:r="http://schemas.openxmlformats.org/officeDocument/2006/relationships">
-  <p:cSld>
-    <p:spTree>
-      <p:nvGrpSpPr>
-        <p:cNvPr id="1" name=""/>
-        <p:cNvGrpSpPr/>
-        <p:nvPr/>
-      </p:nvGrpSpPr>
-      <p:grpSpPr>
-        <a:xfrm>
-          <a:off x="0" y="0"/>
-          <a:ext cx="0" cy="0"/>
-          <a:chOff x="0" y="0"/>
-          <a:chExt cx="0" cy="0"/>
-        </a:xfrm>
-      </p:grpSpPr>
-      <p:sp>
-        <p:nvSpPr>
-          <p:cNvPr id="2" name="Slide Image Placeholder 1"/>
-          <p:cNvSpPr>
-            <a:spLocks noGrp="1"/>
-          </p:cNvSpPr>
-          <p:nvPr>
-            <p:ph type="sldImg" idx="2"/>
-          </p:nvPr>
-        </p:nvSpPr>
-        <p:spPr/>
-      </p:sp>
-      <p:sp>
-        <p:nvSpPr>
-          <p:cNvPr id="3" name="Notes Placeholder 2"/>
-          <p:cNvSpPr>
-            <a:spLocks noGrp="1"/>
-          </p:cNvSpPr>
-          <p:nvPr>
-            <p:ph type="body" idx="3" sz="quarter"/>
-          </p:nvPr>
-        </p:nvSpPr>
-        <p:spPr/>
-        <p:txBody>
-          <a:bodyPr/>
-          <a:lstStyle/>
-          <a:p>
-            <a:r>
-              <a:t>The how-to just before the activity — the concrete steps, and the one time-critical warning.</a:t>
-            </a:r>
-          </a:p>
-          <a:p>
-            <a:r>
-              <a:t>• Gather every screenshot, export and test result captured across Topics 6–9.</a:t>
-            </a:r>
-          </a:p>
-          <a:p>
-            <a:r>
-              <a:t>• Sort into A / B / C; give each item a clear label and number.</a:t>
-            </a:r>
-          </a:p>
-          <a:p>
-            <a:r>
-              <a:t>• The accent line: note any gaps — and recapture WHILE THE LAB IS STILL STANDING.</a:t>
-            </a:r>
-          </a:p>
-          <a:p>
-            <a:r>
-              <a:t>Misconception to pre-empt: "I'll recapture it later." The lab is ephemeral — once it's torn down</a:t>
-            </a:r>
-          </a:p>
-          <a:p>
-            <a:r>
-              <a:t>the evidence is gone for good; recapture now, not next week.</a:t>
-            </a:r>
-          </a:p>
-          <a:p>
-            <a:r>
-              <a:t>Question to pose: "What's the one thing you can do today that you can't do after the lab closes?"</a:t>
-            </a:r>
-          </a:p>
-          <a:p>
-            <a:r>
-              <a:t>(recapture missing evidence).</a:t>
-            </a:r>
-          </a:p>
-          <a:p>
-            <a:r>
-              <a:t>UoC/AT2 tie: PC 4.3; this frames the Build-your-appendices activity that follows.</a:t>
-            </a:r>
-          </a:p>
-        </p:txBody>
-      </p:sp>
-      <p:sp>
-        <p:nvSpPr>
-          <p:cNvPr id="4" name="Slide Number Placeholder 3"/>
-          <p:cNvSpPr>
-            <a:spLocks noGrp="1"/>
-          </p:cNvSpPr>
-          <p:nvPr>
-            <p:ph type="sldNum" idx="5" sz="quarter"/>
-          </p:nvPr>
-        </p:nvSpPr>
-        <p:spPr/>
-      </p:sp>
-    </p:spTree>
-  </p:cSld>
-  <p:clrMapOvr>
-    <a:masterClrMapping/>
-  </p:clrMapOvr>
-</p:notes>
-</file>
-
-<file path=ppt/notesSlides/notesSlide5.xml><?xml version="1.0" encoding="utf-8"?>
-<p:notes xmlns:a="http://schemas.openxmlformats.org/drawingml/2006/main" xmlns:p="http://schemas.openxmlformats.org/presentationml/2006/main" xmlns:r="http://schemas.openxmlformats.org/officeDocument/2006/relationships">
-  <p:cSld>
-    <p:spTree>
-      <p:nvGrpSpPr>
-        <p:cNvPr id="1" name=""/>
-        <p:cNvGrpSpPr/>
-        <p:nvPr/>
-      </p:nvGrpSpPr>
-      <p:grpSpPr>
-        <a:xfrm>
-          <a:off x="0" y="0"/>
-          <a:ext cx="0" cy="0"/>
-          <a:chOff x="0" y="0"/>
-          <a:chExt cx="0" cy="0"/>
-        </a:xfrm>
-      </p:grpSpPr>
-      <p:sp>
-        <p:nvSpPr>
-          <p:cNvPr id="2" name="Slide Image Placeholder 1"/>
-          <p:cNvSpPr>
-            <a:spLocks noGrp="1"/>
-          </p:cNvSpPr>
-          <p:nvPr>
-            <p:ph type="sldImg" idx="2"/>
-          </p:nvPr>
-        </p:nvSpPr>
-        <p:spPr/>
-      </p:sp>
-      <p:sp>
-        <p:nvSpPr>
-          <p:cNvPr id="3" name="Notes Placeholder 2"/>
-          <p:cNvSpPr>
-            <a:spLocks noGrp="1"/>
-          </p:cNvSpPr>
-          <p:nvPr>
-            <p:ph type="body" idx="3" sz="quarter"/>
-          </p:nvPr>
-        </p:nvSpPr>
-        <p:spPr/>
-        <p:txBody>
-          <a:bodyPr/>
-          <a:lstStyle/>
-          <a:p>
-            <a:r>
-              <a:t>Facilitation — a filing/organising task, not a lecture. They've been capturing since Topic 6; now</a:t>
-            </a:r>
-          </a:p>
-          <a:p>
-            <a:r>
-              <a:t>they assemble it.</a:t>
-            </a:r>
-          </a:p>
-          <a:p>
-            <a:r>
-              <a:t>Tell students: "You've been capturing evidence since Topic 6 — now assemble it. Sort everything</a:t>
-            </a:r>
-          </a:p>
-          <a:p>
-            <a:r>
-              <a:t>into three appendices: screenshots, config exports, test evidence. Label and number every item so</a:t>
-            </a:r>
-          </a:p>
-          <a:p>
-            <a:r>
-              <a:t>your report can cite it. Flag anything missing and recapture it now, while the lab is up."</a:t>
-            </a:r>
-          </a:p>
-          <a:p>
-            <a:r>
-              <a:t>Steps (put on the board):</a:t>
-            </a:r>
-          </a:p>
-          <a:p>
-            <a:r>
-              <a:t>1. Gather all screenshots, exports and test results from Topics 6–9.</a:t>
-            </a:r>
-          </a:p>
-          <a:p>
-            <a:r>
-              <a:t>2. Sort into A (screenshots) / B (config exports) / C (test evidence).</a:t>
-            </a:r>
-          </a:p>
-          <a:p>
-            <a:r>
-              <a:t>3. Label and number each item.</a:t>
-            </a:r>
-          </a:p>
-          <a:p>
-            <a:r>
-              <a:t>4. List any gaps — and recapture them immediately.</a:t>
-            </a:r>
-          </a:p>
-          <a:p>
-            <a:r>
-              <a:t>Must produce: three organised appendices, every item labelled and numbered, gaps recaptured.</a:t>
-            </a:r>
-          </a:p>
-          <a:p>
-            <a:r>
-              <a:t>Timing: ~20 min. Where they get stuck: they discover they never captured something — that's the</a:t>
-            </a:r>
-          </a:p>
-          <a:p>
-            <a:r>
-              <a:t>point, not a failure; have them recapture live from the standing lab, don't let them fabricate it.</a:t>
-            </a:r>
-          </a:p>
-          <a:p>
-            <a:r>
-              <a:t>Share-back prompt: "What gap did you find — and could you still recapture it?"</a:t>
-            </a:r>
-          </a:p>
-          <a:p>
-            <a:r>
-              <a:t>No-leakage note: this is the PRACTICE engagement (Ledgerline); AT2 assembles the same appendices</a:t>
-            </a:r>
-          </a:p>
-          <a:p>
-            <a:r>
-              <a:t>for the assessed system (LMS) — comparable, not identical.</a:t>
-            </a:r>
-          </a:p>
-        </p:txBody>
-      </p:sp>
-      <p:sp>
-        <p:nvSpPr>
-          <p:cNvPr id="4" name="Slide Number Placeholder 3"/>
-          <p:cNvSpPr>
-            <a:spLocks noGrp="1"/>
-          </p:cNvSpPr>
-          <p:nvPr>
-            <p:ph type="sldNum" idx="5" sz="quarter"/>
-          </p:nvPr>
-        </p:nvSpPr>
-        <p:spPr/>
-      </p:sp>
-    </p:spTree>
-  </p:cSld>
-  <p:clrMapOvr>
-    <a:masterClrMapping/>
-  </p:clrMapOvr>
-</p:notes>
-</file>
-
-<file path=ppt/notesSlides/notesSlide6.xml><?xml version="1.0" encoding="utf-8"?>
-<p:notes xmlns:a="http://schemas.openxmlformats.org/drawingml/2006/main" xmlns:p="http://schemas.openxmlformats.org/presentationml/2006/main" xmlns:r="http://schemas.openxmlformats.org/officeDocument/2006/relationships">
-  <p:cSld>
-    <p:spTree>
-      <p:nvGrpSpPr>
-        <p:cNvPr id="1" name=""/>
-        <p:cNvGrpSpPr/>
-        <p:nvPr/>
-      </p:nvGrpSpPr>
-      <p:grpSpPr>
-        <a:xfrm>
-          <a:off x="0" y="0"/>
-          <a:ext cx="0" cy="0"/>
-          <a:chOff x="0" y="0"/>
-          <a:chExt cx="0" cy="0"/>
-        </a:xfrm>
-      </p:grpSpPr>
-      <p:sp>
-        <p:nvSpPr>
-          <p:cNvPr id="2" name="Slide Image Placeholder 1"/>
-          <p:cNvSpPr>
-            <a:spLocks noGrp="1"/>
-          </p:cNvSpPr>
-          <p:nvPr>
-            <p:ph type="sldImg" idx="2"/>
-          </p:nvPr>
-        </p:nvSpPr>
-        <p:spPr/>
-      </p:sp>
-      <p:sp>
-        <p:nvSpPr>
-          <p:cNvPr id="3" name="Notes Placeholder 2"/>
-          <p:cNvSpPr>
-            <a:spLocks noGrp="1"/>
-          </p:cNvSpPr>
-          <p:nvPr>
-            <p:ph type="body" idx="3" sz="quarter"/>
-          </p:nvPr>
-        </p:nvSpPr>
-        <p:spPr/>
-        <p:txBody>
-          <a:bodyPr/>
-          <a:lstStyle/>
-          <a:p>
-            <a:r>
-              <a:t>Opens C2 — the audience question before the structure. Who the report is for decides how it's</a:t>
-            </a:r>
-          </a:p>
-          <a:p>
-            <a:r>
-              <a:t>written.</a:t>
-            </a:r>
-          </a:p>
-          <a:p>
-            <a:r>
-              <a:t>• The report is for the people who will run and audit the system: YAT ICT and auditors.</a:t>
-            </a:r>
-          </a:p>
-          <a:p>
-            <a:r>
-              <a:t>• The accent line: clear, factual, traceable — every claim backed by an appendix reference.</a:t>
-            </a:r>
-          </a:p>
-          <a:p>
-            <a:r>
-              <a:t>• It's a record of what was built and why — not a diary of your day.</a:t>
-            </a:r>
-          </a:p>
-          <a:p>
-            <a:r>
-              <a:t>Misconception to pre-empt: "write it for the marker" / "write down everything I did." No — write</a:t>
-            </a:r>
-          </a:p>
-          <a:p>
-            <a:r>
-              <a:t>for the operator and auditor; relevance and traceability, not a blow-by-blow of your afternoon.</a:t>
-            </a:r>
-          </a:p>
-          <a:p>
-            <a:r>
-              <a:t>Question to pose: "The person reading this has to run the system at 2am when an alarm fires — what</a:t>
-            </a:r>
-          </a:p>
-          <a:p>
-            <a:r>
-              <a:t>do they need from your report, and what don't they care about?"</a:t>
-            </a:r>
-          </a:p>
-          <a:p>
-            <a:r>
-              <a:t>UoC/AT2 tie: PC 4.1 (document and communicate work to required personnel) — the audience IS the</a:t>
-            </a:r>
-          </a:p>
-          <a:p>
-            <a:r>
-              <a:t>"required personnel."</a:t>
-            </a:r>
-          </a:p>
-        </p:txBody>
-      </p:sp>
-      <p:sp>
-        <p:nvSpPr>
-          <p:cNvPr id="4" name="Slide Number Placeholder 3"/>
-          <p:cNvSpPr>
-            <a:spLocks noGrp="1"/>
-          </p:cNvSpPr>
-          <p:nvPr>
-            <p:ph type="sldNum" idx="5" sz="quarter"/>
-          </p:nvPr>
-        </p:nvSpPr>
-        <p:spPr/>
-      </p:sp>
-    </p:spTree>
-  </p:cSld>
-  <p:clrMapOvr>
-    <a:masterClrMapping/>
-  </p:clrMapOvr>
-</p:notes>
-</file>
-
-<file path=ppt/notesSlides/notesSlide7.xml><?xml version="1.0" encoding="utf-8"?>
-<p:notes xmlns:a="http://schemas.openxmlformats.org/drawingml/2006/main" xmlns:p="http://schemas.openxmlformats.org/presentationml/2006/main" xmlns:r="http://schemas.openxmlformats.org/officeDocument/2006/relationships">
-  <p:cSld>
-    <p:spTree>
-      <p:nvGrpSpPr>
-        <p:cNvPr id="1" name=""/>
-        <p:cNvGrpSpPr/>
-        <p:nvPr/>
-      </p:nvGrpSpPr>
-      <p:grpSpPr>
-        <a:xfrm>
-          <a:off x="0" y="0"/>
-          <a:ext cx="0" cy="0"/>
-          <a:chOff x="0" y="0"/>
-          <a:chExt cx="0" cy="0"/>
-        </a:xfrm>
-      </p:grpSpPr>
-      <p:sp>
-        <p:nvSpPr>
-          <p:cNvPr id="2" name="Slide Image Placeholder 1"/>
-          <p:cNvSpPr>
-            <a:spLocks noGrp="1"/>
-          </p:cNvSpPr>
-          <p:nvPr>
-            <p:ph type="sldImg" idx="2"/>
-          </p:nvPr>
-        </p:nvSpPr>
-        <p:spPr/>
-      </p:sp>
-      <p:sp>
-        <p:nvSpPr>
-          <p:cNvPr id="3" name="Notes Placeholder 2"/>
-          <p:cNvSpPr>
-            <a:spLocks noGrp="1"/>
-          </p:cNvSpPr>
-          <p:nvPr>
-            <p:ph type="body" idx="3" sz="quarter"/>
-          </p:nvPr>
-        </p:nvSpPr>
-        <p:spPr/>
-        <p:txBody>
-          <a:bodyPr/>
-          <a:lstStyle/>
-          <a:p>
-            <a:r>
-              <a:t>The template — the map of the seven sections. They write TO this; they don't invent structure.</a:t>
-            </a:r>
-          </a:p>
-          <a:p>
-            <a:r>
-              <a:t>• Read the sections: §1 Exec Summary · §2 Context · §3 Scope · §4 Build/Change Narrative ·</a:t>
-            </a:r>
-          </a:p>
-          <a:p>
-            <a:r>
-              <a:t>§5 Configuration Decisions · §6 Testing/Validation · §7 Operational Handover.</a:t>
-            </a:r>
-          </a:p>
-          <a:p>
-            <a:r>
-              <a:t>• Appendices A/B/C are referenced throughout — the structure and the evidence interlock.</a:t>
-            </a:r>
-          </a:p>
-          <a:p>
-            <a:r>
-              <a:t>• The point: same professional-writing discipline as AT1's Business Case, new document — the</a:t>
-            </a:r>
-          </a:p>
-          <a:p>
-            <a:r>
-              <a:t>assessor exemplar sets the standard.</a:t>
-            </a:r>
-          </a:p>
-          <a:p>
-            <a:r>
-              <a:t>Misconception to pre-empt: "I'll organise it my own way." No — the template IS the standard; a</a:t>
-            </a:r>
-          </a:p>
-          <a:p>
-            <a:r>
-              <a:t>report that doesn't follow it costs marks and confuses the reader.</a:t>
-            </a:r>
-          </a:p>
-          <a:p>
-            <a:r>
-              <a:t>Question to pose: "Which of these sections are you writing fresh today, and which are you dropping</a:t>
-            </a:r>
-          </a:p>
-          <a:p>
-            <a:r>
-              <a:t>in from work you already did?" (§5/§6 come from Topic 9 — leads to the next slides).</a:t>
-            </a:r>
-          </a:p>
-          <a:p>
-            <a:r>
-              <a:t>UoC/AT2 tie: PC 4.1; §1–§7 + Appendices A/B/C is the AT2 marking home — every criterion lives in it.</a:t>
-            </a:r>
-          </a:p>
-        </p:txBody>
-      </p:sp>
-      <p:sp>
-        <p:nvSpPr>
-          <p:cNvPr id="4" name="Slide Number Placeholder 3"/>
-          <p:cNvSpPr>
-            <a:spLocks noGrp="1"/>
-          </p:cNvSpPr>
-          <p:nvPr>
-            <p:ph type="sldNum" idx="5" sz="quarter"/>
-          </p:nvPr>
-        </p:nvSpPr>
-        <p:spPr/>
-      </p:sp>
-    </p:spTree>
-  </p:cSld>
-  <p:clrMapOvr>
-    <a:masterClrMapping/>
-  </p:clrMapOvr>
-</p:notes>
-</file>
-
-<file path=ppt/notesSlides/notesSlide8.xml><?xml version="1.0" encoding="utf-8"?>
-<p:notes xmlns:a="http://schemas.openxmlformats.org/drawingml/2006/main" xmlns:p="http://schemas.openxmlformats.org/presentationml/2006/main" xmlns:r="http://schemas.openxmlformats.org/officeDocument/2006/relationships">
-  <p:cSld>
-    <p:spTree>
-      <p:nvGrpSpPr>
-        <p:cNvPr id="1" name=""/>
-        <p:cNvGrpSpPr/>
-        <p:nvPr/>
-      </p:nvGrpSpPr>
-      <p:grpSpPr>
-        <a:xfrm>
-          <a:off x="0" y="0"/>
-          <a:ext cx="0" cy="0"/>
-          <a:chOff x="0" y="0"/>
-          <a:chExt cx="0" cy="0"/>
-        </a:xfrm>
-      </p:grpSpPr>
-      <p:sp>
-        <p:nvSpPr>
-          <p:cNvPr id="2" name="Slide Image Placeholder 1"/>
-          <p:cNvSpPr>
-            <a:spLocks noGrp="1"/>
-          </p:cNvSpPr>
-          <p:nvPr>
-            <p:ph type="sldImg" idx="2"/>
-          </p:nvPr>
-        </p:nvSpPr>
-        <p:spPr/>
-      </p:sp>
-      <p:sp>
-        <p:nvSpPr>
-          <p:cNvPr id="3" name="Notes Placeholder 2"/>
-          <p:cNvSpPr>
-            <a:spLocks noGrp="1"/>
-          </p:cNvSpPr>
-          <p:nvPr>
-            <p:ph type="body" idx="3" sz="quarter"/>
-          </p:nvPr>
-        </p:nvSpPr>
-        <p:spPr/>
-        <p:txBody>
-          <a:bodyPr/>
-          <a:lstStyle/>
-          <a:p>
-            <a:r>
-              <a:t>The biggest writing section — teach it as a factual, ordered record, not a story.</a:t>
-            </a:r>
-          </a:p>
-          <a:p>
-            <a:r>
-              <a:t>• Walk the tier order: foundation → network → compute → elasticity → database → storage →</a:t>
-            </a:r>
-          </a:p>
-          <a:p>
-            <a:r>
-              <a:t>monitoring. That order is the spine of §4.</a:t>
-            </a:r>
-          </a:p>
-          <a:p>
-            <a:r>
-              <a:t>• For each tier: state what you built and what changed from the baseline design.</a:t>
-            </a:r>
-          </a:p>
-          <a:p>
-            <a:r>
-              <a:t>• The accent line: cross-reference the Appendix A screenshots and Appendix B exports that prove it.</a:t>
-            </a:r>
-          </a:p>
-          <a:p>
-            <a:r>
-              <a:t>• Factual and specific — not "I set up the server", but what, where, and with which settings.</a:t>
-            </a:r>
-          </a:p>
-          <a:p>
-            <a:r>
-              <a:t>Misconception to pre-empt: "the narrative is the story of my day." No — it's a factual tier-by-tier</a:t>
-            </a:r>
-          </a:p>
-          <a:p>
-            <a:r>
-              <a:t>record, and every claim is cross-referenced to evidence.</a:t>
-            </a:r>
-          </a:p>
-          <a:p>
-            <a:r>
-              <a:t>Question to pose: "'I configured the database.' What three things does an auditor still not know</a:t>
-            </a:r>
-          </a:p>
-          <a:p>
-            <a:r>
-              <a:t>from that sentence?" (which engine, what settings, where's the proof).</a:t>
-            </a:r>
-          </a:p>
-          <a:p>
-            <a:r>
-              <a:t>UoC/AT2 tie: PC 4.1; §4 is the A-build criterion in AT2 — the written proof of what was built.</a:t>
-            </a:r>
-          </a:p>
-        </p:txBody>
-      </p:sp>
-      <p:sp>
-        <p:nvSpPr>
-          <p:cNvPr id="4" name="Slide Number Placeholder 3"/>
-          <p:cNvSpPr>
-            <a:spLocks noGrp="1"/>
-          </p:cNvSpPr>
-          <p:nvPr>
-            <p:ph type="sldNum" idx="5" sz="quarter"/>
-          </p:nvPr>
-        </p:nvSpPr>
-        <p:spPr/>
-      </p:sp>
-    </p:spTree>
-  </p:cSld>
-  <p:clrMapOvr>
-    <a:masterClrMapping/>
-  </p:clrMapOvr>
-</p:notes>
-</file>
-
-<file path=ppt/notesSlides/notesSlide9.xml><?xml version="1.0" encoding="utf-8"?>
-<p:notes xmlns:a="http://schemas.openxmlformats.org/drawingml/2006/main" xmlns:p="http://schemas.openxmlformats.org/presentationml/2006/main" xmlns:r="http://schemas.openxmlformats.org/officeDocument/2006/relationships">
-  <p:cSld>
-    <p:spTree>
-      <p:nvGrpSpPr>
-        <p:cNvPr id="1" name=""/>
-        <p:cNvGrpSpPr/>
-        <p:nvPr/>
-      </p:nvGrpSpPr>
-      <p:grpSpPr>
-        <a:xfrm>
-          <a:off x="0" y="0"/>
-          <a:ext cx="0" cy="0"/>
-          <a:chOff x="0" y="0"/>
-          <a:chExt cx="0" cy="0"/>
-        </a:xfrm>
-      </p:grpSpPr>
-      <p:sp>
-        <p:nvSpPr>
-          <p:cNvPr id="2" name="Slide Image Placeholder 1"/>
-          <p:cNvSpPr>
-            <a:spLocks noGrp="1"/>
-          </p:cNvSpPr>
-          <p:nvPr>
-            <p:ph type="sldImg" idx="2"/>
-          </p:nvPr>
-        </p:nvSpPr>
-        <p:spPr/>
-      </p:sp>
-      <p:sp>
-        <p:nvSpPr>
-          <p:cNvPr id="3" name="Notes Placeholder 2"/>
-          <p:cNvSpPr>
-            <a:spLocks noGrp="1"/>
-          </p:cNvSpPr>
-          <p:nvPr>
-            <p:ph type="body" idx="3" sz="quarter"/>
-          </p:nvPr>
-        </p:nvSpPr>
-        <p:spPr/>
-        <p:txBody>
-          <a:bodyPr/>
-          <a:lstStyle/>
-          <a:p>
-            <a:r>
-              <a:t>The payoff of C2 — the least NEW writing, the most marks. Their Topic 9 work lands straight here.</a:t>
-            </a:r>
-          </a:p>
-          <a:p>
-            <a:r>
-              <a:t>• §5 Configuration Decisions = the Topic 9 C1–C8 justifications — drop in the rationales already</a:t>
-            </a:r>
-          </a:p>
-          <a:p>
-            <a:r>
-              <a:t>written.</a:t>
-            </a:r>
-          </a:p>
-          <a:p>
-            <a:r>
-              <a:t>• The accent line: §6 Testing/Validation = the Topic 9 validation results, each referencing</a:t>
-            </a:r>
-          </a:p>
-          <a:p>
-            <a:r>
-              <a:t>Appendix C.</a:t>
-            </a:r>
-          </a:p>
-          <a:p>
-            <a:r>
-              <a:t>• The point: this is where the marked judgement (justify) and the evidence of a working build come</a:t>
-            </a:r>
-          </a:p>
-          <a:p>
-            <a:r>
-              <a:t>together in one place.</a:t>
-            </a:r>
-          </a:p>
-          <a:p>
-            <a:r>
-              <a:t>Misconception to pre-empt: "I have to write §5 and §6 from scratch." No — they wrote these in</a:t>
-            </a:r>
-          </a:p>
-          <a:p>
-            <a:r>
-              <a:t>Topic 9; this is assembling and cross-referencing, not re-authoring.</a:t>
-            </a:r>
-          </a:p>
-          <a:p>
-            <a:r>
-              <a:t>Question to pose: "Your Topic 9 justification for the managed database — which section does it go</a:t>
-            </a:r>
-          </a:p>
-          <a:p>
-            <a:r>
-              <a:t>in, and what appendix backs the testing beside it?" (§5; and §6 references Appendix C).</a:t>
-            </a:r>
-          </a:p>
-          <a:p>
-            <a:r>
-              <a:t>UoC/AT2 tie: PC 4.1; §5 = the A4 criterion, §6 = A-build in AT2.</a:t>
+              <a:t>Activity = the assessment run sheet's Q1–Q6 and the handover task, rehearsed on the practice build.</a:t>
+            </a:r>
+          </a:p>
+          <a:p>
+            <a:r>
+              <a:t>The failure mode is textbook definitions — circulate and ask "but in yours?" every time.</a:t>
+            </a:r>
+          </a:p>
+          <a:p>
+            <a:r>
+              <a:t>Some questions have no matching teaching yet; see the gap review before delivering this.</a:t>
             </a:r>
           </a:p>
         </p:txBody>
@@ -5463,7 +3790,7 @@
                 </a:solidFill>
                 <a:latin typeface="Roboto"/>
               </a:rPr>
-              <a:t>Evidencing &amp; documenting</a:t>
+              <a:t>Proving it works, and handing it over</a:t>
             </a:r>
           </a:p>
           <a:p>
@@ -5479,7 +3806,7 @@
                 </a:solidFill>
                 <a:latin typeface="Roboto Light"/>
               </a:rPr>
-              <a:t>Turn everything you've built into the Deployment Report</a:t>
+              <a:t/>
             </a:r>
           </a:p>
         </p:txBody>
@@ -5541,7 +3868,7 @@
     <p:bg>
       <p:bgPr>
         <a:solidFill>
-          <a:srgbClr val="FFFFFF"/>
+          <a:srgbClr val="F9F9F9"/>
         </a:solidFill>
         <a:effectLst/>
       </p:bgPr>
@@ -5561,8 +3888,8 @@
         </p:nvSpPr>
         <p:spPr>
           <a:xfrm>
-            <a:off x="640080" y="457200"/>
-            <a:ext cx="10881360" cy="960120"/>
+            <a:off x="640080" y="548640"/>
+            <a:ext cx="10881360" cy="1097280"/>
           </a:xfrm>
           <a:prstGeom prst="rect">
             <a:avLst/>
@@ -5576,13 +3903,13 @@
           <a:lstStyle/>
           <a:p>
             <a:r>
-              <a:rPr sz="2800" b="1" i="0">
+              <a:rPr sz="3200" b="1" i="0">
                 <a:solidFill>
                   <a:srgbClr val="2A2929"/>
                 </a:solidFill>
                 <a:latin typeface="Roboto"/>
               </a:rPr>
-              <a:t>Technical documentation — who reads it</a:t>
+              <a:t>Key takeaways</a:t>
             </a:r>
           </a:p>
           <a:p>
@@ -5592,13 +3919,13 @@
               </a:spcBef>
             </a:pPr>
             <a:r>
-              <a:rPr sz="1800" b="0" i="1">
-                <a:solidFill>
-                  <a:srgbClr val="D68E10"/>
-                </a:solidFill>
-                <a:latin typeface="Roboto Light"/>
-              </a:rPr>
-              <a:t>write for the reader</a:t>
+              <a:rPr sz="1800" b="1" i="0">
+                <a:solidFill>
+                  <a:srgbClr val="92268F"/>
+                </a:solidFill>
+                <a:latin typeface="Roboto"/>
+              </a:rPr>
+              <a:t>Section 1 · Proving the paths</a:t>
             </a:r>
           </a:p>
         </p:txBody>
@@ -5611,14 +3938,14 @@
         </p:nvSpPr>
         <p:spPr>
           <a:xfrm>
-            <a:off x="658368" y="1371600"/>
+            <a:off x="658368" y="1600200"/>
             <a:ext cx="1463040" cy="50800"/>
           </a:xfrm>
           <a:prstGeom prst="rect">
             <a:avLst/>
           </a:prstGeom>
           <a:solidFill>
-            <a:srgbClr val="27B5CE"/>
+            <a:srgbClr val="92268F"/>
           </a:solidFill>
           <a:ln>
             <a:noFill/>
@@ -5649,117 +3976,47 @@
       </p:sp>
       <p:sp>
         <p:nvSpPr>
-          <p:cNvPr id="4" name="TextBox 3"/>
-          <p:cNvSpPr txBox="1"/>
-          <p:nvPr/>
-        </p:nvSpPr>
-        <p:spPr>
-          <a:xfrm>
-            <a:off x="658368" y="1691640"/>
-            <a:ext cx="10881360" cy="4480560"/>
-          </a:xfrm>
-          <a:prstGeom prst="rect">
-            <a:avLst/>
-          </a:prstGeom>
-          <a:noFill/>
-        </p:spPr>
-        <p:txBody>
-          <a:bodyPr wrap="square" anchor="ctr" lIns="0" rIns="0" tIns="0" bIns="0">
-            <a:spAutoFit/>
-          </a:bodyPr>
-          <a:lstStyle/>
-          <a:p>
-            <a:pPr marL="0" indent="0">
-              <a:lnSpc>
-                <a:spcPct val="105000"/>
-              </a:lnSpc>
-              <a:spcBef>
-                <a:spcPts val="0"/>
-              </a:spcBef>
-              <a:spcAft>
-                <a:spcPts val="1000"/>
-              </a:spcAft>
-            </a:pPr>
-            <a:r>
-              <a:rPr sz="2400" b="1" i="0">
-                <a:solidFill>
-                  <a:srgbClr val="EDAB0C"/>
-                </a:solidFill>
-                <a:latin typeface="Roboto"/>
-              </a:rPr>
-              <a:t>■  </a:t>
-            </a:r>
-            <a:r>
-              <a:rPr sz="2400" b="0" i="0">
-                <a:solidFill>
-                  <a:srgbClr val="2A2929"/>
-                </a:solidFill>
-                <a:latin typeface="Roboto"/>
-              </a:rPr>
-              <a:t>The Deployment Report is written for the people who will run and audit the system — YAT ICT and auditors.</a:t>
-            </a:r>
-          </a:p>
-          <a:p>
-            <a:pPr marL="0" indent="0">
-              <a:lnSpc>
-                <a:spcPct val="105000"/>
-              </a:lnSpc>
-              <a:spcBef>
-                <a:spcPts val="0"/>
-              </a:spcBef>
-              <a:spcAft>
-                <a:spcPts val="1000"/>
-              </a:spcAft>
-            </a:pPr>
-            <a:r>
-              <a:rPr sz="2400" b="1" i="0">
-                <a:solidFill>
-                  <a:srgbClr val="EDAB0C"/>
-                </a:solidFill>
-                <a:latin typeface="Roboto"/>
-              </a:rPr>
-              <a:t>■  </a:t>
-            </a:r>
-            <a:r>
-              <a:rPr sz="2400" b="0" i="0">
-                <a:solidFill>
-                  <a:srgbClr val="2A2929"/>
-                </a:solidFill>
-                <a:latin typeface="Roboto"/>
-              </a:rPr>
-              <a:t>Clear, factual, traceable — every claim backed by an appendix reference.</a:t>
-            </a:r>
-          </a:p>
-          <a:p>
-            <a:pPr marL="0" indent="0">
-              <a:lnSpc>
-                <a:spcPct val="105000"/>
-              </a:lnSpc>
-              <a:spcBef>
-                <a:spcPts val="0"/>
-              </a:spcBef>
-              <a:spcAft>
-                <a:spcPts val="1000"/>
-              </a:spcAft>
-            </a:pPr>
-            <a:r>
-              <a:rPr sz="2400" b="1" i="0">
-                <a:solidFill>
-                  <a:srgbClr val="EDAB0C"/>
-                </a:solidFill>
-                <a:latin typeface="Roboto"/>
-              </a:rPr>
-              <a:t>■  </a:t>
-            </a:r>
-            <a:r>
-              <a:rPr sz="2400" b="0" i="0">
-                <a:solidFill>
-                  <a:srgbClr val="2A2929"/>
-                </a:solidFill>
-                <a:latin typeface="Roboto"/>
-              </a:rPr>
-              <a:t>It's a record of what was built and why — not a diary of your day.</a:t>
-            </a:r>
+          <p:cNvPr id="4" name="Rectangle 3"/>
+          <p:cNvSpPr/>
+          <p:nvPr/>
+        </p:nvSpPr>
+        <p:spPr>
+          <a:xfrm>
+            <a:off x="640080" y="1965960"/>
+            <a:ext cx="10927080" cy="841248"/>
+          </a:xfrm>
+          <a:prstGeom prst="rect">
+            <a:avLst/>
+          </a:prstGeom>
+          <a:solidFill>
+            <a:srgbClr val="FFFFFF"/>
+          </a:solidFill>
+          <a:ln w="12700">
+            <a:solidFill>
+              <a:srgbClr val="CCCCCC"/>
+            </a:solidFill>
+          </a:ln>
+          <a:effectLst/>
+        </p:spPr>
+        <p:style>
+          <a:lnRef idx="1">
+            <a:schemeClr val="accent1"/>
+          </a:lnRef>
+          <a:fillRef idx="3">
+            <a:schemeClr val="accent1"/>
+          </a:fillRef>
+          <a:effectRef idx="2">
+            <a:schemeClr val="accent1"/>
+          </a:effectRef>
+          <a:fontRef idx="minor">
+            <a:schemeClr val="lt1"/>
+          </a:fontRef>
+        </p:style>
+        <p:txBody>
+          <a:bodyPr rtlCol="0" anchor="ctr"/>
+          <a:lstStyle/>
+          <a:p>
+            <a:pPr algn="ctr"/>
           </a:p>
         </p:txBody>
       </p:sp>
@@ -5771,14 +4028,14 @@
         </p:nvSpPr>
         <p:spPr>
           <a:xfrm>
-            <a:off x="0" y="6565392"/>
-            <a:ext cx="12191695" cy="38100"/>
+            <a:off x="640080" y="1965960"/>
+            <a:ext cx="109728" cy="841248"/>
           </a:xfrm>
           <a:prstGeom prst="rect">
             <a:avLst/>
           </a:prstGeom>
           <a:solidFill>
-            <a:srgbClr val="27B5CE"/>
+            <a:srgbClr val="92268F"/>
           </a:solidFill>
           <a:ln>
             <a:noFill/>
@@ -5815,6 +4072,347 @@
         </p:nvSpPr>
         <p:spPr>
           <a:xfrm>
+            <a:off x="960120" y="1965960"/>
+            <a:ext cx="10424160" cy="841248"/>
+          </a:xfrm>
+          <a:prstGeom prst="rect">
+            <a:avLst/>
+          </a:prstGeom>
+          <a:noFill/>
+        </p:spPr>
+        <p:txBody>
+          <a:bodyPr wrap="square" anchor="ctr" lIns="0" rIns="0" tIns="0" bIns="0">
+            <a:spAutoFit/>
+          </a:bodyPr>
+          <a:lstStyle/>
+          <a:p>
+            <a:pPr>
+              <a:lnSpc>
+                <a:spcPct val="100000"/>
+              </a:lnSpc>
+            </a:pPr>
+            <a:r>
+              <a:rPr sz="1700" b="0" i="0">
+                <a:solidFill>
+                  <a:srgbClr val="2A2929"/>
+                </a:solidFill>
+                <a:latin typeface="Roboto"/>
+              </a:rPr>
+              <a:t>Building is not confirming; deploying without error proves very little.</a:t>
+            </a:r>
+          </a:p>
+        </p:txBody>
+      </p:sp>
+      <p:sp>
+        <p:nvSpPr>
+          <p:cNvPr id="7" name="Rectangle 6"/>
+          <p:cNvSpPr/>
+          <p:nvPr/>
+        </p:nvSpPr>
+        <p:spPr>
+          <a:xfrm>
+            <a:off x="640080" y="2916936"/>
+            <a:ext cx="10927080" cy="841248"/>
+          </a:xfrm>
+          <a:prstGeom prst="rect">
+            <a:avLst/>
+          </a:prstGeom>
+          <a:solidFill>
+            <a:srgbClr val="FFFFFF"/>
+          </a:solidFill>
+          <a:ln w="12700">
+            <a:solidFill>
+              <a:srgbClr val="CCCCCC"/>
+            </a:solidFill>
+          </a:ln>
+          <a:effectLst/>
+        </p:spPr>
+        <p:style>
+          <a:lnRef idx="1">
+            <a:schemeClr val="accent1"/>
+          </a:lnRef>
+          <a:fillRef idx="3">
+            <a:schemeClr val="accent1"/>
+          </a:fillRef>
+          <a:effectRef idx="2">
+            <a:schemeClr val="accent1"/>
+          </a:effectRef>
+          <a:fontRef idx="minor">
+            <a:schemeClr val="lt1"/>
+          </a:fontRef>
+        </p:style>
+        <p:txBody>
+          <a:bodyPr rtlCol="0" anchor="ctr"/>
+          <a:lstStyle/>
+          <a:p>
+            <a:pPr algn="ctr"/>
+          </a:p>
+        </p:txBody>
+      </p:sp>
+      <p:sp>
+        <p:nvSpPr>
+          <p:cNvPr id="8" name="Rectangle 7"/>
+          <p:cNvSpPr/>
+          <p:nvPr/>
+        </p:nvSpPr>
+        <p:spPr>
+          <a:xfrm>
+            <a:off x="640080" y="2916936"/>
+            <a:ext cx="109728" cy="841248"/>
+          </a:xfrm>
+          <a:prstGeom prst="rect">
+            <a:avLst/>
+          </a:prstGeom>
+          <a:solidFill>
+            <a:srgbClr val="92268F"/>
+          </a:solidFill>
+          <a:ln>
+            <a:noFill/>
+          </a:ln>
+          <a:effectLst/>
+        </p:spPr>
+        <p:style>
+          <a:lnRef idx="1">
+            <a:schemeClr val="accent1"/>
+          </a:lnRef>
+          <a:fillRef idx="3">
+            <a:schemeClr val="accent1"/>
+          </a:fillRef>
+          <a:effectRef idx="2">
+            <a:schemeClr val="accent1"/>
+          </a:effectRef>
+          <a:fontRef idx="minor">
+            <a:schemeClr val="lt1"/>
+          </a:fontRef>
+        </p:style>
+        <p:txBody>
+          <a:bodyPr rtlCol="0" anchor="ctr"/>
+          <a:lstStyle/>
+          <a:p>
+            <a:pPr algn="ctr"/>
+          </a:p>
+        </p:txBody>
+      </p:sp>
+      <p:sp>
+        <p:nvSpPr>
+          <p:cNvPr id="9" name="TextBox 8"/>
+          <p:cNvSpPr txBox="1"/>
+          <p:nvPr/>
+        </p:nvSpPr>
+        <p:spPr>
+          <a:xfrm>
+            <a:off x="960120" y="2916936"/>
+            <a:ext cx="10424160" cy="841248"/>
+          </a:xfrm>
+          <a:prstGeom prst="rect">
+            <a:avLst/>
+          </a:prstGeom>
+          <a:noFill/>
+        </p:spPr>
+        <p:txBody>
+          <a:bodyPr wrap="square" anchor="ctr" lIns="0" rIns="0" tIns="0" bIns="0">
+            <a:spAutoFit/>
+          </a:bodyPr>
+          <a:lstStyle/>
+          <a:p>
+            <a:pPr>
+              <a:lnSpc>
+                <a:spcPct val="100000"/>
+              </a:lnSpc>
+            </a:pPr>
+            <a:r>
+              <a:rPr sz="1700" b="0" i="0">
+                <a:solidFill>
+                  <a:srgbClr val="2A2929"/>
+                </a:solidFill>
+                <a:latin typeface="Roboto"/>
+              </a:rPr>
+              <a:t>Prove the paths that should work and the ones that should not.</a:t>
+            </a:r>
+          </a:p>
+        </p:txBody>
+      </p:sp>
+      <p:sp>
+        <p:nvSpPr>
+          <p:cNvPr id="10" name="Rectangle 9"/>
+          <p:cNvSpPr/>
+          <p:nvPr/>
+        </p:nvSpPr>
+        <p:spPr>
+          <a:xfrm>
+            <a:off x="640080" y="3867912"/>
+            <a:ext cx="10927080" cy="841248"/>
+          </a:xfrm>
+          <a:prstGeom prst="rect">
+            <a:avLst/>
+          </a:prstGeom>
+          <a:solidFill>
+            <a:srgbClr val="FFFFFF"/>
+          </a:solidFill>
+          <a:ln w="12700">
+            <a:solidFill>
+              <a:srgbClr val="CCCCCC"/>
+            </a:solidFill>
+          </a:ln>
+          <a:effectLst/>
+        </p:spPr>
+        <p:style>
+          <a:lnRef idx="1">
+            <a:schemeClr val="accent1"/>
+          </a:lnRef>
+          <a:fillRef idx="3">
+            <a:schemeClr val="accent1"/>
+          </a:fillRef>
+          <a:effectRef idx="2">
+            <a:schemeClr val="accent1"/>
+          </a:effectRef>
+          <a:fontRef idx="minor">
+            <a:schemeClr val="lt1"/>
+          </a:fontRef>
+        </p:style>
+        <p:txBody>
+          <a:bodyPr rtlCol="0" anchor="ctr"/>
+          <a:lstStyle/>
+          <a:p>
+            <a:pPr algn="ctr"/>
+          </a:p>
+        </p:txBody>
+      </p:sp>
+      <p:sp>
+        <p:nvSpPr>
+          <p:cNvPr id="11" name="Rectangle 10"/>
+          <p:cNvSpPr/>
+          <p:nvPr/>
+        </p:nvSpPr>
+        <p:spPr>
+          <a:xfrm>
+            <a:off x="640080" y="3867912"/>
+            <a:ext cx="109728" cy="841248"/>
+          </a:xfrm>
+          <a:prstGeom prst="rect">
+            <a:avLst/>
+          </a:prstGeom>
+          <a:solidFill>
+            <a:srgbClr val="92268F"/>
+          </a:solidFill>
+          <a:ln>
+            <a:noFill/>
+          </a:ln>
+          <a:effectLst/>
+        </p:spPr>
+        <p:style>
+          <a:lnRef idx="1">
+            <a:schemeClr val="accent1"/>
+          </a:lnRef>
+          <a:fillRef idx="3">
+            <a:schemeClr val="accent1"/>
+          </a:fillRef>
+          <a:effectRef idx="2">
+            <a:schemeClr val="accent1"/>
+          </a:effectRef>
+          <a:fontRef idx="minor">
+            <a:schemeClr val="lt1"/>
+          </a:fontRef>
+        </p:style>
+        <p:txBody>
+          <a:bodyPr rtlCol="0" anchor="ctr"/>
+          <a:lstStyle/>
+          <a:p>
+            <a:pPr algn="ctr"/>
+          </a:p>
+        </p:txBody>
+      </p:sp>
+      <p:sp>
+        <p:nvSpPr>
+          <p:cNvPr id="12" name="TextBox 11"/>
+          <p:cNvSpPr txBox="1"/>
+          <p:nvPr/>
+        </p:nvSpPr>
+        <p:spPr>
+          <a:xfrm>
+            <a:off x="960120" y="3867912"/>
+            <a:ext cx="10424160" cy="841248"/>
+          </a:xfrm>
+          <a:prstGeom prst="rect">
+            <a:avLst/>
+          </a:prstGeom>
+          <a:noFill/>
+        </p:spPr>
+        <p:txBody>
+          <a:bodyPr wrap="square" anchor="ctr" lIns="0" rIns="0" tIns="0" bIns="0">
+            <a:spAutoFit/>
+          </a:bodyPr>
+          <a:lstStyle/>
+          <a:p>
+            <a:pPr>
+              <a:lnSpc>
+                <a:spcPct val="100000"/>
+              </a:lnSpc>
+            </a:pPr>
+            <a:r>
+              <a:rPr sz="1700" b="0" i="0">
+                <a:solidFill>
+                  <a:srgbClr val="2A2929"/>
+                </a:solidFill>
+                <a:latin typeface="Roboto"/>
+              </a:rPr>
+              <a:t>Read the error before changing anything, then retest and record the fix.</a:t>
+            </a:r>
+          </a:p>
+        </p:txBody>
+      </p:sp>
+      <p:sp>
+        <p:nvSpPr>
+          <p:cNvPr id="13" name="Rectangle 12"/>
+          <p:cNvSpPr/>
+          <p:nvPr/>
+        </p:nvSpPr>
+        <p:spPr>
+          <a:xfrm>
+            <a:off x="0" y="6565392"/>
+            <a:ext cx="12191695" cy="38100"/>
+          </a:xfrm>
+          <a:prstGeom prst="rect">
+            <a:avLst/>
+          </a:prstGeom>
+          <a:solidFill>
+            <a:srgbClr val="92268F"/>
+          </a:solidFill>
+          <a:ln>
+            <a:noFill/>
+          </a:ln>
+          <a:effectLst/>
+        </p:spPr>
+        <p:style>
+          <a:lnRef idx="1">
+            <a:schemeClr val="accent1"/>
+          </a:lnRef>
+          <a:fillRef idx="3">
+            <a:schemeClr val="accent1"/>
+          </a:fillRef>
+          <a:effectRef idx="2">
+            <a:schemeClr val="accent1"/>
+          </a:effectRef>
+          <a:fontRef idx="minor">
+            <a:schemeClr val="lt1"/>
+          </a:fontRef>
+        </p:style>
+        <p:txBody>
+          <a:bodyPr rtlCol="0" anchor="ctr"/>
+          <a:lstStyle/>
+          <a:p>
+            <a:pPr algn="ctr"/>
+          </a:p>
+        </p:txBody>
+      </p:sp>
+      <p:sp>
+        <p:nvSpPr>
+          <p:cNvPr id="14" name="TextBox 13"/>
+          <p:cNvSpPr txBox="1"/>
+          <p:nvPr/>
+        </p:nvSpPr>
+        <p:spPr>
+          <a:xfrm>
             <a:off x="502920" y="6400800"/>
             <a:ext cx="5486400" cy="320040"/>
           </a:xfrm>
@@ -5852,7 +4450,7 @@
       </p:sp>
       <p:sp>
         <p:nvSpPr>
-          <p:cNvPr id="7" name="TextBox 6"/>
+          <p:cNvPr id="15" name="TextBox 14"/>
           <p:cNvSpPr txBox="1"/>
           <p:nvPr/>
         </p:nvSpPr>
@@ -5880,7 +4478,7 @@
                 </a:solidFill>
                 <a:latin typeface="Roboto"/>
               </a:rPr>
-              <a:t>7</a:t>
+              <a:t>8</a:t>
             </a:r>
           </a:p>
         </p:txBody>
@@ -5913,64 +4511,14 @@
       <p:grpSpPr/>
       <p:sp>
         <p:nvSpPr>
-          <p:cNvPr id="2" name="TextBox 1"/>
-          <p:cNvSpPr txBox="1"/>
-          <p:nvPr/>
-        </p:nvSpPr>
-        <p:spPr>
-          <a:xfrm>
-            <a:off x="640080" y="457200"/>
-            <a:ext cx="10881360" cy="960120"/>
-          </a:xfrm>
-          <a:prstGeom prst="rect">
-            <a:avLst/>
-          </a:prstGeom>
-          <a:noFill/>
-        </p:spPr>
-        <p:txBody>
-          <a:bodyPr wrap="square" anchor="t" lIns="0" rIns="0" tIns="0" bIns="0">
-            <a:spAutoFit/>
-          </a:bodyPr>
-          <a:lstStyle/>
-          <a:p>
-            <a:r>
-              <a:rPr sz="2800" b="1" i="0">
-                <a:solidFill>
-                  <a:srgbClr val="2A2929"/>
-                </a:solidFill>
-                <a:latin typeface="Roboto"/>
-              </a:rPr>
-              <a:t>The report structure</a:t>
-            </a:r>
-          </a:p>
-          <a:p>
-            <a:pPr>
-              <a:spcBef>
-                <a:spcPts val="200"/>
-              </a:spcBef>
-            </a:pPr>
-            <a:r>
-              <a:rPr sz="1800" b="0" i="1">
-                <a:solidFill>
-                  <a:srgbClr val="D68E10"/>
-                </a:solidFill>
-                <a:latin typeface="Roboto Light"/>
-              </a:rPr>
-              <a:t>the template</a:t>
-            </a:r>
-          </a:p>
-        </p:txBody>
-      </p:sp>
-      <p:sp>
-        <p:nvSpPr>
-          <p:cNvPr id="3" name="Rectangle 2"/>
+          <p:cNvPr id="2" name="Rectangle 1"/>
           <p:cNvSpPr/>
           <p:nvPr/>
         </p:nvSpPr>
         <p:spPr>
           <a:xfrm>
-            <a:off x="658368" y="1371600"/>
-            <a:ext cx="1463040" cy="50800"/>
+            <a:off x="0" y="0"/>
+            <a:ext cx="3931920" cy="6858000"/>
           </a:xfrm>
           <a:prstGeom prst="rect">
             <a:avLst/>
@@ -6007,14 +4555,48 @@
       </p:sp>
       <p:sp>
         <p:nvSpPr>
+          <p:cNvPr id="3" name="TextBox 2"/>
+          <p:cNvSpPr txBox="1"/>
+          <p:nvPr/>
+        </p:nvSpPr>
+        <p:spPr>
+          <a:xfrm>
+            <a:off x="365760" y="2103120"/>
+            <a:ext cx="3291840" cy="2194560"/>
+          </a:xfrm>
+          <a:prstGeom prst="rect">
+            <a:avLst/>
+          </a:prstGeom>
+          <a:noFill/>
+        </p:spPr>
+        <p:txBody>
+          <a:bodyPr wrap="square" anchor="t" lIns="0" rIns="0" tIns="0" bIns="0">
+            <a:spAutoFit/>
+          </a:bodyPr>
+          <a:lstStyle/>
+          <a:p>
+            <a:r>
+              <a:rPr sz="13000" b="1" i="0">
+                <a:solidFill>
+                  <a:srgbClr val="FFFFFF"/>
+                </a:solidFill>
+                <a:latin typeface="Roboto"/>
+              </a:rPr>
+              <a:t>02</a:t>
+            </a:r>
+          </a:p>
+        </p:txBody>
+      </p:sp>
+      <p:sp>
+        <p:nvSpPr>
           <p:cNvPr id="4" name="TextBox 3"/>
           <p:cNvSpPr txBox="1"/>
           <p:nvPr/>
         </p:nvSpPr>
         <p:spPr>
           <a:xfrm>
-            <a:off x="658368" y="1691640"/>
-            <a:ext cx="10881360" cy="4480560"/>
+            <a:off x="4480560" y="2468880"/>
+            <a:ext cx="7132320" cy="2194560"/>
           </a:xfrm>
           <a:prstGeom prst="rect">
             <a:avLst/>
@@ -6022,132 +4604,51 @@
           <a:noFill/>
         </p:spPr>
         <p:txBody>
-          <a:bodyPr wrap="square" anchor="ctr" lIns="0" rIns="0" tIns="0" bIns="0">
+          <a:bodyPr wrap="square" anchor="t" lIns="0" rIns="0" tIns="0" bIns="0">
             <a:spAutoFit/>
           </a:bodyPr>
           <a:lstStyle/>
           <a:p>
-            <a:pPr marL="0" indent="0">
-              <a:lnSpc>
-                <a:spcPct val="105000"/>
-              </a:lnSpc>
+            <a:r>
+              <a:rPr sz="1600" b="1" i="0">
+                <a:solidFill>
+                  <a:srgbClr val="27B5CE"/>
+                </a:solidFill>
+                <a:latin typeface="Roboto"/>
+              </a:rPr>
+              <a:t>SECTION</a:t>
+            </a:r>
+          </a:p>
+          <a:p>
+            <a:pPr>
               <a:spcBef>
-                <a:spcPts val="0"/>
+                <a:spcPts val="600"/>
               </a:spcBef>
-              <a:spcAft>
+            </a:pPr>
+            <a:r>
+              <a:rPr sz="3800" b="1" i="0">
+                <a:solidFill>
+                  <a:srgbClr val="2A2929"/>
+                </a:solidFill>
+                <a:latin typeface="Roboto"/>
+              </a:rPr>
+              <a:t>Proving it scales</a:t>
+            </a:r>
+          </a:p>
+          <a:p>
+            <a:pPr>
+              <a:spcBef>
                 <a:spcPts val="1000"/>
-              </a:spcAft>
+              </a:spcBef>
             </a:pPr>
             <a:r>
-              <a:rPr sz="2400" b="1" i="0">
-                <a:solidFill>
-                  <a:srgbClr val="EDAB0C"/>
-                </a:solidFill>
-                <a:latin typeface="Roboto"/>
-              </a:rPr>
-              <a:t>■  </a:t>
-            </a:r>
-            <a:r>
-              <a:rPr sz="2400" b="0" i="0">
-                <a:solidFill>
-                  <a:srgbClr val="2A2929"/>
-                </a:solidFill>
-                <a:latin typeface="Roboto"/>
-              </a:rPr>
-              <a:t>§1 Executive Summary · §2 Engagement Context · §3 Scope of Deployment.</a:t>
-            </a:r>
-          </a:p>
-          <a:p>
-            <a:pPr marL="0" indent="0">
-              <a:lnSpc>
-                <a:spcPct val="105000"/>
-              </a:lnSpc>
-              <a:spcBef>
-                <a:spcPts val="0"/>
-              </a:spcBef>
-              <a:spcAft>
-                <a:spcPts val="1000"/>
-              </a:spcAft>
-            </a:pPr>
-            <a:r>
-              <a:rPr sz="2400" b="1" i="0">
-                <a:solidFill>
-                  <a:srgbClr val="EDAB0C"/>
-                </a:solidFill>
-                <a:latin typeface="Roboto"/>
-              </a:rPr>
-              <a:t>■  </a:t>
-            </a:r>
-            <a:r>
-              <a:rPr sz="2400" b="0" i="0">
-                <a:solidFill>
-                  <a:srgbClr val="2A2929"/>
-                </a:solidFill>
-                <a:latin typeface="Roboto"/>
-              </a:rPr>
-              <a:t>§4 Build / Change Narrative · §5 Configuration Decisions · §6 Testing, Simulation &amp; Validation.</a:t>
-            </a:r>
-          </a:p>
-          <a:p>
-            <a:pPr marL="0" indent="0">
-              <a:lnSpc>
-                <a:spcPct val="105000"/>
-              </a:lnSpc>
-              <a:spcBef>
-                <a:spcPts val="0"/>
-              </a:spcBef>
-              <a:spcAft>
-                <a:spcPts val="1000"/>
-              </a:spcAft>
-            </a:pPr>
-            <a:r>
-              <a:rPr sz="2400" b="1" i="0">
-                <a:solidFill>
-                  <a:srgbClr val="EDAB0C"/>
-                </a:solidFill>
-                <a:latin typeface="Roboto"/>
-              </a:rPr>
-              <a:t>■  </a:t>
-            </a:r>
-            <a:r>
-              <a:rPr sz="2400" b="0" i="0">
-                <a:solidFill>
-                  <a:srgbClr val="2A2929"/>
-                </a:solidFill>
-                <a:latin typeface="Roboto"/>
-              </a:rPr>
-              <a:t>§7 Operational Handover.</a:t>
-            </a:r>
-          </a:p>
-          <a:p>
-            <a:pPr marL="0" indent="0">
-              <a:lnSpc>
-                <a:spcPct val="105000"/>
-              </a:lnSpc>
-              <a:spcBef>
-                <a:spcPts val="0"/>
-              </a:spcBef>
-              <a:spcAft>
-                <a:spcPts val="1000"/>
-              </a:spcAft>
-            </a:pPr>
-            <a:r>
-              <a:rPr sz="2400" b="1" i="0">
-                <a:solidFill>
-                  <a:srgbClr val="EDAB0C"/>
-                </a:solidFill>
-                <a:latin typeface="Roboto"/>
-              </a:rPr>
-              <a:t>■  </a:t>
-            </a:r>
-            <a:r>
-              <a:rPr sz="2400" b="0" i="0">
-                <a:solidFill>
-                  <a:srgbClr val="2A2929"/>
-                </a:solidFill>
-                <a:latin typeface="Roboto"/>
-              </a:rPr>
-              <a:t>Appendices A (screenshots) · B (config exports) · C (test evidence) — referenced throughout.</a:t>
+              <a:rPr sz="2000" b="0" i="1">
+                <a:solidFill>
+                  <a:srgbClr val="484848"/>
+                </a:solidFill>
+                <a:latin typeface="Roboto Light"/>
+              </a:rPr>
+              <a:t>make it happen on purpose</a:t>
             </a:r>
           </a:p>
         </p:txBody>
@@ -6269,7 +4770,7 @@
                 </a:solidFill>
                 <a:latin typeface="Roboto"/>
               </a:rPr>
-              <a:t>8</a:t>
+              <a:t/>
             </a:r>
           </a:p>
         </p:txBody>
@@ -6329,7 +4830,7 @@
                 </a:solidFill>
                 <a:latin typeface="Roboto"/>
               </a:rPr>
-              <a:t>The Build / Change Narrative (§4)</a:t>
+              <a:t>Watching a scaling policy work</a:t>
             </a:r>
           </a:p>
           <a:p>
@@ -6345,7 +4846,7 @@
                 </a:solidFill>
                 <a:latin typeface="Roboto Light"/>
               </a:rPr>
-              <a:t>what you built, tier by tier</a:t>
+              <a:t>out is fast, in is slow</a:t>
             </a:r>
           </a:p>
         </p:txBody>
@@ -6443,7 +4944,7 @@
                 </a:solidFill>
                 <a:latin typeface="Roboto"/>
               </a:rPr>
-              <a:t>Walk the build in order: foundation → network → compute → elasticity → database → storage → monitoring.</a:t>
+              <a:t>A policy that has never been triggered is a claim, not a capability.</a:t>
             </a:r>
           </a:p>
           <a:p>
@@ -6474,7 +4975,7 @@
                 </a:solidFill>
                 <a:latin typeface="Roboto"/>
               </a:rPr>
-              <a:t>For each, state what you built and what changed from the baseline design.</a:t>
+              <a:t>You make it act by moving the target so the current reading is on the wrong side of it, then putting the target back.</a:t>
             </a:r>
           </a:p>
           <a:p>
@@ -6505,7 +5006,7 @@
                 </a:solidFill>
                 <a:latin typeface="Roboto"/>
               </a:rPr>
-              <a:t>Cross-reference the Appendix A screenshots and Appendix B exports that prove it.</a:t>
+              <a:t>Scale out is quick. Scale in is deliberately much slower, so the platform does not thrash.</a:t>
             </a:r>
           </a:p>
           <a:p>
@@ -6536,7 +5037,7 @@
                 </a:solidFill>
                 <a:latin typeface="Roboto"/>
               </a:rPr>
-              <a:t>Factual and specific — not “I set up the server”, but what, where, and with which settings.</a:t>
+              <a:t>Capture both directions — the group adding and the group removing.</a:t>
             </a:r>
           </a:p>
         </p:txBody>
@@ -6691,64 +5192,14 @@
       <p:grpSpPr/>
       <p:sp>
         <p:nvSpPr>
-          <p:cNvPr id="2" name="TextBox 1"/>
-          <p:cNvSpPr txBox="1"/>
-          <p:nvPr/>
-        </p:nvSpPr>
-        <p:spPr>
-          <a:xfrm>
-            <a:off x="640080" y="457200"/>
-            <a:ext cx="10881360" cy="960120"/>
-          </a:xfrm>
-          <a:prstGeom prst="rect">
-            <a:avLst/>
-          </a:prstGeom>
-          <a:noFill/>
-        </p:spPr>
-        <p:txBody>
-          <a:bodyPr wrap="square" anchor="t" lIns="0" rIns="0" tIns="0" bIns="0">
-            <a:spAutoFit/>
-          </a:bodyPr>
-          <a:lstStyle/>
-          <a:p>
-            <a:r>
-              <a:rPr sz="2800" b="1" i="0">
-                <a:solidFill>
-                  <a:srgbClr val="2A2929"/>
-                </a:solidFill>
-                <a:latin typeface="Roboto"/>
-              </a:rPr>
-              <a:t>§5 Configuration Decisions &amp; §6 Testing</a:t>
-            </a:r>
-          </a:p>
-          <a:p>
-            <a:pPr>
-              <a:spcBef>
-                <a:spcPts val="200"/>
-              </a:spcBef>
-            </a:pPr>
-            <a:r>
-              <a:rPr sz="1800" b="0" i="1">
-                <a:solidFill>
-                  <a:srgbClr val="D68E10"/>
-                </a:solidFill>
-                <a:latin typeface="Roboto Light"/>
-              </a:rPr>
-              <a:t>your Topic 9 work lands here</a:t>
-            </a:r>
-          </a:p>
-        </p:txBody>
-      </p:sp>
-      <p:sp>
-        <p:nvSpPr>
-          <p:cNvPr id="3" name="Rectangle 2"/>
+          <p:cNvPr id="2" name="Rectangle 1"/>
           <p:cNvSpPr/>
           <p:nvPr/>
         </p:nvSpPr>
         <p:spPr>
           <a:xfrm>
-            <a:off x="658368" y="1371600"/>
-            <a:ext cx="1463040" cy="50800"/>
+            <a:off x="0" y="0"/>
+            <a:ext cx="12191695" cy="1234440"/>
           </a:xfrm>
           <a:prstGeom prst="rect">
             <a:avLst/>
@@ -6785,14 +5236,67 @@
       </p:sp>
       <p:sp>
         <p:nvSpPr>
+          <p:cNvPr id="3" name="Rounded Rectangle 2"/>
+          <p:cNvSpPr/>
+          <p:nvPr/>
+        </p:nvSpPr>
+        <p:spPr>
+          <a:xfrm>
+            <a:off x="640080" y="384048"/>
+            <a:ext cx="1691640" cy="457200"/>
+          </a:xfrm>
+          <a:prstGeom prst="roundRect">
+            <a:avLst/>
+          </a:prstGeom>
+          <a:solidFill>
+            <a:srgbClr val="2A2929"/>
+          </a:solidFill>
+          <a:ln>
+            <a:noFill/>
+          </a:ln>
+          <a:effectLst/>
+        </p:spPr>
+        <p:style>
+          <a:lnRef idx="1">
+            <a:schemeClr val="accent1"/>
+          </a:lnRef>
+          <a:fillRef idx="3">
+            <a:schemeClr val="accent1"/>
+          </a:fillRef>
+          <a:effectRef idx="2">
+            <a:schemeClr val="accent1"/>
+          </a:effectRef>
+          <a:fontRef idx="minor">
+            <a:schemeClr val="lt1"/>
+          </a:fontRef>
+        </p:style>
+        <p:txBody>
+          <a:bodyPr rtlCol="0" anchor="ctr"/>
+          <a:lstStyle/>
+          <a:p>
+            <a:pPr algn="ctr"/>
+            <a:r>
+              <a:rPr sz="1400" b="1" i="0">
+                <a:solidFill>
+                  <a:srgbClr val="FBB900"/>
+                </a:solidFill>
+                <a:latin typeface="Roboto"/>
+              </a:rPr>
+              <a:t>ACTIVITY</a:t>
+            </a:r>
+          </a:p>
+        </p:txBody>
+      </p:sp>
+      <p:sp>
+        <p:nvSpPr>
           <p:cNvPr id="4" name="TextBox 3"/>
           <p:cNvSpPr txBox="1"/>
           <p:nvPr/>
         </p:nvSpPr>
         <p:spPr>
           <a:xfrm>
-            <a:off x="658368" y="1691640"/>
-            <a:ext cx="10881360" cy="4480560"/>
+            <a:off x="2560320" y="310896"/>
+            <a:ext cx="8961120" cy="685800"/>
           </a:xfrm>
           <a:prstGeom prst="rect">
             <a:avLst/>
@@ -6801,6 +5305,40 @@
         </p:spPr>
         <p:txBody>
           <a:bodyPr wrap="square" anchor="ctr" lIns="0" rIns="0" tIns="0" bIns="0">
+            <a:spAutoFit/>
+          </a:bodyPr>
+          <a:lstStyle/>
+          <a:p>
+            <a:r>
+              <a:rPr sz="2600" b="1" i="0">
+                <a:solidFill>
+                  <a:srgbClr val="FFFFFF"/>
+                </a:solidFill>
+                <a:latin typeface="Roboto"/>
+              </a:rPr>
+              <a:t>Drive a scale event</a:t>
+            </a:r>
+          </a:p>
+        </p:txBody>
+      </p:sp>
+      <p:sp>
+        <p:nvSpPr>
+          <p:cNvPr id="5" name="TextBox 4"/>
+          <p:cNvSpPr txBox="1"/>
+          <p:nvPr/>
+        </p:nvSpPr>
+        <p:spPr>
+          <a:xfrm>
+            <a:off x="658368" y="1554480"/>
+            <a:ext cx="10881360" cy="4297680"/>
+          </a:xfrm>
+          <a:prstGeom prst="rect">
+            <a:avLst/>
+          </a:prstGeom>
+          <a:noFill/>
+        </p:spPr>
+        <p:txBody>
+          <a:bodyPr wrap="square" anchor="t" lIns="0" rIns="0" tIns="0" bIns="0">
             <a:spAutoFit/>
           </a:bodyPr>
           <a:lstStyle/>
@@ -6817,7 +5355,7 @@
               </a:spcAft>
             </a:pPr>
             <a:r>
-              <a:rPr sz="2400" b="1" i="0">
+              <a:rPr sz="1700" b="1" i="0">
                 <a:solidFill>
                   <a:srgbClr val="EDAB0C"/>
                 </a:solidFill>
@@ -6826,13 +5364,13 @@
               <a:t>■  </a:t>
             </a:r>
             <a:r>
-              <a:rPr sz="2400" b="0" i="0">
+              <a:rPr sz="1700" b="0" i="0">
                 <a:solidFill>
                   <a:srgbClr val="2A2929"/>
                 </a:solidFill>
                 <a:latin typeface="Roboto"/>
               </a:rPr>
-              <a:t>§5 Configuration Decisions = your Topic 9 C1–C8 justifications — drop in the rationales you wrote.</a:t>
+              <a:t>Run sheet — test T5.</a:t>
             </a:r>
           </a:p>
           <a:p>
@@ -6848,7 +5386,7 @@
               </a:spcAft>
             </a:pPr>
             <a:r>
-              <a:rPr sz="2400" b="1" i="0">
+              <a:rPr sz="1700" b="1" i="0">
                 <a:solidFill>
                   <a:srgbClr val="EDAB0C"/>
                 </a:solidFill>
@@ -6857,51 +5395,100 @@
               <a:t>■  </a:t>
             </a:r>
             <a:r>
-              <a:rPr sz="2400" b="0" i="0">
+              <a:rPr sz="1700" b="0" i="0">
                 <a:solidFill>
                   <a:srgbClr val="2A2929"/>
                 </a:solidFill>
                 <a:latin typeface="Roboto"/>
               </a:rPr>
-              <a:t>§6 Testing/Validation = your Topic 9 validation results, each referencing Appendix C.</a:t>
-            </a:r>
-          </a:p>
-          <a:p>
-            <a:pPr marL="0" indent="0">
-              <a:lnSpc>
-                <a:spcPct val="105000"/>
-              </a:lnSpc>
-              <a:spcBef>
-                <a:spcPts val="0"/>
-              </a:spcBef>
-              <a:spcAft>
-                <a:spcPts val="1000"/>
-              </a:spcAft>
-            </a:pPr>
-            <a:r>
-              <a:rPr sz="2400" b="1" i="0">
-                <a:solidFill>
-                  <a:srgbClr val="EDAB0C"/>
-                </a:solidFill>
-                <a:latin typeface="Roboto"/>
-              </a:rPr>
-              <a:t>■  </a:t>
-            </a:r>
-            <a:r>
-              <a:rPr sz="2400" b="0" i="0">
+              <a:t>Read the current metric, move the policy target to force the group to add a server, watch it, then reverse it and watch the group come back down.</a:t>
+            </a:r>
+          </a:p>
+        </p:txBody>
+      </p:sp>
+      <p:sp>
+        <p:nvSpPr>
+          <p:cNvPr id="6" name="Rounded Rectangle 5"/>
+          <p:cNvSpPr/>
+          <p:nvPr/>
+        </p:nvSpPr>
+        <p:spPr>
+          <a:xfrm>
+            <a:off x="640080" y="5897880"/>
+            <a:ext cx="4023360" cy="457200"/>
+          </a:xfrm>
+          <a:prstGeom prst="roundRect">
+            <a:avLst/>
+          </a:prstGeom>
+          <a:solidFill>
+            <a:srgbClr val="F9F9F9"/>
+          </a:solidFill>
+          <a:ln w="12700">
+            <a:solidFill>
+              <a:srgbClr val="CCCCCC"/>
+            </a:solidFill>
+          </a:ln>
+          <a:effectLst/>
+        </p:spPr>
+        <p:style>
+          <a:lnRef idx="1">
+            <a:schemeClr val="accent1"/>
+          </a:lnRef>
+          <a:fillRef idx="3">
+            <a:schemeClr val="accent1"/>
+          </a:fillRef>
+          <a:effectRef idx="2">
+            <a:schemeClr val="accent1"/>
+          </a:effectRef>
+          <a:fontRef idx="minor">
+            <a:schemeClr val="lt1"/>
+          </a:fontRef>
+        </p:style>
+        <p:txBody>
+          <a:bodyPr rtlCol="0" anchor="ctr"/>
+          <a:lstStyle/>
+          <a:p>
+            <a:pPr algn="ctr"/>
+          </a:p>
+        </p:txBody>
+      </p:sp>
+      <p:sp>
+        <p:nvSpPr>
+          <p:cNvPr id="7" name="TextBox 6"/>
+          <p:cNvSpPr txBox="1"/>
+          <p:nvPr/>
+        </p:nvSpPr>
+        <p:spPr>
+          <a:xfrm>
+            <a:off x="822960" y="5943600"/>
+            <a:ext cx="3657600" cy="365760"/>
+          </a:xfrm>
+          <a:prstGeom prst="rect">
+            <a:avLst/>
+          </a:prstGeom>
+          <a:noFill/>
+        </p:spPr>
+        <p:txBody>
+          <a:bodyPr wrap="square" anchor="ctr" lIns="0" rIns="0" tIns="0" bIns="0">
+            <a:spAutoFit/>
+          </a:bodyPr>
+          <a:lstStyle/>
+          <a:p>
+            <a:r>
+              <a:rPr sz="1500" b="1" i="0">
                 <a:solidFill>
                   <a:srgbClr val="2A2929"/>
                 </a:solidFill>
                 <a:latin typeface="Roboto"/>
               </a:rPr>
-              <a:t>This is where the marked judgement (justify) and the evidence of a working build come together.</a:t>
-            </a:r>
-          </a:p>
-        </p:txBody>
-      </p:sp>
-      <p:sp>
-        <p:nvSpPr>
-          <p:cNvPr id="5" name="Rectangle 4"/>
+              <a:t>⏱  ~20 min</a:t>
+            </a:r>
+          </a:p>
+        </p:txBody>
+      </p:sp>
+      <p:sp>
+        <p:nvSpPr>
+          <p:cNvPr id="8" name="Rectangle 7"/>
           <p:cNvSpPr/>
           <p:nvPr/>
         </p:nvSpPr>
@@ -6945,7 +5532,7 @@
       </p:sp>
       <p:sp>
         <p:nvSpPr>
-          <p:cNvPr id="6" name="TextBox 5"/>
+          <p:cNvPr id="9" name="TextBox 8"/>
           <p:cNvSpPr txBox="1"/>
           <p:nvPr/>
         </p:nvSpPr>
@@ -6988,7 +5575,7 @@
       </p:sp>
       <p:sp>
         <p:nvSpPr>
-          <p:cNvPr id="7" name="TextBox 6"/>
+          <p:cNvPr id="10" name="TextBox 9"/>
           <p:cNvSpPr txBox="1"/>
           <p:nvPr/>
         </p:nvSpPr>
@@ -7035,7 +5622,7 @@
     <p:bg>
       <p:bgPr>
         <a:solidFill>
-          <a:srgbClr val="FFFFFF"/>
+          <a:srgbClr val="F9F9F9"/>
         </a:solidFill>
         <a:effectLst/>
       </p:bgPr>
@@ -7055,8 +5642,8 @@
         </p:nvSpPr>
         <p:spPr>
           <a:xfrm>
-            <a:off x="640080" y="457200"/>
-            <a:ext cx="10881360" cy="960120"/>
+            <a:off x="640080" y="548640"/>
+            <a:ext cx="10881360" cy="1097280"/>
           </a:xfrm>
           <a:prstGeom prst="rect">
             <a:avLst/>
@@ -7070,13 +5657,13 @@
           <a:lstStyle/>
           <a:p>
             <a:r>
-              <a:rPr sz="2800" b="1" i="0">
+              <a:rPr sz="3200" b="1" i="0">
                 <a:solidFill>
                   <a:srgbClr val="2A2929"/>
                 </a:solidFill>
                 <a:latin typeface="Roboto"/>
               </a:rPr>
-              <a:t>§1–§3 and §7</a:t>
+              <a:t>Key takeaways</a:t>
             </a:r>
           </a:p>
           <a:p>
@@ -7086,13 +5673,13 @@
               </a:spcBef>
             </a:pPr>
             <a:r>
-              <a:rPr sz="1800" b="0" i="1">
-                <a:solidFill>
-                  <a:srgbClr val="D68E10"/>
-                </a:solidFill>
-                <a:latin typeface="Roboto Light"/>
-              </a:rPr>
-              <a:t>frame it and hand it over</a:t>
+              <a:rPr sz="1800" b="1" i="0">
+                <a:solidFill>
+                  <a:srgbClr val="27B5CE"/>
+                </a:solidFill>
+                <a:latin typeface="Roboto"/>
+              </a:rPr>
+              <a:t>Section 2 · Scaling</a:t>
             </a:r>
           </a:p>
         </p:txBody>
@@ -7105,7 +5692,7 @@
         </p:nvSpPr>
         <p:spPr>
           <a:xfrm>
-            <a:off x="658368" y="1371600"/>
+            <a:off x="658368" y="1600200"/>
             <a:ext cx="1463040" cy="50800"/>
           </a:xfrm>
           <a:prstGeom prst="rect">
@@ -7143,117 +5730,47 @@
       </p:sp>
       <p:sp>
         <p:nvSpPr>
-          <p:cNvPr id="4" name="TextBox 3"/>
-          <p:cNvSpPr txBox="1"/>
-          <p:nvPr/>
-        </p:nvSpPr>
-        <p:spPr>
-          <a:xfrm>
-            <a:off x="658368" y="1691640"/>
-            <a:ext cx="10881360" cy="4480560"/>
-          </a:xfrm>
-          <a:prstGeom prst="rect">
-            <a:avLst/>
-          </a:prstGeom>
-          <a:noFill/>
-        </p:spPr>
-        <p:txBody>
-          <a:bodyPr wrap="square" anchor="ctr" lIns="0" rIns="0" tIns="0" bIns="0">
-            <a:spAutoFit/>
-          </a:bodyPr>
-          <a:lstStyle/>
-          <a:p>
-            <a:pPr marL="0" indent="0">
-              <a:lnSpc>
-                <a:spcPct val="105000"/>
-              </a:lnSpc>
-              <a:spcBef>
-                <a:spcPts val="0"/>
-              </a:spcBef>
-              <a:spcAft>
-                <a:spcPts val="1000"/>
-              </a:spcAft>
-            </a:pPr>
-            <a:r>
-              <a:rPr sz="2400" b="1" i="0">
-                <a:solidFill>
-                  <a:srgbClr val="EDAB0C"/>
-                </a:solidFill>
-                <a:latin typeface="Roboto"/>
-              </a:rPr>
-              <a:t>■  </a:t>
-            </a:r>
-            <a:r>
-              <a:rPr sz="2400" b="0" i="0">
-                <a:solidFill>
-                  <a:srgbClr val="2A2929"/>
-                </a:solidFill>
-                <a:latin typeface="Roboto"/>
-              </a:rPr>
-              <a:t>§2 Context + §3 Scope — what the engagement was, why, and what's in / out of this build.</a:t>
-            </a:r>
-          </a:p>
-          <a:p>
-            <a:pPr marL="0" indent="0">
-              <a:lnSpc>
-                <a:spcPct val="105000"/>
-              </a:lnSpc>
-              <a:spcBef>
-                <a:spcPts val="0"/>
-              </a:spcBef>
-              <a:spcAft>
-                <a:spcPts val="1000"/>
-              </a:spcAft>
-            </a:pPr>
-            <a:r>
-              <a:rPr sz="2400" b="1" i="0">
-                <a:solidFill>
-                  <a:srgbClr val="EDAB0C"/>
-                </a:solidFill>
-                <a:latin typeface="Roboto"/>
-              </a:rPr>
-              <a:t>■  </a:t>
-            </a:r>
-            <a:r>
-              <a:rPr sz="2400" b="0" i="0">
-                <a:solidFill>
-                  <a:srgbClr val="2A2929"/>
-                </a:solidFill>
-                <a:latin typeface="Roboto"/>
-              </a:rPr>
-              <a:t>§7 Operational Handover — what YAT ICT now owns and how to run it (alarms, backups, access).</a:t>
-            </a:r>
-          </a:p>
-          <a:p>
-            <a:pPr marL="0" indent="0">
-              <a:lnSpc>
-                <a:spcPct val="105000"/>
-              </a:lnSpc>
-              <a:spcBef>
-                <a:spcPts val="0"/>
-              </a:spcBef>
-              <a:spcAft>
-                <a:spcPts val="1000"/>
-              </a:spcAft>
-            </a:pPr>
-            <a:r>
-              <a:rPr sz="2400" b="1" i="0">
-                <a:solidFill>
-                  <a:srgbClr val="EDAB0C"/>
-                </a:solidFill>
-                <a:latin typeface="Roboto"/>
-              </a:rPr>
-              <a:t>■  </a:t>
-            </a:r>
-            <a:r>
-              <a:rPr sz="2400" b="0" i="0">
-                <a:solidFill>
-                  <a:srgbClr val="2A2929"/>
-                </a:solidFill>
-                <a:latin typeface="Roboto"/>
-              </a:rPr>
-              <a:t>§1 Executive Summary — write it last; a short, plain summary for a busy reader.</a:t>
-            </a:r>
+          <p:cNvPr id="4" name="Rectangle 3"/>
+          <p:cNvSpPr/>
+          <p:nvPr/>
+        </p:nvSpPr>
+        <p:spPr>
+          <a:xfrm>
+            <a:off x="640080" y="1965960"/>
+            <a:ext cx="10927080" cy="841248"/>
+          </a:xfrm>
+          <a:prstGeom prst="rect">
+            <a:avLst/>
+          </a:prstGeom>
+          <a:solidFill>
+            <a:srgbClr val="FFFFFF"/>
+          </a:solidFill>
+          <a:ln w="12700">
+            <a:solidFill>
+              <a:srgbClr val="CCCCCC"/>
+            </a:solidFill>
+          </a:ln>
+          <a:effectLst/>
+        </p:spPr>
+        <p:style>
+          <a:lnRef idx="1">
+            <a:schemeClr val="accent1"/>
+          </a:lnRef>
+          <a:fillRef idx="3">
+            <a:schemeClr val="accent1"/>
+          </a:fillRef>
+          <a:effectRef idx="2">
+            <a:schemeClr val="accent1"/>
+          </a:effectRef>
+          <a:fontRef idx="minor">
+            <a:schemeClr val="lt1"/>
+          </a:fontRef>
+        </p:style>
+        <p:txBody>
+          <a:bodyPr rtlCol="0" anchor="ctr"/>
+          <a:lstStyle/>
+          <a:p>
+            <a:pPr algn="ctr"/>
           </a:p>
         </p:txBody>
       </p:sp>
@@ -7265,8 +5782,8 @@
         </p:nvSpPr>
         <p:spPr>
           <a:xfrm>
-            <a:off x="0" y="6565392"/>
-            <a:ext cx="12191695" cy="38100"/>
+            <a:off x="640080" y="1965960"/>
+            <a:ext cx="109728" cy="841248"/>
           </a:xfrm>
           <a:prstGeom prst="rect">
             <a:avLst/>
@@ -7309,6 +5826,347 @@
         </p:nvSpPr>
         <p:spPr>
           <a:xfrm>
+            <a:off x="960120" y="1965960"/>
+            <a:ext cx="10424160" cy="841248"/>
+          </a:xfrm>
+          <a:prstGeom prst="rect">
+            <a:avLst/>
+          </a:prstGeom>
+          <a:noFill/>
+        </p:spPr>
+        <p:txBody>
+          <a:bodyPr wrap="square" anchor="ctr" lIns="0" rIns="0" tIns="0" bIns="0">
+            <a:spAutoFit/>
+          </a:bodyPr>
+          <a:lstStyle/>
+          <a:p>
+            <a:pPr>
+              <a:lnSpc>
+                <a:spcPct val="100000"/>
+              </a:lnSpc>
+            </a:pPr>
+            <a:r>
+              <a:rPr sz="1700" b="0" i="0">
+                <a:solidFill>
+                  <a:srgbClr val="2A2929"/>
+                </a:solidFill>
+                <a:latin typeface="Roboto"/>
+              </a:rPr>
+              <a:t>An untriggered policy is a claim.</a:t>
+            </a:r>
+          </a:p>
+        </p:txBody>
+      </p:sp>
+      <p:sp>
+        <p:nvSpPr>
+          <p:cNvPr id="7" name="Rectangle 6"/>
+          <p:cNvSpPr/>
+          <p:nvPr/>
+        </p:nvSpPr>
+        <p:spPr>
+          <a:xfrm>
+            <a:off x="640080" y="2916936"/>
+            <a:ext cx="10927080" cy="841248"/>
+          </a:xfrm>
+          <a:prstGeom prst="rect">
+            <a:avLst/>
+          </a:prstGeom>
+          <a:solidFill>
+            <a:srgbClr val="FFFFFF"/>
+          </a:solidFill>
+          <a:ln w="12700">
+            <a:solidFill>
+              <a:srgbClr val="CCCCCC"/>
+            </a:solidFill>
+          </a:ln>
+          <a:effectLst/>
+        </p:spPr>
+        <p:style>
+          <a:lnRef idx="1">
+            <a:schemeClr val="accent1"/>
+          </a:lnRef>
+          <a:fillRef idx="3">
+            <a:schemeClr val="accent1"/>
+          </a:fillRef>
+          <a:effectRef idx="2">
+            <a:schemeClr val="accent1"/>
+          </a:effectRef>
+          <a:fontRef idx="minor">
+            <a:schemeClr val="lt1"/>
+          </a:fontRef>
+        </p:style>
+        <p:txBody>
+          <a:bodyPr rtlCol="0" anchor="ctr"/>
+          <a:lstStyle/>
+          <a:p>
+            <a:pPr algn="ctr"/>
+          </a:p>
+        </p:txBody>
+      </p:sp>
+      <p:sp>
+        <p:nvSpPr>
+          <p:cNvPr id="8" name="Rectangle 7"/>
+          <p:cNvSpPr/>
+          <p:nvPr/>
+        </p:nvSpPr>
+        <p:spPr>
+          <a:xfrm>
+            <a:off x="640080" y="2916936"/>
+            <a:ext cx="109728" cy="841248"/>
+          </a:xfrm>
+          <a:prstGeom prst="rect">
+            <a:avLst/>
+          </a:prstGeom>
+          <a:solidFill>
+            <a:srgbClr val="27B5CE"/>
+          </a:solidFill>
+          <a:ln>
+            <a:noFill/>
+          </a:ln>
+          <a:effectLst/>
+        </p:spPr>
+        <p:style>
+          <a:lnRef idx="1">
+            <a:schemeClr val="accent1"/>
+          </a:lnRef>
+          <a:fillRef idx="3">
+            <a:schemeClr val="accent1"/>
+          </a:fillRef>
+          <a:effectRef idx="2">
+            <a:schemeClr val="accent1"/>
+          </a:effectRef>
+          <a:fontRef idx="minor">
+            <a:schemeClr val="lt1"/>
+          </a:fontRef>
+        </p:style>
+        <p:txBody>
+          <a:bodyPr rtlCol="0" anchor="ctr"/>
+          <a:lstStyle/>
+          <a:p>
+            <a:pPr algn="ctr"/>
+          </a:p>
+        </p:txBody>
+      </p:sp>
+      <p:sp>
+        <p:nvSpPr>
+          <p:cNvPr id="9" name="TextBox 8"/>
+          <p:cNvSpPr txBox="1"/>
+          <p:nvPr/>
+        </p:nvSpPr>
+        <p:spPr>
+          <a:xfrm>
+            <a:off x="960120" y="2916936"/>
+            <a:ext cx="10424160" cy="841248"/>
+          </a:xfrm>
+          <a:prstGeom prst="rect">
+            <a:avLst/>
+          </a:prstGeom>
+          <a:noFill/>
+        </p:spPr>
+        <p:txBody>
+          <a:bodyPr wrap="square" anchor="ctr" lIns="0" rIns="0" tIns="0" bIns="0">
+            <a:spAutoFit/>
+          </a:bodyPr>
+          <a:lstStyle/>
+          <a:p>
+            <a:pPr>
+              <a:lnSpc>
+                <a:spcPct val="100000"/>
+              </a:lnSpc>
+            </a:pPr>
+            <a:r>
+              <a:rPr sz="1700" b="0" i="0">
+                <a:solidFill>
+                  <a:srgbClr val="2A2929"/>
+                </a:solidFill>
+                <a:latin typeface="Roboto"/>
+              </a:rPr>
+              <a:t>Move the target to force the event, then restore it.</a:t>
+            </a:r>
+          </a:p>
+        </p:txBody>
+      </p:sp>
+      <p:sp>
+        <p:nvSpPr>
+          <p:cNvPr id="10" name="Rectangle 9"/>
+          <p:cNvSpPr/>
+          <p:nvPr/>
+        </p:nvSpPr>
+        <p:spPr>
+          <a:xfrm>
+            <a:off x="640080" y="3867912"/>
+            <a:ext cx="10927080" cy="841248"/>
+          </a:xfrm>
+          <a:prstGeom prst="rect">
+            <a:avLst/>
+          </a:prstGeom>
+          <a:solidFill>
+            <a:srgbClr val="FFFFFF"/>
+          </a:solidFill>
+          <a:ln w="12700">
+            <a:solidFill>
+              <a:srgbClr val="CCCCCC"/>
+            </a:solidFill>
+          </a:ln>
+          <a:effectLst/>
+        </p:spPr>
+        <p:style>
+          <a:lnRef idx="1">
+            <a:schemeClr val="accent1"/>
+          </a:lnRef>
+          <a:fillRef idx="3">
+            <a:schemeClr val="accent1"/>
+          </a:fillRef>
+          <a:effectRef idx="2">
+            <a:schemeClr val="accent1"/>
+          </a:effectRef>
+          <a:fontRef idx="minor">
+            <a:schemeClr val="lt1"/>
+          </a:fontRef>
+        </p:style>
+        <p:txBody>
+          <a:bodyPr rtlCol="0" anchor="ctr"/>
+          <a:lstStyle/>
+          <a:p>
+            <a:pPr algn="ctr"/>
+          </a:p>
+        </p:txBody>
+      </p:sp>
+      <p:sp>
+        <p:nvSpPr>
+          <p:cNvPr id="11" name="Rectangle 10"/>
+          <p:cNvSpPr/>
+          <p:nvPr/>
+        </p:nvSpPr>
+        <p:spPr>
+          <a:xfrm>
+            <a:off x="640080" y="3867912"/>
+            <a:ext cx="109728" cy="841248"/>
+          </a:xfrm>
+          <a:prstGeom prst="rect">
+            <a:avLst/>
+          </a:prstGeom>
+          <a:solidFill>
+            <a:srgbClr val="27B5CE"/>
+          </a:solidFill>
+          <a:ln>
+            <a:noFill/>
+          </a:ln>
+          <a:effectLst/>
+        </p:spPr>
+        <p:style>
+          <a:lnRef idx="1">
+            <a:schemeClr val="accent1"/>
+          </a:lnRef>
+          <a:fillRef idx="3">
+            <a:schemeClr val="accent1"/>
+          </a:fillRef>
+          <a:effectRef idx="2">
+            <a:schemeClr val="accent1"/>
+          </a:effectRef>
+          <a:fontRef idx="minor">
+            <a:schemeClr val="lt1"/>
+          </a:fontRef>
+        </p:style>
+        <p:txBody>
+          <a:bodyPr rtlCol="0" anchor="ctr"/>
+          <a:lstStyle/>
+          <a:p>
+            <a:pPr algn="ctr"/>
+          </a:p>
+        </p:txBody>
+      </p:sp>
+      <p:sp>
+        <p:nvSpPr>
+          <p:cNvPr id="12" name="TextBox 11"/>
+          <p:cNvSpPr txBox="1"/>
+          <p:nvPr/>
+        </p:nvSpPr>
+        <p:spPr>
+          <a:xfrm>
+            <a:off x="960120" y="3867912"/>
+            <a:ext cx="10424160" cy="841248"/>
+          </a:xfrm>
+          <a:prstGeom prst="rect">
+            <a:avLst/>
+          </a:prstGeom>
+          <a:noFill/>
+        </p:spPr>
+        <p:txBody>
+          <a:bodyPr wrap="square" anchor="ctr" lIns="0" rIns="0" tIns="0" bIns="0">
+            <a:spAutoFit/>
+          </a:bodyPr>
+          <a:lstStyle/>
+          <a:p>
+            <a:pPr>
+              <a:lnSpc>
+                <a:spcPct val="100000"/>
+              </a:lnSpc>
+            </a:pPr>
+            <a:r>
+              <a:rPr sz="1700" b="0" i="0">
+                <a:solidFill>
+                  <a:srgbClr val="2A2929"/>
+                </a:solidFill>
+                <a:latin typeface="Roboto"/>
+              </a:rPr>
+              <a:t>Evidence both directions.</a:t>
+            </a:r>
+          </a:p>
+        </p:txBody>
+      </p:sp>
+      <p:sp>
+        <p:nvSpPr>
+          <p:cNvPr id="13" name="Rectangle 12"/>
+          <p:cNvSpPr/>
+          <p:nvPr/>
+        </p:nvSpPr>
+        <p:spPr>
+          <a:xfrm>
+            <a:off x="0" y="6565392"/>
+            <a:ext cx="12191695" cy="38100"/>
+          </a:xfrm>
+          <a:prstGeom prst="rect">
+            <a:avLst/>
+          </a:prstGeom>
+          <a:solidFill>
+            <a:srgbClr val="27B5CE"/>
+          </a:solidFill>
+          <a:ln>
+            <a:noFill/>
+          </a:ln>
+          <a:effectLst/>
+        </p:spPr>
+        <p:style>
+          <a:lnRef idx="1">
+            <a:schemeClr val="accent1"/>
+          </a:lnRef>
+          <a:fillRef idx="3">
+            <a:schemeClr val="accent1"/>
+          </a:fillRef>
+          <a:effectRef idx="2">
+            <a:schemeClr val="accent1"/>
+          </a:effectRef>
+          <a:fontRef idx="minor">
+            <a:schemeClr val="lt1"/>
+          </a:fontRef>
+        </p:style>
+        <p:txBody>
+          <a:bodyPr rtlCol="0" anchor="ctr"/>
+          <a:lstStyle/>
+          <a:p>
+            <a:pPr algn="ctr"/>
+          </a:p>
+        </p:txBody>
+      </p:sp>
+      <p:sp>
+        <p:nvSpPr>
+          <p:cNvPr id="14" name="TextBox 13"/>
+          <p:cNvSpPr txBox="1"/>
+          <p:nvPr/>
+        </p:nvSpPr>
+        <p:spPr>
+          <a:xfrm>
             <a:off x="502920" y="6400800"/>
             <a:ext cx="5486400" cy="320040"/>
           </a:xfrm>
@@ -7346,7 +6204,7 @@
       </p:sp>
       <p:sp>
         <p:nvSpPr>
-          <p:cNvPr id="7" name="TextBox 6"/>
+          <p:cNvPr id="15" name="TextBox 14"/>
           <p:cNvSpPr txBox="1"/>
           <p:nvPr/>
         </p:nvSpPr>
@@ -7414,13 +6272,13 @@
         <p:spPr>
           <a:xfrm>
             <a:off x="0" y="0"/>
-            <a:ext cx="12191695" cy="1234440"/>
+            <a:ext cx="3931920" cy="6858000"/>
           </a:xfrm>
           <a:prstGeom prst="rect">
             <a:avLst/>
           </a:prstGeom>
           <a:solidFill>
-            <a:srgbClr val="27B5CE"/>
+            <a:srgbClr val="205F61"/>
           </a:solidFill>
           <a:ln>
             <a:noFill/>
@@ -7451,20 +6309,120 @@
       </p:sp>
       <p:sp>
         <p:nvSpPr>
-          <p:cNvPr id="3" name="Rounded Rectangle 2"/>
+          <p:cNvPr id="3" name="TextBox 2"/>
+          <p:cNvSpPr txBox="1"/>
+          <p:nvPr/>
+        </p:nvSpPr>
+        <p:spPr>
+          <a:xfrm>
+            <a:off x="365760" y="2103120"/>
+            <a:ext cx="3291840" cy="2194560"/>
+          </a:xfrm>
+          <a:prstGeom prst="rect">
+            <a:avLst/>
+          </a:prstGeom>
+          <a:noFill/>
+        </p:spPr>
+        <p:txBody>
+          <a:bodyPr wrap="square" anchor="t" lIns="0" rIns="0" tIns="0" bIns="0">
+            <a:spAutoFit/>
+          </a:bodyPr>
+          <a:lstStyle/>
+          <a:p>
+            <a:r>
+              <a:rPr sz="13000" b="1" i="0">
+                <a:solidFill>
+                  <a:srgbClr val="FFFFFF"/>
+                </a:solidFill>
+                <a:latin typeface="Roboto"/>
+              </a:rPr>
+              <a:t>03</a:t>
+            </a:r>
+          </a:p>
+        </p:txBody>
+      </p:sp>
+      <p:sp>
+        <p:nvSpPr>
+          <p:cNvPr id="4" name="TextBox 3"/>
+          <p:cNvSpPr txBox="1"/>
+          <p:nvPr/>
+        </p:nvSpPr>
+        <p:spPr>
+          <a:xfrm>
+            <a:off x="4480560" y="2468880"/>
+            <a:ext cx="7132320" cy="2194560"/>
+          </a:xfrm>
+          <a:prstGeom prst="rect">
+            <a:avLst/>
+          </a:prstGeom>
+          <a:noFill/>
+        </p:spPr>
+        <p:txBody>
+          <a:bodyPr wrap="square" anchor="t" lIns="0" rIns="0" tIns="0" bIns="0">
+            <a:spAutoFit/>
+          </a:bodyPr>
+          <a:lstStyle/>
+          <a:p>
+            <a:r>
+              <a:rPr sz="1600" b="1" i="0">
+                <a:solidFill>
+                  <a:srgbClr val="205F61"/>
+                </a:solidFill>
+                <a:latin typeface="Roboto"/>
+              </a:rPr>
+              <a:t>SECTION</a:t>
+            </a:r>
+          </a:p>
+          <a:p>
+            <a:pPr>
+              <a:spcBef>
+                <a:spcPts val="600"/>
+              </a:spcBef>
+            </a:pPr>
+            <a:r>
+              <a:rPr sz="3800" b="1" i="0">
+                <a:solidFill>
+                  <a:srgbClr val="2A2929"/>
+                </a:solidFill>
+                <a:latin typeface="Roboto"/>
+              </a:rPr>
+              <a:t>Answering for what you built, and filing it</a:t>
+            </a:r>
+          </a:p>
+          <a:p>
+            <a:pPr>
+              <a:spcBef>
+                <a:spcPts val="1000"/>
+              </a:spcBef>
+            </a:pPr>
+            <a:r>
+              <a:rPr sz="2000" b="0" i="1">
+                <a:solidFill>
+                  <a:srgbClr val="484848"/>
+                </a:solidFill>
+                <a:latin typeface="Roboto Light"/>
+              </a:rPr>
+              <a:t>in context, then on file</a:t>
+            </a:r>
+          </a:p>
+        </p:txBody>
+      </p:sp>
+      <p:sp>
+        <p:nvSpPr>
+          <p:cNvPr id="5" name="Rectangle 4"/>
           <p:cNvSpPr/>
           <p:nvPr/>
         </p:nvSpPr>
         <p:spPr>
           <a:xfrm>
-            <a:off x="640080" y="384048"/>
-            <a:ext cx="1691640" cy="457200"/>
-          </a:xfrm>
-          <a:prstGeom prst="roundRect">
+            <a:off x="0" y="6565392"/>
+            <a:ext cx="12191695" cy="38100"/>
+          </a:xfrm>
+          <a:prstGeom prst="rect">
             <a:avLst/>
           </a:prstGeom>
           <a:solidFill>
-            <a:srgbClr val="2A2929"/>
+            <a:srgbClr val="205F61"/>
           </a:solidFill>
           <a:ln>
             <a:noFill/>
@@ -7490,62 +6448,19 @@
           <a:lstStyle/>
           <a:p>
             <a:pPr algn="ctr"/>
-            <a:r>
-              <a:rPr sz="1400" b="1" i="0">
-                <a:solidFill>
-                  <a:srgbClr val="FBB900"/>
-                </a:solidFill>
-                <a:latin typeface="Roboto"/>
-              </a:rPr>
-              <a:t>ACTIVITY</a:t>
-            </a:r>
-          </a:p>
-        </p:txBody>
-      </p:sp>
-      <p:sp>
-        <p:nvSpPr>
-          <p:cNvPr id="4" name="TextBox 3"/>
+          </a:p>
+        </p:txBody>
+      </p:sp>
+      <p:sp>
+        <p:nvSpPr>
+          <p:cNvPr id="6" name="TextBox 5"/>
           <p:cNvSpPr txBox="1"/>
           <p:nvPr/>
         </p:nvSpPr>
         <p:spPr>
           <a:xfrm>
-            <a:off x="2560320" y="310896"/>
-            <a:ext cx="8961120" cy="685800"/>
-          </a:xfrm>
-          <a:prstGeom prst="rect">
-            <a:avLst/>
-          </a:prstGeom>
-          <a:noFill/>
-        </p:spPr>
-        <p:txBody>
-          <a:bodyPr wrap="square" anchor="ctr" lIns="0" rIns="0" tIns="0" bIns="0">
-            <a:spAutoFit/>
-          </a:bodyPr>
-          <a:lstStyle/>
-          <a:p>
-            <a:r>
-              <a:rPr sz="2600" b="1" i="0">
-                <a:solidFill>
-                  <a:srgbClr val="FFFFFF"/>
-                </a:solidFill>
-                <a:latin typeface="Roboto"/>
-              </a:rPr>
-              <a:t>Draft the Deployment Report</a:t>
-            </a:r>
-          </a:p>
-        </p:txBody>
-      </p:sp>
-      <p:sp>
-        <p:nvSpPr>
-          <p:cNvPr id="5" name="TextBox 4"/>
-          <p:cNvSpPr txBox="1"/>
-          <p:nvPr/>
-        </p:nvSpPr>
-        <p:spPr>
-          <a:xfrm>
-            <a:off x="658368" y="1554480"/>
-            <a:ext cx="10881360" cy="4297680"/>
+            <a:off x="502920" y="6400800"/>
+            <a:ext cx="5486400" cy="320040"/>
           </a:xfrm>
           <a:prstGeom prst="rect">
             <a:avLst/>
@@ -7558,174 +6473,24 @@
           </a:bodyPr>
           <a:lstStyle/>
           <a:p>
-            <a:pPr marL="0" indent="0">
-              <a:lnSpc>
-                <a:spcPct val="105000"/>
-              </a:lnSpc>
-              <a:spcBef>
-                <a:spcPts val="0"/>
-              </a:spcBef>
-              <a:spcAft>
-                <a:spcPts val="1000"/>
-              </a:spcAft>
-            </a:pPr>
-            <a:r>
-              <a:rPr sz="1700" b="1" i="0">
-                <a:solidFill>
-                  <a:srgbClr val="EDAB0C"/>
-                </a:solidFill>
-                <a:latin typeface="Roboto"/>
-              </a:rPr>
-              <a:t>■  </a:t>
-            </a:r>
-            <a:r>
-              <a:rPr sz="1700" b="0" i="0">
+            <a:r>
+              <a:rPr sz="1100" b="1" i="0">
                 <a:solidFill>
                   <a:srgbClr val="2A2929"/>
                 </a:solidFill>
                 <a:latin typeface="Roboto"/>
               </a:rPr>
-              <a:t>Write the report to the template for the practice engagement:</a:t>
-            </a:r>
-          </a:p>
-          <a:p>
-            <a:pPr marL="365760" indent="0">
-              <a:lnSpc>
-                <a:spcPct val="105000"/>
-              </a:lnSpc>
-              <a:spcBef>
-                <a:spcPts val="0"/>
-              </a:spcBef>
-              <a:spcAft>
-                <a:spcPts val="500"/>
-              </a:spcAft>
-            </a:pPr>
-            <a:r>
-              <a:rPr sz="1400" b="0" i="0">
-                <a:solidFill>
-                  <a:srgbClr val="7A7A7A"/>
-                </a:solidFill>
-                <a:latin typeface="Roboto"/>
-              </a:rPr>
-              <a:t>–  </a:t>
-            </a:r>
-            <a:r>
-              <a:rPr sz="1400" b="0" i="0">
-                <a:solidFill>
-                  <a:srgbClr val="2A2929"/>
-                </a:solidFill>
-                <a:latin typeface="Roboto"/>
-              </a:rPr>
-              <a:t>§4 narrative cross-referencing your appendices; §5 from your justifications; §6 from your validation</a:t>
-            </a:r>
-          </a:p>
-          <a:p>
-            <a:pPr marL="365760" indent="0">
-              <a:lnSpc>
-                <a:spcPct val="105000"/>
-              </a:lnSpc>
-              <a:spcBef>
-                <a:spcPts val="0"/>
-              </a:spcBef>
-              <a:spcAft>
-                <a:spcPts val="500"/>
-              </a:spcAft>
-            </a:pPr>
-            <a:r>
-              <a:rPr sz="1400" b="0" i="0">
-                <a:solidFill>
-                  <a:srgbClr val="7A7A7A"/>
-                </a:solidFill>
-                <a:latin typeface="Roboto"/>
-              </a:rPr>
-              <a:t>–  </a:t>
-            </a:r>
-            <a:r>
-              <a:rPr sz="1400" b="0" i="0">
-                <a:solidFill>
-                  <a:srgbClr val="2A2929"/>
-                </a:solidFill>
-                <a:latin typeface="Roboto"/>
-              </a:rPr>
-              <a:t>§2/§3 context + scope; §7 handover; §1 summary last</a:t>
-            </a:r>
-          </a:p>
-          <a:p>
-            <a:pPr marL="0" indent="0">
-              <a:lnSpc>
-                <a:spcPct val="105000"/>
-              </a:lnSpc>
-              <a:spcBef>
-                <a:spcPts val="0"/>
-              </a:spcBef>
-              <a:spcAft>
-                <a:spcPts val="1000"/>
-              </a:spcAft>
-            </a:pPr>
-            <a:r>
-              <a:rPr sz="1700" b="1" i="0">
-                <a:solidFill>
-                  <a:srgbClr val="EDAB0C"/>
-                </a:solidFill>
-                <a:latin typeface="Roboto"/>
-              </a:rPr>
-              <a:t>■  </a:t>
-            </a:r>
-            <a:r>
-              <a:rPr sz="1700" b="0" i="0">
-                <a:solidFill>
-                  <a:srgbClr val="2A2929"/>
-                </a:solidFill>
-                <a:latin typeface="Roboto"/>
-              </a:rPr>
-              <a:t>Every claim ties back to a labelled appendix item.</a:t>
-            </a:r>
-          </a:p>
-        </p:txBody>
-      </p:sp>
-      <p:sp>
-        <p:nvSpPr>
-          <p:cNvPr id="6" name="Rounded Rectangle 5"/>
-          <p:cNvSpPr/>
-          <p:nvPr/>
-        </p:nvSpPr>
-        <p:spPr>
-          <a:xfrm>
-            <a:off x="640080" y="5897880"/>
-            <a:ext cx="4023360" cy="457200"/>
-          </a:xfrm>
-          <a:prstGeom prst="roundRect">
-            <a:avLst/>
-          </a:prstGeom>
-          <a:solidFill>
-            <a:srgbClr val="F9F9F9"/>
-          </a:solidFill>
-          <a:ln w="12700">
-            <a:solidFill>
-              <a:srgbClr val="CCCCCC"/>
-            </a:solidFill>
-          </a:ln>
-          <a:effectLst/>
-        </p:spPr>
-        <p:style>
-          <a:lnRef idx="1">
-            <a:schemeClr val="accent1"/>
-          </a:lnRef>
-          <a:fillRef idx="3">
-            <a:schemeClr val="accent1"/>
-          </a:fillRef>
-          <a:effectRef idx="2">
-            <a:schemeClr val="accent1"/>
-          </a:effectRef>
-          <a:fontRef idx="minor">
-            <a:schemeClr val="lt1"/>
-          </a:fontRef>
-        </p:style>
-        <p:txBody>
-          <a:bodyPr rtlCol="0" anchor="ctr"/>
-          <a:lstStyle/>
-          <a:p>
-            <a:pPr algn="ctr"/>
+              <a:t>Kangan </a:t>
+            </a:r>
+            <a:r>
+              <a:rPr sz="1100" b="1" i="0">
+                <a:solidFill>
+                  <a:srgbClr val="D68E10"/>
+                </a:solidFill>
+                <a:latin typeface="Roboto"/>
+              </a:rPr>
+              <a:t>Institute</a:t>
+            </a:r>
           </a:p>
         </p:txBody>
       </p:sp>
@@ -7737,86 +6502,8 @@
         </p:nvSpPr>
         <p:spPr>
           <a:xfrm>
-            <a:off x="822960" y="5943600"/>
-            <a:ext cx="3657600" cy="365760"/>
-          </a:xfrm>
-          <a:prstGeom prst="rect">
-            <a:avLst/>
-          </a:prstGeom>
-          <a:noFill/>
-        </p:spPr>
-        <p:txBody>
-          <a:bodyPr wrap="square" anchor="ctr" lIns="0" rIns="0" tIns="0" bIns="0">
-            <a:spAutoFit/>
-          </a:bodyPr>
-          <a:lstStyle/>
-          <a:p>
-            <a:r>
-              <a:rPr sz="1500" b="1" i="0">
-                <a:solidFill>
-                  <a:srgbClr val="2A2929"/>
-                </a:solidFill>
-                <a:latin typeface="Roboto"/>
-              </a:rPr>
-              <a:t>⏱  ~40 min</a:t>
-            </a:r>
-          </a:p>
-        </p:txBody>
-      </p:sp>
-      <p:sp>
-        <p:nvSpPr>
-          <p:cNvPr id="8" name="Rectangle 7"/>
-          <p:cNvSpPr/>
-          <p:nvPr/>
-        </p:nvSpPr>
-        <p:spPr>
-          <a:xfrm>
-            <a:off x="0" y="6565392"/>
-            <a:ext cx="12191695" cy="38100"/>
-          </a:xfrm>
-          <a:prstGeom prst="rect">
-            <a:avLst/>
-          </a:prstGeom>
-          <a:solidFill>
-            <a:srgbClr val="27B5CE"/>
-          </a:solidFill>
-          <a:ln>
-            <a:noFill/>
-          </a:ln>
-          <a:effectLst/>
-        </p:spPr>
-        <p:style>
-          <a:lnRef idx="1">
-            <a:schemeClr val="accent1"/>
-          </a:lnRef>
-          <a:fillRef idx="3">
-            <a:schemeClr val="accent1"/>
-          </a:fillRef>
-          <a:effectRef idx="2">
-            <a:schemeClr val="accent1"/>
-          </a:effectRef>
-          <a:fontRef idx="minor">
-            <a:schemeClr val="lt1"/>
-          </a:fontRef>
-        </p:style>
-        <p:txBody>
-          <a:bodyPr rtlCol="0" anchor="ctr"/>
-          <a:lstStyle/>
-          <a:p>
-            <a:pPr algn="ctr"/>
-          </a:p>
-        </p:txBody>
-      </p:sp>
-      <p:sp>
-        <p:nvSpPr>
-          <p:cNvPr id="9" name="TextBox 8"/>
-          <p:cNvSpPr txBox="1"/>
-          <p:nvPr/>
-        </p:nvSpPr>
-        <p:spPr>
-          <a:xfrm>
-            <a:off x="502920" y="6400800"/>
-            <a:ext cx="5486400" cy="320040"/>
+            <a:off x="10515600" y="6400800"/>
+            <a:ext cx="1188720" cy="320040"/>
           </a:xfrm>
           <a:prstGeom prst="rect">
             <a:avLst/>
@@ -7829,49 +6516,6 @@
           </a:bodyPr>
           <a:lstStyle/>
           <a:p>
-            <a:r>
-              <a:rPr sz="1100" b="1" i="0">
-                <a:solidFill>
-                  <a:srgbClr val="2A2929"/>
-                </a:solidFill>
-                <a:latin typeface="Roboto"/>
-              </a:rPr>
-              <a:t>Kangan </a:t>
-            </a:r>
-            <a:r>
-              <a:rPr sz="1100" b="1" i="0">
-                <a:solidFill>
-                  <a:srgbClr val="D68E10"/>
-                </a:solidFill>
-                <a:latin typeface="Roboto"/>
-              </a:rPr>
-              <a:t>Institute</a:t>
-            </a:r>
-          </a:p>
-        </p:txBody>
-      </p:sp>
-      <p:sp>
-        <p:nvSpPr>
-          <p:cNvPr id="10" name="TextBox 9"/>
-          <p:cNvSpPr txBox="1"/>
-          <p:nvPr/>
-        </p:nvSpPr>
-        <p:spPr>
-          <a:xfrm>
-            <a:off x="10515600" y="6400800"/>
-            <a:ext cx="1188720" cy="320040"/>
-          </a:xfrm>
-          <a:prstGeom prst="rect">
-            <a:avLst/>
-          </a:prstGeom>
-          <a:noFill/>
-        </p:spPr>
-        <p:txBody>
-          <a:bodyPr wrap="square" anchor="t" lIns="0" rIns="0" tIns="0" bIns="0">
-            <a:spAutoFit/>
-          </a:bodyPr>
-          <a:lstStyle/>
-          <a:p>
             <a:pPr algn="r"/>
             <a:r>
               <a:rPr sz="1100" b="0" i="0">
@@ -7880,7 +6524,7 @@
                 </a:solidFill>
                 <a:latin typeface="Roboto"/>
               </a:rPr>
-              <a:t>12</a:t>
+              <a:t/>
             </a:r>
           </a:p>
         </p:txBody>
@@ -7899,7 +6543,7 @@
     <p:bg>
       <p:bgPr>
         <a:solidFill>
-          <a:srgbClr val="F9F9F9"/>
+          <a:srgbClr val="FFFFFF"/>
         </a:solidFill>
         <a:effectLst/>
       </p:bgPr>
@@ -7919,8 +6563,8 @@
         </p:nvSpPr>
         <p:spPr>
           <a:xfrm>
-            <a:off x="640080" y="548640"/>
-            <a:ext cx="10881360" cy="1097280"/>
+            <a:off x="640080" y="457200"/>
+            <a:ext cx="10881360" cy="960120"/>
           </a:xfrm>
           <a:prstGeom prst="rect">
             <a:avLst/>
@@ -7934,13 +6578,13 @@
           <a:lstStyle/>
           <a:p>
             <a:r>
-              <a:rPr sz="3200" b="1" i="0">
+              <a:rPr sz="2800" b="1" i="0">
                 <a:solidFill>
                   <a:srgbClr val="2A2929"/>
                 </a:solidFill>
                 <a:latin typeface="Roboto"/>
               </a:rPr>
-              <a:t>Key takeaways</a:t>
+              <a:t>Knowledge questions are about your build</a:t>
             </a:r>
           </a:p>
           <a:p>
@@ -7950,13 +6594,13 @@
               </a:spcBef>
             </a:pPr>
             <a:r>
-              <a:rPr sz="1800" b="1" i="0">
-                <a:solidFill>
-                  <a:srgbClr val="27B5CE"/>
-                </a:solidFill>
-                <a:latin typeface="Roboto"/>
-              </a:rPr>
-              <a:t>Section 2 · The report</a:t>
+              <a:rPr sz="1800" b="0" i="1">
+                <a:solidFill>
+                  <a:srgbClr val="D68E10"/>
+                </a:solidFill>
+                <a:latin typeface="Roboto Light"/>
+              </a:rPr>
+              <a:t>name your own resources</a:t>
             </a:r>
           </a:p>
         </p:txBody>
@@ -7969,14 +6613,14 @@
         </p:nvSpPr>
         <p:spPr>
           <a:xfrm>
-            <a:off x="658368" y="1600200"/>
+            <a:off x="658368" y="1371600"/>
             <a:ext cx="1463040" cy="50800"/>
           </a:xfrm>
           <a:prstGeom prst="rect">
             <a:avLst/>
           </a:prstGeom>
           <a:solidFill>
-            <a:srgbClr val="27B5CE"/>
+            <a:srgbClr val="205F61"/>
           </a:solidFill>
           <a:ln>
             <a:noFill/>
@@ -8007,25 +6651,139 @@
       </p:sp>
       <p:sp>
         <p:nvSpPr>
-          <p:cNvPr id="4" name="Rectangle 3"/>
+          <p:cNvPr id="4" name="TextBox 3"/>
+          <p:cNvSpPr txBox="1"/>
+          <p:nvPr/>
+        </p:nvSpPr>
+        <p:spPr>
+          <a:xfrm>
+            <a:off x="658368" y="1691640"/>
+            <a:ext cx="10881360" cy="4480560"/>
+          </a:xfrm>
+          <a:prstGeom prst="rect">
+            <a:avLst/>
+          </a:prstGeom>
+          <a:noFill/>
+        </p:spPr>
+        <p:txBody>
+          <a:bodyPr wrap="square" anchor="ctr" lIns="0" rIns="0" tIns="0" bIns="0">
+            <a:spAutoFit/>
+          </a:bodyPr>
+          <a:lstStyle/>
+          <a:p>
+            <a:pPr marL="0" indent="0">
+              <a:lnSpc>
+                <a:spcPct val="105000"/>
+              </a:lnSpc>
+              <a:spcBef>
+                <a:spcPts val="0"/>
+              </a:spcBef>
+              <a:spcAft>
+                <a:spcPts val="1000"/>
+              </a:spcAft>
+            </a:pPr>
+            <a:r>
+              <a:rPr sz="2400" b="1" i="0">
+                <a:solidFill>
+                  <a:srgbClr val="EDAB0C"/>
+                </a:solidFill>
+                <a:latin typeface="Roboto"/>
+              </a:rPr>
+              <a:t>■  </a:t>
+            </a:r>
+            <a:r>
+              <a:rPr sz="2400" b="0" i="0">
+                <a:solidFill>
+                  <a:srgbClr val="2A2929"/>
+                </a:solidFill>
+                <a:latin typeface="Roboto"/>
+              </a:rPr>
+              <a:t>Some of what you know cannot be shown by a screenshot — why a managed service, what the storage types are for, where the security boundary falls, what happens when a name is resolved.</a:t>
+            </a:r>
+          </a:p>
+          <a:p>
+            <a:pPr marL="0" indent="0">
+              <a:lnSpc>
+                <a:spcPct val="105000"/>
+              </a:lnSpc>
+              <a:spcBef>
+                <a:spcPts val="0"/>
+              </a:spcBef>
+              <a:spcAft>
+                <a:spcPts val="1000"/>
+              </a:spcAft>
+            </a:pPr>
+            <a:r>
+              <a:rPr sz="2400" b="1" i="0">
+                <a:solidFill>
+                  <a:srgbClr val="EDAB0C"/>
+                </a:solidFill>
+                <a:latin typeface="Roboto"/>
+              </a:rPr>
+              <a:t>■  </a:t>
+            </a:r>
+            <a:r>
+              <a:rPr sz="2400" b="0" i="0">
+                <a:solidFill>
+                  <a:srgbClr val="2A2929"/>
+                </a:solidFill>
+                <a:latin typeface="Roboto"/>
+              </a:rPr>
+              <a:t>The questions ask about your environment. Name your own resources, your own rules, your own decisions.</a:t>
+            </a:r>
+          </a:p>
+          <a:p>
+            <a:pPr marL="0" indent="0">
+              <a:lnSpc>
+                <a:spcPct val="105000"/>
+              </a:lnSpc>
+              <a:spcBef>
+                <a:spcPts val="0"/>
+              </a:spcBef>
+              <a:spcAft>
+                <a:spcPts val="1000"/>
+              </a:spcAft>
+            </a:pPr>
+            <a:r>
+              <a:rPr sz="2400" b="1" i="0">
+                <a:solidFill>
+                  <a:srgbClr val="EDAB0C"/>
+                </a:solidFill>
+                <a:latin typeface="Roboto"/>
+              </a:rPr>
+              <a:t>■  </a:t>
+            </a:r>
+            <a:r>
+              <a:rPr sz="2400" b="0" i="0">
+                <a:solidFill>
+                  <a:srgbClr val="2A2929"/>
+                </a:solidFill>
+                <a:latin typeface="Roboto"/>
+              </a:rPr>
+              <a:t>A textbook definition shows recall. Explaining your own build shows understanding, and that is what is being assessed.</a:t>
+            </a:r>
+          </a:p>
+        </p:txBody>
+      </p:sp>
+      <p:sp>
+        <p:nvSpPr>
+          <p:cNvPr id="5" name="Rectangle 4"/>
           <p:cNvSpPr/>
           <p:nvPr/>
         </p:nvSpPr>
         <p:spPr>
           <a:xfrm>
-            <a:off x="640080" y="1965960"/>
-            <a:ext cx="10927080" cy="841248"/>
+            <a:off x="0" y="6565392"/>
+            <a:ext cx="12191695" cy="38100"/>
           </a:xfrm>
           <a:prstGeom prst="rect">
             <a:avLst/>
           </a:prstGeom>
           <a:solidFill>
-            <a:srgbClr val="FFFFFF"/>
+            <a:srgbClr val="205F61"/>
           </a:solidFill>
-          <a:ln w="12700">
-            <a:solidFill>
-              <a:srgbClr val="CCCCCC"/>
-            </a:solidFill>
+          <a:ln>
+            <a:noFill/>
           </a:ln>
           <a:effectLst/>
         </p:spPr>
@@ -8053,521 +6811,7 @@
       </p:sp>
       <p:sp>
         <p:nvSpPr>
-          <p:cNvPr id="5" name="Rectangle 4"/>
-          <p:cNvSpPr/>
-          <p:nvPr/>
-        </p:nvSpPr>
-        <p:spPr>
-          <a:xfrm>
-            <a:off x="640080" y="1965960"/>
-            <a:ext cx="109728" cy="841248"/>
-          </a:xfrm>
-          <a:prstGeom prst="rect">
-            <a:avLst/>
-          </a:prstGeom>
-          <a:solidFill>
-            <a:srgbClr val="27B5CE"/>
-          </a:solidFill>
-          <a:ln>
-            <a:noFill/>
-          </a:ln>
-          <a:effectLst/>
-        </p:spPr>
-        <p:style>
-          <a:lnRef idx="1">
-            <a:schemeClr val="accent1"/>
-          </a:lnRef>
-          <a:fillRef idx="3">
-            <a:schemeClr val="accent1"/>
-          </a:fillRef>
-          <a:effectRef idx="2">
-            <a:schemeClr val="accent1"/>
-          </a:effectRef>
-          <a:fontRef idx="minor">
-            <a:schemeClr val="lt1"/>
-          </a:fontRef>
-        </p:style>
-        <p:txBody>
-          <a:bodyPr rtlCol="0" anchor="ctr"/>
-          <a:lstStyle/>
-          <a:p>
-            <a:pPr algn="ctr"/>
-          </a:p>
-        </p:txBody>
-      </p:sp>
-      <p:sp>
-        <p:nvSpPr>
           <p:cNvPr id="6" name="TextBox 5"/>
-          <p:cNvSpPr txBox="1"/>
-          <p:nvPr/>
-        </p:nvSpPr>
-        <p:spPr>
-          <a:xfrm>
-            <a:off x="960120" y="1965960"/>
-            <a:ext cx="10424160" cy="841248"/>
-          </a:xfrm>
-          <a:prstGeom prst="rect">
-            <a:avLst/>
-          </a:prstGeom>
-          <a:noFill/>
-        </p:spPr>
-        <p:txBody>
-          <a:bodyPr wrap="square" anchor="ctr" lIns="0" rIns="0" tIns="0" bIns="0">
-            <a:spAutoFit/>
-          </a:bodyPr>
-          <a:lstStyle/>
-          <a:p>
-            <a:pPr>
-              <a:lnSpc>
-                <a:spcPct val="100000"/>
-              </a:lnSpc>
-            </a:pPr>
-            <a:r>
-              <a:rPr sz="1700" b="0" i="0">
-                <a:solidFill>
-                  <a:srgbClr val="2A2929"/>
-                </a:solidFill>
-                <a:latin typeface="Roboto"/>
-              </a:rPr>
-              <a:t>Write for the people who run and audit the system; factual and traceable.</a:t>
-            </a:r>
-          </a:p>
-        </p:txBody>
-      </p:sp>
-      <p:sp>
-        <p:nvSpPr>
-          <p:cNvPr id="7" name="Rectangle 6"/>
-          <p:cNvSpPr/>
-          <p:nvPr/>
-        </p:nvSpPr>
-        <p:spPr>
-          <a:xfrm>
-            <a:off x="640080" y="2916936"/>
-            <a:ext cx="10927080" cy="841248"/>
-          </a:xfrm>
-          <a:prstGeom prst="rect">
-            <a:avLst/>
-          </a:prstGeom>
-          <a:solidFill>
-            <a:srgbClr val="FFFFFF"/>
-          </a:solidFill>
-          <a:ln w="12700">
-            <a:solidFill>
-              <a:srgbClr val="CCCCCC"/>
-            </a:solidFill>
-          </a:ln>
-          <a:effectLst/>
-        </p:spPr>
-        <p:style>
-          <a:lnRef idx="1">
-            <a:schemeClr val="accent1"/>
-          </a:lnRef>
-          <a:fillRef idx="3">
-            <a:schemeClr val="accent1"/>
-          </a:fillRef>
-          <a:effectRef idx="2">
-            <a:schemeClr val="accent1"/>
-          </a:effectRef>
-          <a:fontRef idx="minor">
-            <a:schemeClr val="lt1"/>
-          </a:fontRef>
-        </p:style>
-        <p:txBody>
-          <a:bodyPr rtlCol="0" anchor="ctr"/>
-          <a:lstStyle/>
-          <a:p>
-            <a:pPr algn="ctr"/>
-          </a:p>
-        </p:txBody>
-      </p:sp>
-      <p:sp>
-        <p:nvSpPr>
-          <p:cNvPr id="8" name="Rectangle 7"/>
-          <p:cNvSpPr/>
-          <p:nvPr/>
-        </p:nvSpPr>
-        <p:spPr>
-          <a:xfrm>
-            <a:off x="640080" y="2916936"/>
-            <a:ext cx="109728" cy="841248"/>
-          </a:xfrm>
-          <a:prstGeom prst="rect">
-            <a:avLst/>
-          </a:prstGeom>
-          <a:solidFill>
-            <a:srgbClr val="27B5CE"/>
-          </a:solidFill>
-          <a:ln>
-            <a:noFill/>
-          </a:ln>
-          <a:effectLst/>
-        </p:spPr>
-        <p:style>
-          <a:lnRef idx="1">
-            <a:schemeClr val="accent1"/>
-          </a:lnRef>
-          <a:fillRef idx="3">
-            <a:schemeClr val="accent1"/>
-          </a:fillRef>
-          <a:effectRef idx="2">
-            <a:schemeClr val="accent1"/>
-          </a:effectRef>
-          <a:fontRef idx="minor">
-            <a:schemeClr val="lt1"/>
-          </a:fontRef>
-        </p:style>
-        <p:txBody>
-          <a:bodyPr rtlCol="0" anchor="ctr"/>
-          <a:lstStyle/>
-          <a:p>
-            <a:pPr algn="ctr"/>
-          </a:p>
-        </p:txBody>
-      </p:sp>
-      <p:sp>
-        <p:nvSpPr>
-          <p:cNvPr id="9" name="TextBox 8"/>
-          <p:cNvSpPr txBox="1"/>
-          <p:nvPr/>
-        </p:nvSpPr>
-        <p:spPr>
-          <a:xfrm>
-            <a:off x="960120" y="2916936"/>
-            <a:ext cx="10424160" cy="841248"/>
-          </a:xfrm>
-          <a:prstGeom prst="rect">
-            <a:avLst/>
-          </a:prstGeom>
-          <a:noFill/>
-        </p:spPr>
-        <p:txBody>
-          <a:bodyPr wrap="square" anchor="ctr" lIns="0" rIns="0" tIns="0" bIns="0">
-            <a:spAutoFit/>
-          </a:bodyPr>
-          <a:lstStyle/>
-          <a:p>
-            <a:pPr>
-              <a:lnSpc>
-                <a:spcPct val="100000"/>
-              </a:lnSpc>
-            </a:pPr>
-            <a:r>
-              <a:rPr sz="1700" b="0" i="0">
-                <a:solidFill>
-                  <a:srgbClr val="2A2929"/>
-                </a:solidFill>
-                <a:latin typeface="Roboto"/>
-              </a:rPr>
-              <a:t>Follow the template — §1–§7 + Appendices A/B/C.</a:t>
-            </a:r>
-          </a:p>
-        </p:txBody>
-      </p:sp>
-      <p:sp>
-        <p:nvSpPr>
-          <p:cNvPr id="10" name="Rectangle 9"/>
-          <p:cNvSpPr/>
-          <p:nvPr/>
-        </p:nvSpPr>
-        <p:spPr>
-          <a:xfrm>
-            <a:off x="640080" y="3867912"/>
-            <a:ext cx="10927080" cy="841248"/>
-          </a:xfrm>
-          <a:prstGeom prst="rect">
-            <a:avLst/>
-          </a:prstGeom>
-          <a:solidFill>
-            <a:srgbClr val="FFFFFF"/>
-          </a:solidFill>
-          <a:ln w="12700">
-            <a:solidFill>
-              <a:srgbClr val="CCCCCC"/>
-            </a:solidFill>
-          </a:ln>
-          <a:effectLst/>
-        </p:spPr>
-        <p:style>
-          <a:lnRef idx="1">
-            <a:schemeClr val="accent1"/>
-          </a:lnRef>
-          <a:fillRef idx="3">
-            <a:schemeClr val="accent1"/>
-          </a:fillRef>
-          <a:effectRef idx="2">
-            <a:schemeClr val="accent1"/>
-          </a:effectRef>
-          <a:fontRef idx="minor">
-            <a:schemeClr val="lt1"/>
-          </a:fontRef>
-        </p:style>
-        <p:txBody>
-          <a:bodyPr rtlCol="0" anchor="ctr"/>
-          <a:lstStyle/>
-          <a:p>
-            <a:pPr algn="ctr"/>
-          </a:p>
-        </p:txBody>
-      </p:sp>
-      <p:sp>
-        <p:nvSpPr>
-          <p:cNvPr id="11" name="Rectangle 10"/>
-          <p:cNvSpPr/>
-          <p:nvPr/>
-        </p:nvSpPr>
-        <p:spPr>
-          <a:xfrm>
-            <a:off x="640080" y="3867912"/>
-            <a:ext cx="109728" cy="841248"/>
-          </a:xfrm>
-          <a:prstGeom prst="rect">
-            <a:avLst/>
-          </a:prstGeom>
-          <a:solidFill>
-            <a:srgbClr val="27B5CE"/>
-          </a:solidFill>
-          <a:ln>
-            <a:noFill/>
-          </a:ln>
-          <a:effectLst/>
-        </p:spPr>
-        <p:style>
-          <a:lnRef idx="1">
-            <a:schemeClr val="accent1"/>
-          </a:lnRef>
-          <a:fillRef idx="3">
-            <a:schemeClr val="accent1"/>
-          </a:fillRef>
-          <a:effectRef idx="2">
-            <a:schemeClr val="accent1"/>
-          </a:effectRef>
-          <a:fontRef idx="minor">
-            <a:schemeClr val="lt1"/>
-          </a:fontRef>
-        </p:style>
-        <p:txBody>
-          <a:bodyPr rtlCol="0" anchor="ctr"/>
-          <a:lstStyle/>
-          <a:p>
-            <a:pPr algn="ctr"/>
-          </a:p>
-        </p:txBody>
-      </p:sp>
-      <p:sp>
-        <p:nvSpPr>
-          <p:cNvPr id="12" name="TextBox 11"/>
-          <p:cNvSpPr txBox="1"/>
-          <p:nvPr/>
-        </p:nvSpPr>
-        <p:spPr>
-          <a:xfrm>
-            <a:off x="960120" y="3867912"/>
-            <a:ext cx="10424160" cy="841248"/>
-          </a:xfrm>
-          <a:prstGeom prst="rect">
-            <a:avLst/>
-          </a:prstGeom>
-          <a:noFill/>
-        </p:spPr>
-        <p:txBody>
-          <a:bodyPr wrap="square" anchor="ctr" lIns="0" rIns="0" tIns="0" bIns="0">
-            <a:spAutoFit/>
-          </a:bodyPr>
-          <a:lstStyle/>
-          <a:p>
-            <a:pPr>
-              <a:lnSpc>
-                <a:spcPct val="100000"/>
-              </a:lnSpc>
-            </a:pPr>
-            <a:r>
-              <a:rPr sz="1700" b="0" i="0">
-                <a:solidFill>
-                  <a:srgbClr val="2A2929"/>
-                </a:solidFill>
-                <a:latin typeface="Roboto"/>
-              </a:rPr>
-              <a:t>§5 carries your justifications; §6 your validation; §4 cross-references the evidence.</a:t>
-            </a:r>
-          </a:p>
-        </p:txBody>
-      </p:sp>
-      <p:sp>
-        <p:nvSpPr>
-          <p:cNvPr id="13" name="Rectangle 12"/>
-          <p:cNvSpPr/>
-          <p:nvPr/>
-        </p:nvSpPr>
-        <p:spPr>
-          <a:xfrm>
-            <a:off x="640080" y="4818888"/>
-            <a:ext cx="10927080" cy="841248"/>
-          </a:xfrm>
-          <a:prstGeom prst="rect">
-            <a:avLst/>
-          </a:prstGeom>
-          <a:solidFill>
-            <a:srgbClr val="FFFFFF"/>
-          </a:solidFill>
-          <a:ln w="12700">
-            <a:solidFill>
-              <a:srgbClr val="CCCCCC"/>
-            </a:solidFill>
-          </a:ln>
-          <a:effectLst/>
-        </p:spPr>
-        <p:style>
-          <a:lnRef idx="1">
-            <a:schemeClr val="accent1"/>
-          </a:lnRef>
-          <a:fillRef idx="3">
-            <a:schemeClr val="accent1"/>
-          </a:fillRef>
-          <a:effectRef idx="2">
-            <a:schemeClr val="accent1"/>
-          </a:effectRef>
-          <a:fontRef idx="minor">
-            <a:schemeClr val="lt1"/>
-          </a:fontRef>
-        </p:style>
-        <p:txBody>
-          <a:bodyPr rtlCol="0" anchor="ctr"/>
-          <a:lstStyle/>
-          <a:p>
-            <a:pPr algn="ctr"/>
-          </a:p>
-        </p:txBody>
-      </p:sp>
-      <p:sp>
-        <p:nvSpPr>
-          <p:cNvPr id="14" name="Rectangle 13"/>
-          <p:cNvSpPr/>
-          <p:nvPr/>
-        </p:nvSpPr>
-        <p:spPr>
-          <a:xfrm>
-            <a:off x="640080" y="4818888"/>
-            <a:ext cx="109728" cy="841248"/>
-          </a:xfrm>
-          <a:prstGeom prst="rect">
-            <a:avLst/>
-          </a:prstGeom>
-          <a:solidFill>
-            <a:srgbClr val="27B5CE"/>
-          </a:solidFill>
-          <a:ln>
-            <a:noFill/>
-          </a:ln>
-          <a:effectLst/>
-        </p:spPr>
-        <p:style>
-          <a:lnRef idx="1">
-            <a:schemeClr val="accent1"/>
-          </a:lnRef>
-          <a:fillRef idx="3">
-            <a:schemeClr val="accent1"/>
-          </a:fillRef>
-          <a:effectRef idx="2">
-            <a:schemeClr val="accent1"/>
-          </a:effectRef>
-          <a:fontRef idx="minor">
-            <a:schemeClr val="lt1"/>
-          </a:fontRef>
-        </p:style>
-        <p:txBody>
-          <a:bodyPr rtlCol="0" anchor="ctr"/>
-          <a:lstStyle/>
-          <a:p>
-            <a:pPr algn="ctr"/>
-          </a:p>
-        </p:txBody>
-      </p:sp>
-      <p:sp>
-        <p:nvSpPr>
-          <p:cNvPr id="15" name="TextBox 14"/>
-          <p:cNvSpPr txBox="1"/>
-          <p:nvPr/>
-        </p:nvSpPr>
-        <p:spPr>
-          <a:xfrm>
-            <a:off x="960120" y="4818888"/>
-            <a:ext cx="10424160" cy="841248"/>
-          </a:xfrm>
-          <a:prstGeom prst="rect">
-            <a:avLst/>
-          </a:prstGeom>
-          <a:noFill/>
-        </p:spPr>
-        <p:txBody>
-          <a:bodyPr wrap="square" anchor="ctr" lIns="0" rIns="0" tIns="0" bIns="0">
-            <a:spAutoFit/>
-          </a:bodyPr>
-          <a:lstStyle/>
-          <a:p>
-            <a:pPr>
-              <a:lnSpc>
-                <a:spcPct val="100000"/>
-              </a:lnSpc>
-            </a:pPr>
-            <a:r>
-              <a:rPr sz="1700" b="0" i="0">
-                <a:solidFill>
-                  <a:srgbClr val="2A2929"/>
-                </a:solidFill>
-                <a:latin typeface="Roboto"/>
-              </a:rPr>
-              <a:t>Write the Executive Summary last.</a:t>
-            </a:r>
-          </a:p>
-        </p:txBody>
-      </p:sp>
-      <p:sp>
-        <p:nvSpPr>
-          <p:cNvPr id="16" name="Rectangle 15"/>
-          <p:cNvSpPr/>
-          <p:nvPr/>
-        </p:nvSpPr>
-        <p:spPr>
-          <a:xfrm>
-            <a:off x="0" y="6565392"/>
-            <a:ext cx="12191695" cy="38100"/>
-          </a:xfrm>
-          <a:prstGeom prst="rect">
-            <a:avLst/>
-          </a:prstGeom>
-          <a:solidFill>
-            <a:srgbClr val="27B5CE"/>
-          </a:solidFill>
-          <a:ln>
-            <a:noFill/>
-          </a:ln>
-          <a:effectLst/>
-        </p:spPr>
-        <p:style>
-          <a:lnRef idx="1">
-            <a:schemeClr val="accent1"/>
-          </a:lnRef>
-          <a:fillRef idx="3">
-            <a:schemeClr val="accent1"/>
-          </a:fillRef>
-          <a:effectRef idx="2">
-            <a:schemeClr val="accent1"/>
-          </a:effectRef>
-          <a:fontRef idx="minor">
-            <a:schemeClr val="lt1"/>
-          </a:fontRef>
-        </p:style>
-        <p:txBody>
-          <a:bodyPr rtlCol="0" anchor="ctr"/>
-          <a:lstStyle/>
-          <a:p>
-            <a:pPr algn="ctr"/>
-          </a:p>
-        </p:txBody>
-      </p:sp>
-      <p:sp>
-        <p:nvSpPr>
-          <p:cNvPr id="17" name="TextBox 16"/>
           <p:cNvSpPr txBox="1"/>
           <p:nvPr/>
         </p:nvSpPr>
@@ -8610,7 +6854,7 @@
       </p:sp>
       <p:sp>
         <p:nvSpPr>
-          <p:cNvPr id="18" name="TextBox 17"/>
+          <p:cNvPr id="7" name="TextBox 6"/>
           <p:cNvSpPr txBox="1"/>
           <p:nvPr/>
         </p:nvSpPr>
@@ -8638,7 +6882,7 @@
                 </a:solidFill>
                 <a:latin typeface="Roboto"/>
               </a:rPr>
-              <a:t>13</a:t>
+              <a:t>12</a:t>
             </a:r>
           </a:p>
         </p:txBody>
@@ -8671,14 +6915,64 @@
       <p:grpSpPr/>
       <p:sp>
         <p:nvSpPr>
-          <p:cNvPr id="2" name="Rectangle 1"/>
+          <p:cNvPr id="2" name="TextBox 1"/>
+          <p:cNvSpPr txBox="1"/>
+          <p:nvPr/>
+        </p:nvSpPr>
+        <p:spPr>
+          <a:xfrm>
+            <a:off x="640080" y="457200"/>
+            <a:ext cx="10881360" cy="960120"/>
+          </a:xfrm>
+          <a:prstGeom prst="rect">
+            <a:avLst/>
+          </a:prstGeom>
+          <a:noFill/>
+        </p:spPr>
+        <p:txBody>
+          <a:bodyPr wrap="square" anchor="t" lIns="0" rIns="0" tIns="0" bIns="0">
+            <a:spAutoFit/>
+          </a:bodyPr>
+          <a:lstStyle/>
+          <a:p>
+            <a:r>
+              <a:rPr sz="2800" b="1" i="0">
+                <a:solidFill>
+                  <a:srgbClr val="2A2929"/>
+                </a:solidFill>
+                <a:latin typeface="Roboto"/>
+              </a:rPr>
+              <a:t>What a full answer looks like</a:t>
+            </a:r>
+          </a:p>
+          <a:p>
+            <a:pPr>
+              <a:spcBef>
+                <a:spcPts val="200"/>
+              </a:spcBef>
+            </a:pPr>
+            <a:r>
+              <a:rPr sz="1800" b="0" i="1">
+                <a:solidFill>
+                  <a:srgbClr val="D68E10"/>
+                </a:solidFill>
+                <a:latin typeface="Roboto Light"/>
+              </a:rPr>
+              <a:t>specific, sourced, complete</a:t>
+            </a:r>
+          </a:p>
+        </p:txBody>
+      </p:sp>
+      <p:sp>
+        <p:nvSpPr>
+          <p:cNvPr id="3" name="Rectangle 2"/>
           <p:cNvSpPr/>
           <p:nvPr/>
         </p:nvSpPr>
         <p:spPr>
           <a:xfrm>
-            <a:off x="0" y="0"/>
-            <a:ext cx="3931920" cy="6858000"/>
+            <a:off x="658368" y="1371600"/>
+            <a:ext cx="1463040" cy="50800"/>
           </a:xfrm>
           <a:prstGeom prst="rect">
             <a:avLst/>
@@ -8715,14 +7009,14 @@
       </p:sp>
       <p:sp>
         <p:nvSpPr>
-          <p:cNvPr id="3" name="TextBox 2"/>
+          <p:cNvPr id="4" name="TextBox 3"/>
           <p:cNvSpPr txBox="1"/>
           <p:nvPr/>
         </p:nvSpPr>
         <p:spPr>
           <a:xfrm>
-            <a:off x="365760" y="2103120"/>
-            <a:ext cx="3291840" cy="2194560"/>
+            <a:off x="658368" y="1691640"/>
+            <a:ext cx="10881360" cy="4480560"/>
           </a:xfrm>
           <a:prstGeom prst="rect">
             <a:avLst/>
@@ -8730,85 +7024,132 @@
           <a:noFill/>
         </p:spPr>
         <p:txBody>
-          <a:bodyPr wrap="square" anchor="t" lIns="0" rIns="0" tIns="0" bIns="0">
+          <a:bodyPr wrap="square" anchor="ctr" lIns="0" rIns="0" tIns="0" bIns="0">
             <a:spAutoFit/>
           </a:bodyPr>
           <a:lstStyle/>
           <a:p>
-            <a:r>
-              <a:rPr sz="13000" b="1" i="0">
-                <a:solidFill>
-                  <a:srgbClr val="FFFFFF"/>
-                </a:solidFill>
-                <a:latin typeface="Roboto"/>
-              </a:rPr>
-              <a:t>03</a:t>
-            </a:r>
-          </a:p>
-        </p:txBody>
-      </p:sp>
-      <p:sp>
-        <p:nvSpPr>
-          <p:cNvPr id="4" name="TextBox 3"/>
-          <p:cNvSpPr txBox="1"/>
-          <p:nvPr/>
-        </p:nvSpPr>
-        <p:spPr>
-          <a:xfrm>
-            <a:off x="4480560" y="2468880"/>
-            <a:ext cx="7132320" cy="2194560"/>
-          </a:xfrm>
-          <a:prstGeom prst="rect">
-            <a:avLst/>
-          </a:prstGeom>
-          <a:noFill/>
-        </p:spPr>
-        <p:txBody>
-          <a:bodyPr wrap="square" anchor="t" lIns="0" rIns="0" tIns="0" bIns="0">
-            <a:spAutoFit/>
-          </a:bodyPr>
-          <a:lstStyle/>
-          <a:p>
-            <a:r>
-              <a:rPr sz="1600" b="1" i="0">
-                <a:solidFill>
-                  <a:srgbClr val="205F61"/>
-                </a:solidFill>
-                <a:latin typeface="Roboto"/>
-              </a:rPr>
-              <a:t>SECTION</a:t>
-            </a:r>
-          </a:p>
-          <a:p>
-            <a:pPr>
+            <a:pPr marL="0" indent="0">
+              <a:lnSpc>
+                <a:spcPct val="105000"/>
+              </a:lnSpc>
               <a:spcBef>
-                <a:spcPts val="600"/>
+                <a:spcPts val="0"/>
               </a:spcBef>
+              <a:spcAft>
+                <a:spcPts val="1000"/>
+              </a:spcAft>
             </a:pPr>
             <a:r>
-              <a:rPr sz="3800" b="1" i="0">
+              <a:rPr sz="2400" b="1" i="0">
+                <a:solidFill>
+                  <a:srgbClr val="EDAB0C"/>
+                </a:solidFill>
+                <a:latin typeface="Roboto"/>
+              </a:rPr>
+              <a:t>■  </a:t>
+            </a:r>
+            <a:r>
+              <a:rPr sz="2400" b="0" i="0">
                 <a:solidFill>
                   <a:srgbClr val="2A2929"/>
                 </a:solidFill>
                 <a:latin typeface="Roboto"/>
               </a:rPr>
-              <a:t>Knowledge in context</a:t>
-            </a:r>
-          </a:p>
-          <a:p>
-            <a:pPr>
+              <a:t>Answer the question that was asked, in the terms it was asked in.</a:t>
+            </a:r>
+          </a:p>
+          <a:p>
+            <a:pPr marL="0" indent="0">
+              <a:lnSpc>
+                <a:spcPct val="105000"/>
+              </a:lnSpc>
               <a:spcBef>
+                <a:spcPts val="0"/>
+              </a:spcBef>
+              <a:spcAft>
                 <a:spcPts val="1000"/>
+              </a:spcAft>
+            </a:pPr>
+            <a:r>
+              <a:rPr sz="2400" b="1" i="0">
+                <a:solidFill>
+                  <a:srgbClr val="EDAB0C"/>
+                </a:solidFill>
+                <a:latin typeface="Roboto"/>
+              </a:rPr>
+              <a:t>■  </a:t>
+            </a:r>
+            <a:r>
+              <a:rPr sz="2400" b="0" i="0">
+                <a:solidFill>
+                  <a:srgbClr val="2A2929"/>
+                </a:solidFill>
+                <a:latin typeface="Roboto"/>
+              </a:rPr>
+              <a:t>Where a question asks for a risk or a consequence, ground it in what the system actually holds and who it belongs to — not in "it would be less secure".</a:t>
+            </a:r>
+          </a:p>
+          <a:p>
+            <a:pPr marL="0" indent="0">
+              <a:lnSpc>
+                <a:spcPct val="105000"/>
+              </a:lnSpc>
+              <a:spcBef>
+                <a:spcPts val="0"/>
               </a:spcBef>
+              <a:spcAft>
+                <a:spcPts val="1000"/>
+              </a:spcAft>
             </a:pPr>
             <a:r>
-              <a:rPr sz="2000" b="0" i="1">
-                <a:solidFill>
-                  <a:srgbClr val="484848"/>
-                </a:solidFill>
-                <a:latin typeface="Roboto Light"/>
-              </a:rPr>
-              <a:t>evidence what you know</a:t>
+              <a:rPr sz="2400" b="1" i="0">
+                <a:solidFill>
+                  <a:srgbClr val="EDAB0C"/>
+                </a:solidFill>
+                <a:latin typeface="Roboto"/>
+              </a:rPr>
+              <a:t>■  </a:t>
+            </a:r>
+            <a:r>
+              <a:rPr sz="2400" b="0" i="0">
+                <a:solidFill>
+                  <a:srgbClr val="2A2929"/>
+                </a:solidFill>
+                <a:latin typeface="Roboto"/>
+              </a:rPr>
+              <a:t>Where it asks you to compare, name both options.</a:t>
+            </a:r>
+          </a:p>
+          <a:p>
+            <a:pPr marL="0" indent="0">
+              <a:lnSpc>
+                <a:spcPct val="105000"/>
+              </a:lnSpc>
+              <a:spcBef>
+                <a:spcPts val="0"/>
+              </a:spcBef>
+              <a:spcAft>
+                <a:spcPts val="1000"/>
+              </a:spcAft>
+            </a:pPr>
+            <a:r>
+              <a:rPr sz="2400" b="1" i="0">
+                <a:solidFill>
+                  <a:srgbClr val="EDAB0C"/>
+                </a:solidFill>
+                <a:latin typeface="Roboto"/>
+              </a:rPr>
+              <a:t>■  </a:t>
+            </a:r>
+            <a:r>
+              <a:rPr sz="2400" b="0" i="0">
+                <a:solidFill>
+                  <a:srgbClr val="2A2929"/>
+                </a:solidFill>
+                <a:latin typeface="Roboto"/>
+              </a:rPr>
+              <a:t>Where the intranet carries the source, use it. An answer in the client's own terms beats a generic one.</a:t>
             </a:r>
           </a:p>
         </p:txBody>
@@ -8930,7 +7271,7 @@
                 </a:solidFill>
                 <a:latin typeface="Roboto"/>
               </a:rPr>
-              <a:t/>
+              <a:t>13</a:t>
             </a:r>
           </a:p>
         </p:txBody>
@@ -8990,7 +7331,7 @@
                 </a:solidFill>
                 <a:latin typeface="Roboto"/>
               </a:rPr>
-              <a:t>Evidence what you know — in context</a:t>
+              <a:t>Filing the completed document</a:t>
             </a:r>
           </a:p>
           <a:p>
@@ -9006,7 +7347,7 @@
                 </a:solidFill>
                 <a:latin typeface="Roboto Light"/>
               </a:rPr>
-              <a:t>grounded, not abstract</a:t>
+              <a:t>the record outlives you</a:t>
             </a:r>
           </a:p>
         </p:txBody>
@@ -9104,7 +7445,7 @@
                 </a:solidFill>
                 <a:latin typeface="Roboto"/>
               </a:rPr>
-              <a:t>Some knowledge isn't shown just by building — shared responsibility, managed vs self-hosted, storage/scaling/database options, cost models.</a:t>
+              <a:t>An engagement is not finished when the build works. It is finished when the record of it is somewhere the client can find after you have gone.</a:t>
             </a:r>
           </a:p>
           <a:p>
@@ -9135,7 +7476,7 @@
                 </a:solidFill>
                 <a:latin typeface="Roboto"/>
               </a:rPr>
-              <a:t>Answer the knowledge questions grounded in your build: cite your actual design and decisions.</a:t>
+              <a:t>Where that is, is set by the organisation's records policy — not by preference.</a:t>
             </a:r>
           </a:p>
           <a:p>
@@ -9166,7 +7507,7 @@
                 </a:solidFill>
                 <a:latin typeface="Roboto"/>
               </a:rPr>
-              <a:t>“Why a managed database here?” → because of the Ledgerline workload and these trade-offs — not a textbook definition.</a:t>
+              <a:t>Name the location, and name the policy that requires it. "I would file it appropriately" evidences nothing.</a:t>
             </a:r>
           </a:p>
         </p:txBody>
@@ -9445,7 +7786,7 @@
                 </a:solidFill>
                 <a:latin typeface="Roboto"/>
               </a:rPr>
-              <a:t>Answer the knowledge questions in context</a:t>
+              <a:t>Answer the questions and file the run sheet</a:t>
             </a:r>
           </a:p>
         </p:txBody>
@@ -9499,69 +7840,7 @@
                 </a:solidFill>
                 <a:latin typeface="Roboto"/>
               </a:rPr>
-              <a:t>Answer the AT2 knowledge questions for the practice engagement:</a:t>
-            </a:r>
-          </a:p>
-          <a:p>
-            <a:pPr marL="365760" indent="0">
-              <a:lnSpc>
-                <a:spcPct val="105000"/>
-              </a:lnSpc>
-              <a:spcBef>
-                <a:spcPts val="0"/>
-              </a:spcBef>
-              <a:spcAft>
-                <a:spcPts val="500"/>
-              </a:spcAft>
-            </a:pPr>
-            <a:r>
-              <a:rPr sz="1400" b="0" i="0">
-                <a:solidFill>
-                  <a:srgbClr val="7A7A7A"/>
-                </a:solidFill>
-                <a:latin typeface="Roboto"/>
-              </a:rPr>
-              <a:t>–  </a:t>
-            </a:r>
-            <a:r>
-              <a:rPr sz="1400" b="0" i="0">
-                <a:solidFill>
-                  <a:srgbClr val="2A2929"/>
-                </a:solidFill>
-                <a:latin typeface="Roboto"/>
-              </a:rPr>
-              <a:t>reference your own build, decisions and the Ledgerline workload</a:t>
-            </a:r>
-          </a:p>
-          <a:p>
-            <a:pPr marL="365760" indent="0">
-              <a:lnSpc>
-                <a:spcPct val="105000"/>
-              </a:lnSpc>
-              <a:spcBef>
-                <a:spcPts val="0"/>
-              </a:spcBef>
-              <a:spcAft>
-                <a:spcPts val="500"/>
-              </a:spcAft>
-            </a:pPr>
-            <a:r>
-              <a:rPr sz="1400" b="0" i="0">
-                <a:solidFill>
-                  <a:srgbClr val="7A7A7A"/>
-                </a:solidFill>
-                <a:latin typeface="Roboto"/>
-              </a:rPr>
-              <a:t>–  </a:t>
-            </a:r>
-            <a:r>
-              <a:rPr sz="1400" b="0" i="0">
-                <a:solidFill>
-                  <a:srgbClr val="2A2929"/>
-                </a:solidFill>
-                <a:latin typeface="Roboto"/>
-              </a:rPr>
-              <a:t>shared responsibility · managed vs self-hosted · storage/scaling/db options · cost models</a:t>
+              <a:t>Answer each knowledge question about your own build, then record where the completed run sheet is filed and which policy required that location.</a:t>
             </a:r>
           </a:p>
           <a:p>
@@ -9592,7 +7871,7 @@
                 </a:solidFill>
                 <a:latin typeface="Roboto"/>
               </a:rPr>
-              <a:t>Specific to your system — not generic best practice.</a:t>
+              <a:t>Practice note: your practice run sheet carries no questions — use the assessment's, against the system you have just built here.</a:t>
             </a:r>
           </a:p>
         </p:txBody>
@@ -9672,7 +7951,7 @@
                 </a:solidFill>
                 <a:latin typeface="Roboto"/>
               </a:rPr>
-              <a:t>⏱  ~20 min</a:t>
+              <a:t>⏱  ~40 min</a:t>
             </a:r>
           </a:p>
         </p:txBody>
@@ -9854,7 +8133,7 @@
                 </a:solidFill>
                 <a:latin typeface="Roboto"/>
               </a:rPr>
-              <a:t>The build becomes the deliverable</a:t>
+              <a:t>Built is not finished</a:t>
             </a:r>
           </a:p>
           <a:p>
@@ -9870,7 +8149,7 @@
                 </a:solidFill>
                 <a:latin typeface="Roboto Light"/>
               </a:rPr>
-              <a:t>no new building — write it up</a:t>
+              <a:t>now prove it</a:t>
             </a:r>
           </a:p>
         </p:txBody>
@@ -9968,7 +8247,7 @@
                 </a:solidFill>
                 <a:latin typeface="Roboto"/>
               </a:rPr>
-              <a:t>Topics 6–9 built, monitored, validated and justified the workload — capturing evidence the whole way.</a:t>
+              <a:t>Everything on your run sheet is now built. None of it has been shown to work.</a:t>
             </a:r>
           </a:p>
           <a:p>
@@ -9999,7 +8278,7 @@
                 </a:solidFill>
                 <a:latin typeface="Roboto"/>
               </a:rPr>
-              <a:t>Topic 10 assembles that into the Deployment Report — the single AT2 deliverable.</a:t>
+              <a:t>Today you prove each path, prove the ones that should be blocked are blocked, and make it scale in front of you.</a:t>
             </a:r>
           </a:p>
           <a:p>
@@ -10030,7 +8309,7 @@
                 </a:solidFill>
                 <a:latin typeface="Roboto"/>
               </a:rPr>
-              <a:t>Four moves: organise the evidence, write the report, evidence your knowledge in context, and reflect.</a:t>
+              <a:t>Then you answer for what you built, and file it where it belongs.</a:t>
             </a:r>
           </a:p>
           <a:p>
@@ -10061,7 +8340,7 @@
                 </a:solidFill>
                 <a:latin typeface="Roboto"/>
               </a:rPr>
-              <a:t>No new resources — everything you need was captured as you built.</a:t>
+              <a:t>After this topic you are ready to attempt the assessment.</a:t>
             </a:r>
           </a:p>
         </p:txBody>
@@ -10197,1131 +8476,6 @@
 </file>
 
 <file path=ppt/slides/slide20.xml><?xml version="1.0" encoding="utf-8"?>
-<p:sld xmlns:a="http://schemas.openxmlformats.org/drawingml/2006/main" xmlns:p="http://schemas.openxmlformats.org/presentationml/2006/main" xmlns:r="http://schemas.openxmlformats.org/officeDocument/2006/relationships">
-  <p:cSld>
-    <p:bg>
-      <p:bgPr>
-        <a:solidFill>
-          <a:srgbClr val="FFFFFF"/>
-        </a:solidFill>
-        <a:effectLst/>
-      </p:bgPr>
-    </p:bg>
-    <p:spTree>
-      <p:nvGrpSpPr>
-        <p:cNvPr id="1" name=""/>
-        <p:cNvGrpSpPr/>
-        <p:nvPr/>
-      </p:nvGrpSpPr>
-      <p:grpSpPr/>
-      <p:sp>
-        <p:nvSpPr>
-          <p:cNvPr id="2" name="Rectangle 1"/>
-          <p:cNvSpPr/>
-          <p:nvPr/>
-        </p:nvSpPr>
-        <p:spPr>
-          <a:xfrm>
-            <a:off x="0" y="0"/>
-            <a:ext cx="3931920" cy="6858000"/>
-          </a:xfrm>
-          <a:prstGeom prst="rect">
-            <a:avLst/>
-          </a:prstGeom>
-          <a:solidFill>
-            <a:srgbClr val="004488"/>
-          </a:solidFill>
-          <a:ln>
-            <a:noFill/>
-          </a:ln>
-          <a:effectLst/>
-        </p:spPr>
-        <p:style>
-          <a:lnRef idx="1">
-            <a:schemeClr val="accent1"/>
-          </a:lnRef>
-          <a:fillRef idx="3">
-            <a:schemeClr val="accent1"/>
-          </a:fillRef>
-          <a:effectRef idx="2">
-            <a:schemeClr val="accent1"/>
-          </a:effectRef>
-          <a:fontRef idx="minor">
-            <a:schemeClr val="lt1"/>
-          </a:fontRef>
-        </p:style>
-        <p:txBody>
-          <a:bodyPr rtlCol="0" anchor="ctr"/>
-          <a:lstStyle/>
-          <a:p>
-            <a:pPr algn="ctr"/>
-          </a:p>
-        </p:txBody>
-      </p:sp>
-      <p:sp>
-        <p:nvSpPr>
-          <p:cNvPr id="3" name="TextBox 2"/>
-          <p:cNvSpPr txBox="1"/>
-          <p:nvPr/>
-        </p:nvSpPr>
-        <p:spPr>
-          <a:xfrm>
-            <a:off x="365760" y="2103120"/>
-            <a:ext cx="3291840" cy="2194560"/>
-          </a:xfrm>
-          <a:prstGeom prst="rect">
-            <a:avLst/>
-          </a:prstGeom>
-          <a:noFill/>
-        </p:spPr>
-        <p:txBody>
-          <a:bodyPr wrap="square" anchor="t" lIns="0" rIns="0" tIns="0" bIns="0">
-            <a:spAutoFit/>
-          </a:bodyPr>
-          <a:lstStyle/>
-          <a:p>
-            <a:r>
-              <a:rPr sz="13000" b="1" i="0">
-                <a:solidFill>
-                  <a:srgbClr val="FFFFFF"/>
-                </a:solidFill>
-                <a:latin typeface="Roboto"/>
-              </a:rPr>
-              <a:t>04</a:t>
-            </a:r>
-          </a:p>
-        </p:txBody>
-      </p:sp>
-      <p:sp>
-        <p:nvSpPr>
-          <p:cNvPr id="4" name="TextBox 3"/>
-          <p:cNvSpPr txBox="1"/>
-          <p:nvPr/>
-        </p:nvSpPr>
-        <p:spPr>
-          <a:xfrm>
-            <a:off x="4480560" y="2468880"/>
-            <a:ext cx="7132320" cy="2194560"/>
-          </a:xfrm>
-          <a:prstGeom prst="rect">
-            <a:avLst/>
-          </a:prstGeom>
-          <a:noFill/>
-        </p:spPr>
-        <p:txBody>
-          <a:bodyPr wrap="square" anchor="t" lIns="0" rIns="0" tIns="0" bIns="0">
-            <a:spAutoFit/>
-          </a:bodyPr>
-          <a:lstStyle/>
-          <a:p>
-            <a:r>
-              <a:rPr sz="1600" b="1" i="0">
-                <a:solidFill>
-                  <a:srgbClr val="004488"/>
-                </a:solidFill>
-                <a:latin typeface="Roboto"/>
-              </a:rPr>
-              <a:t>SECTION</a:t>
-            </a:r>
-          </a:p>
-          <a:p>
-            <a:pPr>
-              <a:spcBef>
-                <a:spcPts val="600"/>
-              </a:spcBef>
-            </a:pPr>
-            <a:r>
-              <a:rPr sz="3800" b="1" i="0">
-                <a:solidFill>
-                  <a:srgbClr val="2A2929"/>
-                </a:solidFill>
-                <a:latin typeface="Roboto"/>
-              </a:rPr>
-              <a:t>Reflection &amp; feedback</a:t>
-            </a:r>
-          </a:p>
-          <a:p>
-            <a:pPr>
-              <a:spcBef>
-                <a:spcPts val="1000"/>
-              </a:spcBef>
-            </a:pPr>
-            <a:r>
-              <a:rPr sz="2000" b="0" i="1">
-                <a:solidFill>
-                  <a:srgbClr val="484848"/>
-                </a:solidFill>
-                <a:latin typeface="Roboto Light"/>
-              </a:rPr>
-              <a:t>close the loop</a:t>
-            </a:r>
-          </a:p>
-        </p:txBody>
-      </p:sp>
-      <p:sp>
-        <p:nvSpPr>
-          <p:cNvPr id="5" name="Rectangle 4"/>
-          <p:cNvSpPr/>
-          <p:nvPr/>
-        </p:nvSpPr>
-        <p:spPr>
-          <a:xfrm>
-            <a:off x="0" y="6565392"/>
-            <a:ext cx="12191695" cy="38100"/>
-          </a:xfrm>
-          <a:prstGeom prst="rect">
-            <a:avLst/>
-          </a:prstGeom>
-          <a:solidFill>
-            <a:srgbClr val="004488"/>
-          </a:solidFill>
-          <a:ln>
-            <a:noFill/>
-          </a:ln>
-          <a:effectLst/>
-        </p:spPr>
-        <p:style>
-          <a:lnRef idx="1">
-            <a:schemeClr val="accent1"/>
-          </a:lnRef>
-          <a:fillRef idx="3">
-            <a:schemeClr val="accent1"/>
-          </a:fillRef>
-          <a:effectRef idx="2">
-            <a:schemeClr val="accent1"/>
-          </a:effectRef>
-          <a:fontRef idx="minor">
-            <a:schemeClr val="lt1"/>
-          </a:fontRef>
-        </p:style>
-        <p:txBody>
-          <a:bodyPr rtlCol="0" anchor="ctr"/>
-          <a:lstStyle/>
-          <a:p>
-            <a:pPr algn="ctr"/>
-          </a:p>
-        </p:txBody>
-      </p:sp>
-      <p:sp>
-        <p:nvSpPr>
-          <p:cNvPr id="6" name="TextBox 5"/>
-          <p:cNvSpPr txBox="1"/>
-          <p:nvPr/>
-        </p:nvSpPr>
-        <p:spPr>
-          <a:xfrm>
-            <a:off x="502920" y="6400800"/>
-            <a:ext cx="5486400" cy="320040"/>
-          </a:xfrm>
-          <a:prstGeom prst="rect">
-            <a:avLst/>
-          </a:prstGeom>
-          <a:noFill/>
-        </p:spPr>
-        <p:txBody>
-          <a:bodyPr wrap="square" anchor="t" lIns="0" rIns="0" tIns="0" bIns="0">
-            <a:spAutoFit/>
-          </a:bodyPr>
-          <a:lstStyle/>
-          <a:p>
-            <a:r>
-              <a:rPr sz="1100" b="1" i="0">
-                <a:solidFill>
-                  <a:srgbClr val="2A2929"/>
-                </a:solidFill>
-                <a:latin typeface="Roboto"/>
-              </a:rPr>
-              <a:t>Kangan </a:t>
-            </a:r>
-            <a:r>
-              <a:rPr sz="1100" b="1" i="0">
-                <a:solidFill>
-                  <a:srgbClr val="D68E10"/>
-                </a:solidFill>
-                <a:latin typeface="Roboto"/>
-              </a:rPr>
-              <a:t>Institute</a:t>
-            </a:r>
-          </a:p>
-        </p:txBody>
-      </p:sp>
-      <p:sp>
-        <p:nvSpPr>
-          <p:cNvPr id="7" name="TextBox 6"/>
-          <p:cNvSpPr txBox="1"/>
-          <p:nvPr/>
-        </p:nvSpPr>
-        <p:spPr>
-          <a:xfrm>
-            <a:off x="10515600" y="6400800"/>
-            <a:ext cx="1188720" cy="320040"/>
-          </a:xfrm>
-          <a:prstGeom prst="rect">
-            <a:avLst/>
-          </a:prstGeom>
-          <a:noFill/>
-        </p:spPr>
-        <p:txBody>
-          <a:bodyPr wrap="square" anchor="t" lIns="0" rIns="0" tIns="0" bIns="0">
-            <a:spAutoFit/>
-          </a:bodyPr>
-          <a:lstStyle/>
-          <a:p>
-            <a:pPr algn="r"/>
-            <a:r>
-              <a:rPr sz="1100" b="0" i="0">
-                <a:solidFill>
-                  <a:srgbClr val="7A7A7A"/>
-                </a:solidFill>
-                <a:latin typeface="Roboto"/>
-              </a:rPr>
-              <a:t/>
-            </a:r>
-          </a:p>
-        </p:txBody>
-      </p:sp>
-    </p:spTree>
-  </p:cSld>
-  <p:clrMapOvr>
-    <a:masterClrMapping/>
-  </p:clrMapOvr>
-</p:sld>
-</file>
-
-<file path=ppt/slides/slide21.xml><?xml version="1.0" encoding="utf-8"?>
-<p:sld xmlns:a="http://schemas.openxmlformats.org/drawingml/2006/main" xmlns:p="http://schemas.openxmlformats.org/presentationml/2006/main" xmlns:r="http://schemas.openxmlformats.org/officeDocument/2006/relationships">
-  <p:cSld>
-    <p:bg>
-      <p:bgPr>
-        <a:solidFill>
-          <a:srgbClr val="FFFFFF"/>
-        </a:solidFill>
-        <a:effectLst/>
-      </p:bgPr>
-    </p:bg>
-    <p:spTree>
-      <p:nvGrpSpPr>
-        <p:cNvPr id="1" name=""/>
-        <p:cNvGrpSpPr/>
-        <p:nvPr/>
-      </p:nvGrpSpPr>
-      <p:grpSpPr/>
-      <p:sp>
-        <p:nvSpPr>
-          <p:cNvPr id="2" name="TextBox 1"/>
-          <p:cNvSpPr txBox="1"/>
-          <p:nvPr/>
-        </p:nvSpPr>
-        <p:spPr>
-          <a:xfrm>
-            <a:off x="640080" y="457200"/>
-            <a:ext cx="10881360" cy="960120"/>
-          </a:xfrm>
-          <a:prstGeom prst="rect">
-            <a:avLst/>
-          </a:prstGeom>
-          <a:noFill/>
-        </p:spPr>
-        <p:txBody>
-          <a:bodyPr wrap="square" anchor="t" lIns="0" rIns="0" tIns="0" bIns="0">
-            <a:spAutoFit/>
-          </a:bodyPr>
-          <a:lstStyle/>
-          <a:p>
-            <a:r>
-              <a:rPr sz="2800" b="1" i="0">
-                <a:solidFill>
-                  <a:srgbClr val="2A2929"/>
-                </a:solidFill>
-                <a:latin typeface="Roboto"/>
-              </a:rPr>
-              <a:t>Reflect, and respond to feedback</a:t>
-            </a:r>
-          </a:p>
-          <a:p>
-            <a:pPr>
-              <a:spcBef>
-                <a:spcPts val="200"/>
-              </a:spcBef>
-            </a:pPr>
-            <a:r>
-              <a:rPr sz="1800" b="0" i="1">
-                <a:solidFill>
-                  <a:srgbClr val="D68E10"/>
-                </a:solidFill>
-                <a:latin typeface="Roboto Light"/>
-              </a:rPr>
-              <a:t>honest review, then improve</a:t>
-            </a:r>
-          </a:p>
-        </p:txBody>
-      </p:sp>
-      <p:sp>
-        <p:nvSpPr>
-          <p:cNvPr id="3" name="Rectangle 2"/>
-          <p:cNvSpPr/>
-          <p:nvPr/>
-        </p:nvSpPr>
-        <p:spPr>
-          <a:xfrm>
-            <a:off x="658368" y="1371600"/>
-            <a:ext cx="1463040" cy="50800"/>
-          </a:xfrm>
-          <a:prstGeom prst="rect">
-            <a:avLst/>
-          </a:prstGeom>
-          <a:solidFill>
-            <a:srgbClr val="004488"/>
-          </a:solidFill>
-          <a:ln>
-            <a:noFill/>
-          </a:ln>
-          <a:effectLst/>
-        </p:spPr>
-        <p:style>
-          <a:lnRef idx="1">
-            <a:schemeClr val="accent1"/>
-          </a:lnRef>
-          <a:fillRef idx="3">
-            <a:schemeClr val="accent1"/>
-          </a:fillRef>
-          <a:effectRef idx="2">
-            <a:schemeClr val="accent1"/>
-          </a:effectRef>
-          <a:fontRef idx="minor">
-            <a:schemeClr val="lt1"/>
-          </a:fontRef>
-        </p:style>
-        <p:txBody>
-          <a:bodyPr rtlCol="0" anchor="ctr"/>
-          <a:lstStyle/>
-          <a:p>
-            <a:pPr algn="ctr"/>
-          </a:p>
-        </p:txBody>
-      </p:sp>
-      <p:sp>
-        <p:nvSpPr>
-          <p:cNvPr id="4" name="TextBox 3"/>
-          <p:cNvSpPr txBox="1"/>
-          <p:nvPr/>
-        </p:nvSpPr>
-        <p:spPr>
-          <a:xfrm>
-            <a:off x="658368" y="1691640"/>
-            <a:ext cx="10881360" cy="4480560"/>
-          </a:xfrm>
-          <a:prstGeom prst="rect">
-            <a:avLst/>
-          </a:prstGeom>
-          <a:noFill/>
-        </p:spPr>
-        <p:txBody>
-          <a:bodyPr wrap="square" anchor="ctr" lIns="0" rIns="0" tIns="0" bIns="0">
-            <a:spAutoFit/>
-          </a:bodyPr>
-          <a:lstStyle/>
-          <a:p>
-            <a:pPr marL="0" indent="0">
-              <a:lnSpc>
-                <a:spcPct val="105000"/>
-              </a:lnSpc>
-              <a:spcBef>
-                <a:spcPts val="0"/>
-              </a:spcBef>
-              <a:spcAft>
-                <a:spcPts val="1000"/>
-              </a:spcAft>
-            </a:pPr>
-            <a:r>
-              <a:rPr sz="2400" b="1" i="0">
-                <a:solidFill>
-                  <a:srgbClr val="EDAB0C"/>
-                </a:solidFill>
-                <a:latin typeface="Roboto"/>
-              </a:rPr>
-              <a:t>■  </a:t>
-            </a:r>
-            <a:r>
-              <a:rPr sz="2400" b="0" i="0">
-                <a:solidFill>
-                  <a:srgbClr val="2A2929"/>
-                </a:solidFill>
-                <a:latin typeface="Roboto"/>
-              </a:rPr>
-              <a:t>A reflection is an honest review — what worked, what you'd do differently, what you learned — not a summary of what you did.</a:t>
-            </a:r>
-          </a:p>
-          <a:p>
-            <a:pPr marL="0" indent="0">
-              <a:lnSpc>
-                <a:spcPct val="105000"/>
-              </a:lnSpc>
-              <a:spcBef>
-                <a:spcPts val="0"/>
-              </a:spcBef>
-              <a:spcAft>
-                <a:spcPts val="1000"/>
-              </a:spcAft>
-            </a:pPr>
-            <a:r>
-              <a:rPr sz="2400" b="1" i="0">
-                <a:solidFill>
-                  <a:srgbClr val="EDAB0C"/>
-                </a:solidFill>
-                <a:latin typeface="Roboto"/>
-              </a:rPr>
-              <a:t>■  </a:t>
-            </a:r>
-            <a:r>
-              <a:rPr sz="2400" b="0" i="0">
-                <a:solidFill>
-                  <a:srgbClr val="2A2929"/>
-                </a:solidFill>
-                <a:latin typeface="Roboto"/>
-              </a:rPr>
-              <a:t>Then seek feedback on your report from the required personnel, and respond to it.</a:t>
-            </a:r>
-          </a:p>
-          <a:p>
-            <a:pPr marL="0" indent="0">
-              <a:lnSpc>
-                <a:spcPct val="105000"/>
-              </a:lnSpc>
-              <a:spcBef>
-                <a:spcPts val="0"/>
-              </a:spcBef>
-              <a:spcAft>
-                <a:spcPts val="1000"/>
-              </a:spcAft>
-            </a:pPr>
-            <a:r>
-              <a:rPr sz="2400" b="1" i="0">
-                <a:solidFill>
-                  <a:srgbClr val="EDAB0C"/>
-                </a:solidFill>
-                <a:latin typeface="Roboto"/>
-              </a:rPr>
-              <a:t>■  </a:t>
-            </a:r>
-            <a:r>
-              <a:rPr sz="2400" b="0" i="0">
-                <a:solidFill>
-                  <a:srgbClr val="2A2929"/>
-                </a:solidFill>
-                <a:latin typeface="Roboto"/>
-              </a:rPr>
-              <a:t>Acting on feedback is part of the job — and it's assessed.</a:t>
-            </a:r>
-          </a:p>
-        </p:txBody>
-      </p:sp>
-      <p:sp>
-        <p:nvSpPr>
-          <p:cNvPr id="5" name="Rectangle 4"/>
-          <p:cNvSpPr/>
-          <p:nvPr/>
-        </p:nvSpPr>
-        <p:spPr>
-          <a:xfrm>
-            <a:off x="0" y="6565392"/>
-            <a:ext cx="12191695" cy="38100"/>
-          </a:xfrm>
-          <a:prstGeom prst="rect">
-            <a:avLst/>
-          </a:prstGeom>
-          <a:solidFill>
-            <a:srgbClr val="004488"/>
-          </a:solidFill>
-          <a:ln>
-            <a:noFill/>
-          </a:ln>
-          <a:effectLst/>
-        </p:spPr>
-        <p:style>
-          <a:lnRef idx="1">
-            <a:schemeClr val="accent1"/>
-          </a:lnRef>
-          <a:fillRef idx="3">
-            <a:schemeClr val="accent1"/>
-          </a:fillRef>
-          <a:effectRef idx="2">
-            <a:schemeClr val="accent1"/>
-          </a:effectRef>
-          <a:fontRef idx="minor">
-            <a:schemeClr val="lt1"/>
-          </a:fontRef>
-        </p:style>
-        <p:txBody>
-          <a:bodyPr rtlCol="0" anchor="ctr"/>
-          <a:lstStyle/>
-          <a:p>
-            <a:pPr algn="ctr"/>
-          </a:p>
-        </p:txBody>
-      </p:sp>
-      <p:sp>
-        <p:nvSpPr>
-          <p:cNvPr id="6" name="TextBox 5"/>
-          <p:cNvSpPr txBox="1"/>
-          <p:nvPr/>
-        </p:nvSpPr>
-        <p:spPr>
-          <a:xfrm>
-            <a:off x="502920" y="6400800"/>
-            <a:ext cx="5486400" cy="320040"/>
-          </a:xfrm>
-          <a:prstGeom prst="rect">
-            <a:avLst/>
-          </a:prstGeom>
-          <a:noFill/>
-        </p:spPr>
-        <p:txBody>
-          <a:bodyPr wrap="square" anchor="t" lIns="0" rIns="0" tIns="0" bIns="0">
-            <a:spAutoFit/>
-          </a:bodyPr>
-          <a:lstStyle/>
-          <a:p>
-            <a:r>
-              <a:rPr sz="1100" b="1" i="0">
-                <a:solidFill>
-                  <a:srgbClr val="2A2929"/>
-                </a:solidFill>
-                <a:latin typeface="Roboto"/>
-              </a:rPr>
-              <a:t>Kangan </a:t>
-            </a:r>
-            <a:r>
-              <a:rPr sz="1100" b="1" i="0">
-                <a:solidFill>
-                  <a:srgbClr val="D68E10"/>
-                </a:solidFill>
-                <a:latin typeface="Roboto"/>
-              </a:rPr>
-              <a:t>Institute</a:t>
-            </a:r>
-          </a:p>
-        </p:txBody>
-      </p:sp>
-      <p:sp>
-        <p:nvSpPr>
-          <p:cNvPr id="7" name="TextBox 6"/>
-          <p:cNvSpPr txBox="1"/>
-          <p:nvPr/>
-        </p:nvSpPr>
-        <p:spPr>
-          <a:xfrm>
-            <a:off x="10515600" y="6400800"/>
-            <a:ext cx="1188720" cy="320040"/>
-          </a:xfrm>
-          <a:prstGeom prst="rect">
-            <a:avLst/>
-          </a:prstGeom>
-          <a:noFill/>
-        </p:spPr>
-        <p:txBody>
-          <a:bodyPr wrap="square" anchor="t" lIns="0" rIns="0" tIns="0" bIns="0">
-            <a:spAutoFit/>
-          </a:bodyPr>
-          <a:lstStyle/>
-          <a:p>
-            <a:pPr algn="r"/>
-            <a:r>
-              <a:rPr sz="1100" b="0" i="0">
-                <a:solidFill>
-                  <a:srgbClr val="7A7A7A"/>
-                </a:solidFill>
-                <a:latin typeface="Roboto"/>
-              </a:rPr>
-              <a:t>16</a:t>
-            </a:r>
-          </a:p>
-        </p:txBody>
-      </p:sp>
-    </p:spTree>
-  </p:cSld>
-  <p:clrMapOvr>
-    <a:masterClrMapping/>
-  </p:clrMapOvr>
-</p:sld>
-</file>
-
-<file path=ppt/slides/slide22.xml><?xml version="1.0" encoding="utf-8"?>
-<p:sld xmlns:a="http://schemas.openxmlformats.org/drawingml/2006/main" xmlns:p="http://schemas.openxmlformats.org/presentationml/2006/main" xmlns:r="http://schemas.openxmlformats.org/officeDocument/2006/relationships">
-  <p:cSld>
-    <p:bg>
-      <p:bgPr>
-        <a:solidFill>
-          <a:srgbClr val="FFFFFF"/>
-        </a:solidFill>
-        <a:effectLst/>
-      </p:bgPr>
-    </p:bg>
-    <p:spTree>
-      <p:nvGrpSpPr>
-        <p:cNvPr id="1" name=""/>
-        <p:cNvGrpSpPr/>
-        <p:nvPr/>
-      </p:nvGrpSpPr>
-      <p:grpSpPr/>
-      <p:sp>
-        <p:nvSpPr>
-          <p:cNvPr id="2" name="Rectangle 1"/>
-          <p:cNvSpPr/>
-          <p:nvPr/>
-        </p:nvSpPr>
-        <p:spPr>
-          <a:xfrm>
-            <a:off x="0" y="0"/>
-            <a:ext cx="12191695" cy="1234440"/>
-          </a:xfrm>
-          <a:prstGeom prst="rect">
-            <a:avLst/>
-          </a:prstGeom>
-          <a:solidFill>
-            <a:srgbClr val="004488"/>
-          </a:solidFill>
-          <a:ln>
-            <a:noFill/>
-          </a:ln>
-          <a:effectLst/>
-        </p:spPr>
-        <p:style>
-          <a:lnRef idx="1">
-            <a:schemeClr val="accent1"/>
-          </a:lnRef>
-          <a:fillRef idx="3">
-            <a:schemeClr val="accent1"/>
-          </a:fillRef>
-          <a:effectRef idx="2">
-            <a:schemeClr val="accent1"/>
-          </a:effectRef>
-          <a:fontRef idx="minor">
-            <a:schemeClr val="lt1"/>
-          </a:fontRef>
-        </p:style>
-        <p:txBody>
-          <a:bodyPr rtlCol="0" anchor="ctr"/>
-          <a:lstStyle/>
-          <a:p>
-            <a:pPr algn="ctr"/>
-          </a:p>
-        </p:txBody>
-      </p:sp>
-      <p:sp>
-        <p:nvSpPr>
-          <p:cNvPr id="3" name="Rounded Rectangle 2"/>
-          <p:cNvSpPr/>
-          <p:nvPr/>
-        </p:nvSpPr>
-        <p:spPr>
-          <a:xfrm>
-            <a:off x="640080" y="384048"/>
-            <a:ext cx="1691640" cy="457200"/>
-          </a:xfrm>
-          <a:prstGeom prst="roundRect">
-            <a:avLst/>
-          </a:prstGeom>
-          <a:solidFill>
-            <a:srgbClr val="2A2929"/>
-          </a:solidFill>
-          <a:ln>
-            <a:noFill/>
-          </a:ln>
-          <a:effectLst/>
-        </p:spPr>
-        <p:style>
-          <a:lnRef idx="1">
-            <a:schemeClr val="accent1"/>
-          </a:lnRef>
-          <a:fillRef idx="3">
-            <a:schemeClr val="accent1"/>
-          </a:fillRef>
-          <a:effectRef idx="2">
-            <a:schemeClr val="accent1"/>
-          </a:effectRef>
-          <a:fontRef idx="minor">
-            <a:schemeClr val="lt1"/>
-          </a:fontRef>
-        </p:style>
-        <p:txBody>
-          <a:bodyPr rtlCol="0" anchor="ctr"/>
-          <a:lstStyle/>
-          <a:p>
-            <a:pPr algn="ctr"/>
-            <a:r>
-              <a:rPr sz="1400" b="1" i="0">
-                <a:solidFill>
-                  <a:srgbClr val="FBB900"/>
-                </a:solidFill>
-                <a:latin typeface="Roboto"/>
-              </a:rPr>
-              <a:t>ACTIVITY</a:t>
-            </a:r>
-          </a:p>
-        </p:txBody>
-      </p:sp>
-      <p:sp>
-        <p:nvSpPr>
-          <p:cNvPr id="4" name="TextBox 3"/>
-          <p:cNvSpPr txBox="1"/>
-          <p:nvPr/>
-        </p:nvSpPr>
-        <p:spPr>
-          <a:xfrm>
-            <a:off x="2560320" y="310896"/>
-            <a:ext cx="8961120" cy="685800"/>
-          </a:xfrm>
-          <a:prstGeom prst="rect">
-            <a:avLst/>
-          </a:prstGeom>
-          <a:noFill/>
-        </p:spPr>
-        <p:txBody>
-          <a:bodyPr wrap="square" anchor="ctr" lIns="0" rIns="0" tIns="0" bIns="0">
-            <a:spAutoFit/>
-          </a:bodyPr>
-          <a:lstStyle/>
-          <a:p>
-            <a:r>
-              <a:rPr sz="2600" b="1" i="0">
-                <a:solidFill>
-                  <a:srgbClr val="FFFFFF"/>
-                </a:solidFill>
-                <a:latin typeface="Roboto"/>
-              </a:rPr>
-              <a:t>Reflect &amp; seek feedback</a:t>
-            </a:r>
-          </a:p>
-        </p:txBody>
-      </p:sp>
-      <p:sp>
-        <p:nvSpPr>
-          <p:cNvPr id="5" name="TextBox 4"/>
-          <p:cNvSpPr txBox="1"/>
-          <p:nvPr/>
-        </p:nvSpPr>
-        <p:spPr>
-          <a:xfrm>
-            <a:off x="658368" y="1554480"/>
-            <a:ext cx="10881360" cy="4297680"/>
-          </a:xfrm>
-          <a:prstGeom prst="rect">
-            <a:avLst/>
-          </a:prstGeom>
-          <a:noFill/>
-        </p:spPr>
-        <p:txBody>
-          <a:bodyPr wrap="square" anchor="t" lIns="0" rIns="0" tIns="0" bIns="0">
-            <a:spAutoFit/>
-          </a:bodyPr>
-          <a:lstStyle/>
-          <a:p>
-            <a:pPr marL="0" indent="0">
-              <a:lnSpc>
-                <a:spcPct val="105000"/>
-              </a:lnSpc>
-              <a:spcBef>
-                <a:spcPts val="0"/>
-              </a:spcBef>
-              <a:spcAft>
-                <a:spcPts val="1000"/>
-              </a:spcAft>
-            </a:pPr>
-            <a:r>
-              <a:rPr sz="1700" b="1" i="0">
-                <a:solidFill>
-                  <a:srgbClr val="EDAB0C"/>
-                </a:solidFill>
-                <a:latin typeface="Roboto"/>
-              </a:rPr>
-              <a:t>■  </a:t>
-            </a:r>
-            <a:r>
-              <a:rPr sz="1700" b="0" i="0">
-                <a:solidFill>
-                  <a:srgbClr val="2A2929"/>
-                </a:solidFill>
-                <a:latin typeface="Roboto"/>
-              </a:rPr>
-              <a:t>Close out the engagement:</a:t>
-            </a:r>
-          </a:p>
-          <a:p>
-            <a:pPr marL="365760" indent="0">
-              <a:lnSpc>
-                <a:spcPct val="105000"/>
-              </a:lnSpc>
-              <a:spcBef>
-                <a:spcPts val="0"/>
-              </a:spcBef>
-              <a:spcAft>
-                <a:spcPts val="500"/>
-              </a:spcAft>
-            </a:pPr>
-            <a:r>
-              <a:rPr sz="1400" b="0" i="0">
-                <a:solidFill>
-                  <a:srgbClr val="7A7A7A"/>
-                </a:solidFill>
-                <a:latin typeface="Roboto"/>
-              </a:rPr>
-              <a:t>–  </a:t>
-            </a:r>
-            <a:r>
-              <a:rPr sz="1400" b="0" i="0">
-                <a:solidFill>
-                  <a:srgbClr val="2A2929"/>
-                </a:solidFill>
-                <a:latin typeface="Roboto"/>
-              </a:rPr>
-              <a:t>write a short, honest reflection on the build and the process</a:t>
-            </a:r>
-          </a:p>
-          <a:p>
-            <a:pPr marL="365760" indent="0">
-              <a:lnSpc>
-                <a:spcPct val="105000"/>
-              </a:lnSpc>
-              <a:spcBef>
-                <a:spcPts val="0"/>
-              </a:spcBef>
-              <a:spcAft>
-                <a:spcPts val="500"/>
-              </a:spcAft>
-            </a:pPr>
-            <a:r>
-              <a:rPr sz="1400" b="0" i="0">
-                <a:solidFill>
-                  <a:srgbClr val="7A7A7A"/>
-                </a:solidFill>
-                <a:latin typeface="Roboto"/>
-              </a:rPr>
-              <a:t>–  </a:t>
-            </a:r>
-            <a:r>
-              <a:rPr sz="1400" b="0" i="0">
-                <a:solidFill>
-                  <a:srgbClr val="2A2929"/>
-                </a:solidFill>
-                <a:latin typeface="Roboto"/>
-              </a:rPr>
-              <a:t>seek feedback on your report, and note what you changed in response</a:t>
-            </a:r>
-          </a:p>
-        </p:txBody>
-      </p:sp>
-      <p:sp>
-        <p:nvSpPr>
-          <p:cNvPr id="6" name="Rounded Rectangle 5"/>
-          <p:cNvSpPr/>
-          <p:nvPr/>
-        </p:nvSpPr>
-        <p:spPr>
-          <a:xfrm>
-            <a:off x="640080" y="5897880"/>
-            <a:ext cx="4023360" cy="457200"/>
-          </a:xfrm>
-          <a:prstGeom prst="roundRect">
-            <a:avLst/>
-          </a:prstGeom>
-          <a:solidFill>
-            <a:srgbClr val="F9F9F9"/>
-          </a:solidFill>
-          <a:ln w="12700">
-            <a:solidFill>
-              <a:srgbClr val="CCCCCC"/>
-            </a:solidFill>
-          </a:ln>
-          <a:effectLst/>
-        </p:spPr>
-        <p:style>
-          <a:lnRef idx="1">
-            <a:schemeClr val="accent1"/>
-          </a:lnRef>
-          <a:fillRef idx="3">
-            <a:schemeClr val="accent1"/>
-          </a:fillRef>
-          <a:effectRef idx="2">
-            <a:schemeClr val="accent1"/>
-          </a:effectRef>
-          <a:fontRef idx="minor">
-            <a:schemeClr val="lt1"/>
-          </a:fontRef>
-        </p:style>
-        <p:txBody>
-          <a:bodyPr rtlCol="0" anchor="ctr"/>
-          <a:lstStyle/>
-          <a:p>
-            <a:pPr algn="ctr"/>
-          </a:p>
-        </p:txBody>
-      </p:sp>
-      <p:sp>
-        <p:nvSpPr>
-          <p:cNvPr id="7" name="TextBox 6"/>
-          <p:cNvSpPr txBox="1"/>
-          <p:nvPr/>
-        </p:nvSpPr>
-        <p:spPr>
-          <a:xfrm>
-            <a:off x="822960" y="5943600"/>
-            <a:ext cx="3657600" cy="365760"/>
-          </a:xfrm>
-          <a:prstGeom prst="rect">
-            <a:avLst/>
-          </a:prstGeom>
-          <a:noFill/>
-        </p:spPr>
-        <p:txBody>
-          <a:bodyPr wrap="square" anchor="ctr" lIns="0" rIns="0" tIns="0" bIns="0">
-            <a:spAutoFit/>
-          </a:bodyPr>
-          <a:lstStyle/>
-          <a:p>
-            <a:r>
-              <a:rPr sz="1500" b="1" i="0">
-                <a:solidFill>
-                  <a:srgbClr val="2A2929"/>
-                </a:solidFill>
-                <a:latin typeface="Roboto"/>
-              </a:rPr>
-              <a:t>⏱  ~15 min</a:t>
-            </a:r>
-          </a:p>
-        </p:txBody>
-      </p:sp>
-      <p:sp>
-        <p:nvSpPr>
-          <p:cNvPr id="8" name="Rectangle 7"/>
-          <p:cNvSpPr/>
-          <p:nvPr/>
-        </p:nvSpPr>
-        <p:spPr>
-          <a:xfrm>
-            <a:off x="0" y="6565392"/>
-            <a:ext cx="12191695" cy="38100"/>
-          </a:xfrm>
-          <a:prstGeom prst="rect">
-            <a:avLst/>
-          </a:prstGeom>
-          <a:solidFill>
-            <a:srgbClr val="004488"/>
-          </a:solidFill>
-          <a:ln>
-            <a:noFill/>
-          </a:ln>
-          <a:effectLst/>
-        </p:spPr>
-        <p:style>
-          <a:lnRef idx="1">
-            <a:schemeClr val="accent1"/>
-          </a:lnRef>
-          <a:fillRef idx="3">
-            <a:schemeClr val="accent1"/>
-          </a:fillRef>
-          <a:effectRef idx="2">
-            <a:schemeClr val="accent1"/>
-          </a:effectRef>
-          <a:fontRef idx="minor">
-            <a:schemeClr val="lt1"/>
-          </a:fontRef>
-        </p:style>
-        <p:txBody>
-          <a:bodyPr rtlCol="0" anchor="ctr"/>
-          <a:lstStyle/>
-          <a:p>
-            <a:pPr algn="ctr"/>
-          </a:p>
-        </p:txBody>
-      </p:sp>
-      <p:sp>
-        <p:nvSpPr>
-          <p:cNvPr id="9" name="TextBox 8"/>
-          <p:cNvSpPr txBox="1"/>
-          <p:nvPr/>
-        </p:nvSpPr>
-        <p:spPr>
-          <a:xfrm>
-            <a:off x="502920" y="6400800"/>
-            <a:ext cx="5486400" cy="320040"/>
-          </a:xfrm>
-          <a:prstGeom prst="rect">
-            <a:avLst/>
-          </a:prstGeom>
-          <a:noFill/>
-        </p:spPr>
-        <p:txBody>
-          <a:bodyPr wrap="square" anchor="t" lIns="0" rIns="0" tIns="0" bIns="0">
-            <a:spAutoFit/>
-          </a:bodyPr>
-          <a:lstStyle/>
-          <a:p>
-            <a:r>
-              <a:rPr sz="1100" b="1" i="0">
-                <a:solidFill>
-                  <a:srgbClr val="2A2929"/>
-                </a:solidFill>
-                <a:latin typeface="Roboto"/>
-              </a:rPr>
-              <a:t>Kangan </a:t>
-            </a:r>
-            <a:r>
-              <a:rPr sz="1100" b="1" i="0">
-                <a:solidFill>
-                  <a:srgbClr val="D68E10"/>
-                </a:solidFill>
-                <a:latin typeface="Roboto"/>
-              </a:rPr>
-              <a:t>Institute</a:t>
-            </a:r>
-          </a:p>
-        </p:txBody>
-      </p:sp>
-      <p:sp>
-        <p:nvSpPr>
-          <p:cNvPr id="10" name="TextBox 9"/>
-          <p:cNvSpPr txBox="1"/>
-          <p:nvPr/>
-        </p:nvSpPr>
-        <p:spPr>
-          <a:xfrm>
-            <a:off x="10515600" y="6400800"/>
-            <a:ext cx="1188720" cy="320040"/>
-          </a:xfrm>
-          <a:prstGeom prst="rect">
-            <a:avLst/>
-          </a:prstGeom>
-          <a:noFill/>
-        </p:spPr>
-        <p:txBody>
-          <a:bodyPr wrap="square" anchor="t" lIns="0" rIns="0" tIns="0" bIns="0">
-            <a:spAutoFit/>
-          </a:bodyPr>
-          <a:lstStyle/>
-          <a:p>
-            <a:pPr algn="r"/>
-            <a:r>
-              <a:rPr sz="1100" b="0" i="0">
-                <a:solidFill>
-                  <a:srgbClr val="7A7A7A"/>
-                </a:solidFill>
-                <a:latin typeface="Roboto"/>
-              </a:rPr>
-              <a:t>17</a:t>
-            </a:r>
-          </a:p>
-        </p:txBody>
-      </p:sp>
-    </p:spTree>
-  </p:cSld>
-  <p:clrMapOvr>
-    <a:masterClrMapping/>
-  </p:clrMapOvr>
-</p:sld>
-</file>
-
-<file path=ppt/slides/slide23.xml><?xml version="1.0" encoding="utf-8"?>
 <p:sld xmlns:a="http://schemas.openxmlformats.org/drawingml/2006/main" xmlns:p="http://schemas.openxmlformats.org/presentationml/2006/main" xmlns:r="http://schemas.openxmlformats.org/officeDocument/2006/relationships">
   <p:cSld>
     <p:bg>
@@ -11380,7 +8534,7 @@
             <a:r>
               <a:rPr sz="1800" b="1" i="0">
                 <a:solidFill>
-                  <a:srgbClr val="004488"/>
+                  <a:srgbClr val="205F61"/>
                 </a:solidFill>
                 <a:latin typeface="Roboto"/>
               </a:rPr>
@@ -11404,7 +8558,7 @@
             <a:avLst/>
           </a:prstGeom>
           <a:solidFill>
-            <a:srgbClr val="004488"/>
+            <a:srgbClr val="205F61"/>
           </a:solidFill>
           <a:ln>
             <a:noFill/>
@@ -11494,7 +8648,7 @@
             <a:avLst/>
           </a:prstGeom>
           <a:solidFill>
-            <a:srgbClr val="004488"/>
+            <a:srgbClr val="205F61"/>
           </a:solidFill>
           <a:ln>
             <a:noFill/>
@@ -11557,7 +8711,7 @@
                 </a:solidFill>
                 <a:latin typeface="Roboto"/>
               </a:rPr>
-              <a:t>Evidence is traceable and lives in Appendices A / B / C.</a:t>
+              <a:t>Prove every path, including the ones that must fail.</a:t>
             </a:r>
           </a:p>
         </p:txBody>
@@ -11623,7 +8777,7 @@
             <a:avLst/>
           </a:prstGeom>
           <a:solidFill>
-            <a:srgbClr val="004488"/>
+            <a:srgbClr val="205F61"/>
           </a:solidFill>
           <a:ln>
             <a:noFill/>
@@ -11686,7 +8840,7 @@
                 </a:solidFill>
                 <a:latin typeface="Roboto"/>
               </a:rPr>
-              <a:t>Write to the template, cross-referencing the evidence throughout.</a:t>
+              <a:t>Trigger the scaling policy rather than asserting it works.</a:t>
             </a:r>
           </a:p>
         </p:txBody>
@@ -11752,7 +8906,7 @@
             <a:avLst/>
           </a:prstGeom>
           <a:solidFill>
-            <a:srgbClr val="004488"/>
+            <a:srgbClr val="205F61"/>
           </a:solidFill>
           <a:ln>
             <a:noFill/>
@@ -11815,7 +8969,7 @@
                 </a:solidFill>
                 <a:latin typeface="Roboto"/>
               </a:rPr>
-              <a:t>§5 carries your C1–C8 justifications; §6 your validation results.</a:t>
+              <a:t>Answer knowledge questions from your own build, not from definitions.</a:t>
             </a:r>
           </a:p>
         </p:txBody>
@@ -11881,7 +9035,7 @@
             <a:avLst/>
           </a:prstGeom>
           <a:solidFill>
-            <a:srgbClr val="004488"/>
+            <a:srgbClr val="205F61"/>
           </a:solidFill>
           <a:ln>
             <a:noFill/>
@@ -11944,7 +9098,7 @@
                 </a:solidFill>
                 <a:latin typeface="Roboto"/>
               </a:rPr>
-              <a:t>Evidence your knowledge in the context of your build; reflect and respond to feedback.</a:t>
+              <a:t>File the record where policy requires, and name the policy.</a:t>
             </a:r>
           </a:p>
         </p:txBody>
@@ -11957,19 +9111,17 @@
         </p:nvSpPr>
         <p:spPr>
           <a:xfrm>
-            <a:off x="640080" y="5769864"/>
-            <a:ext cx="10927080" cy="841248"/>
+            <a:off x="0" y="6565392"/>
+            <a:ext cx="12191695" cy="38100"/>
           </a:xfrm>
           <a:prstGeom prst="rect">
             <a:avLst/>
           </a:prstGeom>
           <a:solidFill>
-            <a:srgbClr val="FFFFFF"/>
+            <a:srgbClr val="205F61"/>
           </a:solidFill>
-          <a:ln w="12700">
-            <a:solidFill>
-              <a:srgbClr val="CCCCCC"/>
-            </a:solidFill>
+          <a:ln>
+            <a:noFill/>
           </a:ln>
           <a:effectLst/>
         </p:spPr>
@@ -11997,134 +9149,7 @@
       </p:sp>
       <p:sp>
         <p:nvSpPr>
-          <p:cNvPr id="17" name="Rectangle 16"/>
-          <p:cNvSpPr/>
-          <p:nvPr/>
-        </p:nvSpPr>
-        <p:spPr>
-          <a:xfrm>
-            <a:off x="640080" y="5769864"/>
-            <a:ext cx="109728" cy="841248"/>
-          </a:xfrm>
-          <a:prstGeom prst="rect">
-            <a:avLst/>
-          </a:prstGeom>
-          <a:solidFill>
-            <a:srgbClr val="004488"/>
-          </a:solidFill>
-          <a:ln>
-            <a:noFill/>
-          </a:ln>
-          <a:effectLst/>
-        </p:spPr>
-        <p:style>
-          <a:lnRef idx="1">
-            <a:schemeClr val="accent1"/>
-          </a:lnRef>
-          <a:fillRef idx="3">
-            <a:schemeClr val="accent1"/>
-          </a:fillRef>
-          <a:effectRef idx="2">
-            <a:schemeClr val="accent1"/>
-          </a:effectRef>
-          <a:fontRef idx="minor">
-            <a:schemeClr val="lt1"/>
-          </a:fontRef>
-        </p:style>
-        <p:txBody>
-          <a:bodyPr rtlCol="0" anchor="ctr"/>
-          <a:lstStyle/>
-          <a:p>
-            <a:pPr algn="ctr"/>
-          </a:p>
-        </p:txBody>
-      </p:sp>
-      <p:sp>
-        <p:nvSpPr>
-          <p:cNvPr id="18" name="TextBox 17"/>
-          <p:cNvSpPr txBox="1"/>
-          <p:nvPr/>
-        </p:nvSpPr>
-        <p:spPr>
-          <a:xfrm>
-            <a:off x="960120" y="5769864"/>
-            <a:ext cx="10424160" cy="841248"/>
-          </a:xfrm>
-          <a:prstGeom prst="rect">
-            <a:avLst/>
-          </a:prstGeom>
-          <a:noFill/>
-        </p:spPr>
-        <p:txBody>
-          <a:bodyPr wrap="square" anchor="ctr" lIns="0" rIns="0" tIns="0" bIns="0">
-            <a:spAutoFit/>
-          </a:bodyPr>
-          <a:lstStyle/>
-          <a:p>
-            <a:pPr>
-              <a:lnSpc>
-                <a:spcPct val="100000"/>
-              </a:lnSpc>
-            </a:pPr>
-            <a:r>
-              <a:rPr sz="1700" b="0" i="0">
-                <a:solidFill>
-                  <a:srgbClr val="2A2929"/>
-                </a:solidFill>
-                <a:latin typeface="Roboto"/>
-              </a:rPr>
-              <a:t>The Deployment Report is the AT2 deliverable — this is where it all comes together.</a:t>
-            </a:r>
-          </a:p>
-        </p:txBody>
-      </p:sp>
-      <p:sp>
-        <p:nvSpPr>
-          <p:cNvPr id="19" name="Rectangle 18"/>
-          <p:cNvSpPr/>
-          <p:nvPr/>
-        </p:nvSpPr>
-        <p:spPr>
-          <a:xfrm>
-            <a:off x="0" y="6565392"/>
-            <a:ext cx="12191695" cy="38100"/>
-          </a:xfrm>
-          <a:prstGeom prst="rect">
-            <a:avLst/>
-          </a:prstGeom>
-          <a:solidFill>
-            <a:srgbClr val="004488"/>
-          </a:solidFill>
-          <a:ln>
-            <a:noFill/>
-          </a:ln>
-          <a:effectLst/>
-        </p:spPr>
-        <p:style>
-          <a:lnRef idx="1">
-            <a:schemeClr val="accent1"/>
-          </a:lnRef>
-          <a:fillRef idx="3">
-            <a:schemeClr val="accent1"/>
-          </a:fillRef>
-          <a:effectRef idx="2">
-            <a:schemeClr val="accent1"/>
-          </a:effectRef>
-          <a:fontRef idx="minor">
-            <a:schemeClr val="lt1"/>
-          </a:fontRef>
-        </p:style>
-        <p:txBody>
-          <a:bodyPr rtlCol="0" anchor="ctr"/>
-          <a:lstStyle/>
-          <a:p>
-            <a:pPr algn="ctr"/>
-          </a:p>
-        </p:txBody>
-      </p:sp>
-      <p:sp>
-        <p:nvSpPr>
-          <p:cNvPr id="20" name="TextBox 19"/>
+          <p:cNvPr id="17" name="TextBox 16"/>
           <p:cNvSpPr txBox="1"/>
           <p:nvPr/>
         </p:nvSpPr>
@@ -12167,7 +9192,7 @@
       </p:sp>
       <p:sp>
         <p:nvSpPr>
-          <p:cNvPr id="21" name="TextBox 20"/>
+          <p:cNvPr id="18" name="TextBox 17"/>
           <p:cNvSpPr txBox="1"/>
           <p:nvPr/>
         </p:nvSpPr>
@@ -12195,7 +9220,7 @@
                 </a:solidFill>
                 <a:latin typeface="Roboto"/>
               </a:rPr>
-              <a:t>18</a:t>
+              <a:t>16</a:t>
             </a:r>
           </a:p>
         </p:txBody>
@@ -12208,7 +9233,7 @@
 </p:sld>
 </file>
 
-<file path=ppt/slides/slide24.xml><?xml version="1.0" encoding="utf-8"?>
+<file path=ppt/slides/slide21.xml><?xml version="1.0" encoding="utf-8"?>
 <p:sld xmlns:a="http://schemas.openxmlformats.org/drawingml/2006/main" xmlns:p="http://schemas.openxmlformats.org/presentationml/2006/main" xmlns:r="http://schemas.openxmlformats.org/officeDocument/2006/relationships">
   <p:cSld>
     <p:bg>
@@ -12299,7 +9324,7 @@
                 </a:solidFill>
                 <a:latin typeface="Roboto"/>
               </a:rPr>
-              <a:t>AT2 complete</a:t>
+              <a:t>AT2 from here</a:t>
             </a:r>
           </a:p>
           <a:p>
@@ -12318,7 +9343,7 @@
                 </a:solidFill>
                 <a:latin typeface="Roboto Light"/>
               </a:rPr>
-              <a:t>You can now build a cloud workload to a supplied design, evidence it, justify it, and document it.</a:t>
+              <a:t>You can stand up a working, private, monitored, scaling cloud workload to a run sheet and prove it.</a:t>
             </a:r>
           </a:p>
           <a:p>
@@ -12337,7 +9362,26 @@
                 </a:solidFill>
                 <a:latin typeface="Roboto Light"/>
               </a:rPr>
-              <a:t>Next: the AT2 assessment build — then AT3, where the baseline becomes highly available.</a:t>
+              <a:t>The assessment is the same shape of work on a different system.</a:t>
+            </a:r>
+          </a:p>
+          <a:p>
+            <a:pPr>
+              <a:lnSpc>
+                <a:spcPct val="105000"/>
+              </a:lnSpc>
+              <a:spcBef>
+                <a:spcPts val="1200"/>
+              </a:spcBef>
+            </a:pPr>
+            <a:r>
+              <a:rPr sz="1900" b="0" i="0">
+                <a:solidFill>
+                  <a:srgbClr val="E8E8E8"/>
+                </a:solidFill>
+                <a:latin typeface="Roboto Light"/>
+              </a:rPr>
+              <a:t>After that: making it survive losing a whole availability zone.</a:t>
             </a:r>
           </a:p>
         </p:txBody>
@@ -12491,7 +9535,7 @@
                 </a:solidFill>
                 <a:latin typeface="Roboto"/>
               </a:rPr>
-              <a:t>Evidence into the appendices</a:t>
+              <a:t>Proving the paths</a:t>
             </a:r>
           </a:p>
           <a:p>
@@ -12507,7 +9551,7 @@
                 </a:solidFill>
                 <a:latin typeface="Roboto Light"/>
               </a:rPr>
-              <a:t>make it traceable</a:t>
+              <a:t>test, read, fix, retest</a:t>
             </a:r>
           </a:p>
         </p:txBody>
@@ -12689,7 +9733,7 @@
                 </a:solidFill>
                 <a:latin typeface="Roboto"/>
               </a:rPr>
-              <a:t>What makes evidence count</a:t>
+              <a:t>What testing is for</a:t>
             </a:r>
           </a:p>
           <a:p>
@@ -12705,7 +9749,7 @@
                 </a:solidFill>
                 <a:latin typeface="Roboto Light"/>
               </a:rPr>
-              <a:t>traceable, or it proves nothing</a:t>
+              <a:t>no error is not proof</a:t>
             </a:r>
           </a:p>
         </p:txBody>
@@ -12803,7 +9847,7 @@
                 </a:solidFill>
                 <a:latin typeface="Roboto"/>
               </a:rPr>
-              <a:t>Good evidence is named, dated, and shows the Region and identity it was taken under.</a:t>
+              <a:t>Building something is not the same as confirming it does what was asked.</a:t>
             </a:r>
           </a:p>
           <a:p>
@@ -12834,7 +9878,7 @@
                 </a:solidFill>
                 <a:latin typeface="Roboto"/>
               </a:rPr>
-              <a:t>It's organised and referenceable — so a reader can find the exact item the narrative cites.</a:t>
+              <a:t>Nothing erroring during the build proves only that it deployed.</a:t>
             </a:r>
           </a:p>
           <a:p>
@@ -12865,7 +9909,38 @@
                 </a:solidFill>
                 <a:latin typeface="Roboto"/>
               </a:rPr>
-              <a:t>A screenshot nobody can place, or an export with no label, proves nothing.</a:t>
+              <a:t>Test → observe → compare against what the run sheet asked for → fix → test again.</a:t>
+            </a:r>
+          </a:p>
+          <a:p>
+            <a:pPr marL="0" indent="0">
+              <a:lnSpc>
+                <a:spcPct val="105000"/>
+              </a:lnSpc>
+              <a:spcBef>
+                <a:spcPts val="0"/>
+              </a:spcBef>
+              <a:spcAft>
+                <a:spcPts val="1000"/>
+              </a:spcAft>
+            </a:pPr>
+            <a:r>
+              <a:rPr sz="2400" b="1" i="0">
+                <a:solidFill>
+                  <a:srgbClr val="EDAB0C"/>
+                </a:solidFill>
+                <a:latin typeface="Roboto"/>
+              </a:rPr>
+              <a:t>■  </a:t>
+            </a:r>
+            <a:r>
+              <a:rPr sz="2400" b="0" i="0">
+                <a:solidFill>
+                  <a:srgbClr val="2A2929"/>
+                </a:solidFill>
+                <a:latin typeface="Roboto"/>
+              </a:rPr>
+              <a:t>A test you fixed something to pass is better evidence than one that passed first go — say what you changed.</a:t>
             </a:r>
           </a:p>
         </p:txBody>
@@ -13047,7 +10122,7 @@
                 </a:solidFill>
                 <a:latin typeface="Roboto"/>
               </a:rPr>
-              <a:t>Appendices A / B / C</a:t>
+              <a:t>Reaching a server with nothing exposed</a:t>
             </a:r>
           </a:p>
           <a:p>
@@ -13063,7 +10138,7 @@
                 </a:solidFill>
                 <a:latin typeface="Roboto Light"/>
               </a:rPr>
-              <a:t>where the evidence lives</a:t>
+              <a:t>access without exposure</a:t>
             </a:r>
           </a:p>
         </p:txBody>
@@ -13161,7 +10236,7 @@
                 </a:solidFill>
                 <a:latin typeface="Roboto"/>
               </a:rPr>
-              <a:t>Appendix A — build evidence: the named screenshots taken as you built each tier.</a:t>
+              <a:t>Your servers sit in a private subnet with no public address and no inbound path. You still need to get onto one.</a:t>
             </a:r>
           </a:p>
           <a:p>
@@ -13192,7 +10267,7 @@
                 </a:solidFill>
                 <a:latin typeface="Roboto"/>
               </a:rPr>
-              <a:t>Appendix B — configuration exports: the settings of what you built (e.g. security-group rules, RDS config).</a:t>
+              <a:t>A session service connects through the platform rather than over the network, so it needs no key pair and no open port.</a:t>
             </a:r>
           </a:p>
           <a:p>
@@ -13223,38 +10298,7 @@
                 </a:solidFill>
                 <a:latin typeface="Roboto"/>
               </a:rPr>
-              <a:t>Appendix C — test and validation evidence: connectivity, scaling and recovery-objective results.</a:t>
-            </a:r>
-          </a:p>
-          <a:p>
-            <a:pPr marL="0" indent="0">
-              <a:lnSpc>
-                <a:spcPct val="105000"/>
-              </a:lnSpc>
-              <a:spcBef>
-                <a:spcPts val="0"/>
-              </a:spcBef>
-              <a:spcAft>
-                <a:spcPts val="1000"/>
-              </a:spcAft>
-            </a:pPr>
-            <a:r>
-              <a:rPr sz="2400" b="1" i="0">
-                <a:solidFill>
-                  <a:srgbClr val="EDAB0C"/>
-                </a:solidFill>
-                <a:latin typeface="Roboto"/>
-              </a:rPr>
-              <a:t>■  </a:t>
-            </a:r>
-            <a:r>
-              <a:rPr sz="2400" b="0" i="0">
-                <a:solidFill>
-                  <a:srgbClr val="2A2929"/>
-                </a:solidFill>
-                <a:latin typeface="Roboto"/>
-              </a:rPr>
-              <a:t>Label and number every item so §4–§6 can cross-reference it.</a:t>
+              <a:t>That is exactly why the tier can stay closed: administrative access does not require a way in.</a:t>
             </a:r>
           </a:p>
         </p:txBody>
@@ -13436,7 +10480,7 @@
                 </a:solidFill>
                 <a:latin typeface="Roboto"/>
               </a:rPr>
-              <a:t>Organise what you captured</a:t>
+              <a:t>The four paths worth proving</a:t>
             </a:r>
           </a:p>
           <a:p>
@@ -13452,7 +10496,7 @@
                 </a:solidFill>
                 <a:latin typeface="Roboto Light"/>
               </a:rPr>
-              <a:t>since Topic 6</a:t>
+              <a:t>four paths, four different causes</a:t>
             </a:r>
           </a:p>
         </p:txBody>
@@ -13550,7 +10594,7 @@
                 </a:solidFill>
                 <a:latin typeface="Roboto"/>
               </a:rPr>
-              <a:t>Gather every screenshot, export and test result you captured across the build.</a:t>
+              <a:t>Onto a server — confirm you are where you think you are.</a:t>
             </a:r>
           </a:p>
           <a:p>
@@ -13581,7 +10625,7 @@
                 </a:solidFill>
                 <a:latin typeface="Roboto"/>
               </a:rPr>
-              <a:t>Sort them into A / B / C; give each a clear label and number.</a:t>
+              <a:t>Out to the internet — the outbound path through the NAT gateway works.</a:t>
             </a:r>
           </a:p>
           <a:p>
@@ -13612,7 +10656,69 @@
                 </a:solidFill>
                 <a:latin typeface="Roboto"/>
               </a:rPr>
-              <a:t>Note any gaps — and recapture while the lab is still standing.</a:t>
+              <a:t>Across to the database — the application tier can reach the data tier privately, on its port.</a:t>
+            </a:r>
+          </a:p>
+          <a:p>
+            <a:pPr marL="0" indent="0">
+              <a:lnSpc>
+                <a:spcPct val="105000"/>
+              </a:lnSpc>
+              <a:spcBef>
+                <a:spcPts val="0"/>
+              </a:spcBef>
+              <a:spcAft>
+                <a:spcPts val="1000"/>
+              </a:spcAft>
+            </a:pPr>
+            <a:r>
+              <a:rPr sz="2400" b="1" i="0">
+                <a:solidFill>
+                  <a:srgbClr val="EDAB0C"/>
+                </a:solidFill>
+                <a:latin typeface="Roboto"/>
+              </a:rPr>
+              <a:t>■  </a:t>
+            </a:r>
+            <a:r>
+              <a:rPr sz="2400" b="0" i="0">
+                <a:solidFill>
+                  <a:srgbClr val="2A2929"/>
+                </a:solidFill>
+                <a:latin typeface="Roboto"/>
+              </a:rPr>
+              <a:t>In from a browser — a user reaches the application through the load balancer's address.</a:t>
+            </a:r>
+          </a:p>
+          <a:p>
+            <a:pPr marL="0" indent="0">
+              <a:lnSpc>
+                <a:spcPct val="105000"/>
+              </a:lnSpc>
+              <a:spcBef>
+                <a:spcPts val="0"/>
+              </a:spcBef>
+              <a:spcAft>
+                <a:spcPts val="1000"/>
+              </a:spcAft>
+            </a:pPr>
+            <a:r>
+              <a:rPr sz="2400" b="1" i="0">
+                <a:solidFill>
+                  <a:srgbClr val="EDAB0C"/>
+                </a:solidFill>
+                <a:latin typeface="Roboto"/>
+              </a:rPr>
+              <a:t>■  </a:t>
+            </a:r>
+            <a:r>
+              <a:rPr sz="2400" b="0" i="0">
+                <a:solidFill>
+                  <a:srgbClr val="2A2929"/>
+                </a:solidFill>
+                <a:latin typeface="Roboto"/>
+              </a:rPr>
+              <a:t>Each one exercises a different piece of what you built. A failure tells you which piece.</a:t>
             </a:r>
           </a:p>
         </p:txBody>
@@ -13767,14 +10873,64 @@
       <p:grpSpPr/>
       <p:sp>
         <p:nvSpPr>
-          <p:cNvPr id="2" name="Rectangle 1"/>
+          <p:cNvPr id="2" name="TextBox 1"/>
+          <p:cNvSpPr txBox="1"/>
+          <p:nvPr/>
+        </p:nvSpPr>
+        <p:spPr>
+          <a:xfrm>
+            <a:off x="640080" y="457200"/>
+            <a:ext cx="10881360" cy="960120"/>
+          </a:xfrm>
+          <a:prstGeom prst="rect">
+            <a:avLst/>
+          </a:prstGeom>
+          <a:noFill/>
+        </p:spPr>
+        <p:txBody>
+          <a:bodyPr wrap="square" anchor="t" lIns="0" rIns="0" tIns="0" bIns="0">
+            <a:spAutoFit/>
+          </a:bodyPr>
+          <a:lstStyle/>
+          <a:p>
+            <a:r>
+              <a:rPr sz="2800" b="1" i="0">
+                <a:solidFill>
+                  <a:srgbClr val="2A2929"/>
+                </a:solidFill>
+                <a:latin typeface="Roboto"/>
+              </a:rPr>
+              <a:t>Proving what should not work</a:t>
+            </a:r>
+          </a:p>
+          <a:p>
+            <a:pPr>
+              <a:spcBef>
+                <a:spcPts val="200"/>
+              </a:spcBef>
+            </a:pPr>
+            <a:r>
+              <a:rPr sz="1800" b="0" i="1">
+                <a:solidFill>
+                  <a:srgbClr val="D68E10"/>
+                </a:solidFill>
+                <a:latin typeface="Roboto Light"/>
+              </a:rPr>
+              <a:t>a failure can be the evidence</a:t>
+            </a:r>
+          </a:p>
+        </p:txBody>
+      </p:sp>
+      <p:sp>
+        <p:nvSpPr>
+          <p:cNvPr id="3" name="Rectangle 2"/>
           <p:cNvSpPr/>
           <p:nvPr/>
         </p:nvSpPr>
         <p:spPr>
           <a:xfrm>
-            <a:off x="0" y="0"/>
-            <a:ext cx="12191695" cy="1234440"/>
+            <a:off x="658368" y="1371600"/>
+            <a:ext cx="1463040" cy="50800"/>
           </a:xfrm>
           <a:prstGeom prst="rect">
             <a:avLst/>
@@ -13811,67 +10967,14 @@
       </p:sp>
       <p:sp>
         <p:nvSpPr>
-          <p:cNvPr id="3" name="Rounded Rectangle 2"/>
-          <p:cNvSpPr/>
-          <p:nvPr/>
-        </p:nvSpPr>
-        <p:spPr>
-          <a:xfrm>
-            <a:off x="640080" y="384048"/>
-            <a:ext cx="1691640" cy="457200"/>
-          </a:xfrm>
-          <a:prstGeom prst="roundRect">
-            <a:avLst/>
-          </a:prstGeom>
-          <a:solidFill>
-            <a:srgbClr val="2A2929"/>
-          </a:solidFill>
-          <a:ln>
-            <a:noFill/>
-          </a:ln>
-          <a:effectLst/>
-        </p:spPr>
-        <p:style>
-          <a:lnRef idx="1">
-            <a:schemeClr val="accent1"/>
-          </a:lnRef>
-          <a:fillRef idx="3">
-            <a:schemeClr val="accent1"/>
-          </a:fillRef>
-          <a:effectRef idx="2">
-            <a:schemeClr val="accent1"/>
-          </a:effectRef>
-          <a:fontRef idx="minor">
-            <a:schemeClr val="lt1"/>
-          </a:fontRef>
-        </p:style>
-        <p:txBody>
-          <a:bodyPr rtlCol="0" anchor="ctr"/>
-          <a:lstStyle/>
-          <a:p>
-            <a:pPr algn="ctr"/>
-            <a:r>
-              <a:rPr sz="1400" b="1" i="0">
-                <a:solidFill>
-                  <a:srgbClr val="FBB900"/>
-                </a:solidFill>
-                <a:latin typeface="Roboto"/>
-              </a:rPr>
-              <a:t>ACTIVITY</a:t>
-            </a:r>
-          </a:p>
-        </p:txBody>
-      </p:sp>
-      <p:sp>
-        <p:nvSpPr>
           <p:cNvPr id="4" name="TextBox 3"/>
           <p:cNvSpPr txBox="1"/>
           <p:nvPr/>
         </p:nvSpPr>
         <p:spPr>
           <a:xfrm>
-            <a:off x="2560320" y="310896"/>
-            <a:ext cx="8961120" cy="685800"/>
+            <a:off x="658368" y="1691640"/>
+            <a:ext cx="10881360" cy="4480560"/>
           </a:xfrm>
           <a:prstGeom prst="rect">
             <a:avLst/>
@@ -13880,40 +10983,6 @@
         </p:spPr>
         <p:txBody>
           <a:bodyPr wrap="square" anchor="ctr" lIns="0" rIns="0" tIns="0" bIns="0">
-            <a:spAutoFit/>
-          </a:bodyPr>
-          <a:lstStyle/>
-          <a:p>
-            <a:r>
-              <a:rPr sz="2600" b="1" i="0">
-                <a:solidFill>
-                  <a:srgbClr val="FFFFFF"/>
-                </a:solidFill>
-                <a:latin typeface="Roboto"/>
-              </a:rPr>
-              <a:t>Build your appendices</a:t>
-            </a:r>
-          </a:p>
-        </p:txBody>
-      </p:sp>
-      <p:sp>
-        <p:nvSpPr>
-          <p:cNvPr id="5" name="TextBox 4"/>
-          <p:cNvSpPr txBox="1"/>
-          <p:nvPr/>
-        </p:nvSpPr>
-        <p:spPr>
-          <a:xfrm>
-            <a:off x="658368" y="1554480"/>
-            <a:ext cx="10881360" cy="4297680"/>
-          </a:xfrm>
-          <a:prstGeom prst="rect">
-            <a:avLst/>
-          </a:prstGeom>
-          <a:noFill/>
-        </p:spPr>
-        <p:txBody>
-          <a:bodyPr wrap="square" anchor="t" lIns="0" rIns="0" tIns="0" bIns="0">
             <a:spAutoFit/>
           </a:bodyPr>
           <a:lstStyle/>
@@ -13930,7 +10999,7 @@
               </a:spcAft>
             </a:pPr>
             <a:r>
-              <a:rPr sz="1700" b="1" i="0">
+              <a:rPr sz="2400" b="1" i="0">
                 <a:solidFill>
                   <a:srgbClr val="EDAB0C"/>
                 </a:solidFill>
@@ -13939,75 +11008,13 @@
               <a:t>■  </a:t>
             </a:r>
             <a:r>
-              <a:rPr sz="1700" b="0" i="0">
+              <a:rPr sz="2400" b="0" i="0">
                 <a:solidFill>
                   <a:srgbClr val="2A2929"/>
                 </a:solidFill>
                 <a:latin typeface="Roboto"/>
               </a:rPr>
-              <a:t>Assemble Appendices A, B and C from the evidence you captured since Topic 6:</a:t>
-            </a:r>
-          </a:p>
-          <a:p>
-            <a:pPr marL="365760" indent="0">
-              <a:lnSpc>
-                <a:spcPct val="105000"/>
-              </a:lnSpc>
-              <a:spcBef>
-                <a:spcPts val="0"/>
-              </a:spcBef>
-              <a:spcAft>
-                <a:spcPts val="500"/>
-              </a:spcAft>
-            </a:pPr>
-            <a:r>
-              <a:rPr sz="1400" b="0" i="0">
-                <a:solidFill>
-                  <a:srgbClr val="7A7A7A"/>
-                </a:solidFill>
-                <a:latin typeface="Roboto"/>
-              </a:rPr>
-              <a:t>–  </a:t>
-            </a:r>
-            <a:r>
-              <a:rPr sz="1400" b="0" i="0">
-                <a:solidFill>
-                  <a:srgbClr val="2A2929"/>
-                </a:solidFill>
-                <a:latin typeface="Roboto"/>
-              </a:rPr>
-              <a:t>sort into screenshots / config exports / test evidence</a:t>
-            </a:r>
-          </a:p>
-          <a:p>
-            <a:pPr marL="365760" indent="0">
-              <a:lnSpc>
-                <a:spcPct val="105000"/>
-              </a:lnSpc>
-              <a:spcBef>
-                <a:spcPts val="0"/>
-              </a:spcBef>
-              <a:spcAft>
-                <a:spcPts val="500"/>
-              </a:spcAft>
-            </a:pPr>
-            <a:r>
-              <a:rPr sz="1400" b="0" i="0">
-                <a:solidFill>
-                  <a:srgbClr val="7A7A7A"/>
-                </a:solidFill>
-                <a:latin typeface="Roboto"/>
-              </a:rPr>
-              <a:t>–  </a:t>
-            </a:r>
-            <a:r>
-              <a:rPr sz="1400" b="0" i="0">
-                <a:solidFill>
-                  <a:srgbClr val="2A2929"/>
-                </a:solidFill>
-                <a:latin typeface="Roboto"/>
-              </a:rPr>
-              <a:t>label and number each item</a:t>
+              <a:t>Connectivity is half of it. The other half is showing the database is unreachable from anywhere it should not be reached from.</a:t>
             </a:r>
           </a:p>
           <a:p>
@@ -14023,7 +11030,7 @@
               </a:spcAft>
             </a:pPr>
             <a:r>
-              <a:rPr sz="1700" b="1" i="0">
+              <a:rPr sz="2400" b="1" i="0">
                 <a:solidFill>
                   <a:srgbClr val="EDAB0C"/>
                 </a:solidFill>
@@ -14032,100 +11039,51 @@
               <a:t>■  </a:t>
             </a:r>
             <a:r>
-              <a:rPr sz="1700" b="0" i="0">
+              <a:rPr sz="2400" b="0" i="0">
                 <a:solidFill>
                   <a:srgbClr val="2A2929"/>
                 </a:solidFill>
                 <a:latin typeface="Roboto"/>
               </a:rPr>
-              <a:t>Flag any gaps and recapture them now.</a:t>
-            </a:r>
-          </a:p>
-        </p:txBody>
-      </p:sp>
-      <p:sp>
-        <p:nvSpPr>
-          <p:cNvPr id="6" name="Rounded Rectangle 5"/>
-          <p:cNvSpPr/>
-          <p:nvPr/>
-        </p:nvSpPr>
-        <p:spPr>
-          <a:xfrm>
-            <a:off x="640080" y="5897880"/>
-            <a:ext cx="4023360" cy="457200"/>
-          </a:xfrm>
-          <a:prstGeom prst="roundRect">
-            <a:avLst/>
-          </a:prstGeom>
-          <a:solidFill>
-            <a:srgbClr val="F9F9F9"/>
-          </a:solidFill>
-          <a:ln w="12700">
-            <a:solidFill>
-              <a:srgbClr val="CCCCCC"/>
-            </a:solidFill>
-          </a:ln>
-          <a:effectLst/>
-        </p:spPr>
-        <p:style>
-          <a:lnRef idx="1">
-            <a:schemeClr val="accent1"/>
-          </a:lnRef>
-          <a:fillRef idx="3">
-            <a:schemeClr val="accent1"/>
-          </a:fillRef>
-          <a:effectRef idx="2">
-            <a:schemeClr val="accent1"/>
-          </a:effectRef>
-          <a:fontRef idx="minor">
-            <a:schemeClr val="lt1"/>
-          </a:fontRef>
-        </p:style>
-        <p:txBody>
-          <a:bodyPr rtlCol="0" anchor="ctr"/>
-          <a:lstStyle/>
-          <a:p>
-            <a:pPr algn="ctr"/>
-          </a:p>
-        </p:txBody>
-      </p:sp>
-      <p:sp>
-        <p:nvSpPr>
-          <p:cNvPr id="7" name="TextBox 6"/>
-          <p:cNvSpPr txBox="1"/>
-          <p:nvPr/>
-        </p:nvSpPr>
-        <p:spPr>
-          <a:xfrm>
-            <a:off x="822960" y="5943600"/>
-            <a:ext cx="3657600" cy="365760"/>
-          </a:xfrm>
-          <a:prstGeom prst="rect">
-            <a:avLst/>
-          </a:prstGeom>
-          <a:noFill/>
-        </p:spPr>
-        <p:txBody>
-          <a:bodyPr wrap="square" anchor="ctr" lIns="0" rIns="0" tIns="0" bIns="0">
-            <a:spAutoFit/>
-          </a:bodyPr>
-          <a:lstStyle/>
-          <a:p>
-            <a:r>
-              <a:rPr sz="1500" b="1" i="0">
+              <a:t>A test that is supposed to fail is evidence when it fails. Capture it.</a:t>
+            </a:r>
+          </a:p>
+          <a:p>
+            <a:pPr marL="0" indent="0">
+              <a:lnSpc>
+                <a:spcPct val="105000"/>
+              </a:lnSpc>
+              <a:spcBef>
+                <a:spcPts val="0"/>
+              </a:spcBef>
+              <a:spcAft>
+                <a:spcPts val="1000"/>
+              </a:spcAft>
+            </a:pPr>
+            <a:r>
+              <a:rPr sz="2400" b="1" i="0">
+                <a:solidFill>
+                  <a:srgbClr val="EDAB0C"/>
+                </a:solidFill>
+                <a:latin typeface="Roboto"/>
+              </a:rPr>
+              <a:t>■  </a:t>
+            </a:r>
+            <a:r>
+              <a:rPr sz="2400" b="0" i="0">
                 <a:solidFill>
                   <a:srgbClr val="2A2929"/>
                 </a:solidFill>
                 <a:latin typeface="Roboto"/>
               </a:rPr>
-              <a:t>⏱  ~20 min</a:t>
-            </a:r>
-          </a:p>
-        </p:txBody>
-      </p:sp>
-      <p:sp>
-        <p:nvSpPr>
-          <p:cNvPr id="8" name="Rectangle 7"/>
+              <a:t>"It works" and "only the right things can reach it" are two separate claims, and both are assessed.</a:t>
+            </a:r>
+          </a:p>
+        </p:txBody>
+      </p:sp>
+      <p:sp>
+        <p:nvSpPr>
+          <p:cNvPr id="5" name="Rectangle 4"/>
           <p:cNvSpPr/>
           <p:nvPr/>
         </p:nvSpPr>
@@ -14169,7 +11127,7 @@
       </p:sp>
       <p:sp>
         <p:nvSpPr>
-          <p:cNvPr id="9" name="TextBox 8"/>
+          <p:cNvPr id="6" name="TextBox 5"/>
           <p:cNvSpPr txBox="1"/>
           <p:nvPr/>
         </p:nvSpPr>
@@ -14212,7 +11170,7 @@
       </p:sp>
       <p:sp>
         <p:nvSpPr>
-          <p:cNvPr id="10" name="TextBox 9"/>
+          <p:cNvPr id="7" name="TextBox 6"/>
           <p:cNvSpPr txBox="1"/>
           <p:nvPr/>
         </p:nvSpPr>
@@ -14259,7 +11217,7 @@
     <p:bg>
       <p:bgPr>
         <a:solidFill>
-          <a:srgbClr val="F9F9F9"/>
+          <a:srgbClr val="FFFFFF"/>
         </a:solidFill>
         <a:effectLst/>
       </p:bgPr>
@@ -14279,8 +11237,8 @@
         </p:nvSpPr>
         <p:spPr>
           <a:xfrm>
-            <a:off x="640080" y="548640"/>
-            <a:ext cx="10881360" cy="1097280"/>
+            <a:off x="640080" y="457200"/>
+            <a:ext cx="10881360" cy="960120"/>
           </a:xfrm>
           <a:prstGeom prst="rect">
             <a:avLst/>
@@ -14294,13 +11252,13 @@
           <a:lstStyle/>
           <a:p>
             <a:r>
-              <a:rPr sz="3200" b="1" i="0">
+              <a:rPr sz="2800" b="1" i="0">
                 <a:solidFill>
                   <a:srgbClr val="2A2929"/>
                 </a:solidFill>
                 <a:latin typeface="Roboto"/>
               </a:rPr>
-              <a:t>Key takeaways</a:t>
+              <a:t>Reading a failure</a:t>
             </a:r>
           </a:p>
           <a:p>
@@ -14310,13 +11268,13 @@
               </a:spcBef>
             </a:pPr>
             <a:r>
-              <a:rPr sz="1800" b="1" i="0">
-                <a:solidFill>
-                  <a:srgbClr val="92268F"/>
-                </a:solidFill>
-                <a:latin typeface="Roboto"/>
-              </a:rPr>
-              <a:t>Section 1 · Evidence</a:t>
+              <a:rPr sz="1800" b="0" i="1">
+                <a:solidFill>
+                  <a:srgbClr val="D68E10"/>
+                </a:solidFill>
+                <a:latin typeface="Roboto Light"/>
+              </a:rPr>
+              <a:t>refused ≠ timed out</a:t>
             </a:r>
           </a:p>
         </p:txBody>
@@ -14329,7 +11287,7 @@
         </p:nvSpPr>
         <p:spPr>
           <a:xfrm>
-            <a:off x="658368" y="1600200"/>
+            <a:off x="658368" y="1371600"/>
             <a:ext cx="1463040" cy="50800"/>
           </a:xfrm>
           <a:prstGeom prst="rect">
@@ -14367,47 +11325,117 @@
       </p:sp>
       <p:sp>
         <p:nvSpPr>
-          <p:cNvPr id="4" name="Rectangle 3"/>
-          <p:cNvSpPr/>
-          <p:nvPr/>
-        </p:nvSpPr>
-        <p:spPr>
-          <a:xfrm>
-            <a:off x="640080" y="1965960"/>
-            <a:ext cx="10927080" cy="841248"/>
-          </a:xfrm>
-          <a:prstGeom prst="rect">
-            <a:avLst/>
-          </a:prstGeom>
-          <a:solidFill>
-            <a:srgbClr val="FFFFFF"/>
-          </a:solidFill>
-          <a:ln w="12700">
-            <a:solidFill>
-              <a:srgbClr val="CCCCCC"/>
-            </a:solidFill>
-          </a:ln>
-          <a:effectLst/>
-        </p:spPr>
-        <p:style>
-          <a:lnRef idx="1">
-            <a:schemeClr val="accent1"/>
-          </a:lnRef>
-          <a:fillRef idx="3">
-            <a:schemeClr val="accent1"/>
-          </a:fillRef>
-          <a:effectRef idx="2">
-            <a:schemeClr val="accent1"/>
-          </a:effectRef>
-          <a:fontRef idx="minor">
-            <a:schemeClr val="lt1"/>
-          </a:fontRef>
-        </p:style>
-        <p:txBody>
-          <a:bodyPr rtlCol="0" anchor="ctr"/>
-          <a:lstStyle/>
-          <a:p>
-            <a:pPr algn="ctr"/>
+          <p:cNvPr id="4" name="TextBox 3"/>
+          <p:cNvSpPr txBox="1"/>
+          <p:nvPr/>
+        </p:nvSpPr>
+        <p:spPr>
+          <a:xfrm>
+            <a:off x="658368" y="1691640"/>
+            <a:ext cx="10881360" cy="4480560"/>
+          </a:xfrm>
+          <a:prstGeom prst="rect">
+            <a:avLst/>
+          </a:prstGeom>
+          <a:noFill/>
+        </p:spPr>
+        <p:txBody>
+          <a:bodyPr wrap="square" anchor="ctr" lIns="0" rIns="0" tIns="0" bIns="0">
+            <a:spAutoFit/>
+          </a:bodyPr>
+          <a:lstStyle/>
+          <a:p>
+            <a:pPr marL="0" indent="0">
+              <a:lnSpc>
+                <a:spcPct val="105000"/>
+              </a:lnSpc>
+              <a:spcBef>
+                <a:spcPts val="0"/>
+              </a:spcBef>
+              <a:spcAft>
+                <a:spcPts val="1000"/>
+              </a:spcAft>
+            </a:pPr>
+            <a:r>
+              <a:rPr sz="2400" b="1" i="0">
+                <a:solidFill>
+                  <a:srgbClr val="EDAB0C"/>
+                </a:solidFill>
+                <a:latin typeface="Roboto"/>
+              </a:rPr>
+              <a:t>■  </a:t>
+            </a:r>
+            <a:r>
+              <a:rPr sz="2400" b="0" i="0">
+                <a:solidFill>
+                  <a:srgbClr val="2A2929"/>
+                </a:solidFill>
+                <a:latin typeface="Roboto"/>
+              </a:rPr>
+              <a:t>A refused connection and a timeout mean different things. Refused means something answered and said no; a timeout means nothing answered at all.</a:t>
+            </a:r>
+          </a:p>
+          <a:p>
+            <a:pPr marL="0" indent="0">
+              <a:lnSpc>
+                <a:spcPct val="105000"/>
+              </a:lnSpc>
+              <a:spcBef>
+                <a:spcPts val="0"/>
+              </a:spcBef>
+              <a:spcAft>
+                <a:spcPts val="1000"/>
+              </a:spcAft>
+            </a:pPr>
+            <a:r>
+              <a:rPr sz="2400" b="1" i="0">
+                <a:solidFill>
+                  <a:srgbClr val="EDAB0C"/>
+                </a:solidFill>
+                <a:latin typeface="Roboto"/>
+              </a:rPr>
+              <a:t>■  </a:t>
+            </a:r>
+            <a:r>
+              <a:rPr sz="2400" b="0" i="0">
+                <a:solidFill>
+                  <a:srgbClr val="2A2929"/>
+                </a:solidFill>
+                <a:latin typeface="Roboto"/>
+              </a:rPr>
+              <a:t>Most of what goes wrong here is a rule pointing at the wrong source, or a subnet with no route — not something broken.</a:t>
+            </a:r>
+          </a:p>
+          <a:p>
+            <a:pPr marL="0" indent="0">
+              <a:lnSpc>
+                <a:spcPct val="105000"/>
+              </a:lnSpc>
+              <a:spcBef>
+                <a:spcPts val="0"/>
+              </a:spcBef>
+              <a:spcAft>
+                <a:spcPts val="1000"/>
+              </a:spcAft>
+            </a:pPr>
+            <a:r>
+              <a:rPr sz="2400" b="1" i="0">
+                <a:solidFill>
+                  <a:srgbClr val="EDAB0C"/>
+                </a:solidFill>
+                <a:latin typeface="Roboto"/>
+              </a:rPr>
+              <a:t>■  </a:t>
+            </a:r>
+            <a:r>
+              <a:rPr sz="2400" b="0" i="0">
+                <a:solidFill>
+                  <a:srgbClr val="2A2929"/>
+                </a:solidFill>
+                <a:latin typeface="Roboto"/>
+              </a:rPr>
+              <a:t>Read the error before you change anything.</a:t>
+            </a:r>
           </a:p>
         </p:txBody>
       </p:sp>
@@ -14419,8 +11447,8 @@
         </p:nvSpPr>
         <p:spPr>
           <a:xfrm>
-            <a:off x="640080" y="1965960"/>
-            <a:ext cx="109728" cy="841248"/>
+            <a:off x="0" y="6565392"/>
+            <a:ext cx="12191695" cy="38100"/>
           </a:xfrm>
           <a:prstGeom prst="rect">
             <a:avLst/>
@@ -14463,476 +11491,6 @@
         </p:nvSpPr>
         <p:spPr>
           <a:xfrm>
-            <a:off x="960120" y="1965960"/>
-            <a:ext cx="10424160" cy="841248"/>
-          </a:xfrm>
-          <a:prstGeom prst="rect">
-            <a:avLst/>
-          </a:prstGeom>
-          <a:noFill/>
-        </p:spPr>
-        <p:txBody>
-          <a:bodyPr wrap="square" anchor="ctr" lIns="0" rIns="0" tIns="0" bIns="0">
-            <a:spAutoFit/>
-          </a:bodyPr>
-          <a:lstStyle/>
-          <a:p>
-            <a:pPr>
-              <a:lnSpc>
-                <a:spcPct val="100000"/>
-              </a:lnSpc>
-            </a:pPr>
-            <a:r>
-              <a:rPr sz="1700" b="0" i="0">
-                <a:solidFill>
-                  <a:srgbClr val="2A2929"/>
-                </a:solidFill>
-                <a:latin typeface="Roboto"/>
-              </a:rPr>
-              <a:t>Evidence must be traceable — named, dated, Region/identity visible.</a:t>
-            </a:r>
-          </a:p>
-        </p:txBody>
-      </p:sp>
-      <p:sp>
-        <p:nvSpPr>
-          <p:cNvPr id="7" name="Rectangle 6"/>
-          <p:cNvSpPr/>
-          <p:nvPr/>
-        </p:nvSpPr>
-        <p:spPr>
-          <a:xfrm>
-            <a:off x="640080" y="2916936"/>
-            <a:ext cx="10927080" cy="841248"/>
-          </a:xfrm>
-          <a:prstGeom prst="rect">
-            <a:avLst/>
-          </a:prstGeom>
-          <a:solidFill>
-            <a:srgbClr val="FFFFFF"/>
-          </a:solidFill>
-          <a:ln w="12700">
-            <a:solidFill>
-              <a:srgbClr val="CCCCCC"/>
-            </a:solidFill>
-          </a:ln>
-          <a:effectLst/>
-        </p:spPr>
-        <p:style>
-          <a:lnRef idx="1">
-            <a:schemeClr val="accent1"/>
-          </a:lnRef>
-          <a:fillRef idx="3">
-            <a:schemeClr val="accent1"/>
-          </a:fillRef>
-          <a:effectRef idx="2">
-            <a:schemeClr val="accent1"/>
-          </a:effectRef>
-          <a:fontRef idx="minor">
-            <a:schemeClr val="lt1"/>
-          </a:fontRef>
-        </p:style>
-        <p:txBody>
-          <a:bodyPr rtlCol="0" anchor="ctr"/>
-          <a:lstStyle/>
-          <a:p>
-            <a:pPr algn="ctr"/>
-          </a:p>
-        </p:txBody>
-      </p:sp>
-      <p:sp>
-        <p:nvSpPr>
-          <p:cNvPr id="8" name="Rectangle 7"/>
-          <p:cNvSpPr/>
-          <p:nvPr/>
-        </p:nvSpPr>
-        <p:spPr>
-          <a:xfrm>
-            <a:off x="640080" y="2916936"/>
-            <a:ext cx="109728" cy="841248"/>
-          </a:xfrm>
-          <a:prstGeom prst="rect">
-            <a:avLst/>
-          </a:prstGeom>
-          <a:solidFill>
-            <a:srgbClr val="92268F"/>
-          </a:solidFill>
-          <a:ln>
-            <a:noFill/>
-          </a:ln>
-          <a:effectLst/>
-        </p:spPr>
-        <p:style>
-          <a:lnRef idx="1">
-            <a:schemeClr val="accent1"/>
-          </a:lnRef>
-          <a:fillRef idx="3">
-            <a:schemeClr val="accent1"/>
-          </a:fillRef>
-          <a:effectRef idx="2">
-            <a:schemeClr val="accent1"/>
-          </a:effectRef>
-          <a:fontRef idx="minor">
-            <a:schemeClr val="lt1"/>
-          </a:fontRef>
-        </p:style>
-        <p:txBody>
-          <a:bodyPr rtlCol="0" anchor="ctr"/>
-          <a:lstStyle/>
-          <a:p>
-            <a:pPr algn="ctr"/>
-          </a:p>
-        </p:txBody>
-      </p:sp>
-      <p:sp>
-        <p:nvSpPr>
-          <p:cNvPr id="9" name="TextBox 8"/>
-          <p:cNvSpPr txBox="1"/>
-          <p:nvPr/>
-        </p:nvSpPr>
-        <p:spPr>
-          <a:xfrm>
-            <a:off x="960120" y="2916936"/>
-            <a:ext cx="10424160" cy="841248"/>
-          </a:xfrm>
-          <a:prstGeom prst="rect">
-            <a:avLst/>
-          </a:prstGeom>
-          <a:noFill/>
-        </p:spPr>
-        <p:txBody>
-          <a:bodyPr wrap="square" anchor="ctr" lIns="0" rIns="0" tIns="0" bIns="0">
-            <a:spAutoFit/>
-          </a:bodyPr>
-          <a:lstStyle/>
-          <a:p>
-            <a:pPr>
-              <a:lnSpc>
-                <a:spcPct val="100000"/>
-              </a:lnSpc>
-            </a:pPr>
-            <a:r>
-              <a:rPr sz="1700" b="0" i="0">
-                <a:solidFill>
-                  <a:srgbClr val="2A2929"/>
-                </a:solidFill>
-                <a:latin typeface="Roboto"/>
-              </a:rPr>
-              <a:t>Appendix A = screenshots, B = config exports, C = test evidence.</a:t>
-            </a:r>
-          </a:p>
-        </p:txBody>
-      </p:sp>
-      <p:sp>
-        <p:nvSpPr>
-          <p:cNvPr id="10" name="Rectangle 9"/>
-          <p:cNvSpPr/>
-          <p:nvPr/>
-        </p:nvSpPr>
-        <p:spPr>
-          <a:xfrm>
-            <a:off x="640080" y="3867912"/>
-            <a:ext cx="10927080" cy="841248"/>
-          </a:xfrm>
-          <a:prstGeom prst="rect">
-            <a:avLst/>
-          </a:prstGeom>
-          <a:solidFill>
-            <a:srgbClr val="FFFFFF"/>
-          </a:solidFill>
-          <a:ln w="12700">
-            <a:solidFill>
-              <a:srgbClr val="CCCCCC"/>
-            </a:solidFill>
-          </a:ln>
-          <a:effectLst/>
-        </p:spPr>
-        <p:style>
-          <a:lnRef idx="1">
-            <a:schemeClr val="accent1"/>
-          </a:lnRef>
-          <a:fillRef idx="3">
-            <a:schemeClr val="accent1"/>
-          </a:fillRef>
-          <a:effectRef idx="2">
-            <a:schemeClr val="accent1"/>
-          </a:effectRef>
-          <a:fontRef idx="minor">
-            <a:schemeClr val="lt1"/>
-          </a:fontRef>
-        </p:style>
-        <p:txBody>
-          <a:bodyPr rtlCol="0" anchor="ctr"/>
-          <a:lstStyle/>
-          <a:p>
-            <a:pPr algn="ctr"/>
-          </a:p>
-        </p:txBody>
-      </p:sp>
-      <p:sp>
-        <p:nvSpPr>
-          <p:cNvPr id="11" name="Rectangle 10"/>
-          <p:cNvSpPr/>
-          <p:nvPr/>
-        </p:nvSpPr>
-        <p:spPr>
-          <a:xfrm>
-            <a:off x="640080" y="3867912"/>
-            <a:ext cx="109728" cy="841248"/>
-          </a:xfrm>
-          <a:prstGeom prst="rect">
-            <a:avLst/>
-          </a:prstGeom>
-          <a:solidFill>
-            <a:srgbClr val="92268F"/>
-          </a:solidFill>
-          <a:ln>
-            <a:noFill/>
-          </a:ln>
-          <a:effectLst/>
-        </p:spPr>
-        <p:style>
-          <a:lnRef idx="1">
-            <a:schemeClr val="accent1"/>
-          </a:lnRef>
-          <a:fillRef idx="3">
-            <a:schemeClr val="accent1"/>
-          </a:fillRef>
-          <a:effectRef idx="2">
-            <a:schemeClr val="accent1"/>
-          </a:effectRef>
-          <a:fontRef idx="minor">
-            <a:schemeClr val="lt1"/>
-          </a:fontRef>
-        </p:style>
-        <p:txBody>
-          <a:bodyPr rtlCol="0" anchor="ctr"/>
-          <a:lstStyle/>
-          <a:p>
-            <a:pPr algn="ctr"/>
-          </a:p>
-        </p:txBody>
-      </p:sp>
-      <p:sp>
-        <p:nvSpPr>
-          <p:cNvPr id="12" name="TextBox 11"/>
-          <p:cNvSpPr txBox="1"/>
-          <p:nvPr/>
-        </p:nvSpPr>
-        <p:spPr>
-          <a:xfrm>
-            <a:off x="960120" y="3867912"/>
-            <a:ext cx="10424160" cy="841248"/>
-          </a:xfrm>
-          <a:prstGeom prst="rect">
-            <a:avLst/>
-          </a:prstGeom>
-          <a:noFill/>
-        </p:spPr>
-        <p:txBody>
-          <a:bodyPr wrap="square" anchor="ctr" lIns="0" rIns="0" tIns="0" bIns="0">
-            <a:spAutoFit/>
-          </a:bodyPr>
-          <a:lstStyle/>
-          <a:p>
-            <a:pPr>
-              <a:lnSpc>
-                <a:spcPct val="100000"/>
-              </a:lnSpc>
-            </a:pPr>
-            <a:r>
-              <a:rPr sz="1700" b="0" i="0">
-                <a:solidFill>
-                  <a:srgbClr val="2A2929"/>
-                </a:solidFill>
-                <a:latin typeface="Roboto"/>
-              </a:rPr>
-              <a:t>Label and number every item so the narrative can cite it.</a:t>
-            </a:r>
-          </a:p>
-        </p:txBody>
-      </p:sp>
-      <p:sp>
-        <p:nvSpPr>
-          <p:cNvPr id="13" name="Rectangle 12"/>
-          <p:cNvSpPr/>
-          <p:nvPr/>
-        </p:nvSpPr>
-        <p:spPr>
-          <a:xfrm>
-            <a:off x="640080" y="4818888"/>
-            <a:ext cx="10927080" cy="841248"/>
-          </a:xfrm>
-          <a:prstGeom prst="rect">
-            <a:avLst/>
-          </a:prstGeom>
-          <a:solidFill>
-            <a:srgbClr val="FFFFFF"/>
-          </a:solidFill>
-          <a:ln w="12700">
-            <a:solidFill>
-              <a:srgbClr val="CCCCCC"/>
-            </a:solidFill>
-          </a:ln>
-          <a:effectLst/>
-        </p:spPr>
-        <p:style>
-          <a:lnRef idx="1">
-            <a:schemeClr val="accent1"/>
-          </a:lnRef>
-          <a:fillRef idx="3">
-            <a:schemeClr val="accent1"/>
-          </a:fillRef>
-          <a:effectRef idx="2">
-            <a:schemeClr val="accent1"/>
-          </a:effectRef>
-          <a:fontRef idx="minor">
-            <a:schemeClr val="lt1"/>
-          </a:fontRef>
-        </p:style>
-        <p:txBody>
-          <a:bodyPr rtlCol="0" anchor="ctr"/>
-          <a:lstStyle/>
-          <a:p>
-            <a:pPr algn="ctr"/>
-          </a:p>
-        </p:txBody>
-      </p:sp>
-      <p:sp>
-        <p:nvSpPr>
-          <p:cNvPr id="14" name="Rectangle 13"/>
-          <p:cNvSpPr/>
-          <p:nvPr/>
-        </p:nvSpPr>
-        <p:spPr>
-          <a:xfrm>
-            <a:off x="640080" y="4818888"/>
-            <a:ext cx="109728" cy="841248"/>
-          </a:xfrm>
-          <a:prstGeom prst="rect">
-            <a:avLst/>
-          </a:prstGeom>
-          <a:solidFill>
-            <a:srgbClr val="92268F"/>
-          </a:solidFill>
-          <a:ln>
-            <a:noFill/>
-          </a:ln>
-          <a:effectLst/>
-        </p:spPr>
-        <p:style>
-          <a:lnRef idx="1">
-            <a:schemeClr val="accent1"/>
-          </a:lnRef>
-          <a:fillRef idx="3">
-            <a:schemeClr val="accent1"/>
-          </a:fillRef>
-          <a:effectRef idx="2">
-            <a:schemeClr val="accent1"/>
-          </a:effectRef>
-          <a:fontRef idx="minor">
-            <a:schemeClr val="lt1"/>
-          </a:fontRef>
-        </p:style>
-        <p:txBody>
-          <a:bodyPr rtlCol="0" anchor="ctr"/>
-          <a:lstStyle/>
-          <a:p>
-            <a:pPr algn="ctr"/>
-          </a:p>
-        </p:txBody>
-      </p:sp>
-      <p:sp>
-        <p:nvSpPr>
-          <p:cNvPr id="15" name="TextBox 14"/>
-          <p:cNvSpPr txBox="1"/>
-          <p:nvPr/>
-        </p:nvSpPr>
-        <p:spPr>
-          <a:xfrm>
-            <a:off x="960120" y="4818888"/>
-            <a:ext cx="10424160" cy="841248"/>
-          </a:xfrm>
-          <a:prstGeom prst="rect">
-            <a:avLst/>
-          </a:prstGeom>
-          <a:noFill/>
-        </p:spPr>
-        <p:txBody>
-          <a:bodyPr wrap="square" anchor="ctr" lIns="0" rIns="0" tIns="0" bIns="0">
-            <a:spAutoFit/>
-          </a:bodyPr>
-          <a:lstStyle/>
-          <a:p>
-            <a:pPr>
-              <a:lnSpc>
-                <a:spcPct val="100000"/>
-              </a:lnSpc>
-            </a:pPr>
-            <a:r>
-              <a:rPr sz="1700" b="0" i="0">
-                <a:solidFill>
-                  <a:srgbClr val="2A2929"/>
-                </a:solidFill>
-                <a:latin typeface="Roboto"/>
-              </a:rPr>
-              <a:t>Capture as you build; organise here; recapture any gaps now.</a:t>
-            </a:r>
-          </a:p>
-        </p:txBody>
-      </p:sp>
-      <p:sp>
-        <p:nvSpPr>
-          <p:cNvPr id="16" name="Rectangle 15"/>
-          <p:cNvSpPr/>
-          <p:nvPr/>
-        </p:nvSpPr>
-        <p:spPr>
-          <a:xfrm>
-            <a:off x="0" y="6565392"/>
-            <a:ext cx="12191695" cy="38100"/>
-          </a:xfrm>
-          <a:prstGeom prst="rect">
-            <a:avLst/>
-          </a:prstGeom>
-          <a:solidFill>
-            <a:srgbClr val="92268F"/>
-          </a:solidFill>
-          <a:ln>
-            <a:noFill/>
-          </a:ln>
-          <a:effectLst/>
-        </p:spPr>
-        <p:style>
-          <a:lnRef idx="1">
-            <a:schemeClr val="accent1"/>
-          </a:lnRef>
-          <a:fillRef idx="3">
-            <a:schemeClr val="accent1"/>
-          </a:fillRef>
-          <a:effectRef idx="2">
-            <a:schemeClr val="accent1"/>
-          </a:effectRef>
-          <a:fontRef idx="minor">
-            <a:schemeClr val="lt1"/>
-          </a:fontRef>
-        </p:style>
-        <p:txBody>
-          <a:bodyPr rtlCol="0" anchor="ctr"/>
-          <a:lstStyle/>
-          <a:p>
-            <a:pPr algn="ctr"/>
-          </a:p>
-        </p:txBody>
-      </p:sp>
-      <p:sp>
-        <p:nvSpPr>
-          <p:cNvPr id="17" name="TextBox 16"/>
-          <p:cNvSpPr txBox="1"/>
-          <p:nvPr/>
-        </p:nvSpPr>
-        <p:spPr>
-          <a:xfrm>
             <a:off x="502920" y="6400800"/>
             <a:ext cx="5486400" cy="320040"/>
           </a:xfrm>
@@ -14970,7 +11528,7 @@
       </p:sp>
       <p:sp>
         <p:nvSpPr>
-          <p:cNvPr id="18" name="TextBox 17"/>
+          <p:cNvPr id="7" name="TextBox 6"/>
           <p:cNvSpPr txBox="1"/>
           <p:nvPr/>
         </p:nvSpPr>
@@ -15038,13 +11596,13 @@
         <p:spPr>
           <a:xfrm>
             <a:off x="0" y="0"/>
-            <a:ext cx="3931920" cy="6858000"/>
+            <a:ext cx="12191695" cy="1234440"/>
           </a:xfrm>
           <a:prstGeom prst="rect">
             <a:avLst/>
           </a:prstGeom>
           <a:solidFill>
-            <a:srgbClr val="27B5CE"/>
+            <a:srgbClr val="92268F"/>
           </a:solidFill>
           <a:ln>
             <a:noFill/>
@@ -15075,120 +11633,20 @@
       </p:sp>
       <p:sp>
         <p:nvSpPr>
-          <p:cNvPr id="3" name="TextBox 2"/>
-          <p:cNvSpPr txBox="1"/>
-          <p:nvPr/>
-        </p:nvSpPr>
-        <p:spPr>
-          <a:xfrm>
-            <a:off x="365760" y="2103120"/>
-            <a:ext cx="3291840" cy="2194560"/>
-          </a:xfrm>
-          <a:prstGeom prst="rect">
-            <a:avLst/>
-          </a:prstGeom>
-          <a:noFill/>
-        </p:spPr>
-        <p:txBody>
-          <a:bodyPr wrap="square" anchor="t" lIns="0" rIns="0" tIns="0" bIns="0">
-            <a:spAutoFit/>
-          </a:bodyPr>
-          <a:lstStyle/>
-          <a:p>
-            <a:r>
-              <a:rPr sz="13000" b="1" i="0">
-                <a:solidFill>
-                  <a:srgbClr val="FFFFFF"/>
-                </a:solidFill>
-                <a:latin typeface="Roboto"/>
-              </a:rPr>
-              <a:t>02</a:t>
-            </a:r>
-          </a:p>
-        </p:txBody>
-      </p:sp>
-      <p:sp>
-        <p:nvSpPr>
-          <p:cNvPr id="4" name="TextBox 3"/>
-          <p:cNvSpPr txBox="1"/>
-          <p:nvPr/>
-        </p:nvSpPr>
-        <p:spPr>
-          <a:xfrm>
-            <a:off x="4480560" y="2468880"/>
-            <a:ext cx="7132320" cy="2194560"/>
-          </a:xfrm>
-          <a:prstGeom prst="rect">
-            <a:avLst/>
-          </a:prstGeom>
-          <a:noFill/>
-        </p:spPr>
-        <p:txBody>
-          <a:bodyPr wrap="square" anchor="t" lIns="0" rIns="0" tIns="0" bIns="0">
-            <a:spAutoFit/>
-          </a:bodyPr>
-          <a:lstStyle/>
-          <a:p>
-            <a:r>
-              <a:rPr sz="1600" b="1" i="0">
-                <a:solidFill>
-                  <a:srgbClr val="27B5CE"/>
-                </a:solidFill>
-                <a:latin typeface="Roboto"/>
-              </a:rPr>
-              <a:t>SECTION</a:t>
-            </a:r>
-          </a:p>
-          <a:p>
-            <a:pPr>
-              <a:spcBef>
-                <a:spcPts val="600"/>
-              </a:spcBef>
-            </a:pPr>
-            <a:r>
-              <a:rPr sz="3800" b="1" i="0">
-                <a:solidFill>
-                  <a:srgbClr val="2A2929"/>
-                </a:solidFill>
-                <a:latin typeface="Roboto"/>
-              </a:rPr>
-              <a:t>Writing the Deployment Report</a:t>
-            </a:r>
-          </a:p>
-          <a:p>
-            <a:pPr>
-              <a:spcBef>
-                <a:spcPts val="1000"/>
-              </a:spcBef>
-            </a:pPr>
-            <a:r>
-              <a:rPr sz="2000" b="0" i="1">
-                <a:solidFill>
-                  <a:srgbClr val="484848"/>
-                </a:solidFill>
-                <a:latin typeface="Roboto Light"/>
-              </a:rPr>
-              <a:t>§1–§7</a:t>
-            </a:r>
-          </a:p>
-        </p:txBody>
-      </p:sp>
-      <p:sp>
-        <p:nvSpPr>
-          <p:cNvPr id="5" name="Rectangle 4"/>
+          <p:cNvPr id="3" name="Rounded Rectangle 2"/>
           <p:cNvSpPr/>
           <p:nvPr/>
         </p:nvSpPr>
         <p:spPr>
           <a:xfrm>
-            <a:off x="0" y="6565392"/>
-            <a:ext cx="12191695" cy="38100"/>
-          </a:xfrm>
-          <a:prstGeom prst="rect">
+            <a:off x="640080" y="384048"/>
+            <a:ext cx="1691640" cy="457200"/>
+          </a:xfrm>
+          <a:prstGeom prst="roundRect">
             <a:avLst/>
           </a:prstGeom>
           <a:solidFill>
-            <a:srgbClr val="27B5CE"/>
+            <a:srgbClr val="2A2929"/>
           </a:solidFill>
           <a:ln>
             <a:noFill/>
@@ -15214,19 +11672,62 @@
           <a:lstStyle/>
           <a:p>
             <a:pPr algn="ctr"/>
-          </a:p>
-        </p:txBody>
-      </p:sp>
-      <p:sp>
-        <p:nvSpPr>
-          <p:cNvPr id="6" name="TextBox 5"/>
+            <a:r>
+              <a:rPr sz="1400" b="1" i="0">
+                <a:solidFill>
+                  <a:srgbClr val="FBB900"/>
+                </a:solidFill>
+                <a:latin typeface="Roboto"/>
+              </a:rPr>
+              <a:t>ACTIVITY</a:t>
+            </a:r>
+          </a:p>
+        </p:txBody>
+      </p:sp>
+      <p:sp>
+        <p:nvSpPr>
+          <p:cNvPr id="4" name="TextBox 3"/>
           <p:cNvSpPr txBox="1"/>
           <p:nvPr/>
         </p:nvSpPr>
         <p:spPr>
           <a:xfrm>
-            <a:off x="502920" y="6400800"/>
-            <a:ext cx="5486400" cy="320040"/>
+            <a:off x="2560320" y="310896"/>
+            <a:ext cx="8961120" cy="685800"/>
+          </a:xfrm>
+          <a:prstGeom prst="rect">
+            <a:avLst/>
+          </a:prstGeom>
+          <a:noFill/>
+        </p:spPr>
+        <p:txBody>
+          <a:bodyPr wrap="square" anchor="ctr" lIns="0" rIns="0" tIns="0" bIns="0">
+            <a:spAutoFit/>
+          </a:bodyPr>
+          <a:lstStyle/>
+          <a:p>
+            <a:r>
+              <a:rPr sz="2600" b="1" i="0">
+                <a:solidFill>
+                  <a:srgbClr val="FFFFFF"/>
+                </a:solidFill>
+                <a:latin typeface="Roboto"/>
+              </a:rPr>
+              <a:t>Run the connectivity tests</a:t>
+            </a:r>
+          </a:p>
+        </p:txBody>
+      </p:sp>
+      <p:sp>
+        <p:nvSpPr>
+          <p:cNvPr id="5" name="TextBox 4"/>
+          <p:cNvSpPr txBox="1"/>
+          <p:nvPr/>
+        </p:nvSpPr>
+        <p:spPr>
+          <a:xfrm>
+            <a:off x="658368" y="1554480"/>
+            <a:ext cx="10881360" cy="4297680"/>
           </a:xfrm>
           <a:prstGeom prst="rect">
             <a:avLst/>
@@ -15239,24 +11740,112 @@
           </a:bodyPr>
           <a:lstStyle/>
           <a:p>
-            <a:r>
-              <a:rPr sz="1100" b="1" i="0">
+            <a:pPr marL="0" indent="0">
+              <a:lnSpc>
+                <a:spcPct val="105000"/>
+              </a:lnSpc>
+              <a:spcBef>
+                <a:spcPts val="0"/>
+              </a:spcBef>
+              <a:spcAft>
+                <a:spcPts val="1000"/>
+              </a:spcAft>
+            </a:pPr>
+            <a:r>
+              <a:rPr sz="1700" b="1" i="0">
+                <a:solidFill>
+                  <a:srgbClr val="EDAB0C"/>
+                </a:solidFill>
+                <a:latin typeface="Roboto"/>
+              </a:rPr>
+              <a:t>■  </a:t>
+            </a:r>
+            <a:r>
+              <a:rPr sz="1700" b="0" i="0">
                 <a:solidFill>
                   <a:srgbClr val="2A2929"/>
                 </a:solidFill>
                 <a:latin typeface="Roboto"/>
               </a:rPr>
-              <a:t>Kangan </a:t>
-            </a:r>
-            <a:r>
-              <a:rPr sz="1100" b="1" i="0">
-                <a:solidFill>
-                  <a:srgbClr val="D68E10"/>
-                </a:solidFill>
-                <a:latin typeface="Roboto"/>
-              </a:rPr>
-              <a:t>Institute</a:t>
-            </a:r>
+              <a:t>Run sheet — tests T1 to T4.</a:t>
+            </a:r>
+          </a:p>
+          <a:p>
+            <a:pPr marL="0" indent="0">
+              <a:lnSpc>
+                <a:spcPct val="105000"/>
+              </a:lnSpc>
+              <a:spcBef>
+                <a:spcPts val="0"/>
+              </a:spcBef>
+              <a:spcAft>
+                <a:spcPts val="1000"/>
+              </a:spcAft>
+            </a:pPr>
+            <a:r>
+              <a:rPr sz="1700" b="1" i="0">
+                <a:solidFill>
+                  <a:srgbClr val="EDAB0C"/>
+                </a:solidFill>
+                <a:latin typeface="Roboto"/>
+              </a:rPr>
+              <a:t>■  </a:t>
+            </a:r>
+            <a:r>
+              <a:rPr sz="1700" b="0" i="0">
+                <a:solidFill>
+                  <a:srgbClr val="2A2929"/>
+                </a:solidFill>
+                <a:latin typeface="Roboto"/>
+              </a:rPr>
+              <a:t>Work through each path in order, capture what actually happened, and where one fails, fix it, run it again, and record what you changed.</a:t>
+            </a:r>
+          </a:p>
+        </p:txBody>
+      </p:sp>
+      <p:sp>
+        <p:nvSpPr>
+          <p:cNvPr id="6" name="Rounded Rectangle 5"/>
+          <p:cNvSpPr/>
+          <p:nvPr/>
+        </p:nvSpPr>
+        <p:spPr>
+          <a:xfrm>
+            <a:off x="640080" y="5897880"/>
+            <a:ext cx="4023360" cy="457200"/>
+          </a:xfrm>
+          <a:prstGeom prst="roundRect">
+            <a:avLst/>
+          </a:prstGeom>
+          <a:solidFill>
+            <a:srgbClr val="F9F9F9"/>
+          </a:solidFill>
+          <a:ln w="12700">
+            <a:solidFill>
+              <a:srgbClr val="CCCCCC"/>
+            </a:solidFill>
+          </a:ln>
+          <a:effectLst/>
+        </p:spPr>
+        <p:style>
+          <a:lnRef idx="1">
+            <a:schemeClr val="accent1"/>
+          </a:lnRef>
+          <a:fillRef idx="3">
+            <a:schemeClr val="accent1"/>
+          </a:fillRef>
+          <a:effectRef idx="2">
+            <a:schemeClr val="accent1"/>
+          </a:effectRef>
+          <a:fontRef idx="minor">
+            <a:schemeClr val="lt1"/>
+          </a:fontRef>
+        </p:style>
+        <p:txBody>
+          <a:bodyPr rtlCol="0" anchor="ctr"/>
+          <a:lstStyle/>
+          <a:p>
+            <a:pPr algn="ctr"/>
           </a:p>
         </p:txBody>
       </p:sp>
@@ -15268,8 +11857,86 @@
         </p:nvSpPr>
         <p:spPr>
           <a:xfrm>
-            <a:off x="10515600" y="6400800"/>
-            <a:ext cx="1188720" cy="320040"/>
+            <a:off x="822960" y="5943600"/>
+            <a:ext cx="3657600" cy="365760"/>
+          </a:xfrm>
+          <a:prstGeom prst="rect">
+            <a:avLst/>
+          </a:prstGeom>
+          <a:noFill/>
+        </p:spPr>
+        <p:txBody>
+          <a:bodyPr wrap="square" anchor="ctr" lIns="0" rIns="0" tIns="0" bIns="0">
+            <a:spAutoFit/>
+          </a:bodyPr>
+          <a:lstStyle/>
+          <a:p>
+            <a:r>
+              <a:rPr sz="1500" b="1" i="0">
+                <a:solidFill>
+                  <a:srgbClr val="2A2929"/>
+                </a:solidFill>
+                <a:latin typeface="Roboto"/>
+              </a:rPr>
+              <a:t>⏱  ~30 min</a:t>
+            </a:r>
+          </a:p>
+        </p:txBody>
+      </p:sp>
+      <p:sp>
+        <p:nvSpPr>
+          <p:cNvPr id="8" name="Rectangle 7"/>
+          <p:cNvSpPr/>
+          <p:nvPr/>
+        </p:nvSpPr>
+        <p:spPr>
+          <a:xfrm>
+            <a:off x="0" y="6565392"/>
+            <a:ext cx="12191695" cy="38100"/>
+          </a:xfrm>
+          <a:prstGeom prst="rect">
+            <a:avLst/>
+          </a:prstGeom>
+          <a:solidFill>
+            <a:srgbClr val="92268F"/>
+          </a:solidFill>
+          <a:ln>
+            <a:noFill/>
+          </a:ln>
+          <a:effectLst/>
+        </p:spPr>
+        <p:style>
+          <a:lnRef idx="1">
+            <a:schemeClr val="accent1"/>
+          </a:lnRef>
+          <a:fillRef idx="3">
+            <a:schemeClr val="accent1"/>
+          </a:fillRef>
+          <a:effectRef idx="2">
+            <a:schemeClr val="accent1"/>
+          </a:effectRef>
+          <a:fontRef idx="minor">
+            <a:schemeClr val="lt1"/>
+          </a:fontRef>
+        </p:style>
+        <p:txBody>
+          <a:bodyPr rtlCol="0" anchor="ctr"/>
+          <a:lstStyle/>
+          <a:p>
+            <a:pPr algn="ctr"/>
+          </a:p>
+        </p:txBody>
+      </p:sp>
+      <p:sp>
+        <p:nvSpPr>
+          <p:cNvPr id="9" name="TextBox 8"/>
+          <p:cNvSpPr txBox="1"/>
+          <p:nvPr/>
+        </p:nvSpPr>
+        <p:spPr>
+          <a:xfrm>
+            <a:off x="502920" y="6400800"/>
+            <a:ext cx="5486400" cy="320040"/>
           </a:xfrm>
           <a:prstGeom prst="rect">
             <a:avLst/>
@@ -15282,6 +11949,49 @@
           </a:bodyPr>
           <a:lstStyle/>
           <a:p>
+            <a:r>
+              <a:rPr sz="1100" b="1" i="0">
+                <a:solidFill>
+                  <a:srgbClr val="2A2929"/>
+                </a:solidFill>
+                <a:latin typeface="Roboto"/>
+              </a:rPr>
+              <a:t>Kangan </a:t>
+            </a:r>
+            <a:r>
+              <a:rPr sz="1100" b="1" i="0">
+                <a:solidFill>
+                  <a:srgbClr val="D68E10"/>
+                </a:solidFill>
+                <a:latin typeface="Roboto"/>
+              </a:rPr>
+              <a:t>Institute</a:t>
+            </a:r>
+          </a:p>
+        </p:txBody>
+      </p:sp>
+      <p:sp>
+        <p:nvSpPr>
+          <p:cNvPr id="10" name="TextBox 9"/>
+          <p:cNvSpPr txBox="1"/>
+          <p:nvPr/>
+        </p:nvSpPr>
+        <p:spPr>
+          <a:xfrm>
+            <a:off x="10515600" y="6400800"/>
+            <a:ext cx="1188720" cy="320040"/>
+          </a:xfrm>
+          <a:prstGeom prst="rect">
+            <a:avLst/>
+          </a:prstGeom>
+          <a:noFill/>
+        </p:spPr>
+        <p:txBody>
+          <a:bodyPr wrap="square" anchor="t" lIns="0" rIns="0" tIns="0" bIns="0">
+            <a:spAutoFit/>
+          </a:bodyPr>
+          <a:lstStyle/>
+          <a:p>
             <a:pPr algn="r"/>
             <a:r>
               <a:rPr sz="1100" b="0" i="0">
@@ -15290,7 +12000,7 @@
                 </a:solidFill>
                 <a:latin typeface="Roboto"/>
               </a:rPr>
-              <a:t/>
+              <a:t>7</a:t>
             </a:r>
           </a:p>
         </p:txBody>
